--- a/docs/business/事業概要_AI_MA部門_営業用.pptx
+++ b/docs/business/事業概要_AI_MA部門_営業用.pptx
@@ -122,20 +122,20 @@
   <p:extLst>
     <p:ext uri="{521415D9-36F7-43E2-AB2F-B90AF26B5E84}">
       <p14:sectionLst xmlns:p14="http://schemas.microsoft.com/office/powerpoint/2010/main">
-        <p14:section name="導入" id="{8cc16937-4b75-3e0c-2a59-77a8b316c57e}">
+        <p14:section name="導入" id="{0c11067a-4e42-2917-400f-b8ee68992000}">
           <p14:sldIdLst>
             <p14:sldId id="256"/>
             <p14:sldId id="257"/>
           </p14:sldIdLst>
         </p14:section>
-        <p14:section name="課題と原点" id="{7a12ed32-44f3-b875-7dde-25c4ca94ba72}">
+        <p14:section name="課題と原点" id="{74aebc8c-c3d7-8212-4c3d-dad31ceb801a}">
           <p14:sldIdLst>
             <p14:sldId id="258"/>
             <p14:sldId id="259"/>
             <p14:sldId id="260"/>
           </p14:sldIdLst>
         </p14:section>
-        <p14:section name="サービス" id="{b62c02f7-c5e5-2db8-98c5-5c0db89f538b}">
+        <p14:section name="サービス" id="{3a073087-b382-6431-9d4d-c53a0ec9e8ef}">
           <p14:sldIdLst>
             <p14:sldId id="261"/>
             <p14:sldId id="262"/>
@@ -146,14 +146,14 @@
             <p14:sldId id="267"/>
           </p14:sldIdLst>
         </p14:section>
-        <p14:section name="事業性" id="{1e763889-9a6e-8764-b00f-397e20741e98}">
+        <p14:section name="事業性" id="{5f2218b9-29a8-c0d1-270a-7e712ec6b54b}">
           <p14:sldIdLst>
             <p14:sldId id="268"/>
             <p14:sldId id="269"/>
             <p14:sldId id="270"/>
           </p14:sldIdLst>
         </p14:section>
-        <p14:section name="まとめ" id="{535e21c4-f10c-cca0-204a-ca9f37e6f2b4}">
+        <p14:section name="まとめ" id="{98409290-5d35-5a33-ff71-6cbaa50e39a6}">
           <p14:sldIdLst>
             <p14:sldId id="271"/>
           </p14:sldIdLst>
@@ -177,7 +177,7 @@
       <c:layout/>
       <c:barChart>
         <c:barDir val="bar"/>
-        <c:grouping val="clustered"/>
+        <c:grouping val="stacked"/>
         <c:varyColors val="0"/>
         <c:ser>
           <c:idx val="0"/>
@@ -195,27 +195,28 @@
           </c:tx>
           <c:spPr>
             <a:solidFill>
-              <a:srgbClr val="E6DCCB"/>
+              <a:srgbClr val="9A8F84"/>
             </a:solidFill>
             <a:effectLst/>
           </c:spPr>
           <c:invertIfNegative val="0"/>
           <c:dLbls>
-            <c:numFmt formatCode="0.0&quot;億&quot;" sourceLinked="0"/>
+            <c:numFmt formatCode="0.0;;;" sourceLinked="0"/>
             <c:txPr>
               <a:bodyPr/>
               <a:lstStyle/>
               <a:p>
                 <a:pPr>
-                  <a:defRPr b="0" i="0" strike="noStrike" sz="1000" u="none">
+                  <a:defRPr b="0" i="0" strike="noStrike" sz="900" u="none">
                     <a:solidFill>
-                      <a:srgbClr val="2B2622"/>
+                      <a:srgbClr val="FFFFFF"/>
                     </a:solidFill>
                     <a:latin typeface="+mn-lt"/>
                   </a:defRPr>
                 </a:pPr>
               </a:p>
             </c:txPr>
+            <c:dLblPos val="ctr"/>
             <c:showLegendKey val="0"/>
             <c:showVal val="1"/>
             <c:showCatName val="0"/>
@@ -226,15 +227,21 @@
           </c:dLbls>
           <c:cat>
             <c:multiLvlStrRef>
-              <c:f>Sheet1!$A$2:$A$3</c:f>
+              <c:f>Sheet1!$A$2:$A$5</c:f>
               <c:multiLvlStrCache>
-                <c:ptCount val="2"/>
+                <c:ptCount val="4"/>
                 <c:lvl>
                   <c:pt idx="0">
-                    <c:v>第1期 2011–19</c:v>
+                    <c:v>第1期 投じた額</c:v>
                   </c:pt>
                   <c:pt idx="1">
-                    <c:v>第2期 2020–</c:v>
+                    <c:v>第1期 戻った額</c:v>
+                  </c:pt>
+                  <c:pt idx="2">
+                    <c:v>第2期 投じた額</c:v>
+                  </c:pt>
+                  <c:pt idx="3">
+                    <c:v>第2期 得た資産＋1年分の利益</c:v>
                   </c:pt>
                 </c:lvl>
               </c:multiLvlStrCache>
@@ -242,15 +249,21 @@
           </c:cat>
           <c:val>
             <c:numRef>
-              <c:f>Sheet1!$B$2:$B$3</c:f>
+              <c:f>Sheet1!$B$2:$B$5</c:f>
               <c:numCache>
                 <c:formatCode>General</c:formatCode>
-                <c:ptCount val="2"/>
+                <c:ptCount val="4"/>
                 <c:pt idx="0">
                   <c:v>10.8</c:v>
                 </c:pt>
                 <c:pt idx="1">
+                  <c:v>0</c:v>
+                </c:pt>
+                <c:pt idx="2">
                   <c:v>14.4</c:v>
+                </c:pt>
+                <c:pt idx="3">
+                  <c:v>0</c:v>
                 </c:pt>
               </c:numCache>
             </c:numRef>
@@ -265,7 +278,187 @@
               <c:strCache>
                 <c:ptCount val="1"/>
                 <c:pt idx="0">
-                  <c:v>回収＋事業利益／取得純資産</c:v>
+                  <c:v>営業利益</c:v>
+                </c:pt>
+              </c:strCache>
+            </c:strRef>
+          </c:tx>
+          <c:spPr>
+            <a:solidFill>
+              <a:srgbClr val="2B2622"/>
+            </a:solidFill>
+            <a:effectLst/>
+          </c:spPr>
+          <c:invertIfNegative val="0"/>
+          <c:dLbls>
+            <c:numFmt formatCode="0.0;;;" sourceLinked="0"/>
+            <c:txPr>
+              <a:bodyPr/>
+              <a:lstStyle/>
+              <a:p>
+                <a:pPr>
+                  <a:defRPr b="0" i="0" strike="noStrike" sz="900" u="none">
+                    <a:solidFill>
+                      <a:srgbClr val="FFFFFF"/>
+                    </a:solidFill>
+                    <a:latin typeface="+mn-lt"/>
+                  </a:defRPr>
+                </a:pPr>
+              </a:p>
+            </c:txPr>
+            <c:dLblPos val="ctr"/>
+            <c:showLegendKey val="0"/>
+            <c:showVal val="1"/>
+            <c:showCatName val="0"/>
+            <c:showSerName val="0"/>
+            <c:showPercent val="0"/>
+            <c:showBubbleSize val="0"/>
+            <c:showLeaderLines val="0"/>
+          </c:dLbls>
+          <c:cat>
+            <c:multiLvlStrRef>
+              <c:f>Sheet1!$A$2:$A$5</c:f>
+              <c:multiLvlStrCache>
+                <c:ptCount val="4"/>
+                <c:lvl>
+                  <c:pt idx="0">
+                    <c:v>第1期 投じた額</c:v>
+                  </c:pt>
+                  <c:pt idx="1">
+                    <c:v>第1期 戻った額</c:v>
+                  </c:pt>
+                  <c:pt idx="2">
+                    <c:v>第2期 投じた額</c:v>
+                  </c:pt>
+                  <c:pt idx="3">
+                    <c:v>第2期 得た資産＋1年分の利益</c:v>
+                  </c:pt>
+                </c:lvl>
+              </c:multiLvlStrCache>
+            </c:multiLvlStrRef>
+          </c:cat>
+          <c:val>
+            <c:numRef>
+              <c:f>Sheet1!$C$2:$C$5</c:f>
+              <c:numCache>
+                <c:formatCode>General</c:formatCode>
+                <c:ptCount val="4"/>
+                <c:pt idx="0">
+                  <c:v>0</c:v>
+                </c:pt>
+                <c:pt idx="1">
+                  <c:v>7.6</c:v>
+                </c:pt>
+                <c:pt idx="2">
+                  <c:v>0</c:v>
+                </c:pt>
+                <c:pt idx="3">
+                  <c:v>2.4</c:v>
+                </c:pt>
+              </c:numCache>
+            </c:numRef>
+          </c:val>
+        </c:ser>
+        <c:ser>
+          <c:idx val="2"/>
+          <c:order val="2"/>
+          <c:tx>
+            <c:strRef>
+              <c:f>Sheet1!$D$1</c:f>
+              <c:strCache>
+                <c:ptCount val="1"/>
+                <c:pt idx="0">
+                  <c:v>売却回収</c:v>
+                </c:pt>
+              </c:strCache>
+            </c:strRef>
+          </c:tx>
+          <c:spPr>
+            <a:solidFill>
+              <a:srgbClr val="C9AE7E"/>
+            </a:solidFill>
+            <a:effectLst/>
+          </c:spPr>
+          <c:invertIfNegative val="0"/>
+          <c:dLbls>
+            <c:numFmt formatCode="0.0;;;" sourceLinked="0"/>
+            <c:txPr>
+              <a:bodyPr/>
+              <a:lstStyle/>
+              <a:p>
+                <a:pPr>
+                  <a:defRPr b="0" i="0" strike="noStrike" sz="900" u="none">
+                    <a:solidFill>
+                      <a:srgbClr val="FFFFFF"/>
+                    </a:solidFill>
+                    <a:latin typeface="+mn-lt"/>
+                  </a:defRPr>
+                </a:pPr>
+              </a:p>
+            </c:txPr>
+            <c:dLblPos val="ctr"/>
+            <c:showLegendKey val="0"/>
+            <c:showVal val="1"/>
+            <c:showCatName val="0"/>
+            <c:showSerName val="0"/>
+            <c:showPercent val="0"/>
+            <c:showBubbleSize val="0"/>
+            <c:showLeaderLines val="0"/>
+          </c:dLbls>
+          <c:cat>
+            <c:multiLvlStrRef>
+              <c:f>Sheet1!$A$2:$A$5</c:f>
+              <c:multiLvlStrCache>
+                <c:ptCount val="4"/>
+                <c:lvl>
+                  <c:pt idx="0">
+                    <c:v>第1期 投じた額</c:v>
+                  </c:pt>
+                  <c:pt idx="1">
+                    <c:v>第1期 戻った額</c:v>
+                  </c:pt>
+                  <c:pt idx="2">
+                    <c:v>第2期 投じた額</c:v>
+                  </c:pt>
+                  <c:pt idx="3">
+                    <c:v>第2期 得た資産＋1年分の利益</c:v>
+                  </c:pt>
+                </c:lvl>
+              </c:multiLvlStrCache>
+            </c:multiLvlStrRef>
+          </c:cat>
+          <c:val>
+            <c:numRef>
+              <c:f>Sheet1!$D$2:$D$5</c:f>
+              <c:numCache>
+                <c:formatCode>General</c:formatCode>
+                <c:ptCount val="4"/>
+                <c:pt idx="0">
+                  <c:v>0</c:v>
+                </c:pt>
+                <c:pt idx="1">
+                  <c:v>5.3</c:v>
+                </c:pt>
+                <c:pt idx="2">
+                  <c:v>0</c:v>
+                </c:pt>
+                <c:pt idx="3">
+                  <c:v>0</c:v>
+                </c:pt>
+              </c:numCache>
+            </c:numRef>
+          </c:val>
+        </c:ser>
+        <c:ser>
+          <c:idx val="3"/>
+          <c:order val="3"/>
+          <c:tx>
+            <c:strRef>
+              <c:f>Sheet1!$E$1</c:f>
+              <c:strCache>
+                <c:ptCount val="1"/>
+                <c:pt idx="0">
+                  <c:v>手元の純資産</c:v>
                 </c:pt>
               </c:strCache>
             </c:strRef>
@@ -278,21 +471,22 @@
           </c:spPr>
           <c:invertIfNegative val="0"/>
           <c:dLbls>
-            <c:numFmt formatCode="0.0&quot;億&quot;" sourceLinked="0"/>
+            <c:numFmt formatCode="0.0;;;" sourceLinked="0"/>
             <c:txPr>
               <a:bodyPr/>
               <a:lstStyle/>
               <a:p>
                 <a:pPr>
-                  <a:defRPr b="0" i="0" strike="noStrike" sz="1000" u="none">
+                  <a:defRPr b="0" i="0" strike="noStrike" sz="900" u="none">
                     <a:solidFill>
-                      <a:srgbClr val="2B2622"/>
+                      <a:srgbClr val="FFFFFF"/>
                     </a:solidFill>
                     <a:latin typeface="+mn-lt"/>
                   </a:defRPr>
                 </a:pPr>
               </a:p>
             </c:txPr>
+            <c:dLblPos val="ctr"/>
             <c:showLegendKey val="0"/>
             <c:showVal val="1"/>
             <c:showCatName val="0"/>
@@ -303,15 +497,21 @@
           </c:dLbls>
           <c:cat>
             <c:multiLvlStrRef>
-              <c:f>Sheet1!$A$2:$A$3</c:f>
+              <c:f>Sheet1!$A$2:$A$5</c:f>
               <c:multiLvlStrCache>
-                <c:ptCount val="2"/>
+                <c:ptCount val="4"/>
                 <c:lvl>
                   <c:pt idx="0">
-                    <c:v>第1期 2011–19</c:v>
+                    <c:v>第1期 投じた額</c:v>
                   </c:pt>
                   <c:pt idx="1">
-                    <c:v>第2期 2020–</c:v>
+                    <c:v>第1期 戻った額</c:v>
+                  </c:pt>
+                  <c:pt idx="2">
+                    <c:v>第2期 投じた額</c:v>
+                  </c:pt>
+                  <c:pt idx="3">
+                    <c:v>第2期 得た資産＋1年分の利益</c:v>
                   </c:pt>
                 </c:lvl>
               </c:multiLvlStrCache>
@@ -319,14 +519,20 @@
           </c:cat>
           <c:val>
             <c:numRef>
-              <c:f>Sheet1!$C$2:$C$3</c:f>
+              <c:f>Sheet1!$E$2:$E$5</c:f>
               <c:numCache>
                 <c:formatCode>General</c:formatCode>
-                <c:ptCount val="2"/>
+                <c:ptCount val="4"/>
                 <c:pt idx="0">
-                  <c:v>9.4</c:v>
+                  <c:v>0</c:v>
                 </c:pt>
                 <c:pt idx="1">
+                  <c:v>2</c:v>
+                </c:pt>
+                <c:pt idx="2">
+                  <c:v>0</c:v>
+                </c:pt>
+                <c:pt idx="3">
                   <c:v>15.9</c:v>
                 </c:pt>
               </c:numCache>
@@ -334,21 +540,22 @@
           </c:val>
         </c:ser>
         <c:dLbls>
-          <c:numFmt formatCode="0.0&quot;億&quot;" sourceLinked="0"/>
+          <c:numFmt formatCode="0.0;;;" sourceLinked="0"/>
           <c:txPr>
             <a:bodyPr/>
             <a:lstStyle/>
             <a:p>
               <a:pPr>
-                <a:defRPr b="0" i="0" strike="noStrike" sz="1000" u="none">
+                <a:defRPr b="0" i="0" strike="noStrike" sz="900" u="none">
                   <a:solidFill>
-                    <a:srgbClr val="2B2622"/>
+                    <a:srgbClr val="FFFFFF"/>
                   </a:solidFill>
                   <a:latin typeface="+mn-lt"/>
                 </a:defRPr>
               </a:pPr>
             </a:p>
           </c:txPr>
+          <c:dLblPos val="ctr"/>
           <c:showLegendKey val="0"/>
           <c:showVal val="1"/>
           <c:showCatName val="0"/>
@@ -357,8 +564,8 @@
           <c:showBubbleSize val="0"/>
           <c:showLeaderLines val="0"/>
         </c:dLbls>
-        <c:gapWidth val="45"/>
-        <c:overlap val="0"/>
+        <c:gapWidth val="35"/>
+        <c:overlap val="100"/>
         <c:axId val="2094734554"/>
         <c:axId val="2094734552"/>
         <c:axId val="2094734556"/>
@@ -366,7 +573,7 @@
       <c:catAx>
         <c:axId val="2094734554"/>
         <c:scaling>
-          <c:orientation val="minMax"/>
+          <c:orientation val="maxMin"/>
         </c:scaling>
         <c:delete val="0"/>
         <c:axPos val="l"/>
@@ -376,7 +583,9 @@
         <c:tickLblPos val="nextTo"/>
         <c:spPr>
           <a:ln w="12700" cap="flat">
-            <a:noFill/>
+            <a:solidFill>
+              <a:srgbClr val="888888"/>
+            </a:solidFill>
             <a:prstDash val="solid"/>
             <a:round/>
           </a:ln>
@@ -386,7 +595,7 @@
           <a:lstStyle/>
           <a:p>
             <a:pPr>
-              <a:defRPr sz="1000" b="0" i="0" u="none" strike="noStrike">
+              <a:defRPr sz="900" b="0" i="0" u="none" strike="noStrike">
                 <a:solidFill>
                   <a:srgbClr val="2B2622"/>
                 </a:solidFill>
@@ -450,7 +659,7 @@
       </c:spPr>
     </c:plotArea>
     <c:legend>
-      <c:legendPos val="b"/>
+      <c:legendPos val="r"/>
       <c:overlay val="0"/>
       <c:txPr>
         <a:bodyPr/>
@@ -2223,7 +2432,7 @@
           <a:p>
             <a:r>
               <a:rPr lang="en-US" dirty="0"/>
-              <a:t>負けた前半も隠さない。値づけのルールを変えたら、後半は買った瞬間に勝てるようになった。このルールがサービスの中身です。</a:t>
+              <a:t>第1期は投じた10.8億が14.9億で戻った。第2期は純資産より安く買えているので、買った瞬間に資産で元が取れていて、そのうえ毎年2.4億の営業利益が乗る。約6年で買収額を利益だけで回収できる計算。</a:t>
             </a:r>
             <a:endParaRPr lang="en-US" dirty="0"/>
           </a:p>
@@ -14076,7 +14285,7 @@
                   <a:schemeClr val="tx1"/>
                 </a:solidFill>
               </a:rPr>
-              <a:t>49戦の実績：勝ちも負けも、すべて自社の実案件</a:t>
+              <a:t>49戦の実績：安く買い、利益と資産で回収する</a:t>
             </a:r>
             <a:endParaRPr lang="en-US" sz="3000" dirty="0"/>
           </a:p>
@@ -14114,7 +14323,7 @@
                   <a:schemeClr val="accent2"/>
                 </a:solidFill>
               </a:rPr>
-              <a:t>2011年3月〜現在。仲介ではなく、自分のお金で買い、売り、立て直してきた</a:t>
+              <a:t>買収額を「いくらの利益と資産が手に入ったか」で測る。2011年3月〜現在、すべて自社の実案件</a:t>
             </a:r>
             <a:endParaRPr lang="en-US" sz="1350" dirty="0"/>
           </a:p>
@@ -14122,18 +14331,18 @@
       </p:sp>
       <p:sp>
         <p:nvSpPr>
-          <p:cNvPr id="6" name="stat 買収28／売却21／出資2"/>
+          <p:cNvPr id="6" name="stat 買収28／売却21／出資2。発掘はほぼ自分"/>
           <p:cNvSpPr/>
           <p:nvPr/>
         </p:nvSpPr>
         <p:spPr>
           <a:xfrm>
             <a:off x="685800" y="2011680"/>
-            <a:ext cx="2560320" cy="2011680"/>
+            <a:ext cx="2560320" cy="1901952"/>
           </a:xfrm>
           <a:prstGeom prst="roundRect">
             <a:avLst>
-              <a:gd name="adj" fmla="val 2727"/>
+              <a:gd name="adj" fmla="val 2885"/>
             </a:avLst>
           </a:prstGeom>
           <a:solidFill>
@@ -14260,7 +14469,7 @@
         <p:spPr>
           <a:xfrm>
             <a:off x="923544" y="3502152"/>
-            <a:ext cx="2103120" cy="411480"/>
+            <a:ext cx="2103120" cy="301752"/>
           </a:xfrm>
           <a:prstGeom prst="rect">
             <a:avLst/>
@@ -14281,7 +14490,7 @@
                   <a:schemeClr val="accent2"/>
                 </a:solidFill>
               </a:rPr>
-              <a:t>買収28／売却21／出資2</a:t>
+              <a:t>買収28／売却21／出資2。発掘はほぼ自分</a:t>
             </a:r>
             <a:endParaRPr lang="en-US" sz="1050" dirty="0"/>
           </a:p>
@@ -14289,18 +14498,18 @@
       </p:sp>
       <p:sp>
         <p:nvSpPr>
-          <p:cNvPr id="11" name="stat 支払った買収総額（回収16.7億円）"/>
+          <p:cNvPr id="11" name="stat 第1期の回収倍率。投じた10.8億円が14.9億円で戻った"/>
           <p:cNvSpPr/>
           <p:nvPr/>
         </p:nvSpPr>
         <p:spPr>
           <a:xfrm>
             <a:off x="3456432" y="2011680"/>
-            <a:ext cx="2560320" cy="2011680"/>
+            <a:ext cx="2560320" cy="1901952"/>
           </a:xfrm>
           <a:prstGeom prst="roundRect">
             <a:avLst>
-              <a:gd name="adj" fmla="val 2727"/>
+              <a:gd name="adj" fmla="val 2885"/>
             </a:avLst>
           </a:prstGeom>
           <a:solidFill>
@@ -14376,7 +14585,7 @@
                   <a:schemeClr val="accent1"/>
                 </a:solidFill>
               </a:rPr>
-              <a:t>25.2</a:t>
+              <a:t>1.4</a:t>
             </a:r>
             <a:endParaRPr lang="en-US" sz="3600" dirty="0"/>
           </a:p>
@@ -14412,7 +14621,7 @@
                   <a:schemeClr val="tx1"/>
                 </a:solidFill>
               </a:rPr>
-              <a:t>億円</a:t>
+              <a:t>倍</a:t>
             </a:r>
             <a:endParaRPr lang="en-US" sz="1300" dirty="0"/>
           </a:p>
@@ -14427,7 +14636,7 @@
         <p:spPr>
           <a:xfrm>
             <a:off x="3694176" y="3502152"/>
-            <a:ext cx="2103120" cy="411480"/>
+            <a:ext cx="2103120" cy="301752"/>
           </a:xfrm>
           <a:prstGeom prst="rect">
             <a:avLst/>
@@ -14448,7 +14657,7 @@
                   <a:schemeClr val="accent2"/>
                 </a:solidFill>
               </a:rPr>
-              <a:t>支払った買収総額（回収16.7億円）</a:t>
+              <a:t>第1期の回収倍率。投じた10.8億円が14.9億円で戻った</a:t>
             </a:r>
             <a:endParaRPr lang="en-US" sz="1050" dirty="0"/>
           </a:p>
@@ -14456,18 +14665,18 @@
       </p:sp>
       <p:sp>
         <p:nvSpPr>
-          <p:cNvPr id="16" name="stat 売上74億円分の事業を25.2億円で取得"/>
+          <p:cNvPr id="16" name="stat 第2期の買収先の営業利益（ランレート、2026年予想）"/>
           <p:cNvSpPr/>
           <p:nvPr/>
         </p:nvSpPr>
         <p:spPr>
           <a:xfrm>
             <a:off x="6227064" y="2011680"/>
-            <a:ext cx="2560320" cy="2011680"/>
+            <a:ext cx="2560320" cy="1901952"/>
           </a:xfrm>
           <a:prstGeom prst="roundRect">
             <a:avLst>
-              <a:gd name="adj" fmla="val 2727"/>
+              <a:gd name="adj" fmla="val 2885"/>
             </a:avLst>
           </a:prstGeom>
           <a:solidFill>
@@ -14543,7 +14752,7 @@
                   <a:schemeClr val="accent1"/>
                 </a:solidFill>
               </a:rPr>
-              <a:t>0.34</a:t>
+              <a:t>2.4</a:t>
             </a:r>
             <a:endParaRPr lang="en-US" sz="3600" dirty="0"/>
           </a:p>
@@ -14579,7 +14788,7 @@
                   <a:schemeClr val="tx1"/>
                 </a:solidFill>
               </a:rPr>
-              <a:t>倍</a:t>
+              <a:t>億円／年</a:t>
             </a:r>
             <a:endParaRPr lang="en-US" sz="1300" dirty="0"/>
           </a:p>
@@ -14594,7 +14803,7 @@
         <p:spPr>
           <a:xfrm>
             <a:off x="6464808" y="3502152"/>
-            <a:ext cx="2103120" cy="411480"/>
+            <a:ext cx="2103120" cy="301752"/>
           </a:xfrm>
           <a:prstGeom prst="rect">
             <a:avLst/>
@@ -14615,7 +14824,7 @@
                   <a:schemeClr val="accent2"/>
                 </a:solidFill>
               </a:rPr>
-              <a:t>売上74億円分の事業を25.2億円で取得</a:t>
+              <a:t>第2期の買収先の営業利益（ランレート、2026年予想）</a:t>
             </a:r>
             <a:endParaRPr lang="en-US" sz="1050" dirty="0"/>
           </a:p>
@@ -14623,18 +14832,18 @@
       </p:sp>
       <p:sp>
         <p:nvSpPr>
-          <p:cNvPr id="21" name="stat グループ売上 23億円→66億円（2019→2026予想）"/>
+          <p:cNvPr id="21" name="stat 第2期の回収年数（買収額14.4億円÷年間営業利益）"/>
           <p:cNvSpPr/>
           <p:nvPr/>
         </p:nvSpPr>
         <p:spPr>
           <a:xfrm>
             <a:off x="8997696" y="2011680"/>
-            <a:ext cx="2560320" cy="2011680"/>
+            <a:ext cx="2560320" cy="1901952"/>
           </a:xfrm>
           <a:prstGeom prst="roundRect">
             <a:avLst>
-              <a:gd name="adj" fmla="val 2727"/>
+              <a:gd name="adj" fmla="val 2885"/>
             </a:avLst>
           </a:prstGeom>
           <a:solidFill>
@@ -14710,7 +14919,7 @@
                   <a:schemeClr val="accent1"/>
                 </a:solidFill>
               </a:rPr>
-              <a:t>2.9</a:t>
+              <a:t>約6</a:t>
             </a:r>
             <a:endParaRPr lang="en-US" sz="3600" dirty="0"/>
           </a:p>
@@ -14746,7 +14955,7 @@
                   <a:schemeClr val="tx1"/>
                 </a:solidFill>
               </a:rPr>
-              <a:t>倍</a:t>
+              <a:t>年</a:t>
             </a:r>
             <a:endParaRPr lang="en-US" sz="1300" dirty="0"/>
           </a:p>
@@ -14761,7 +14970,7 @@
         <p:spPr>
           <a:xfrm>
             <a:off x="9235440" y="3502152"/>
-            <a:ext cx="2103120" cy="411480"/>
+            <a:ext cx="2103120" cy="301752"/>
           </a:xfrm>
           <a:prstGeom prst="rect">
             <a:avLst/>
@@ -14782,7 +14991,7 @@
                   <a:schemeClr val="accent2"/>
                 </a:solidFill>
               </a:rPr>
-              <a:t>グループ売上 23億円→66億円（2019→2026予想）</a:t>
+              <a:t>第2期の回収年数（買収額14.4億円÷年間営業利益）</a:t>
             </a:r>
             <a:endParaRPr lang="en-US" sz="1050" dirty="0"/>
           </a:p>
@@ -14790,13 +14999,13 @@
       </p:sp>
       <p:graphicFrame>
         <p:nvGraphicFramePr>
-          <p:cNvPr id="26" name="two phase chart" descr=""/>
+          <p:cNvPr id="26" name="invest vs return chart" descr=""/>
           <p:cNvGraphicFramePr/>
           <p:nvPr/>
         </p:nvGraphicFramePr>
         <p:xfrm>
-          <a:off x="685800" y="4160520"/>
-          <a:ext cx="6035040" cy="1965960"/>
+          <a:off x="685800" y="4023360"/>
+          <a:ext cx="6400800" cy="2011680"/>
         </p:xfrm>
         <a:graphic xmlns:a="http://schemas.openxmlformats.org/drawingml/2006/main">
           <a:graphicData uri="http://schemas.openxmlformats.org/drawingml/2006/chart">
@@ -14812,12 +15021,12 @@
         </p:nvSpPr>
         <p:spPr>
           <a:xfrm>
-            <a:off x="6949440" y="4114800"/>
-            <a:ext cx="4553712" cy="896112"/>
+            <a:off x="7315200" y="4041648"/>
+            <a:ext cx="4187952" cy="932688"/>
           </a:xfrm>
           <a:prstGeom prst="roundRect">
             <a:avLst>
-              <a:gd name="adj" fmla="val 6122"/>
+              <a:gd name="adj" fmla="val 5882"/>
             </a:avLst>
           </a:prstGeom>
           <a:solidFill>
@@ -14846,8 +15055,8 @@
         </p:nvSpPr>
         <p:spPr>
           <a:xfrm>
-            <a:off x="7178040" y="4114800"/>
-            <a:ext cx="4114800" cy="896112"/>
+            <a:off x="7498080" y="4041648"/>
+            <a:ext cx="3840480" cy="932688"/>
           </a:xfrm>
           <a:prstGeom prst="rect">
             <a:avLst/>
@@ -14868,18 +15077,21 @@
                   <a:schemeClr val="accent2"/>
                 </a:solidFill>
               </a:rPr>
-              <a:t>第1期：授業料を払った　</a:t>
-            </a:r>
+              <a:t>第1期 2011–19：数で獲りにいった</a:t>
+            </a:r>
+            <a:endParaRPr lang="en-US" sz="1200" dirty="0"/>
+          </a:p>
+          <a:p>
             <a:pPr indent="0" marL="0">
               <a:buNone/>
             </a:pPr>
             <a:r>
-              <a:rPr lang="en-US" sz="1200" dirty="0">
+              <a:rPr lang="en-US" sz="1050" dirty="0">
                 <a:solidFill>
                   <a:schemeClr val="tx1"/>
                 </a:solidFill>
               </a:rPr>
-              <a:t>10.8億円を投じ、回収と利益で9.4億円。前半は赤字</a:t>
+              <a:t>売上の0.25倍で買い、保有中の営業利益7.6億＋売却5.3億＋純資産2.0億で回収</a:t>
             </a:r>
             <a:endParaRPr lang="en-US" sz="1200" dirty="0"/>
           </a:p>
@@ -14893,12 +15105,12 @@
         </p:nvSpPr>
         <p:spPr>
           <a:xfrm>
-            <a:off x="6949440" y="5138928"/>
-            <a:ext cx="4553712" cy="896112"/>
+            <a:off x="7315200" y="5084064"/>
+            <a:ext cx="4187952" cy="932688"/>
           </a:xfrm>
           <a:prstGeom prst="roundRect">
             <a:avLst>
-              <a:gd name="adj" fmla="val 6122"/>
+              <a:gd name="adj" fmla="val 5882"/>
             </a:avLst>
           </a:prstGeom>
           <a:solidFill>
@@ -14927,8 +15139,8 @@
         </p:nvSpPr>
         <p:spPr>
           <a:xfrm>
-            <a:off x="7178040" y="5138928"/>
-            <a:ext cx="4114800" cy="896112"/>
+            <a:off x="7498080" y="5084064"/>
+            <a:ext cx="3840480" cy="932688"/>
           </a:xfrm>
           <a:prstGeom prst="rect">
             <a:avLst/>
@@ -14949,18 +15161,21 @@
                   <a:schemeClr val="accent1"/>
                 </a:solidFill>
               </a:rPr>
-              <a:t>第2期：買った瞬間に勝つ　</a:t>
-            </a:r>
+              <a:t>第2期 2020–：純資産より安く買う</a:t>
+            </a:r>
+            <a:endParaRPr lang="en-US" sz="1200" dirty="0"/>
+          </a:p>
+          <a:p>
             <a:pPr indent="0" marL="0">
               <a:buNone/>
             </a:pPr>
             <a:r>
-              <a:rPr lang="en-US" sz="1200" dirty="0">
+              <a:rPr lang="en-US" sz="1050" dirty="0">
                 <a:solidFill>
                   <a:schemeClr val="tx1"/>
                 </a:solidFill>
               </a:rPr>
-              <a:t>14.4億円で純資産15.9億円を取得。値づけを変えただけで反転</a:t>
+              <a:t>純資産の9割の価格で取得し、毎年2.4億円の営業利益が上乗せされていく</a:t>
             </a:r>
             <a:endParaRPr lang="en-US" sz="1200" dirty="0"/>
           </a:p>
@@ -14996,7 +15211,7 @@
                   <a:schemeClr val="accent5"/>
                 </a:solidFill>
               </a:rPr>
-              <a:t>出典：中野邦人 M&amp;A勝敗一覧表、グループ売上管理表（自社実データ）</a:t>
+              <a:t>単位：億円。第1期の営業利益は保有期間中の累計。第2期のランレートはM&amp;Aで取得したグループ会社の2026年予想営業利益。出典：中野邦人 M&amp;A勝敗一覧表、グループ売上管理表</a:t>
             </a:r>
             <a:endParaRPr lang="en-US" sz="900" dirty="0"/>
           </a:p>

--- a/docs/business/事業概要_AI_MA部門_営業用.pptx
+++ b/docs/business/事業概要_AI_MA部門_営業用.pptx
@@ -122,20 +122,20 @@
   <p:extLst>
     <p:ext uri="{521415D9-36F7-43E2-AB2F-B90AF26B5E84}">
       <p14:sectionLst xmlns:p14="http://schemas.microsoft.com/office/powerpoint/2010/main">
-        <p14:section name="導入" id="{0c11067a-4e42-2917-400f-b8ee68992000}">
+        <p14:section name="導入" id="{99787ca1-49af-a0d0-493f-4a616528ca5c}">
           <p14:sldIdLst>
             <p14:sldId id="256"/>
             <p14:sldId id="257"/>
           </p14:sldIdLst>
         </p14:section>
-        <p14:section name="課題と原点" id="{74aebc8c-c3d7-8212-4c3d-dad31ceb801a}">
+        <p14:section name="課題と原点" id="{10529317-3af5-e863-f7a8-f85d72b9073e}">
           <p14:sldIdLst>
             <p14:sldId id="258"/>
             <p14:sldId id="259"/>
             <p14:sldId id="260"/>
           </p14:sldIdLst>
         </p14:section>
-        <p14:section name="サービス" id="{3a073087-b382-6431-9d4d-c53a0ec9e8ef}">
+        <p14:section name="サービス" id="{5e69687d-b065-9cfb-28c0-19e10453e5f3}">
           <p14:sldIdLst>
             <p14:sldId id="261"/>
             <p14:sldId id="262"/>
@@ -146,14 +146,14 @@
             <p14:sldId id="267"/>
           </p14:sldIdLst>
         </p14:section>
-        <p14:section name="事業性" id="{5f2218b9-29a8-c0d1-270a-7e712ec6b54b}">
+        <p14:section name="事業性" id="{2be83fbb-b942-16dc-8848-40aa20647929}">
           <p14:sldIdLst>
             <p14:sldId id="268"/>
             <p14:sldId id="269"/>
             <p14:sldId id="270"/>
           </p14:sldIdLst>
         </p14:section>
-        <p14:section name="まとめ" id="{98409290-5d35-5a33-ff71-6cbaa50e39a6}">
+        <p14:section name="まとめ" id="{219c0a43-d18b-1fba-5c6d-7042dde40b4f}">
           <p14:sldIdLst>
             <p14:sldId id="271"/>
           </p14:sldIdLst>
@@ -2432,7 +2432,7 @@
           <a:p>
             <a:r>
               <a:rPr lang="en-US" dirty="0"/>
-              <a:t>第1期は投じた10.8億が14.9億で戻った。第2期は純資産より安く買えているので、買った瞬間に資産で元が取れていて、そのうえ毎年2.4億の営業利益が乗る。約6年で買収額を利益だけで回収できる計算。</a:t>
+              <a:t>第1期は投じた10.8億が14.9億で戻った。第2期は純資産より安く買っているので、買った瞬間に資産で元が取れている。飲食A社は8.2億で買って今期の営業利益1.3億、飲食B事業は1,400万で買って今期8,000万。この2件だけで年2.1億、約4年で買収額を利益で回収できる。</a:t>
             </a:r>
             <a:endParaRPr lang="en-US" dirty="0"/>
           </a:p>
@@ -14331,7 +14331,7 @@
       </p:sp>
       <p:sp>
         <p:nvSpPr>
-          <p:cNvPr id="6" name="stat 買収28／売却21／出資2。発掘はほぼ自分"/>
+          <p:cNvPr id="6" name="stat 第1期の回収倍率。投じた10.8億円が14.9億円で戻った"/>
           <p:cNvSpPr/>
           <p:nvPr/>
         </p:nvSpPr>
@@ -14418,7 +14418,7 @@
                   <a:schemeClr val="accent1"/>
                 </a:solidFill>
               </a:rPr>
-              <a:t>約50</a:t>
+              <a:t>1.4</a:t>
             </a:r>
             <a:endParaRPr lang="en-US" sz="3600" dirty="0"/>
           </a:p>
@@ -14454,7 +14454,7 @@
                   <a:schemeClr val="tx1"/>
                 </a:solidFill>
               </a:rPr>
-              <a:t>案件</a:t>
+              <a:t>倍</a:t>
             </a:r>
             <a:endParaRPr lang="en-US" sz="1300" dirty="0"/>
           </a:p>
@@ -14490,7 +14490,7 @@
                   <a:schemeClr val="accent2"/>
                 </a:solidFill>
               </a:rPr>
-              <a:t>買収28／売却21／出資2。発掘はほぼ自分</a:t>
+              <a:t>第1期の回収倍率。投じた10.8億円が14.9億円で戻った</a:t>
             </a:r>
             <a:endParaRPr lang="en-US" sz="1050" dirty="0"/>
           </a:p>
@@ -14498,7 +14498,7 @@
       </p:sp>
       <p:sp>
         <p:nvSpPr>
-          <p:cNvPr id="11" name="stat 第1期の回収倍率。投じた10.8億円が14.9億円で戻った"/>
+          <p:cNvPr id="11" name="stat 第2期の純資産倍率。14.4億円で純資産15.9億円を取得"/>
           <p:cNvSpPr/>
           <p:nvPr/>
         </p:nvSpPr>
@@ -14585,7 +14585,7 @@
                   <a:schemeClr val="accent1"/>
                 </a:solidFill>
               </a:rPr>
-              <a:t>1.4</a:t>
+              <a:t>0.9</a:t>
             </a:r>
             <a:endParaRPr lang="en-US" sz="3600" dirty="0"/>
           </a:p>
@@ -14657,7 +14657,7 @@
                   <a:schemeClr val="accent2"/>
                 </a:solidFill>
               </a:rPr>
-              <a:t>第1期の回収倍率。投じた10.8億円が14.9億円で戻った</a:t>
+              <a:t>第2期の純資産倍率。14.4億円で純資産15.9億円を取得</a:t>
             </a:r>
             <a:endParaRPr lang="en-US" sz="1050" dirty="0"/>
           </a:p>
@@ -14665,7 +14665,7 @@
       </p:sp>
       <p:sp>
         <p:nvSpPr>
-          <p:cNvPr id="16" name="stat 第2期の買収先の営業利益（ランレート、2026年予想）"/>
+          <p:cNvPr id="16" name="stat 飲食A社の今期営業利益。8.2億円で取得、純資産13.0億円"/>
           <p:cNvSpPr/>
           <p:nvPr/>
         </p:nvSpPr>
@@ -14752,7 +14752,7 @@
                   <a:schemeClr val="accent1"/>
                 </a:solidFill>
               </a:rPr>
-              <a:t>2.4</a:t>
+              <a:t>1.3億</a:t>
             </a:r>
             <a:endParaRPr lang="en-US" sz="3600" dirty="0"/>
           </a:p>
@@ -14788,7 +14788,7 @@
                   <a:schemeClr val="tx1"/>
                 </a:solidFill>
               </a:rPr>
-              <a:t>億円／年</a:t>
+              <a:t>円／年</a:t>
             </a:r>
             <a:endParaRPr lang="en-US" sz="1300" dirty="0"/>
           </a:p>
@@ -14824,7 +14824,7 @@
                   <a:schemeClr val="accent2"/>
                 </a:solidFill>
               </a:rPr>
-              <a:t>第2期の買収先の営業利益（ランレート、2026年予想）</a:t>
+              <a:t>飲食A社の今期営業利益。8.2億円で取得、純資産13.0億円</a:t>
             </a:r>
             <a:endParaRPr lang="en-US" sz="1050" dirty="0"/>
           </a:p>
@@ -14832,7 +14832,7 @@
       </p:sp>
       <p:sp>
         <p:nvSpPr>
-          <p:cNvPr id="21" name="stat 第2期の回収年数（買収額14.4億円÷年間営業利益）"/>
+          <p:cNvPr id="21" name="stat 飲食B事業の今期営業利益。1,400万円で取得"/>
           <p:cNvSpPr/>
           <p:nvPr/>
         </p:nvSpPr>
@@ -14919,7 +14919,7 @@
                   <a:schemeClr val="accent1"/>
                 </a:solidFill>
               </a:rPr>
-              <a:t>約6</a:t>
+              <a:t>8,000万</a:t>
             </a:r>
             <a:endParaRPr lang="en-US" sz="3600" dirty="0"/>
           </a:p>
@@ -14955,7 +14955,7 @@
                   <a:schemeClr val="tx1"/>
                 </a:solidFill>
               </a:rPr>
-              <a:t>年</a:t>
+              <a:t>円／年</a:t>
             </a:r>
             <a:endParaRPr lang="en-US" sz="1300" dirty="0"/>
           </a:p>
@@ -14991,7 +14991,7 @@
                   <a:schemeClr val="accent2"/>
                 </a:solidFill>
               </a:rPr>
-              <a:t>第2期の回収年数（買収額14.4億円÷年間営業利益）</a:t>
+              <a:t>飲食B事業の今期営業利益。1,400万円で取得</a:t>
             </a:r>
             <a:endParaRPr lang="en-US" sz="1050" dirty="0"/>
           </a:p>
@@ -15175,7 +15175,7 @@
                   <a:schemeClr val="tx1"/>
                 </a:solidFill>
               </a:rPr>
-              <a:t>純資産の9割の価格で取得し、毎年2.4億円の営業利益が上乗せされていく</a:t>
+              <a:t>主要2件だけで今期営業利益2.1億円。買収額8.3億円を約4年で回収し、純資産は買値以上</a:t>
             </a:r>
             <a:endParaRPr lang="en-US" sz="1200" dirty="0"/>
           </a:p>
@@ -15211,7 +15211,7 @@
                   <a:schemeClr val="accent5"/>
                 </a:solidFill>
               </a:rPr>
-              <a:t>単位：億円。第1期の営業利益は保有期間中の累計。第2期のランレートはM&amp;Aで取得したグループ会社の2026年予想営業利益。出典：中野邦人 M&amp;A勝敗一覧表、グループ売上管理表</a:t>
+              <a:t>単位：億円。第1期の営業利益は保有期間中の累計。グラフの第2期の利益はM&amp;Aで取得したグループ会社全体の2026年予想。出典：中野邦人 M&amp;A勝敗一覧表、グループ売上管理表</a:t>
             </a:r>
             <a:endParaRPr lang="en-US" sz="900" dirty="0"/>
           </a:p>

--- a/docs/business/事業概要_AI_MA部門_営業用.pptx
+++ b/docs/business/事業概要_AI_MA部門_営業用.pptx
@@ -122,20 +122,20 @@
   <p:extLst>
     <p:ext uri="{521415D9-36F7-43E2-AB2F-B90AF26B5E84}">
       <p14:sectionLst xmlns:p14="http://schemas.microsoft.com/office/powerpoint/2010/main">
-        <p14:section name="導入" id="{99787ca1-49af-a0d0-493f-4a616528ca5c}">
+        <p14:section name="導入" id="{ef6d071b-112c-6df7-41d5-215749b93239}">
           <p14:sldIdLst>
             <p14:sldId id="256"/>
             <p14:sldId id="257"/>
           </p14:sldIdLst>
         </p14:section>
-        <p14:section name="課題と原点" id="{10529317-3af5-e863-f7a8-f85d72b9073e}">
+        <p14:section name="課題と原点" id="{7e97e339-aa46-f824-3f8c-3000868c4bf1}">
           <p14:sldIdLst>
             <p14:sldId id="258"/>
             <p14:sldId id="259"/>
             <p14:sldId id="260"/>
           </p14:sldIdLst>
         </p14:section>
-        <p14:section name="サービス" id="{5e69687d-b065-9cfb-28c0-19e10453e5f3}">
+        <p14:section name="サービス" id="{7a85cd12-701a-aa0e-d4b9-c32789afc52f}">
           <p14:sldIdLst>
             <p14:sldId id="261"/>
             <p14:sldId id="262"/>
@@ -146,14 +146,14 @@
             <p14:sldId id="267"/>
           </p14:sldIdLst>
         </p14:section>
-        <p14:section name="事業性" id="{2be83fbb-b942-16dc-8848-40aa20647929}">
+        <p14:section name="事業性" id="{8f85441d-7240-01e5-412a-4427d2d7c68a}">
           <p14:sldIdLst>
             <p14:sldId id="268"/>
             <p14:sldId id="269"/>
             <p14:sldId id="270"/>
           </p14:sldIdLst>
         </p14:section>
-        <p14:section name="まとめ" id="{219c0a43-d18b-1fba-5c6d-7042dde40b4f}">
+        <p14:section name="まとめ" id="{f6cbf5e1-e807-d012-81d5-ddb022ac79db}">
           <p14:sldIdLst>
             <p14:sldId id="271"/>
           </p14:sldIdLst>
@@ -168,533 +168,6 @@
 </file>
 
 <file path=ppt/charts/chart1.xml><?xml version="1.0" encoding="utf-8"?>
-<c:chartSpace xmlns:c="http://schemas.openxmlformats.org/drawingml/2006/chart" xmlns:a="http://schemas.openxmlformats.org/drawingml/2006/main" xmlns:r="http://schemas.openxmlformats.org/officeDocument/2006/relationships">
-  <c:date1904 val="0"/>
-  <c:roundedCorners val="1"/>
-  <c:chart>
-    <c:autoTitleDeleted val="1"/>
-    <c:plotArea>
-      <c:layout/>
-      <c:barChart>
-        <c:barDir val="bar"/>
-        <c:grouping val="stacked"/>
-        <c:varyColors val="0"/>
-        <c:ser>
-          <c:idx val="0"/>
-          <c:order val="0"/>
-          <c:tx>
-            <c:strRef>
-              <c:f>Sheet1!$B$1</c:f>
-              <c:strCache>
-                <c:ptCount val="1"/>
-                <c:pt idx="0">
-                  <c:v>投じた額</c:v>
-                </c:pt>
-              </c:strCache>
-            </c:strRef>
-          </c:tx>
-          <c:spPr>
-            <a:solidFill>
-              <a:srgbClr val="9A8F84"/>
-            </a:solidFill>
-            <a:effectLst/>
-          </c:spPr>
-          <c:invertIfNegative val="0"/>
-          <c:dLbls>
-            <c:numFmt formatCode="0.0;;;" sourceLinked="0"/>
-            <c:txPr>
-              <a:bodyPr/>
-              <a:lstStyle/>
-              <a:p>
-                <a:pPr>
-                  <a:defRPr b="0" i="0" strike="noStrike" sz="900" u="none">
-                    <a:solidFill>
-                      <a:srgbClr val="FFFFFF"/>
-                    </a:solidFill>
-                    <a:latin typeface="+mn-lt"/>
-                  </a:defRPr>
-                </a:pPr>
-              </a:p>
-            </c:txPr>
-            <c:dLblPos val="ctr"/>
-            <c:showLegendKey val="0"/>
-            <c:showVal val="1"/>
-            <c:showCatName val="0"/>
-            <c:showSerName val="0"/>
-            <c:showPercent val="0"/>
-            <c:showBubbleSize val="0"/>
-            <c:showLeaderLines val="0"/>
-          </c:dLbls>
-          <c:cat>
-            <c:multiLvlStrRef>
-              <c:f>Sheet1!$A$2:$A$5</c:f>
-              <c:multiLvlStrCache>
-                <c:ptCount val="4"/>
-                <c:lvl>
-                  <c:pt idx="0">
-                    <c:v>第1期 投じた額</c:v>
-                  </c:pt>
-                  <c:pt idx="1">
-                    <c:v>第1期 戻った額</c:v>
-                  </c:pt>
-                  <c:pt idx="2">
-                    <c:v>第2期 投じた額</c:v>
-                  </c:pt>
-                  <c:pt idx="3">
-                    <c:v>第2期 得た資産＋1年分の利益</c:v>
-                  </c:pt>
-                </c:lvl>
-              </c:multiLvlStrCache>
-            </c:multiLvlStrRef>
-          </c:cat>
-          <c:val>
-            <c:numRef>
-              <c:f>Sheet1!$B$2:$B$5</c:f>
-              <c:numCache>
-                <c:formatCode>General</c:formatCode>
-                <c:ptCount val="4"/>
-                <c:pt idx="0">
-                  <c:v>10.8</c:v>
-                </c:pt>
-                <c:pt idx="1">
-                  <c:v>0</c:v>
-                </c:pt>
-                <c:pt idx="2">
-                  <c:v>14.4</c:v>
-                </c:pt>
-                <c:pt idx="3">
-                  <c:v>0</c:v>
-                </c:pt>
-              </c:numCache>
-            </c:numRef>
-          </c:val>
-        </c:ser>
-        <c:ser>
-          <c:idx val="1"/>
-          <c:order val="1"/>
-          <c:tx>
-            <c:strRef>
-              <c:f>Sheet1!$C$1</c:f>
-              <c:strCache>
-                <c:ptCount val="1"/>
-                <c:pt idx="0">
-                  <c:v>営業利益</c:v>
-                </c:pt>
-              </c:strCache>
-            </c:strRef>
-          </c:tx>
-          <c:spPr>
-            <a:solidFill>
-              <a:srgbClr val="2B2622"/>
-            </a:solidFill>
-            <a:effectLst/>
-          </c:spPr>
-          <c:invertIfNegative val="0"/>
-          <c:dLbls>
-            <c:numFmt formatCode="0.0;;;" sourceLinked="0"/>
-            <c:txPr>
-              <a:bodyPr/>
-              <a:lstStyle/>
-              <a:p>
-                <a:pPr>
-                  <a:defRPr b="0" i="0" strike="noStrike" sz="900" u="none">
-                    <a:solidFill>
-                      <a:srgbClr val="FFFFFF"/>
-                    </a:solidFill>
-                    <a:latin typeface="+mn-lt"/>
-                  </a:defRPr>
-                </a:pPr>
-              </a:p>
-            </c:txPr>
-            <c:dLblPos val="ctr"/>
-            <c:showLegendKey val="0"/>
-            <c:showVal val="1"/>
-            <c:showCatName val="0"/>
-            <c:showSerName val="0"/>
-            <c:showPercent val="0"/>
-            <c:showBubbleSize val="0"/>
-            <c:showLeaderLines val="0"/>
-          </c:dLbls>
-          <c:cat>
-            <c:multiLvlStrRef>
-              <c:f>Sheet1!$A$2:$A$5</c:f>
-              <c:multiLvlStrCache>
-                <c:ptCount val="4"/>
-                <c:lvl>
-                  <c:pt idx="0">
-                    <c:v>第1期 投じた額</c:v>
-                  </c:pt>
-                  <c:pt idx="1">
-                    <c:v>第1期 戻った額</c:v>
-                  </c:pt>
-                  <c:pt idx="2">
-                    <c:v>第2期 投じた額</c:v>
-                  </c:pt>
-                  <c:pt idx="3">
-                    <c:v>第2期 得た資産＋1年分の利益</c:v>
-                  </c:pt>
-                </c:lvl>
-              </c:multiLvlStrCache>
-            </c:multiLvlStrRef>
-          </c:cat>
-          <c:val>
-            <c:numRef>
-              <c:f>Sheet1!$C$2:$C$5</c:f>
-              <c:numCache>
-                <c:formatCode>General</c:formatCode>
-                <c:ptCount val="4"/>
-                <c:pt idx="0">
-                  <c:v>0</c:v>
-                </c:pt>
-                <c:pt idx="1">
-                  <c:v>7.6</c:v>
-                </c:pt>
-                <c:pt idx="2">
-                  <c:v>0</c:v>
-                </c:pt>
-                <c:pt idx="3">
-                  <c:v>2.4</c:v>
-                </c:pt>
-              </c:numCache>
-            </c:numRef>
-          </c:val>
-        </c:ser>
-        <c:ser>
-          <c:idx val="2"/>
-          <c:order val="2"/>
-          <c:tx>
-            <c:strRef>
-              <c:f>Sheet1!$D$1</c:f>
-              <c:strCache>
-                <c:ptCount val="1"/>
-                <c:pt idx="0">
-                  <c:v>売却回収</c:v>
-                </c:pt>
-              </c:strCache>
-            </c:strRef>
-          </c:tx>
-          <c:spPr>
-            <a:solidFill>
-              <a:srgbClr val="C9AE7E"/>
-            </a:solidFill>
-            <a:effectLst/>
-          </c:spPr>
-          <c:invertIfNegative val="0"/>
-          <c:dLbls>
-            <c:numFmt formatCode="0.0;;;" sourceLinked="0"/>
-            <c:txPr>
-              <a:bodyPr/>
-              <a:lstStyle/>
-              <a:p>
-                <a:pPr>
-                  <a:defRPr b="0" i="0" strike="noStrike" sz="900" u="none">
-                    <a:solidFill>
-                      <a:srgbClr val="FFFFFF"/>
-                    </a:solidFill>
-                    <a:latin typeface="+mn-lt"/>
-                  </a:defRPr>
-                </a:pPr>
-              </a:p>
-            </c:txPr>
-            <c:dLblPos val="ctr"/>
-            <c:showLegendKey val="0"/>
-            <c:showVal val="1"/>
-            <c:showCatName val="0"/>
-            <c:showSerName val="0"/>
-            <c:showPercent val="0"/>
-            <c:showBubbleSize val="0"/>
-            <c:showLeaderLines val="0"/>
-          </c:dLbls>
-          <c:cat>
-            <c:multiLvlStrRef>
-              <c:f>Sheet1!$A$2:$A$5</c:f>
-              <c:multiLvlStrCache>
-                <c:ptCount val="4"/>
-                <c:lvl>
-                  <c:pt idx="0">
-                    <c:v>第1期 投じた額</c:v>
-                  </c:pt>
-                  <c:pt idx="1">
-                    <c:v>第1期 戻った額</c:v>
-                  </c:pt>
-                  <c:pt idx="2">
-                    <c:v>第2期 投じた額</c:v>
-                  </c:pt>
-                  <c:pt idx="3">
-                    <c:v>第2期 得た資産＋1年分の利益</c:v>
-                  </c:pt>
-                </c:lvl>
-              </c:multiLvlStrCache>
-            </c:multiLvlStrRef>
-          </c:cat>
-          <c:val>
-            <c:numRef>
-              <c:f>Sheet1!$D$2:$D$5</c:f>
-              <c:numCache>
-                <c:formatCode>General</c:formatCode>
-                <c:ptCount val="4"/>
-                <c:pt idx="0">
-                  <c:v>0</c:v>
-                </c:pt>
-                <c:pt idx="1">
-                  <c:v>5.3</c:v>
-                </c:pt>
-                <c:pt idx="2">
-                  <c:v>0</c:v>
-                </c:pt>
-                <c:pt idx="3">
-                  <c:v>0</c:v>
-                </c:pt>
-              </c:numCache>
-            </c:numRef>
-          </c:val>
-        </c:ser>
-        <c:ser>
-          <c:idx val="3"/>
-          <c:order val="3"/>
-          <c:tx>
-            <c:strRef>
-              <c:f>Sheet1!$E$1</c:f>
-              <c:strCache>
-                <c:ptCount val="1"/>
-                <c:pt idx="0">
-                  <c:v>手元の純資産</c:v>
-                </c:pt>
-              </c:strCache>
-            </c:strRef>
-          </c:tx>
-          <c:spPr>
-            <a:solidFill>
-              <a:srgbClr val="A78450"/>
-            </a:solidFill>
-            <a:effectLst/>
-          </c:spPr>
-          <c:invertIfNegative val="0"/>
-          <c:dLbls>
-            <c:numFmt formatCode="0.0;;;" sourceLinked="0"/>
-            <c:txPr>
-              <a:bodyPr/>
-              <a:lstStyle/>
-              <a:p>
-                <a:pPr>
-                  <a:defRPr b="0" i="0" strike="noStrike" sz="900" u="none">
-                    <a:solidFill>
-                      <a:srgbClr val="FFFFFF"/>
-                    </a:solidFill>
-                    <a:latin typeface="+mn-lt"/>
-                  </a:defRPr>
-                </a:pPr>
-              </a:p>
-            </c:txPr>
-            <c:dLblPos val="ctr"/>
-            <c:showLegendKey val="0"/>
-            <c:showVal val="1"/>
-            <c:showCatName val="0"/>
-            <c:showSerName val="0"/>
-            <c:showPercent val="0"/>
-            <c:showBubbleSize val="0"/>
-            <c:showLeaderLines val="0"/>
-          </c:dLbls>
-          <c:cat>
-            <c:multiLvlStrRef>
-              <c:f>Sheet1!$A$2:$A$5</c:f>
-              <c:multiLvlStrCache>
-                <c:ptCount val="4"/>
-                <c:lvl>
-                  <c:pt idx="0">
-                    <c:v>第1期 投じた額</c:v>
-                  </c:pt>
-                  <c:pt idx="1">
-                    <c:v>第1期 戻った額</c:v>
-                  </c:pt>
-                  <c:pt idx="2">
-                    <c:v>第2期 投じた額</c:v>
-                  </c:pt>
-                  <c:pt idx="3">
-                    <c:v>第2期 得た資産＋1年分の利益</c:v>
-                  </c:pt>
-                </c:lvl>
-              </c:multiLvlStrCache>
-            </c:multiLvlStrRef>
-          </c:cat>
-          <c:val>
-            <c:numRef>
-              <c:f>Sheet1!$E$2:$E$5</c:f>
-              <c:numCache>
-                <c:formatCode>General</c:formatCode>
-                <c:ptCount val="4"/>
-                <c:pt idx="0">
-                  <c:v>0</c:v>
-                </c:pt>
-                <c:pt idx="1">
-                  <c:v>2</c:v>
-                </c:pt>
-                <c:pt idx="2">
-                  <c:v>0</c:v>
-                </c:pt>
-                <c:pt idx="3">
-                  <c:v>15.9</c:v>
-                </c:pt>
-              </c:numCache>
-            </c:numRef>
-          </c:val>
-        </c:ser>
-        <c:dLbls>
-          <c:numFmt formatCode="0.0;;;" sourceLinked="0"/>
-          <c:txPr>
-            <a:bodyPr/>
-            <a:lstStyle/>
-            <a:p>
-              <a:pPr>
-                <a:defRPr b="0" i="0" strike="noStrike" sz="900" u="none">
-                  <a:solidFill>
-                    <a:srgbClr val="FFFFFF"/>
-                  </a:solidFill>
-                  <a:latin typeface="+mn-lt"/>
-                </a:defRPr>
-              </a:pPr>
-            </a:p>
-          </c:txPr>
-          <c:dLblPos val="ctr"/>
-          <c:showLegendKey val="0"/>
-          <c:showVal val="1"/>
-          <c:showCatName val="0"/>
-          <c:showSerName val="0"/>
-          <c:showPercent val="0"/>
-          <c:showBubbleSize val="0"/>
-          <c:showLeaderLines val="0"/>
-        </c:dLbls>
-        <c:gapWidth val="35"/>
-        <c:overlap val="100"/>
-        <c:axId val="2094734554"/>
-        <c:axId val="2094734552"/>
-        <c:axId val="2094734556"/>
-      </c:barChart>
-      <c:catAx>
-        <c:axId val="2094734554"/>
-        <c:scaling>
-          <c:orientation val="maxMin"/>
-        </c:scaling>
-        <c:delete val="0"/>
-        <c:axPos val="l"/>
-        <c:numFmt formatCode="General" sourceLinked="1"/>
-        <c:majorTickMark val="out"/>
-        <c:minorTickMark val="none"/>
-        <c:tickLblPos val="nextTo"/>
-        <c:spPr>
-          <a:ln w="12700" cap="flat">
-            <a:solidFill>
-              <a:srgbClr val="888888"/>
-            </a:solidFill>
-            <a:prstDash val="solid"/>
-            <a:round/>
-          </a:ln>
-        </c:spPr>
-        <c:txPr>
-          <a:bodyPr/>
-          <a:lstStyle/>
-          <a:p>
-            <a:pPr>
-              <a:defRPr sz="900" b="0" i="0" u="none" strike="noStrike">
-                <a:solidFill>
-                  <a:srgbClr val="2B2622"/>
-                </a:solidFill>
-                <a:latin typeface="+mn-lt"/>
-              </a:defRPr>
-            </a:pPr>
-            <a:endParaRPr lang="en-US"/>
-          </a:p>
-        </c:txPr>
-        <c:crossAx val="2094734552"/>
-        <c:crosses val="autoZero"/>
-        <c:auto val="1"/>
-        <c:lblAlgn val="ctr"/>
-        <c:noMultiLvlLbl val="1"/>
-      </c:catAx>
-      <c:valAx>
-        <c:axId val="2094734552"/>
-        <c:scaling>
-          <c:orientation val="minMax"/>
-        </c:scaling>
-        <c:delete val="1"/>
-        <c:axPos val="b"/>
-        <c:numFmt formatCode="General" sourceLinked="0"/>
-        <c:majorTickMark val="out"/>
-        <c:minorTickMark val="none"/>
-        <c:tickLblPos val="low"/>
-        <c:spPr>
-          <a:ln w="12700" cap="flat">
-            <a:solidFill>
-              <a:srgbClr val="888888"/>
-            </a:solidFill>
-            <a:prstDash val="solid"/>
-            <a:round/>
-          </a:ln>
-        </c:spPr>
-        <c:txPr>
-          <a:bodyPr/>
-          <a:lstStyle/>
-          <a:p>
-            <a:pPr>
-              <a:defRPr sz="1200" b="0" i="0" u="none" strike="noStrike">
-                <a:solidFill>
-                  <a:srgbClr val="000000"/>
-                </a:solidFill>
-                <a:latin typeface="Arial"/>
-              </a:defRPr>
-            </a:pPr>
-            <a:endParaRPr lang="en-US"/>
-          </a:p>
-        </c:txPr>
-        <c:crossAx val="2094734554"/>
-        <c:crosses val="autoZero"/>
-        <c:crossBetween val="between"/>
-      </c:valAx>
-      <c:spPr>
-        <a:noFill/>
-        <a:ln>
-          <a:noFill/>
-        </a:ln>
-        <a:effectLst/>
-      </c:spPr>
-    </c:plotArea>
-    <c:legend>
-      <c:legendPos val="r"/>
-      <c:overlay val="0"/>
-      <c:txPr>
-        <a:bodyPr/>
-        <a:lstStyle/>
-        <a:p>
-          <a:pPr>
-            <a:defRPr sz="900">
-              <a:solidFill>
-                <a:srgbClr val="6F665F"/>
-              </a:solidFill>
-              <a:latin typeface="+mn-lt"/>
-              <a:cs typeface="+mn-lt"/>
-            </a:defRPr>
-          </a:pPr>
-          <a:endParaRPr lang="en-US"/>
-        </a:p>
-      </c:txPr>
-    </c:legend>
-    <c:plotVisOnly val="1"/>
-    <c:dispBlanksAs val="span"/>
-  </c:chart>
-  <c:spPr>
-    <a:noFill/>
-    <a:ln>
-      <a:noFill/>
-    </a:ln>
-    <a:effectLst/>
-  </c:spPr>
-  <c:externalData r:id="rId1">
-    <c:autoUpdate val="0"/>
-  </c:externalData>
-</c:chartSpace>
-</file>
-
-<file path=ppt/charts/chart2.xml><?xml version="1.0" encoding="utf-8"?>
 <c:chartSpace xmlns:c="http://schemas.openxmlformats.org/drawingml/2006/chart" xmlns:a="http://schemas.openxmlformats.org/drawingml/2006/main" xmlns:r="http://schemas.openxmlformats.org/officeDocument/2006/relationships">
   <c:date1904 val="0"/>
   <c:roundedCorners val="1"/>
@@ -2432,7 +1905,7 @@
           <a:p>
             <a:r>
               <a:rPr lang="en-US" dirty="0"/>
-              <a:t>第1期は投じた10.8億が14.9億で戻った。第2期は純資産より安く買っているので、買った瞬間に資産で元が取れている。飲食A社は8.2億で買って今期の営業利益1.3億、飲食B事業は1,400万で買って今期8,000万。この2件だけで年2.1億、約4年で買収額を利益で回収できる。</a:t>
+              <a:t>見るのは2つ。買った値段に対して資産がいくら残ったか、営業利益がいくらに育ったか。第1期は資産では0.7倍、ただ保有中に7.6億の営業利益を出した。第2期は純資産より安く買っているので、資産は買値の1.3倍。そのうえ単年度で2.4億の営業利益に育っている。飲食A社は8.2億で買って純資産13億、今期の営業利益1.3億。飲食B事業は1,400万で買って純資産7,000万、今期8,000万。</a:t>
             </a:r>
             <a:endParaRPr lang="en-US" dirty="0"/>
           </a:p>
@@ -14285,7 +13758,7 @@
                   <a:schemeClr val="tx1"/>
                 </a:solidFill>
               </a:rPr>
-              <a:t>49戦の実績：安く買い、利益と資産で回収する</a:t>
+              <a:t>49戦の実績：純資産より安く買い、営業利益を積み上げる</a:t>
             </a:r>
             <a:endParaRPr lang="en-US" sz="3000" dirty="0"/>
           </a:p>
@@ -14323,7 +13796,7 @@
                   <a:schemeClr val="accent2"/>
                 </a:solidFill>
               </a:rPr>
-              <a:t>買収額を「いくらの利益と資産が手に入ったか」で測る。2011年3月〜現在、すべて自社の実案件</a:t>
+              <a:t>買った値段に対して「手元に残った資産（売却額を含む）」と「育った営業利益」で測る。すべて自社の実案件</a:t>
             </a:r>
             <a:endParaRPr lang="en-US" sz="1350" dirty="0"/>
           </a:p>
@@ -14331,18 +13804,18 @@
       </p:sp>
       <p:sp>
         <p:nvSpPr>
-          <p:cNvPr id="6" name="stat 第1期の回収倍率。投じた10.8億円が14.9億円で戻った"/>
+          <p:cNvPr id="6" name="panel 第1期 2011–19"/>
           <p:cNvSpPr/>
           <p:nvPr/>
         </p:nvSpPr>
         <p:spPr>
           <a:xfrm>
             <a:off x="685800" y="2011680"/>
-            <a:ext cx="2560320" cy="1901952"/>
+            <a:ext cx="5349240" cy="4041648"/>
           </a:xfrm>
           <a:prstGeom prst="roundRect">
             <a:avLst>
-              <a:gd name="adj" fmla="val 2885"/>
+              <a:gd name="adj" fmla="val 1357"/>
             </a:avLst>
           </a:prstGeom>
           <a:solidFill>
@@ -14371,11 +13844,13 @@
         </p:nvSpPr>
         <p:spPr>
           <a:xfrm>
-            <a:off x="941832" y="2286000"/>
-            <a:ext cx="365760" cy="45720"/>
-          </a:xfrm>
-          <a:prstGeom prst="rect">
-            <a:avLst/>
+            <a:off x="960120" y="2212848"/>
+            <a:ext cx="1417320" cy="274320"/>
+          </a:xfrm>
+          <a:prstGeom prst="roundRect">
+            <a:avLst>
+              <a:gd name="adj" fmla="val 50000"/>
+            </a:avLst>
           </a:prstGeom>
           <a:solidFill>
             <a:schemeClr val="accent1"/>
@@ -14396,8 +13871,8 @@
         </p:nvSpPr>
         <p:spPr>
           <a:xfrm>
-            <a:off x="923544" y="2450592"/>
-            <a:ext cx="2103120" cy="777240"/>
+            <a:off x="960120" y="2212848"/>
+            <a:ext cx="1417320" cy="274320"/>
           </a:xfrm>
           <a:prstGeom prst="rect">
             <a:avLst/>
@@ -14409,18 +13884,18 @@
           <a:bodyPr wrap="square" lIns="0" tIns="0" rIns="0" bIns="0" rtlCol="0" anchor="ctr"/>
           <a:lstStyle/>
           <a:p>
-            <a:pPr indent="0" marL="0">
-              <a:buNone/>
-            </a:pPr>
-            <a:r>
-              <a:rPr lang="en-US" sz="3600" b="1" dirty="0">
-                <a:solidFill>
-                  <a:schemeClr val="accent1"/>
-                </a:solidFill>
-              </a:rPr>
-              <a:t>1.4</a:t>
-            </a:r>
-            <a:endParaRPr lang="en-US" sz="3600" dirty="0"/>
+            <a:pPr algn="ctr" indent="0" marL="0">
+              <a:buNone/>
+            </a:pPr>
+            <a:r>
+              <a:rPr lang="en-US" sz="950" b="1" dirty="0">
+                <a:solidFill>
+                  <a:schemeClr val="bg1"/>
+                </a:solidFill>
+              </a:rPr>
+              <a:t>第1期 2011–19</a:t>
+            </a:r>
+            <a:endParaRPr lang="en-US" sz="950" dirty="0"/>
           </a:p>
         </p:txBody>
       </p:sp>
@@ -14432,31 +13907,31 @@
         </p:nvSpPr>
         <p:spPr>
           <a:xfrm>
-            <a:off x="923544" y="3227832"/>
-            <a:ext cx="2103120" cy="274320"/>
-          </a:xfrm>
-          <a:prstGeom prst="rect">
-            <a:avLst/>
-          </a:prstGeom>
-          <a:noFill/>
-          <a:ln/>
-        </p:spPr>
-        <p:txBody>
-          <a:bodyPr wrap="square" lIns="0" tIns="0" rIns="0" bIns="0" rtlCol="0" anchor="t"/>
-          <a:lstStyle/>
-          <a:p>
-            <a:pPr indent="0" marL="0">
-              <a:buNone/>
-            </a:pPr>
-            <a:r>
-              <a:rPr lang="en-US" sz="1300" b="1" dirty="0">
+            <a:off x="2514600" y="2176272"/>
+            <a:ext cx="3291840" cy="347472"/>
+          </a:xfrm>
+          <a:prstGeom prst="rect">
+            <a:avLst/>
+          </a:prstGeom>
+          <a:noFill/>
+          <a:ln/>
+        </p:spPr>
+        <p:txBody>
+          <a:bodyPr wrap="square" lIns="0" tIns="0" rIns="0" bIns="0" rtlCol="0" anchor="ctr"/>
+          <a:lstStyle/>
+          <a:p>
+            <a:pPr indent="0" marL="0">
+              <a:buNone/>
+            </a:pPr>
+            <a:r>
+              <a:rPr lang="en-US" sz="1400" b="1" dirty="0">
                 <a:solidFill>
                   <a:schemeClr val="tx1"/>
                 </a:solidFill>
               </a:rPr>
-              <a:t>倍</a:t>
-            </a:r>
-            <a:endParaRPr lang="en-US" sz="1300" dirty="0"/>
+              <a:t>数で獲りにいき、授業料も払った</a:t>
+            </a:r>
+            <a:endParaRPr lang="en-US" sz="1400" dirty="0"/>
           </a:p>
         </p:txBody>
       </p:sp>
@@ -14468,81 +13943,616 @@
         </p:nvSpPr>
         <p:spPr>
           <a:xfrm>
-            <a:off x="923544" y="3502152"/>
-            <a:ext cx="2103120" cy="301752"/>
-          </a:xfrm>
-          <a:prstGeom prst="rect">
-            <a:avLst/>
-          </a:prstGeom>
-          <a:noFill/>
-          <a:ln/>
-        </p:spPr>
-        <p:txBody>
-          <a:bodyPr wrap="square" lIns="0" tIns="0" rIns="0" bIns="0" rtlCol="0" anchor="t"/>
-          <a:lstStyle/>
-          <a:p>
-            <a:pPr indent="0" marL="0">
-              <a:buNone/>
-            </a:pPr>
-            <a:r>
-              <a:rPr lang="en-US" sz="1050" dirty="0">
+            <a:off x="960120" y="2743200"/>
+            <a:ext cx="1051560" cy="384048"/>
+          </a:xfrm>
+          <a:prstGeom prst="rect">
+            <a:avLst/>
+          </a:prstGeom>
+          <a:noFill/>
+          <a:ln/>
+        </p:spPr>
+        <p:txBody>
+          <a:bodyPr wrap="square" lIns="0" tIns="0" rIns="0" bIns="0" rtlCol="0" anchor="ctr"/>
+          <a:lstStyle/>
+          <a:p>
+            <a:pPr indent="0" marL="0">
+              <a:buNone/>
+            </a:pPr>
+            <a:r>
+              <a:rPr lang="en-US" sz="1100" b="1" dirty="0">
                 <a:solidFill>
                   <a:schemeClr val="accent2"/>
                 </a:solidFill>
               </a:rPr>
-              <a:t>第1期の回収倍率。投じた10.8億円が14.9億円で戻った</a:t>
-            </a:r>
-            <a:endParaRPr lang="en-US" sz="1050" dirty="0"/>
-          </a:p>
-        </p:txBody>
-      </p:sp>
-      <p:sp>
-        <p:nvSpPr>
-          <p:cNvPr id="11" name="stat 第2期の純資産倍率。14.4億円で純資産15.9億円を取得"/>
-          <p:cNvSpPr/>
-          <p:nvPr/>
-        </p:nvSpPr>
-        <p:spPr>
-          <a:xfrm>
-            <a:off x="3456432" y="2011680"/>
-            <a:ext cx="2560320" cy="1901952"/>
-          </a:xfrm>
-          <a:prstGeom prst="roundRect">
-            <a:avLst>
-              <a:gd name="adj" fmla="val 2885"/>
-            </a:avLst>
+              <a:t>購入額</a:t>
+            </a:r>
+            <a:endParaRPr lang="en-US" sz="1100" dirty="0"/>
+          </a:p>
+        </p:txBody>
+      </p:sp>
+      <p:sp>
+        <p:nvSpPr>
+          <p:cNvPr id="11" name="第1期 2011–19 bar 購入額"/>
+          <p:cNvSpPr/>
+          <p:nvPr/>
+        </p:nvSpPr>
+        <p:spPr>
+          <a:xfrm>
+            <a:off x="2011680" y="2779776"/>
+            <a:ext cx="1085222" cy="310896"/>
+          </a:xfrm>
+          <a:prstGeom prst="rect">
+            <a:avLst/>
           </a:prstGeom>
           <a:solidFill>
-            <a:schemeClr val="bg2"/>
+            <a:srgbClr val="9A8F84"/>
           </a:solidFill>
-          <a:ln w="9525">
+          <a:ln w="12700">
             <a:solidFill>
-              <a:schemeClr val="accent3"/>
+              <a:srgbClr val="9A8F84"/>
             </a:solidFill>
             <a:prstDash val="solid"/>
           </a:ln>
-          <a:effectLst>
-            <a:outerShdw sx="100000" sy="100000" kx="0" ky="0" algn="bl" rotWithShape="0" blurRad="76200" dist="25400" dir="5400000">
-              <a:srgbClr val="6F665F">
-                <a:alpha val="12000"/>
-              </a:srgbClr>
-            </a:outerShdw>
-          </a:effectLst>
-        </p:spPr>
-      </p:sp>
-      <p:sp>
-        <p:nvSpPr>
-          <p:cNvPr id="12" name="Shape 10"/>
-          <p:cNvSpPr/>
-          <p:nvPr/>
-        </p:nvSpPr>
-        <p:spPr>
-          <a:xfrm>
-            <a:off x="3712464" y="2286000"/>
-            <a:ext cx="365760" cy="45720"/>
-          </a:xfrm>
-          <a:prstGeom prst="rect">
-            <a:avLst/>
+        </p:spPr>
+      </p:sp>
+      <p:sp>
+        <p:nvSpPr>
+          <p:cNvPr id="12" name="Text 10"/>
+          <p:cNvSpPr txBox="1"/>
+          <p:nvPr/>
+        </p:nvSpPr>
+        <p:spPr>
+          <a:xfrm>
+            <a:off x="3170054" y="2743200"/>
+            <a:ext cx="822960" cy="384048"/>
+          </a:xfrm>
+          <a:prstGeom prst="rect">
+            <a:avLst/>
+          </a:prstGeom>
+          <a:noFill/>
+          <a:ln/>
+        </p:spPr>
+        <p:txBody>
+          <a:bodyPr wrap="square" lIns="0" tIns="0" rIns="0" bIns="0" rtlCol="0" anchor="ctr"/>
+          <a:lstStyle/>
+          <a:p>
+            <a:pPr indent="0" marL="0">
+              <a:buNone/>
+            </a:pPr>
+            <a:r>
+              <a:rPr lang="en-US" sz="1200" b="1" dirty="0">
+                <a:solidFill>
+                  <a:schemeClr val="tx1"/>
+                </a:solidFill>
+              </a:rPr>
+              <a:t>10.8億</a:t>
+            </a:r>
+            <a:endParaRPr lang="en-US" sz="1200" dirty="0"/>
+          </a:p>
+        </p:txBody>
+      </p:sp>
+      <p:sp>
+        <p:nvSpPr>
+          <p:cNvPr id="13" name="Text 11"/>
+          <p:cNvSpPr txBox="1"/>
+          <p:nvPr/>
+        </p:nvSpPr>
+        <p:spPr>
+          <a:xfrm>
+            <a:off x="960120" y="3246120"/>
+            <a:ext cx="1051560" cy="384048"/>
+          </a:xfrm>
+          <a:prstGeom prst="rect">
+            <a:avLst/>
+          </a:prstGeom>
+          <a:noFill/>
+          <a:ln/>
+        </p:spPr>
+        <p:txBody>
+          <a:bodyPr wrap="square" lIns="0" tIns="0" rIns="0" bIns="0" rtlCol="0" anchor="ctr"/>
+          <a:lstStyle/>
+          <a:p>
+            <a:pPr indent="0" marL="0">
+              <a:buNone/>
+            </a:pPr>
+            <a:r>
+              <a:rPr lang="en-US" sz="1100" b="1" dirty="0">
+                <a:solidFill>
+                  <a:schemeClr val="accent2"/>
+                </a:solidFill>
+              </a:rPr>
+              <a:t>純資産＋売却</a:t>
+            </a:r>
+            <a:endParaRPr lang="en-US" sz="1100" dirty="0"/>
+          </a:p>
+        </p:txBody>
+      </p:sp>
+      <p:sp>
+        <p:nvSpPr>
+          <p:cNvPr id="14" name="第1期 2011–19 bar 純資産＋売却"/>
+          <p:cNvSpPr/>
+          <p:nvPr/>
+        </p:nvSpPr>
+        <p:spPr>
+          <a:xfrm>
+            <a:off x="2011680" y="3282696"/>
+            <a:ext cx="733530" cy="310896"/>
+          </a:xfrm>
+          <a:prstGeom prst="rect">
+            <a:avLst/>
+          </a:prstGeom>
+          <a:solidFill>
+            <a:srgbClr val="A78450"/>
+          </a:solidFill>
+          <a:ln w="12700">
+            <a:solidFill>
+              <a:srgbClr val="A78450"/>
+            </a:solidFill>
+            <a:prstDash val="solid"/>
+          </a:ln>
+        </p:spPr>
+      </p:sp>
+      <p:sp>
+        <p:nvSpPr>
+          <p:cNvPr id="15" name="Text 13"/>
+          <p:cNvSpPr txBox="1"/>
+          <p:nvPr/>
+        </p:nvSpPr>
+        <p:spPr>
+          <a:xfrm>
+            <a:off x="2818362" y="3246120"/>
+            <a:ext cx="822960" cy="384048"/>
+          </a:xfrm>
+          <a:prstGeom prst="rect">
+            <a:avLst/>
+          </a:prstGeom>
+          <a:noFill/>
+          <a:ln/>
+        </p:spPr>
+        <p:txBody>
+          <a:bodyPr wrap="square" lIns="0" tIns="0" rIns="0" bIns="0" rtlCol="0" anchor="ctr"/>
+          <a:lstStyle/>
+          <a:p>
+            <a:pPr indent="0" marL="0">
+              <a:buNone/>
+            </a:pPr>
+            <a:r>
+              <a:rPr lang="en-US" sz="1200" b="1" dirty="0">
+                <a:solidFill>
+                  <a:schemeClr val="tx1"/>
+                </a:solidFill>
+              </a:rPr>
+              <a:t>7.3億</a:t>
+            </a:r>
+            <a:endParaRPr lang="en-US" sz="1200" dirty="0"/>
+          </a:p>
+        </p:txBody>
+      </p:sp>
+      <p:sp>
+        <p:nvSpPr>
+          <p:cNvPr id="16" name="Text 14"/>
+          <p:cNvSpPr txBox="1"/>
+          <p:nvPr/>
+        </p:nvSpPr>
+        <p:spPr>
+          <a:xfrm>
+            <a:off x="4617720" y="2651760"/>
+            <a:ext cx="1234440" cy="1051560"/>
+          </a:xfrm>
+          <a:prstGeom prst="rect">
+            <a:avLst/>
+          </a:prstGeom>
+          <a:noFill/>
+          <a:ln/>
+        </p:spPr>
+        <p:txBody>
+          <a:bodyPr wrap="square" lIns="0" tIns="0" rIns="0" bIns="0" rtlCol="0" anchor="ctr"/>
+          <a:lstStyle/>
+          <a:p>
+            <a:pPr algn="r" indent="0" marL="0">
+              <a:buNone/>
+            </a:pPr>
+            <a:r>
+              <a:rPr lang="en-US" sz="2800" b="1" dirty="0">
+                <a:solidFill>
+                  <a:schemeClr val="accent1"/>
+                </a:solidFill>
+              </a:rPr>
+              <a:t>0.7倍</a:t>
+            </a:r>
+            <a:endParaRPr lang="en-US" sz="1300" dirty="0"/>
+          </a:p>
+          <a:p>
+            <a:pPr algn="r" indent="0" marL="0">
+              <a:buNone/>
+            </a:pPr>
+            <a:r>
+              <a:rPr lang="en-US" sz="900" dirty="0">
+                <a:solidFill>
+                  <a:schemeClr val="accent2"/>
+                </a:solidFill>
+              </a:rPr>
+              <a:t>購入額に対する資産</a:t>
+            </a:r>
+            <a:endParaRPr lang="en-US" sz="1300" dirty="0"/>
+          </a:p>
+        </p:txBody>
+      </p:sp>
+      <p:sp>
+        <p:nvSpPr>
+          <p:cNvPr id="17" name="Shape 15"/>
+          <p:cNvSpPr/>
+          <p:nvPr/>
+        </p:nvSpPr>
+        <p:spPr>
+          <a:xfrm>
+            <a:off x="960120" y="3840480"/>
+            <a:ext cx="4800600" cy="0"/>
+          </a:xfrm>
+          <a:prstGeom prst="line">
+            <a:avLst/>
+          </a:prstGeom>
+          <a:noFill/>
+          <a:ln w="9525">
+            <a:solidFill>
+              <a:srgbClr val="E6DCCB"/>
+            </a:solidFill>
+            <a:prstDash val="solid"/>
+          </a:ln>
+        </p:spPr>
+      </p:sp>
+      <p:sp>
+        <p:nvSpPr>
+          <p:cNvPr id="18" name="Text 16"/>
+          <p:cNvSpPr txBox="1"/>
+          <p:nvPr/>
+        </p:nvSpPr>
+        <p:spPr>
+          <a:xfrm>
+            <a:off x="960120" y="3931920"/>
+            <a:ext cx="2377440" cy="274320"/>
+          </a:xfrm>
+          <a:prstGeom prst="rect">
+            <a:avLst/>
+          </a:prstGeom>
+          <a:noFill/>
+          <a:ln/>
+        </p:spPr>
+        <p:txBody>
+          <a:bodyPr wrap="square" lIns="0" tIns="0" rIns="0" bIns="0" rtlCol="0" anchor="t"/>
+          <a:lstStyle/>
+          <a:p>
+            <a:pPr indent="0" marL="0">
+              <a:buNone/>
+            </a:pPr>
+            <a:r>
+              <a:rPr lang="en-US" sz="1100" b="1" dirty="0">
+                <a:solidFill>
+                  <a:schemeClr val="accent2"/>
+                </a:solidFill>
+              </a:rPr>
+              <a:t>保有期間中の営業利益</a:t>
+            </a:r>
+            <a:endParaRPr lang="en-US" sz="1100" dirty="0"/>
+          </a:p>
+        </p:txBody>
+      </p:sp>
+      <p:sp>
+        <p:nvSpPr>
+          <p:cNvPr id="19" name="Text 17"/>
+          <p:cNvSpPr txBox="1"/>
+          <p:nvPr/>
+        </p:nvSpPr>
+        <p:spPr>
+          <a:xfrm>
+            <a:off x="960120" y="4206240"/>
+            <a:ext cx="2468880" cy="640080"/>
+          </a:xfrm>
+          <a:prstGeom prst="rect">
+            <a:avLst/>
+          </a:prstGeom>
+          <a:noFill/>
+          <a:ln/>
+        </p:spPr>
+        <p:txBody>
+          <a:bodyPr wrap="square" lIns="0" tIns="0" rIns="0" bIns="0" rtlCol="0" anchor="ctr"/>
+          <a:lstStyle/>
+          <a:p>
+            <a:pPr indent="0" marL="0">
+              <a:buNone/>
+            </a:pPr>
+            <a:r>
+              <a:rPr lang="en-US" sz="3000" b="1" dirty="0">
+                <a:solidFill>
+                  <a:schemeClr val="tx1"/>
+                </a:solidFill>
+              </a:rPr>
+              <a:t>累計7.6</a:t>
+            </a:r>
+            <a:pPr indent="0" marL="0">
+              <a:buNone/>
+            </a:pPr>
+            <a:r>
+              <a:rPr lang="en-US" sz="1200" b="1" dirty="0">
+                <a:solidFill>
+                  <a:schemeClr val="accent2"/>
+                </a:solidFill>
+              </a:rPr>
+              <a:t> 億円</a:t>
+            </a:r>
+            <a:endParaRPr lang="en-US" sz="1300" dirty="0"/>
+          </a:p>
+        </p:txBody>
+      </p:sp>
+      <p:sp>
+        <p:nvSpPr>
+          <p:cNvPr id="20" name="Text 18"/>
+          <p:cNvSpPr txBox="1"/>
+          <p:nvPr/>
+        </p:nvSpPr>
+        <p:spPr>
+          <a:xfrm>
+            <a:off x="960120" y="4846320"/>
+            <a:ext cx="2377440" cy="457200"/>
+          </a:xfrm>
+          <a:prstGeom prst="rect">
+            <a:avLst/>
+          </a:prstGeom>
+          <a:noFill/>
+          <a:ln/>
+        </p:spPr>
+        <p:txBody>
+          <a:bodyPr wrap="square" lIns="0" tIns="0" rIns="0" bIns="0" rtlCol="0" anchor="t"/>
+          <a:lstStyle/>
+          <a:p>
+            <a:pPr indent="0" marL="0">
+              <a:buNone/>
+            </a:pPr>
+            <a:r>
+              <a:rPr lang="en-US" sz="950" dirty="0">
+                <a:solidFill>
+                  <a:schemeClr val="accent2"/>
+                </a:solidFill>
+              </a:rPr>
+              <a:t>資産と合わせると14.9億円が戻った</a:t>
+            </a:r>
+            <a:endParaRPr lang="en-US" sz="950" dirty="0"/>
+          </a:p>
+        </p:txBody>
+      </p:sp>
+      <p:sp>
+        <p:nvSpPr>
+          <p:cNvPr id="21" name="第1期 2011–19 deal 1"/>
+          <p:cNvSpPr/>
+          <p:nvPr/>
+        </p:nvSpPr>
+        <p:spPr>
+          <a:xfrm>
+            <a:off x="3474720" y="3977640"/>
+            <a:ext cx="2286000" cy="594360"/>
+          </a:xfrm>
+          <a:prstGeom prst="roundRect">
+            <a:avLst>
+              <a:gd name="adj" fmla="val 7692"/>
+            </a:avLst>
+          </a:prstGeom>
+          <a:solidFill>
+            <a:schemeClr val="bg1"/>
+          </a:solidFill>
+          <a:ln w="12700">
+            <a:solidFill>
+              <a:srgbClr val="E6DCCB"/>
+            </a:solidFill>
+            <a:prstDash val="solid"/>
+          </a:ln>
+        </p:spPr>
+      </p:sp>
+      <p:sp>
+        <p:nvSpPr>
+          <p:cNvPr id="22" name="Text 20"/>
+          <p:cNvSpPr txBox="1"/>
+          <p:nvPr/>
+        </p:nvSpPr>
+        <p:spPr>
+          <a:xfrm>
+            <a:off x="3566160" y="3977640"/>
+            <a:ext cx="2148840" cy="594360"/>
+          </a:xfrm>
+          <a:prstGeom prst="rect">
+            <a:avLst/>
+          </a:prstGeom>
+          <a:noFill/>
+          <a:ln/>
+        </p:spPr>
+        <p:txBody>
+          <a:bodyPr wrap="square" lIns="0" tIns="0" rIns="0" bIns="0" rtlCol="0" anchor="ctr"/>
+          <a:lstStyle/>
+          <a:p>
+            <a:pPr indent="0" marL="0">
+              <a:buNone/>
+            </a:pPr>
+            <a:r>
+              <a:rPr lang="en-US" sz="1050" b="1" dirty="0">
+                <a:solidFill>
+                  <a:schemeClr val="tx1"/>
+                </a:solidFill>
+              </a:rPr>
+              <a:t>多店舗飲食C社（25店舗）</a:t>
+            </a:r>
+            <a:endParaRPr lang="en-US" sz="1300" dirty="0"/>
+          </a:p>
+          <a:p>
+            <a:pPr indent="0" marL="0">
+              <a:buNone/>
+            </a:pPr>
+            <a:r>
+              <a:rPr lang="en-US" sz="900" dirty="0">
+                <a:solidFill>
+                  <a:schemeClr val="accent2"/>
+                </a:solidFill>
+              </a:rPr>
+              <a:t>3.3億円で取得 → 累計営業利益3.9億円</a:t>
+            </a:r>
+            <a:endParaRPr lang="en-US" sz="1300" dirty="0"/>
+          </a:p>
+        </p:txBody>
+      </p:sp>
+      <p:sp>
+        <p:nvSpPr>
+          <p:cNvPr id="23" name="第1期 2011–19 deal 2"/>
+          <p:cNvSpPr/>
+          <p:nvPr/>
+        </p:nvSpPr>
+        <p:spPr>
+          <a:xfrm>
+            <a:off x="3474720" y="4663440"/>
+            <a:ext cx="2286000" cy="594360"/>
+          </a:xfrm>
+          <a:prstGeom prst="roundRect">
+            <a:avLst>
+              <a:gd name="adj" fmla="val 7692"/>
+            </a:avLst>
+          </a:prstGeom>
+          <a:solidFill>
+            <a:schemeClr val="bg1"/>
+          </a:solidFill>
+          <a:ln w="12700">
+            <a:solidFill>
+              <a:srgbClr val="E6DCCB"/>
+            </a:solidFill>
+            <a:prstDash val="solid"/>
+          </a:ln>
+        </p:spPr>
+      </p:sp>
+      <p:sp>
+        <p:nvSpPr>
+          <p:cNvPr id="24" name="Text 22"/>
+          <p:cNvSpPr txBox="1"/>
+          <p:nvPr/>
+        </p:nvSpPr>
+        <p:spPr>
+          <a:xfrm>
+            <a:off x="3566160" y="4663440"/>
+            <a:ext cx="2148840" cy="594360"/>
+          </a:xfrm>
+          <a:prstGeom prst="rect">
+            <a:avLst/>
+          </a:prstGeom>
+          <a:noFill/>
+          <a:ln/>
+        </p:spPr>
+        <p:txBody>
+          <a:bodyPr wrap="square" lIns="0" tIns="0" rIns="0" bIns="0" rtlCol="0" anchor="ctr"/>
+          <a:lstStyle/>
+          <a:p>
+            <a:pPr indent="0" marL="0">
+              <a:buNone/>
+            </a:pPr>
+            <a:r>
+              <a:rPr lang="en-US" sz="1050" b="1" dirty="0">
+                <a:solidFill>
+                  <a:schemeClr val="tx1"/>
+                </a:solidFill>
+              </a:rPr>
+              <a:t>ポータル事業D</a:t>
+            </a:r>
+            <a:endParaRPr lang="en-US" sz="1300" dirty="0"/>
+          </a:p>
+          <a:p>
+            <a:pPr indent="0" marL="0">
+              <a:buNone/>
+            </a:pPr>
+            <a:r>
+              <a:rPr lang="en-US" sz="900" dirty="0">
+                <a:solidFill>
+                  <a:schemeClr val="accent2"/>
+                </a:solidFill>
+              </a:rPr>
+              <a:t>1,100万円で取得 → 累計1.7億円</a:t>
+            </a:r>
+            <a:endParaRPr lang="en-US" sz="1300" dirty="0"/>
+          </a:p>
+        </p:txBody>
+      </p:sp>
+      <p:sp>
+        <p:nvSpPr>
+          <p:cNvPr id="25" name="Text 23"/>
+          <p:cNvSpPr txBox="1"/>
+          <p:nvPr/>
+        </p:nvSpPr>
+        <p:spPr>
+          <a:xfrm>
+            <a:off x="960120" y="5440680"/>
+            <a:ext cx="4800600" cy="502920"/>
+          </a:xfrm>
+          <a:prstGeom prst="rect">
+            <a:avLst/>
+          </a:prstGeom>
+          <a:noFill/>
+          <a:ln/>
+        </p:spPr>
+        <p:txBody>
+          <a:bodyPr wrap="square" lIns="0" tIns="0" rIns="0" bIns="0" rtlCol="0" anchor="ctr"/>
+          <a:lstStyle/>
+          <a:p>
+            <a:pPr indent="0" marL="0">
+              <a:buNone/>
+            </a:pPr>
+            <a:r>
+              <a:rPr lang="en-US" sz="1150" b="1" dirty="0">
+                <a:solidFill>
+                  <a:schemeClr val="accent1"/>
+                </a:solidFill>
+              </a:rPr>
+              <a:t>負けも含めて、この9年がいまの判断ルールになった</a:t>
+            </a:r>
+            <a:endParaRPr lang="en-US" sz="1150" dirty="0"/>
+          </a:p>
+        </p:txBody>
+      </p:sp>
+      <p:sp>
+        <p:nvSpPr>
+          <p:cNvPr id="26" name="panel 第2期 2020–"/>
+          <p:cNvSpPr/>
+          <p:nvPr/>
+        </p:nvSpPr>
+        <p:spPr>
+          <a:xfrm>
+            <a:off x="6172200" y="2011680"/>
+            <a:ext cx="5349240" cy="4041648"/>
+          </a:xfrm>
+          <a:prstGeom prst="roundRect">
+            <a:avLst>
+              <a:gd name="adj" fmla="val 1357"/>
+            </a:avLst>
+          </a:prstGeom>
+          <a:solidFill>
+            <a:schemeClr val="tx1"/>
+          </a:solidFill>
+          <a:ln w="12700">
+            <a:solidFill>
+              <a:schemeClr val="tx1"/>
+            </a:solidFill>
+            <a:prstDash val="solid"/>
+          </a:ln>
+        </p:spPr>
+      </p:sp>
+      <p:sp>
+        <p:nvSpPr>
+          <p:cNvPr id="27" name="Shape 25"/>
+          <p:cNvSpPr/>
+          <p:nvPr/>
+        </p:nvSpPr>
+        <p:spPr>
+          <a:xfrm>
+            <a:off x="6446520" y="2212848"/>
+            <a:ext cx="1417320" cy="274320"/>
+          </a:xfrm>
+          <a:prstGeom prst="roundRect">
+            <a:avLst>
+              <a:gd name="adj" fmla="val 50000"/>
+            </a:avLst>
           </a:prstGeom>
           <a:solidFill>
             <a:schemeClr val="accent1"/>
@@ -14557,14 +14567,14 @@
       </p:sp>
       <p:sp>
         <p:nvSpPr>
-          <p:cNvPr id="13" name="Text 11"/>
+          <p:cNvPr id="28" name="Text 26"/>
           <p:cNvSpPr txBox="1"/>
           <p:nvPr/>
         </p:nvSpPr>
         <p:spPr>
           <a:xfrm>
-            <a:off x="3694176" y="2450592"/>
-            <a:ext cx="2103120" cy="777240"/>
+            <a:off x="6446520" y="2212848"/>
+            <a:ext cx="1417320" cy="274320"/>
           </a:xfrm>
           <a:prstGeom prst="rect">
             <a:avLst/>
@@ -14576,147 +14586,210 @@
           <a:bodyPr wrap="square" lIns="0" tIns="0" rIns="0" bIns="0" rtlCol="0" anchor="ctr"/>
           <a:lstStyle/>
           <a:p>
-            <a:pPr indent="0" marL="0">
-              <a:buNone/>
-            </a:pPr>
-            <a:r>
-              <a:rPr lang="en-US" sz="3600" b="1" dirty="0">
-                <a:solidFill>
-                  <a:schemeClr val="accent1"/>
-                </a:solidFill>
-              </a:rPr>
-              <a:t>0.9</a:t>
-            </a:r>
-            <a:endParaRPr lang="en-US" sz="3600" dirty="0"/>
-          </a:p>
-        </p:txBody>
-      </p:sp>
-      <p:sp>
-        <p:nvSpPr>
-          <p:cNvPr id="14" name="Text 12"/>
+            <a:pPr algn="ctr" indent="0" marL="0">
+              <a:buNone/>
+            </a:pPr>
+            <a:r>
+              <a:rPr lang="en-US" sz="950" b="1" dirty="0">
+                <a:solidFill>
+                  <a:schemeClr val="bg1"/>
+                </a:solidFill>
+              </a:rPr>
+              <a:t>第2期 2020–</a:t>
+            </a:r>
+            <a:endParaRPr lang="en-US" sz="950" dirty="0"/>
+          </a:p>
+        </p:txBody>
+      </p:sp>
+      <p:sp>
+        <p:nvSpPr>
+          <p:cNvPr id="29" name="Text 27"/>
           <p:cNvSpPr txBox="1"/>
           <p:nvPr/>
         </p:nvSpPr>
         <p:spPr>
           <a:xfrm>
-            <a:off x="3694176" y="3227832"/>
-            <a:ext cx="2103120" cy="274320"/>
-          </a:xfrm>
-          <a:prstGeom prst="rect">
-            <a:avLst/>
-          </a:prstGeom>
-          <a:noFill/>
-          <a:ln/>
-        </p:spPr>
-        <p:txBody>
-          <a:bodyPr wrap="square" lIns="0" tIns="0" rIns="0" bIns="0" rtlCol="0" anchor="t"/>
-          <a:lstStyle/>
-          <a:p>
-            <a:pPr indent="0" marL="0">
-              <a:buNone/>
-            </a:pPr>
-            <a:r>
-              <a:rPr lang="en-US" sz="1300" b="1" dirty="0">
-                <a:solidFill>
-                  <a:schemeClr val="tx1"/>
-                </a:solidFill>
-              </a:rPr>
-              <a:t>倍</a:t>
-            </a:r>
-            <a:endParaRPr lang="en-US" sz="1300" dirty="0"/>
-          </a:p>
-        </p:txBody>
-      </p:sp>
-      <p:sp>
-        <p:nvSpPr>
-          <p:cNvPr id="15" name="Text 13"/>
+            <a:off x="8001000" y="2176272"/>
+            <a:ext cx="3291840" cy="347472"/>
+          </a:xfrm>
+          <a:prstGeom prst="rect">
+            <a:avLst/>
+          </a:prstGeom>
+          <a:noFill/>
+          <a:ln/>
+        </p:spPr>
+        <p:txBody>
+          <a:bodyPr wrap="square" lIns="0" tIns="0" rIns="0" bIns="0" rtlCol="0" anchor="ctr"/>
+          <a:lstStyle/>
+          <a:p>
+            <a:pPr indent="0" marL="0">
+              <a:buNone/>
+            </a:pPr>
+            <a:r>
+              <a:rPr lang="en-US" sz="1400" b="1" dirty="0">
+                <a:solidFill>
+                  <a:schemeClr val="accent4"/>
+                </a:solidFill>
+              </a:rPr>
+              <a:t>純資産より安く買う</a:t>
+            </a:r>
+            <a:endParaRPr lang="en-US" sz="1400" dirty="0"/>
+          </a:p>
+        </p:txBody>
+      </p:sp>
+      <p:sp>
+        <p:nvSpPr>
+          <p:cNvPr id="30" name="Text 28"/>
           <p:cNvSpPr txBox="1"/>
           <p:nvPr/>
         </p:nvSpPr>
         <p:spPr>
           <a:xfrm>
-            <a:off x="3694176" y="3502152"/>
-            <a:ext cx="2103120" cy="301752"/>
-          </a:xfrm>
-          <a:prstGeom prst="rect">
-            <a:avLst/>
-          </a:prstGeom>
-          <a:noFill/>
-          <a:ln/>
-        </p:spPr>
-        <p:txBody>
-          <a:bodyPr wrap="square" lIns="0" tIns="0" rIns="0" bIns="0" rtlCol="0" anchor="t"/>
-          <a:lstStyle/>
-          <a:p>
-            <a:pPr indent="0" marL="0">
-              <a:buNone/>
-            </a:pPr>
-            <a:r>
-              <a:rPr lang="en-US" sz="1050" dirty="0">
-                <a:solidFill>
-                  <a:schemeClr val="accent2"/>
-                </a:solidFill>
-              </a:rPr>
-              <a:t>第2期の純資産倍率。14.4億円で純資産15.9億円を取得</a:t>
-            </a:r>
-            <a:endParaRPr lang="en-US" sz="1050" dirty="0"/>
-          </a:p>
-        </p:txBody>
-      </p:sp>
-      <p:sp>
-        <p:nvSpPr>
-          <p:cNvPr id="16" name="stat 飲食A社の今期営業利益。8.2億円で取得、純資産13.0億円"/>
-          <p:cNvSpPr/>
-          <p:nvPr/>
-        </p:nvSpPr>
-        <p:spPr>
-          <a:xfrm>
-            <a:off x="6227064" y="2011680"/>
-            <a:ext cx="2560320" cy="1901952"/>
-          </a:xfrm>
-          <a:prstGeom prst="roundRect">
-            <a:avLst>
-              <a:gd name="adj" fmla="val 2885"/>
-            </a:avLst>
+            <a:off x="6446520" y="2743200"/>
+            <a:ext cx="1051560" cy="384048"/>
+          </a:xfrm>
+          <a:prstGeom prst="rect">
+            <a:avLst/>
+          </a:prstGeom>
+          <a:noFill/>
+          <a:ln/>
+        </p:spPr>
+        <p:txBody>
+          <a:bodyPr wrap="square" lIns="0" tIns="0" rIns="0" bIns="0" rtlCol="0" anchor="ctr"/>
+          <a:lstStyle/>
+          <a:p>
+            <a:pPr indent="0" marL="0">
+              <a:buNone/>
+            </a:pPr>
+            <a:r>
+              <a:rPr lang="en-US" sz="1100" b="1" dirty="0">
+                <a:solidFill>
+                  <a:schemeClr val="accent3"/>
+                </a:solidFill>
+              </a:rPr>
+              <a:t>購入額</a:t>
+            </a:r>
+            <a:endParaRPr lang="en-US" sz="1100" dirty="0"/>
+          </a:p>
+        </p:txBody>
+      </p:sp>
+      <p:sp>
+        <p:nvSpPr>
+          <p:cNvPr id="31" name="第2期 2020– bar 購入額"/>
+          <p:cNvSpPr/>
+          <p:nvPr/>
+        </p:nvSpPr>
+        <p:spPr>
+          <a:xfrm>
+            <a:off x="7498080" y="2779776"/>
+            <a:ext cx="1446963" cy="310896"/>
+          </a:xfrm>
+          <a:prstGeom prst="rect">
+            <a:avLst/>
           </a:prstGeom>
           <a:solidFill>
-            <a:schemeClr val="bg2"/>
+            <a:srgbClr val="9A8F84"/>
           </a:solidFill>
-          <a:ln w="9525">
+          <a:ln w="12700">
             <a:solidFill>
-              <a:schemeClr val="accent3"/>
+              <a:srgbClr val="9A8F84"/>
             </a:solidFill>
             <a:prstDash val="solid"/>
           </a:ln>
-          <a:effectLst>
-            <a:outerShdw sx="100000" sy="100000" kx="0" ky="0" algn="bl" rotWithShape="0" blurRad="76200" dist="25400" dir="5400000">
-              <a:srgbClr val="6F665F">
-                <a:alpha val="12000"/>
-              </a:srgbClr>
-            </a:outerShdw>
-          </a:effectLst>
-        </p:spPr>
-      </p:sp>
-      <p:sp>
-        <p:nvSpPr>
-          <p:cNvPr id="17" name="Shape 15"/>
-          <p:cNvSpPr/>
-          <p:nvPr/>
-        </p:nvSpPr>
-        <p:spPr>
-          <a:xfrm>
-            <a:off x="6483096" y="2286000"/>
-            <a:ext cx="365760" cy="45720"/>
+        </p:spPr>
+      </p:sp>
+      <p:sp>
+        <p:nvSpPr>
+          <p:cNvPr id="32" name="Text 30"/>
+          <p:cNvSpPr txBox="1"/>
+          <p:nvPr/>
+        </p:nvSpPr>
+        <p:spPr>
+          <a:xfrm>
+            <a:off x="9018195" y="2743200"/>
+            <a:ext cx="822960" cy="384048"/>
+          </a:xfrm>
+          <a:prstGeom prst="rect">
+            <a:avLst/>
+          </a:prstGeom>
+          <a:noFill/>
+          <a:ln/>
+        </p:spPr>
+        <p:txBody>
+          <a:bodyPr wrap="square" lIns="0" tIns="0" rIns="0" bIns="0" rtlCol="0" anchor="ctr"/>
+          <a:lstStyle/>
+          <a:p>
+            <a:pPr indent="0" marL="0">
+              <a:buNone/>
+            </a:pPr>
+            <a:r>
+              <a:rPr lang="en-US" sz="1200" b="1" dirty="0">
+                <a:solidFill>
+                  <a:schemeClr val="bg1"/>
+                </a:solidFill>
+              </a:rPr>
+              <a:t>14.4億</a:t>
+            </a:r>
+            <a:endParaRPr lang="en-US" sz="1200" dirty="0"/>
+          </a:p>
+        </p:txBody>
+      </p:sp>
+      <p:sp>
+        <p:nvSpPr>
+          <p:cNvPr id="33" name="Text 31"/>
+          <p:cNvSpPr txBox="1"/>
+          <p:nvPr/>
+        </p:nvSpPr>
+        <p:spPr>
+          <a:xfrm>
+            <a:off x="6446520" y="3246120"/>
+            <a:ext cx="1051560" cy="384048"/>
+          </a:xfrm>
+          <a:prstGeom prst="rect">
+            <a:avLst/>
+          </a:prstGeom>
+          <a:noFill/>
+          <a:ln/>
+        </p:spPr>
+        <p:txBody>
+          <a:bodyPr wrap="square" lIns="0" tIns="0" rIns="0" bIns="0" rtlCol="0" anchor="ctr"/>
+          <a:lstStyle/>
+          <a:p>
+            <a:pPr indent="0" marL="0">
+              <a:buNone/>
+            </a:pPr>
+            <a:r>
+              <a:rPr lang="en-US" sz="1100" b="1" dirty="0">
+                <a:solidFill>
+                  <a:schemeClr val="accent3"/>
+                </a:solidFill>
+              </a:rPr>
+              <a:t>純資産＋売却</a:t>
+            </a:r>
+            <a:endParaRPr lang="en-US" sz="1100" dirty="0"/>
+          </a:p>
+        </p:txBody>
+      </p:sp>
+      <p:sp>
+        <p:nvSpPr>
+          <p:cNvPr id="34" name="第2期 2020– bar 純資産＋売却"/>
+          <p:cNvSpPr/>
+          <p:nvPr/>
+        </p:nvSpPr>
+        <p:spPr>
+          <a:xfrm>
+            <a:off x="7498080" y="3282696"/>
+            <a:ext cx="1828800" cy="310896"/>
           </a:xfrm>
           <a:prstGeom prst="rect">
             <a:avLst/>
           </a:prstGeom>
           <a:solidFill>
-            <a:schemeClr val="accent1"/>
+            <a:srgbClr val="A78450"/>
           </a:solidFill>
           <a:ln w="12700">
             <a:solidFill>
-              <a:schemeClr val="accent1"/>
+              <a:srgbClr val="A78450"/>
             </a:solidFill>
             <a:prstDash val="solid"/>
           </a:ln>
@@ -14724,14 +14797,14 @@
       </p:sp>
       <p:sp>
         <p:nvSpPr>
-          <p:cNvPr id="18" name="Text 16"/>
+          <p:cNvPr id="35" name="Text 33"/>
           <p:cNvSpPr txBox="1"/>
           <p:nvPr/>
         </p:nvSpPr>
         <p:spPr>
           <a:xfrm>
-            <a:off x="6464808" y="2450592"/>
-            <a:ext cx="2103120" cy="777240"/>
+            <a:off x="9400032" y="3246120"/>
+            <a:ext cx="822960" cy="384048"/>
           </a:xfrm>
           <a:prstGeom prst="rect">
             <a:avLst/>
@@ -14747,143 +14820,231 @@
               <a:buNone/>
             </a:pPr>
             <a:r>
-              <a:rPr lang="en-US" sz="3600" b="1" dirty="0">
+              <a:rPr lang="en-US" sz="1200" b="1" dirty="0">
+                <a:solidFill>
+                  <a:schemeClr val="bg1"/>
+                </a:solidFill>
+              </a:rPr>
+              <a:t>18.2億</a:t>
+            </a:r>
+            <a:endParaRPr lang="en-US" sz="1200" dirty="0"/>
+          </a:p>
+        </p:txBody>
+      </p:sp>
+      <p:sp>
+        <p:nvSpPr>
+          <p:cNvPr id="36" name="Text 34"/>
+          <p:cNvSpPr txBox="1"/>
+          <p:nvPr/>
+        </p:nvSpPr>
+        <p:spPr>
+          <a:xfrm>
+            <a:off x="10104120" y="2651760"/>
+            <a:ext cx="1234440" cy="1051560"/>
+          </a:xfrm>
+          <a:prstGeom prst="rect">
+            <a:avLst/>
+          </a:prstGeom>
+          <a:noFill/>
+          <a:ln/>
+        </p:spPr>
+        <p:txBody>
+          <a:bodyPr wrap="square" lIns="0" tIns="0" rIns="0" bIns="0" rtlCol="0" anchor="ctr"/>
+          <a:lstStyle/>
+          <a:p>
+            <a:pPr algn="r" indent="0" marL="0">
+              <a:buNone/>
+            </a:pPr>
+            <a:r>
+              <a:rPr lang="en-US" sz="2800" b="1" dirty="0">
                 <a:solidFill>
                   <a:schemeClr val="accent1"/>
                 </a:solidFill>
               </a:rPr>
-              <a:t>1.3億</a:t>
-            </a:r>
-            <a:endParaRPr lang="en-US" sz="3600" dirty="0"/>
-          </a:p>
-        </p:txBody>
-      </p:sp>
-      <p:sp>
-        <p:nvSpPr>
-          <p:cNvPr id="19" name="Text 17"/>
-          <p:cNvSpPr txBox="1"/>
-          <p:nvPr/>
-        </p:nvSpPr>
-        <p:spPr>
-          <a:xfrm>
-            <a:off x="6464808" y="3227832"/>
-            <a:ext cx="2103120" cy="274320"/>
-          </a:xfrm>
-          <a:prstGeom prst="rect">
-            <a:avLst/>
-          </a:prstGeom>
-          <a:noFill/>
-          <a:ln/>
-        </p:spPr>
-        <p:txBody>
-          <a:bodyPr wrap="square" lIns="0" tIns="0" rIns="0" bIns="0" rtlCol="0" anchor="t"/>
-          <a:lstStyle/>
-          <a:p>
-            <a:pPr indent="0" marL="0">
-              <a:buNone/>
-            </a:pPr>
-            <a:r>
-              <a:rPr lang="en-US" sz="1300" b="1" dirty="0">
-                <a:solidFill>
-                  <a:schemeClr val="tx1"/>
-                </a:solidFill>
-              </a:rPr>
-              <a:t>円／年</a:t>
+              <a:t>1.3倍</a:t>
             </a:r>
             <a:endParaRPr lang="en-US" sz="1300" dirty="0"/>
           </a:p>
-        </p:txBody>
-      </p:sp>
-      <p:sp>
-        <p:nvSpPr>
-          <p:cNvPr id="20" name="Text 18"/>
-          <p:cNvSpPr txBox="1"/>
-          <p:nvPr/>
-        </p:nvSpPr>
-        <p:spPr>
-          <a:xfrm>
-            <a:off x="6464808" y="3502152"/>
-            <a:ext cx="2103120" cy="301752"/>
-          </a:xfrm>
-          <a:prstGeom prst="rect">
-            <a:avLst/>
-          </a:prstGeom>
-          <a:noFill/>
-          <a:ln/>
-        </p:spPr>
-        <p:txBody>
-          <a:bodyPr wrap="square" lIns="0" tIns="0" rIns="0" bIns="0" rtlCol="0" anchor="t"/>
-          <a:lstStyle/>
-          <a:p>
-            <a:pPr indent="0" marL="0">
-              <a:buNone/>
-            </a:pPr>
-            <a:r>
-              <a:rPr lang="en-US" sz="1050" dirty="0">
-                <a:solidFill>
-                  <a:schemeClr val="accent2"/>
-                </a:solidFill>
-              </a:rPr>
-              <a:t>飲食A社の今期営業利益。8.2億円で取得、純資産13.0億円</a:t>
-            </a:r>
-            <a:endParaRPr lang="en-US" sz="1050" dirty="0"/>
-          </a:p>
-        </p:txBody>
-      </p:sp>
-      <p:sp>
-        <p:nvSpPr>
-          <p:cNvPr id="21" name="stat 飲食B事業の今期営業利益。1,400万円で取得"/>
-          <p:cNvSpPr/>
-          <p:nvPr/>
-        </p:nvSpPr>
-        <p:spPr>
-          <a:xfrm>
-            <a:off x="8997696" y="2011680"/>
-            <a:ext cx="2560320" cy="1901952"/>
-          </a:xfrm>
-          <a:prstGeom prst="roundRect">
-            <a:avLst>
-              <a:gd name="adj" fmla="val 2885"/>
-            </a:avLst>
-          </a:prstGeom>
-          <a:solidFill>
-            <a:schemeClr val="bg2"/>
-          </a:solidFill>
+          <a:p>
+            <a:pPr algn="r" indent="0" marL="0">
+              <a:buNone/>
+            </a:pPr>
+            <a:r>
+              <a:rPr lang="en-US" sz="900" dirty="0">
+                <a:solidFill>
+                  <a:schemeClr val="accent3"/>
+                </a:solidFill>
+              </a:rPr>
+              <a:t>購入額に対する資産</a:t>
+            </a:r>
+            <a:endParaRPr lang="en-US" sz="1300" dirty="0"/>
+          </a:p>
+        </p:txBody>
+      </p:sp>
+      <p:sp>
+        <p:nvSpPr>
+          <p:cNvPr id="37" name="Shape 35"/>
+          <p:cNvSpPr/>
+          <p:nvPr/>
+        </p:nvSpPr>
+        <p:spPr>
+          <a:xfrm>
+            <a:off x="6446520" y="3840480"/>
+            <a:ext cx="4800600" cy="0"/>
+          </a:xfrm>
+          <a:prstGeom prst="line">
+            <a:avLst/>
+          </a:prstGeom>
+          <a:noFill/>
           <a:ln w="9525">
             <a:solidFill>
-              <a:schemeClr val="accent3"/>
+              <a:srgbClr val="4E443C"/>
             </a:solidFill>
             <a:prstDash val="solid"/>
           </a:ln>
-          <a:effectLst>
-            <a:outerShdw sx="100000" sy="100000" kx="0" ky="0" algn="bl" rotWithShape="0" blurRad="76200" dist="25400" dir="5400000">
-              <a:srgbClr val="6F665F">
-                <a:alpha val="12000"/>
-              </a:srgbClr>
-            </a:outerShdw>
-          </a:effectLst>
-        </p:spPr>
-      </p:sp>
-      <p:sp>
-        <p:nvSpPr>
-          <p:cNvPr id="22" name="Shape 20"/>
-          <p:cNvSpPr/>
-          <p:nvPr/>
-        </p:nvSpPr>
-        <p:spPr>
-          <a:xfrm>
-            <a:off x="9253728" y="2286000"/>
-            <a:ext cx="365760" cy="45720"/>
-          </a:xfrm>
-          <a:prstGeom prst="rect">
-            <a:avLst/>
+        </p:spPr>
+      </p:sp>
+      <p:sp>
+        <p:nvSpPr>
+          <p:cNvPr id="38" name="Text 36"/>
+          <p:cNvSpPr txBox="1"/>
+          <p:nvPr/>
+        </p:nvSpPr>
+        <p:spPr>
+          <a:xfrm>
+            <a:off x="6446520" y="3931920"/>
+            <a:ext cx="2377440" cy="274320"/>
+          </a:xfrm>
+          <a:prstGeom prst="rect">
+            <a:avLst/>
+          </a:prstGeom>
+          <a:noFill/>
+          <a:ln/>
+        </p:spPr>
+        <p:txBody>
+          <a:bodyPr wrap="square" lIns="0" tIns="0" rIns="0" bIns="0" rtlCol="0" anchor="t"/>
+          <a:lstStyle/>
+          <a:p>
+            <a:pPr indent="0" marL="0">
+              <a:buNone/>
+            </a:pPr>
+            <a:r>
+              <a:rPr lang="en-US" sz="1100" b="1" dirty="0">
+                <a:solidFill>
+                  <a:schemeClr val="accent3"/>
+                </a:solidFill>
+              </a:rPr>
+              <a:t>単年度の営業利益（2026年予想）</a:t>
+            </a:r>
+            <a:endParaRPr lang="en-US" sz="1100" dirty="0"/>
+          </a:p>
+        </p:txBody>
+      </p:sp>
+      <p:sp>
+        <p:nvSpPr>
+          <p:cNvPr id="39" name="Text 37"/>
+          <p:cNvSpPr txBox="1"/>
+          <p:nvPr/>
+        </p:nvSpPr>
+        <p:spPr>
+          <a:xfrm>
+            <a:off x="6446520" y="4206240"/>
+            <a:ext cx="2468880" cy="640080"/>
+          </a:xfrm>
+          <a:prstGeom prst="rect">
+            <a:avLst/>
+          </a:prstGeom>
+          <a:noFill/>
+          <a:ln/>
+        </p:spPr>
+        <p:txBody>
+          <a:bodyPr wrap="square" lIns="0" tIns="0" rIns="0" bIns="0" rtlCol="0" anchor="ctr"/>
+          <a:lstStyle/>
+          <a:p>
+            <a:pPr indent="0" marL="0">
+              <a:buNone/>
+            </a:pPr>
+            <a:r>
+              <a:rPr lang="en-US" sz="3000" b="1" dirty="0">
+                <a:solidFill>
+                  <a:schemeClr val="accent4"/>
+                </a:solidFill>
+              </a:rPr>
+              <a:t>2.4</a:t>
+            </a:r>
+            <a:pPr indent="0" marL="0">
+              <a:buNone/>
+            </a:pPr>
+            <a:r>
+              <a:rPr lang="en-US" sz="1200" b="1" dirty="0">
+                <a:solidFill>
+                  <a:schemeClr val="accent3"/>
+                </a:solidFill>
+              </a:rPr>
+              <a:t> 億円／年</a:t>
+            </a:r>
+            <a:endParaRPr lang="en-US" sz="1300" dirty="0"/>
+          </a:p>
+        </p:txBody>
+      </p:sp>
+      <p:sp>
+        <p:nvSpPr>
+          <p:cNvPr id="40" name="Text 38"/>
+          <p:cNvSpPr txBox="1"/>
+          <p:nvPr/>
+        </p:nvSpPr>
+        <p:spPr>
+          <a:xfrm>
+            <a:off x="6446520" y="4846320"/>
+            <a:ext cx="2377440" cy="457200"/>
+          </a:xfrm>
+          <a:prstGeom prst="rect">
+            <a:avLst/>
+          </a:prstGeom>
+          <a:noFill/>
+          <a:ln/>
+        </p:spPr>
+        <p:txBody>
+          <a:bodyPr wrap="square" lIns="0" tIns="0" rIns="0" bIns="0" rtlCol="0" anchor="t"/>
+          <a:lstStyle/>
+          <a:p>
+            <a:pPr indent="0" marL="0">
+              <a:buNone/>
+            </a:pPr>
+            <a:r>
+              <a:rPr lang="en-US" sz="950" dirty="0">
+                <a:solidFill>
+                  <a:schemeClr val="accent3"/>
+                </a:solidFill>
+              </a:rPr>
+              <a:t>M&amp;Aで取得したグループ会社の合計</a:t>
+            </a:r>
+            <a:endParaRPr lang="en-US" sz="950" dirty="0"/>
+          </a:p>
+        </p:txBody>
+      </p:sp>
+      <p:sp>
+        <p:nvSpPr>
+          <p:cNvPr id="41" name="第2期 2020– deal 1"/>
+          <p:cNvSpPr/>
+          <p:nvPr/>
+        </p:nvSpPr>
+        <p:spPr>
+          <a:xfrm>
+            <a:off x="8961120" y="3977640"/>
+            <a:ext cx="2286000" cy="594360"/>
+          </a:xfrm>
+          <a:prstGeom prst="roundRect">
+            <a:avLst>
+              <a:gd name="adj" fmla="val 7692"/>
+            </a:avLst>
           </a:prstGeom>
           <a:solidFill>
-            <a:schemeClr val="accent1"/>
+            <a:srgbClr val="3A322C"/>
           </a:solidFill>
           <a:ln w="12700">
             <a:solidFill>
-              <a:schemeClr val="accent1"/>
+              <a:srgbClr val="4E443C"/>
             </a:solidFill>
             <a:prstDash val="solid"/>
           </a:ln>
@@ -14891,14 +15052,14 @@
       </p:sp>
       <p:sp>
         <p:nvSpPr>
-          <p:cNvPr id="23" name="Text 21"/>
+          <p:cNvPr id="42" name="Text 40"/>
           <p:cNvSpPr txBox="1"/>
           <p:nvPr/>
         </p:nvSpPr>
         <p:spPr>
           <a:xfrm>
-            <a:off x="9235440" y="2450592"/>
-            <a:ext cx="2103120" cy="777240"/>
+            <a:off x="9052560" y="3977640"/>
+            <a:ext cx="2148840" cy="594360"/>
           </a:xfrm>
           <a:prstGeom prst="rect">
             <a:avLst/>
@@ -14914,149 +15075,68 @@
               <a:buNone/>
             </a:pPr>
             <a:r>
-              <a:rPr lang="en-US" sz="3600" b="1" dirty="0">
-                <a:solidFill>
-                  <a:schemeClr val="accent1"/>
-                </a:solidFill>
-              </a:rPr>
-              <a:t>8,000万</a:t>
-            </a:r>
-            <a:endParaRPr lang="en-US" sz="3600" dirty="0"/>
-          </a:p>
-        </p:txBody>
-      </p:sp>
-      <p:sp>
-        <p:nvSpPr>
-          <p:cNvPr id="24" name="Text 22"/>
-          <p:cNvSpPr txBox="1"/>
-          <p:nvPr/>
-        </p:nvSpPr>
-        <p:spPr>
-          <a:xfrm>
-            <a:off x="9235440" y="3227832"/>
-            <a:ext cx="2103120" cy="274320"/>
-          </a:xfrm>
-          <a:prstGeom prst="rect">
-            <a:avLst/>
-          </a:prstGeom>
-          <a:noFill/>
-          <a:ln/>
-        </p:spPr>
-        <p:txBody>
-          <a:bodyPr wrap="square" lIns="0" tIns="0" rIns="0" bIns="0" rtlCol="0" anchor="t"/>
-          <a:lstStyle/>
-          <a:p>
-            <a:pPr indent="0" marL="0">
-              <a:buNone/>
-            </a:pPr>
-            <a:r>
-              <a:rPr lang="en-US" sz="1300" b="1" dirty="0">
-                <a:solidFill>
-                  <a:schemeClr val="tx1"/>
-                </a:solidFill>
-              </a:rPr>
-              <a:t>円／年</a:t>
+              <a:rPr lang="en-US" sz="1050" b="1" dirty="0">
+                <a:solidFill>
+                  <a:schemeClr val="bg1"/>
+                </a:solidFill>
+              </a:rPr>
+              <a:t>飲食A社</a:t>
             </a:r>
             <a:endParaRPr lang="en-US" sz="1300" dirty="0"/>
           </a:p>
-        </p:txBody>
-      </p:sp>
-      <p:sp>
-        <p:nvSpPr>
-          <p:cNvPr id="25" name="Text 23"/>
-          <p:cNvSpPr txBox="1"/>
-          <p:nvPr/>
-        </p:nvSpPr>
-        <p:spPr>
-          <a:xfrm>
-            <a:off x="9235440" y="3502152"/>
-            <a:ext cx="2103120" cy="301752"/>
-          </a:xfrm>
-          <a:prstGeom prst="rect">
-            <a:avLst/>
-          </a:prstGeom>
-          <a:noFill/>
-          <a:ln/>
-        </p:spPr>
-        <p:txBody>
-          <a:bodyPr wrap="square" lIns="0" tIns="0" rIns="0" bIns="0" rtlCol="0" anchor="t"/>
-          <a:lstStyle/>
-          <a:p>
-            <a:pPr indent="0" marL="0">
-              <a:buNone/>
-            </a:pPr>
-            <a:r>
-              <a:rPr lang="en-US" sz="1050" dirty="0">
-                <a:solidFill>
-                  <a:schemeClr val="accent2"/>
-                </a:solidFill>
-              </a:rPr>
-              <a:t>飲食B事業の今期営業利益。1,400万円で取得</a:t>
-            </a:r>
-            <a:endParaRPr lang="en-US" sz="1050" dirty="0"/>
-          </a:p>
-        </p:txBody>
-      </p:sp>
-      <p:graphicFrame>
-        <p:nvGraphicFramePr>
-          <p:cNvPr id="26" name="invest vs return chart" descr=""/>
-          <p:cNvGraphicFramePr/>
-          <p:nvPr/>
-        </p:nvGraphicFramePr>
-        <p:xfrm>
-          <a:off x="685800" y="4023360"/>
-          <a:ext cx="6400800" cy="2011680"/>
-        </p:xfrm>
-        <a:graphic xmlns:a="http://schemas.openxmlformats.org/drawingml/2006/main">
-          <a:graphicData uri="http://schemas.openxmlformats.org/drawingml/2006/chart">
-            <c:chart xmlns:c="http://schemas.openxmlformats.org/drawingml/2006/chart" r:id="rId1"/>
-          </a:graphicData>
-        </a:graphic>
-      </p:graphicFrame>
-      <p:sp>
-        <p:nvSpPr>
-          <p:cNvPr id="27" name="phase1 note"/>
-          <p:cNvSpPr/>
-          <p:nvPr/>
-        </p:nvSpPr>
-        <p:spPr>
-          <a:xfrm>
-            <a:off x="7315200" y="4041648"/>
-            <a:ext cx="4187952" cy="932688"/>
+          <a:p>
+            <a:pPr indent="0" marL="0">
+              <a:buNone/>
+            </a:pPr>
+            <a:r>
+              <a:rPr lang="en-US" sz="900" dirty="0">
+                <a:solidFill>
+                  <a:schemeClr val="accent3"/>
+                </a:solidFill>
+              </a:rPr>
+              <a:t>8.2億円 → 純資産13.0億＋営業利益1.3億／年</a:t>
+            </a:r>
+            <a:endParaRPr lang="en-US" sz="1300" dirty="0"/>
+          </a:p>
+        </p:txBody>
+      </p:sp>
+      <p:sp>
+        <p:nvSpPr>
+          <p:cNvPr id="43" name="第2期 2020– deal 2"/>
+          <p:cNvSpPr/>
+          <p:nvPr/>
+        </p:nvSpPr>
+        <p:spPr>
+          <a:xfrm>
+            <a:off x="8961120" y="4663440"/>
+            <a:ext cx="2286000" cy="594360"/>
           </a:xfrm>
           <a:prstGeom prst="roundRect">
             <a:avLst>
-              <a:gd name="adj" fmla="val 5882"/>
+              <a:gd name="adj" fmla="val 7692"/>
             </a:avLst>
           </a:prstGeom>
           <a:solidFill>
-            <a:srgbClr val="FFFFFF"/>
+            <a:srgbClr val="3A322C"/>
           </a:solidFill>
-          <a:ln w="9525">
+          <a:ln w="12700">
             <a:solidFill>
-              <a:schemeClr val="accent3"/>
+              <a:srgbClr val="4E443C"/>
             </a:solidFill>
             <a:prstDash val="solid"/>
           </a:ln>
-          <a:effectLst>
-            <a:outerShdw sx="100000" sy="100000" kx="0" ky="0" algn="bl" rotWithShape="0" blurRad="76200" dist="25400" dir="5400000">
-              <a:srgbClr val="6F665F">
-                <a:alpha val="12000"/>
-              </a:srgbClr>
-            </a:outerShdw>
-          </a:effectLst>
-        </p:spPr>
-      </p:sp>
-      <p:sp>
-        <p:nvSpPr>
-          <p:cNvPr id="28" name="Text 25"/>
+        </p:spPr>
+      </p:sp>
+      <p:sp>
+        <p:nvSpPr>
+          <p:cNvPr id="44" name="Text 42"/>
           <p:cNvSpPr txBox="1"/>
           <p:nvPr/>
         </p:nvSpPr>
         <p:spPr>
           <a:xfrm>
-            <a:off x="7498080" y="4041648"/>
-            <a:ext cx="3840480" cy="932688"/>
+            <a:off x="9052560" y="4663440"/>
+            <a:ext cx="2148840" cy="594360"/>
           </a:xfrm>
           <a:prstGeom prst="rect">
             <a:avLst/>
@@ -15072,75 +15152,41 @@
               <a:buNone/>
             </a:pPr>
             <a:r>
-              <a:rPr lang="en-US" sz="1200" b="1" dirty="0">
-                <a:solidFill>
-                  <a:schemeClr val="accent2"/>
-                </a:solidFill>
-              </a:rPr>
-              <a:t>第1期 2011–19：数で獲りにいった</a:t>
-            </a:r>
-            <a:endParaRPr lang="en-US" sz="1200" dirty="0"/>
-          </a:p>
-          <a:p>
-            <a:pPr indent="0" marL="0">
-              <a:buNone/>
-            </a:pPr>
-            <a:r>
-              <a:rPr lang="en-US" sz="1050" dirty="0">
-                <a:solidFill>
-                  <a:schemeClr val="tx1"/>
-                </a:solidFill>
-              </a:rPr>
-              <a:t>売上の0.25倍で買い、保有中の営業利益7.6億＋売却5.3億＋純資産2.0億で回収</a:t>
-            </a:r>
-            <a:endParaRPr lang="en-US" sz="1200" dirty="0"/>
-          </a:p>
-        </p:txBody>
-      </p:sp>
-      <p:sp>
-        <p:nvSpPr>
-          <p:cNvPr id="29" name="phase2 note"/>
-          <p:cNvSpPr/>
-          <p:nvPr/>
-        </p:nvSpPr>
-        <p:spPr>
-          <a:xfrm>
-            <a:off x="7315200" y="5084064"/>
-            <a:ext cx="4187952" cy="932688"/>
-          </a:xfrm>
-          <a:prstGeom prst="roundRect">
-            <a:avLst>
-              <a:gd name="adj" fmla="val 5882"/>
-            </a:avLst>
-          </a:prstGeom>
-          <a:solidFill>
-            <a:schemeClr val="bg2"/>
-          </a:solidFill>
-          <a:ln w="9525">
-            <a:solidFill>
-              <a:schemeClr val="accent3"/>
-            </a:solidFill>
-            <a:prstDash val="solid"/>
-          </a:ln>
-          <a:effectLst>
-            <a:outerShdw sx="100000" sy="100000" kx="0" ky="0" algn="bl" rotWithShape="0" blurRad="76200" dist="25400" dir="5400000">
-              <a:srgbClr val="6F665F">
-                <a:alpha val="12000"/>
-              </a:srgbClr>
-            </a:outerShdw>
-          </a:effectLst>
-        </p:spPr>
-      </p:sp>
-      <p:sp>
-        <p:nvSpPr>
-          <p:cNvPr id="30" name="Text 27"/>
+              <a:rPr lang="en-US" sz="1050" b="1" dirty="0">
+                <a:solidFill>
+                  <a:schemeClr val="bg1"/>
+                </a:solidFill>
+              </a:rPr>
+              <a:t>飲食B事業</a:t>
+            </a:r>
+            <a:endParaRPr lang="en-US" sz="1300" dirty="0"/>
+          </a:p>
+          <a:p>
+            <a:pPr indent="0" marL="0">
+              <a:buNone/>
+            </a:pPr>
+            <a:r>
+              <a:rPr lang="en-US" sz="900" dirty="0">
+                <a:solidFill>
+                  <a:schemeClr val="accent3"/>
+                </a:solidFill>
+              </a:rPr>
+              <a:t>1,400万円 → 純資産7,000万＋営業利益8,000万／年</a:t>
+            </a:r>
+            <a:endParaRPr lang="en-US" sz="1300" dirty="0"/>
+          </a:p>
+        </p:txBody>
+      </p:sp>
+      <p:sp>
+        <p:nvSpPr>
+          <p:cNvPr id="45" name="Text 43"/>
           <p:cNvSpPr txBox="1"/>
           <p:nvPr/>
         </p:nvSpPr>
         <p:spPr>
           <a:xfrm>
-            <a:off x="7498080" y="5084064"/>
-            <a:ext cx="3840480" cy="932688"/>
+            <a:off x="6446520" y="5440680"/>
+            <a:ext cx="4800600" cy="502920"/>
           </a:xfrm>
           <a:prstGeom prst="rect">
             <a:avLst/>
@@ -15156,34 +15202,20 @@
               <a:buNone/>
             </a:pPr>
             <a:r>
-              <a:rPr lang="en-US" sz="1200" b="1" dirty="0">
-                <a:solidFill>
-                  <a:schemeClr val="accent1"/>
-                </a:solidFill>
-              </a:rPr>
-              <a:t>第2期 2020–：純資産より安く買う</a:t>
-            </a:r>
-            <a:endParaRPr lang="en-US" sz="1200" dirty="0"/>
-          </a:p>
-          <a:p>
-            <a:pPr indent="0" marL="0">
-              <a:buNone/>
-            </a:pPr>
-            <a:r>
-              <a:rPr lang="en-US" sz="1050" dirty="0">
-                <a:solidFill>
-                  <a:schemeClr val="tx1"/>
-                </a:solidFill>
-              </a:rPr>
-              <a:t>主要2件だけで今期営業利益2.1億円。買収額8.3億円を約4年で回収し、純資産は買値以上</a:t>
-            </a:r>
-            <a:endParaRPr lang="en-US" sz="1200" dirty="0"/>
-          </a:p>
-        </p:txBody>
-      </p:sp>
-      <p:sp>
-        <p:nvSpPr>
-          <p:cNvPr id="31" name="Text 28"/>
+              <a:rPr lang="en-US" sz="1150" b="1" dirty="0">
+                <a:solidFill>
+                  <a:schemeClr val="accent4"/>
+                </a:solidFill>
+              </a:rPr>
+              <a:t>買った時点で資産が買値を上回り、利益は毎年積み上がる</a:t>
+            </a:r>
+            <a:endParaRPr lang="en-US" sz="1150" dirty="0"/>
+          </a:p>
+        </p:txBody>
+      </p:sp>
+      <p:sp>
+        <p:nvSpPr>
+          <p:cNvPr id="46" name="Text 44"/>
           <p:cNvSpPr txBox="1"/>
           <p:nvPr/>
         </p:nvSpPr>
@@ -15211,7 +15243,7 @@
                   <a:schemeClr val="accent5"/>
                 </a:solidFill>
               </a:rPr>
-              <a:t>単位：億円。第1期の営業利益は保有期間中の累計。グラフの第2期の利益はM&amp;Aで取得したグループ会社全体の2026年予想。出典：中野邦人 M&amp;A勝敗一覧表、グループ売上管理表</a:t>
+              <a:t>第2期の純資産＋売却は、売却済み案件を売却額に置き換えて算出（あどばる株式の売却は含めない）。出典：中野邦人 M&amp;A勝敗一覧表</a:t>
             </a:r>
             <a:endParaRPr lang="en-US" sz="900" dirty="0"/>
           </a:p>

--- a/docs/business/事業概要_AI_MA部門_営業用.pptx
+++ b/docs/business/事業概要_AI_MA部門_営業用.pptx
@@ -4,6 +4,9 @@
   <p:sldMasterIdLst>
     <p:sldMasterId id="2147483648" r:id="rId1"/>
   </p:sldMasterIdLst>
+  <p:notesMasterIdLst>
+    <p:notesMasterId r:id="rId20"/>
+  </p:notesMasterIdLst>
   <p:sldIdLst>
     <p:sldId id="256" r:id="rId2"/>
     <p:sldId id="257" r:id="rId3"/>
@@ -24,9 +27,6 @@
     <p:sldId id="272" r:id="rId18"/>
     <p:sldId id="273" r:id="rId19"/>
   </p:sldIdLst>
-  <p:notesMasterIdLst>
-    <p:notesMasterId r:id="rId20"/>
-  </p:notesMasterIdLst>
   <p:sldSz cx="12192000" cy="6858000"/>
   <p:notesSz cx="6858000" cy="12192000"/>
   <p:defaultTextStyle>
@@ -124,20 +124,20 @@
   <p:extLst>
     <p:ext uri="{521415D9-36F7-43E2-AB2F-B90AF26B5E84}">
       <p14:sectionLst xmlns:p14="http://schemas.microsoft.com/office/powerpoint/2010/main">
-        <p14:section name="導入" id="{b1943de3-4e16-6666-eb17-9b2351e09031}">
+        <p14:section name="導入" id="{B1943DE3-4E16-6666-EB17-9B2351E09031}">
           <p14:sldIdLst>
             <p14:sldId id="256"/>
             <p14:sldId id="257"/>
           </p14:sldIdLst>
         </p14:section>
-        <p14:section name="課題と原点" id="{e5211d3a-7db3-0749-eb19-88a8815b34ff}">
+        <p14:section name="課題と原点" id="{E5211D3A-7DB3-0749-EB19-88A8815B34FF}">
           <p14:sldIdLst>
             <p14:sldId id="258"/>
             <p14:sldId id="259"/>
             <p14:sldId id="260"/>
           </p14:sldIdLst>
         </p14:section>
-        <p14:section name="サービス" id="{852f87aa-3964-295e-d6c5-983c04506938}">
+        <p14:section name="サービス" id="{852F87AA-3964-295E-D6C5-983C04506938}">
           <p14:sldIdLst>
             <p14:sldId id="261"/>
             <p14:sldId id="262"/>
@@ -150,14 +150,14 @@
             <p14:sldId id="269"/>
           </p14:sldIdLst>
         </p14:section>
-        <p14:section name="事業性" id="{a0ba1df1-101c-b290-a4d5-aa4fdd403e24}">
+        <p14:section name="事業性" id="{A0BA1DF1-101C-B290-A4D5-AA4FDD403E24}">
           <p14:sldIdLst>
             <p14:sldId id="270"/>
             <p14:sldId id="271"/>
             <p14:sldId id="272"/>
           </p14:sldIdLst>
         </p14:section>
-        <p14:section name="まとめ" id="{2cc0af29-a7e4-c0b3-0a18-bb9f561fa124}">
+        <p14:section name="まとめ" id="{2CC0AF29-A7E4-C0B3-0A18-BB9F561FA124}">
           <p14:sldIdLst>
             <p14:sldId id="273"/>
           </p14:sldIdLst>
@@ -172,9 +172,11 @@
 </file>
 
 <file path=ppt/charts/chart1.xml><?xml version="1.0" encoding="utf-8"?>
-<c:chartSpace xmlns:c="http://schemas.openxmlformats.org/drawingml/2006/chart" xmlns:a="http://schemas.openxmlformats.org/drawingml/2006/main" xmlns:r="http://schemas.openxmlformats.org/officeDocument/2006/relationships">
+<c:chartSpace xmlns:c="http://schemas.openxmlformats.org/drawingml/2006/chart" xmlns:a="http://schemas.openxmlformats.org/drawingml/2006/main" xmlns:r="http://schemas.openxmlformats.org/officeDocument/2006/relationships" xmlns:c16r2="http://schemas.microsoft.com/office/drawing/2015/06/chart">
   <c:date1904 val="0"/>
+  <c:lang val="ja-JP"/>
   <c:roundedCorners val="1"/>
+  <c:style val="2"/>
   <c:chart>
     <c:title>
       <c:tx>
@@ -191,7 +193,7 @@
               </a:defRPr>
             </a:pPr>
             <a:r>
-              <a:rPr sz="1200" b="0" i="0" u="none" strike="noStrike">
+              <a:rPr lang="zh-TW" altLang="en-US" sz="1200" b="0" i="0" u="none" strike="noStrike">
                 <a:solidFill>
                   <a:srgbClr val="2B2622"/>
                 </a:solidFill>
@@ -202,7 +204,6 @@
           </a:p>
         </c:rich>
       </c:tx>
-      <c:layout/>
       <c:overlay val="0"/>
     </c:title>
     <c:autoTitleDeleted val="0"/>
@@ -233,49 +234,22 @@
             <a:effectLst/>
           </c:spPr>
           <c:invertIfNegative val="0"/>
-          <c:dLbls>
-            <c:numFmt formatCode="0.0" sourceLinked="0"/>
-            <c:txPr>
-              <a:bodyPr/>
-              <a:lstStyle/>
-              <a:p>
-                <a:pPr>
-                  <a:defRPr b="0" i="0" strike="noStrike" sz="1000" u="none">
-                    <a:solidFill>
-                      <a:srgbClr val="FFFFFF"/>
-                    </a:solidFill>
-                    <a:latin typeface="+mn-lt"/>
-                  </a:defRPr>
-                </a:pPr>
-              </a:p>
-            </c:txPr>
-            <c:dLblPos val="ctr"/>
-            <c:showLegendKey val="0"/>
-            <c:showVal val="0"/>
-            <c:showCatName val="0"/>
-            <c:showSerName val="0"/>
-            <c:showPercent val="0"/>
-            <c:showBubbleSize val="0"/>
-            <c:showLeaderLines val="0"/>
-          </c:dLbls>
           <c:cat>
-            <c:multiLvlStrRef>
+            <c:strRef>
               <c:f>Sheet1!$A$2:$A$4</c:f>
-              <c:multiLvlStrCache>
+              <c:strCache>
                 <c:ptCount val="3"/>
-                <c:lvl>
-                  <c:pt idx="0">
-                    <c:v>1年目</c:v>
-                  </c:pt>
-                  <c:pt idx="1">
-                    <c:v>2年目</c:v>
-                  </c:pt>
-                  <c:pt idx="2">
-                    <c:v>3年目</c:v>
-                  </c:pt>
-                </c:lvl>
-              </c:multiLvlStrCache>
-            </c:multiLvlStrRef>
+                <c:pt idx="0">
+                  <c:v>1年目</c:v>
+                </c:pt>
+                <c:pt idx="1">
+                  <c:v>2年目</c:v>
+                </c:pt>
+                <c:pt idx="2">
+                  <c:v>3年目</c:v>
+                </c:pt>
+              </c:strCache>
+            </c:strRef>
           </c:cat>
           <c:val>
             <c:numRef>
@@ -295,6 +269,11 @@
               </c:numCache>
             </c:numRef>
           </c:val>
+          <c:extLst>
+            <c:ext xmlns:c16="http://schemas.microsoft.com/office/drawing/2014/chart" uri="{C3380CC4-5D6E-409C-BE32-E72D297353CC}">
+              <c16:uniqueId val="{00000000-6581-4509-B3B0-B4A7A922F713}"/>
+            </c:ext>
+          </c:extLst>
         </c:ser>
         <c:ser>
           <c:idx val="1"/>
@@ -317,49 +296,22 @@
             <a:effectLst/>
           </c:spPr>
           <c:invertIfNegative val="0"/>
-          <c:dLbls>
-            <c:numFmt formatCode="0.0" sourceLinked="0"/>
-            <c:txPr>
-              <a:bodyPr/>
-              <a:lstStyle/>
-              <a:p>
-                <a:pPr>
-                  <a:defRPr b="0" i="0" strike="noStrike" sz="1000" u="none">
-                    <a:solidFill>
-                      <a:srgbClr val="FFFFFF"/>
-                    </a:solidFill>
-                    <a:latin typeface="+mn-lt"/>
-                  </a:defRPr>
-                </a:pPr>
-              </a:p>
-            </c:txPr>
-            <c:dLblPos val="ctr"/>
-            <c:showLegendKey val="0"/>
-            <c:showVal val="0"/>
-            <c:showCatName val="0"/>
-            <c:showSerName val="0"/>
-            <c:showPercent val="0"/>
-            <c:showBubbleSize val="0"/>
-            <c:showLeaderLines val="0"/>
-          </c:dLbls>
           <c:cat>
-            <c:multiLvlStrRef>
+            <c:strRef>
               <c:f>Sheet1!$A$2:$A$4</c:f>
-              <c:multiLvlStrCache>
+              <c:strCache>
                 <c:ptCount val="3"/>
-                <c:lvl>
-                  <c:pt idx="0">
-                    <c:v>1年目</c:v>
-                  </c:pt>
-                  <c:pt idx="1">
-                    <c:v>2年目</c:v>
-                  </c:pt>
-                  <c:pt idx="2">
-                    <c:v>3年目</c:v>
-                  </c:pt>
-                </c:lvl>
-              </c:multiLvlStrCache>
-            </c:multiLvlStrRef>
+                <c:pt idx="0">
+                  <c:v>1年目</c:v>
+                </c:pt>
+                <c:pt idx="1">
+                  <c:v>2年目</c:v>
+                </c:pt>
+                <c:pt idx="2">
+                  <c:v>3年目</c:v>
+                </c:pt>
+              </c:strCache>
+            </c:strRef>
           </c:cat>
           <c:val>
             <c:numRef>
@@ -379,6 +331,11 @@
               </c:numCache>
             </c:numRef>
           </c:val>
+          <c:extLst>
+            <c:ext xmlns:c16="http://schemas.microsoft.com/office/drawing/2014/chart" uri="{C3380CC4-5D6E-409C-BE32-E72D297353CC}">
+              <c16:uniqueId val="{00000001-6581-4509-B3B0-B4A7A922F713}"/>
+            </c:ext>
+          </c:extLst>
         </c:ser>
         <c:ser>
           <c:idx val="2"/>
@@ -401,49 +358,22 @@
             <a:effectLst/>
           </c:spPr>
           <c:invertIfNegative val="0"/>
-          <c:dLbls>
-            <c:numFmt formatCode="0.0" sourceLinked="0"/>
-            <c:txPr>
-              <a:bodyPr/>
-              <a:lstStyle/>
-              <a:p>
-                <a:pPr>
-                  <a:defRPr b="0" i="0" strike="noStrike" sz="1000" u="none">
-                    <a:solidFill>
-                      <a:srgbClr val="FFFFFF"/>
-                    </a:solidFill>
-                    <a:latin typeface="+mn-lt"/>
-                  </a:defRPr>
-                </a:pPr>
-              </a:p>
-            </c:txPr>
-            <c:dLblPos val="ctr"/>
-            <c:showLegendKey val="0"/>
-            <c:showVal val="0"/>
-            <c:showCatName val="0"/>
-            <c:showSerName val="0"/>
-            <c:showPercent val="0"/>
-            <c:showBubbleSize val="0"/>
-            <c:showLeaderLines val="0"/>
-          </c:dLbls>
           <c:cat>
-            <c:multiLvlStrRef>
+            <c:strRef>
               <c:f>Sheet1!$A$2:$A$4</c:f>
-              <c:multiLvlStrCache>
+              <c:strCache>
                 <c:ptCount val="3"/>
-                <c:lvl>
-                  <c:pt idx="0">
-                    <c:v>1年目</c:v>
-                  </c:pt>
-                  <c:pt idx="1">
-                    <c:v>2年目</c:v>
-                  </c:pt>
-                  <c:pt idx="2">
-                    <c:v>3年目</c:v>
-                  </c:pt>
-                </c:lvl>
-              </c:multiLvlStrCache>
-            </c:multiLvlStrRef>
+                <c:pt idx="0">
+                  <c:v>1年目</c:v>
+                </c:pt>
+                <c:pt idx="1">
+                  <c:v>2年目</c:v>
+                </c:pt>
+                <c:pt idx="2">
+                  <c:v>3年目</c:v>
+                </c:pt>
+              </c:strCache>
+            </c:strRef>
           </c:cat>
           <c:val>
             <c:numRef>
@@ -463,37 +393,24 @@
               </c:numCache>
             </c:numRef>
           </c:val>
+          <c:extLst>
+            <c:ext xmlns:c16="http://schemas.microsoft.com/office/drawing/2014/chart" uri="{C3380CC4-5D6E-409C-BE32-E72D297353CC}">
+              <c16:uniqueId val="{00000002-6581-4509-B3B0-B4A7A922F713}"/>
+            </c:ext>
+          </c:extLst>
         </c:ser>
         <c:dLbls>
-          <c:numFmt formatCode="0.0" sourceLinked="0"/>
-          <c:txPr>
-            <a:bodyPr/>
-            <a:lstStyle/>
-            <a:p>
-              <a:pPr>
-                <a:defRPr b="0" i="0" strike="noStrike" sz="1000" u="none">
-                  <a:solidFill>
-                    <a:srgbClr val="FFFFFF"/>
-                  </a:solidFill>
-                  <a:latin typeface="+mn-lt"/>
-                </a:defRPr>
-              </a:pPr>
-            </a:p>
-          </c:txPr>
-          <c:dLblPos val="ctr"/>
           <c:showLegendKey val="0"/>
           <c:showVal val="0"/>
           <c:showCatName val="0"/>
           <c:showSerName val="0"/>
           <c:showPercent val="0"/>
           <c:showBubbleSize val="0"/>
-          <c:showLeaderLines val="0"/>
         </c:dLbls>
         <c:gapWidth val="55"/>
         <c:overlap val="100"/>
         <c:axId val="2094734554"/>
         <c:axId val="2094734552"/>
-        <c:axId val="2094734556"/>
       </c:barChart>
       <c:catAx>
         <c:axId val="2094734554"/>
@@ -534,6 +451,7 @@
         <c:crosses val="autoZero"/>
         <c:auto val="1"/>
         <c:lblAlgn val="ctr"/>
+        <c:lblOffset val="100"/>
         <c:noMultiLvlLbl val="1"/>
       </c:catAx>
       <c:valAx>
@@ -616,6 +534,7 @@
     </c:legend>
     <c:plotVisOnly val="1"/>
     <c:dispBlanksAs val="span"/>
+    <c:showDLblsOverMax val="1"/>
   </c:chart>
   <c:spPr>
     <a:noFill/>
@@ -652,241 +571,17 @@
           <a:chExt cx="0" cy="0"/>
         </a:xfrm>
       </p:grpSpPr>
-      <p:sp>
-        <p:nvSpPr>
-          <p:cNvPr id="2" name="Header Placeholder 1"/>
-          <p:cNvSpPr>
-            <a:spLocks noGrp="1"/>
-          </p:cNvSpPr>
-          <p:nvPr>
-            <p:ph type="hdr" sz="quarter"/>
-          </p:nvPr>
-        </p:nvSpPr>
-        <p:spPr>
-          <a:xfrm>
-            <a:off x="0" y="0"/>
-            <a:ext cx="2971800" cy="458788"/>
-          </a:xfrm>
-          <a:prstGeom prst="rect">
-            <a:avLst/>
-          </a:prstGeom>
-        </p:spPr>
-        <p:txBody>
-          <a:bodyPr vert="horz" lIns="91440" tIns="45720" rIns="91440" bIns="45720" rtlCol="0"/>
-          <a:lstStyle>
-            <a:lvl1pPr algn="l">
-              <a:defRPr sz="1200"/>
-            </a:lvl1pPr>
-          </a:lstStyle>
-          <a:p>
-            <a:endParaRPr lang="en-US"/>
-          </a:p>
-        </p:txBody>
-      </p:sp>
-      <p:sp>
-        <p:nvSpPr>
-          <p:cNvPr id="3" name="Date Placeholder 2"/>
-          <p:cNvSpPr>
-            <a:spLocks noGrp="1"/>
-          </p:cNvSpPr>
-          <p:nvPr>
-            <p:ph type="dt" idx="1"/>
-          </p:nvPr>
-        </p:nvSpPr>
-        <p:spPr>
-          <a:xfrm>
-            <a:off x="3884613" y="0"/>
-            <a:ext cx="2971800" cy="458788"/>
-          </a:xfrm>
-          <a:prstGeom prst="rect">
-            <a:avLst/>
-          </a:prstGeom>
-        </p:spPr>
-        <p:txBody>
-          <a:bodyPr vert="horz" lIns="91440" tIns="45720" rIns="91440" bIns="45720" rtlCol="0"/>
-          <a:lstStyle>
-            <a:lvl1pPr algn="r">
-              <a:defRPr sz="1200"/>
-            </a:lvl1pPr>
-          </a:lstStyle>
-          <a:p>
-            <a:fld id="{5282F153-3F37-0F45-9E97-73ACFA13230C}" type="datetimeFigureOut">
-              <a:rPr lang="en-US"/>
-              <a:t>7/23/19</a:t>
-            </a:fld>
-            <a:endParaRPr lang="en-US"/>
-          </a:p>
-        </p:txBody>
-      </p:sp>
-      <p:sp>
-        <p:nvSpPr>
-          <p:cNvPr id="4" name="Slide Image Placeholder 3"/>
-          <p:cNvSpPr>
-            <a:spLocks noGrp="1" noRot="1" noChangeAspect="1"/>
-          </p:cNvSpPr>
-          <p:nvPr>
-            <p:ph type="sldImg" idx="2"/>
-          </p:nvPr>
-        </p:nvSpPr>
-        <p:spPr>
-          <a:xfrm>
-            <a:off x="685800" y="1143000"/>
-            <a:ext cx="5486400" cy="3086100"/>
-          </a:xfrm>
-          <a:prstGeom prst="rect">
-            <a:avLst/>
-          </a:prstGeom>
-          <a:noFill/>
-          <a:ln w="12700">
-            <a:solidFill>
-              <a:prstClr val="black"/>
-            </a:solidFill>
-          </a:ln>
-        </p:spPr>
-        <p:txBody>
-          <a:bodyPr vert="horz" lIns="91440" tIns="45720" rIns="91440" bIns="45720" rtlCol="0" anchor="ctr"/>
-          <a:lstStyle/>
-          <a:p>
-            <a:endParaRPr lang="en-US"/>
-          </a:p>
-        </p:txBody>
-      </p:sp>
-      <p:sp>
-        <p:nvSpPr>
-          <p:cNvPr id="5" name="Notes Placeholder 4"/>
-          <p:cNvSpPr>
-            <a:spLocks noGrp="1"/>
-          </p:cNvSpPr>
-          <p:nvPr>
-            <p:ph type="body" sz="quarter" idx="3"/>
-          </p:nvPr>
-        </p:nvSpPr>
-        <p:spPr>
-          <a:xfrm>
-            <a:off x="685800" y="4400550"/>
-            <a:ext cx="5486400" cy="3600450"/>
-          </a:xfrm>
-          <a:prstGeom prst="rect">
-            <a:avLst/>
-          </a:prstGeom>
-        </p:spPr>
-        <p:txBody>
-          <a:bodyPr vert="horz" lIns="91440" tIns="45720" rIns="91440" bIns="45720" rtlCol="0"/>
-          <a:lstStyle/>
-          <a:p>
-            <a:pPr lvl="0"/>
-            <a:r>
-              <a:rPr lang="en-US"/>
-              <a:t>Click to edit Master text styles</a:t>
-            </a:r>
-          </a:p>
-          <a:p>
-            <a:pPr lvl="1"/>
-            <a:r>
-              <a:rPr lang="en-US"/>
-              <a:t>Second level</a:t>
-            </a:r>
-          </a:p>
-          <a:p>
-            <a:pPr lvl="2"/>
-            <a:r>
-              <a:rPr lang="en-US"/>
-              <a:t>Third level</a:t>
-            </a:r>
-          </a:p>
-          <a:p>
-            <a:pPr lvl="3"/>
-            <a:r>
-              <a:rPr lang="en-US"/>
-              <a:t>Fourth level</a:t>
-            </a:r>
-          </a:p>
-          <a:p>
-            <a:pPr lvl="4"/>
-            <a:r>
-              <a:rPr lang="en-US"/>
-              <a:t>Fifth level</a:t>
-            </a:r>
-          </a:p>
-        </p:txBody>
-      </p:sp>
-      <p:sp>
-        <p:nvSpPr>
-          <p:cNvPr id="6" name="Footer Placeholder 5"/>
-          <p:cNvSpPr>
-            <a:spLocks noGrp="1"/>
-          </p:cNvSpPr>
-          <p:nvPr>
-            <p:ph type="ftr" sz="quarter" idx="4"/>
-          </p:nvPr>
-        </p:nvSpPr>
-        <p:spPr>
-          <a:xfrm>
-            <a:off x="0" y="8685213"/>
-            <a:ext cx="2971800" cy="458787"/>
-          </a:xfrm>
-          <a:prstGeom prst="rect">
-            <a:avLst/>
-          </a:prstGeom>
-        </p:spPr>
-        <p:txBody>
-          <a:bodyPr vert="horz" lIns="91440" tIns="45720" rIns="91440" bIns="45720" rtlCol="0" anchor="b"/>
-          <a:lstStyle>
-            <a:lvl1pPr algn="l">
-              <a:defRPr sz="1200"/>
-            </a:lvl1pPr>
-          </a:lstStyle>
-          <a:p>
-            <a:endParaRPr lang="en-US"/>
-          </a:p>
-        </p:txBody>
-      </p:sp>
-      <p:sp>
-        <p:nvSpPr>
-          <p:cNvPr id="7" name="Slide Number Placeholder 6"/>
-          <p:cNvSpPr>
-            <a:spLocks noGrp="1"/>
-          </p:cNvSpPr>
-          <p:nvPr>
-            <p:ph type="sldNum" sz="quarter" idx="5"/>
-          </p:nvPr>
-        </p:nvSpPr>
-        <p:spPr>
-          <a:xfrm>
-            <a:off x="3884613" y="8685213"/>
-            <a:ext cx="2971800" cy="458787"/>
-          </a:xfrm>
-          <a:prstGeom prst="rect">
-            <a:avLst/>
-          </a:prstGeom>
-        </p:spPr>
-        <p:txBody>
-          <a:bodyPr vert="horz" lIns="91440" tIns="45720" rIns="91440" bIns="45720" rtlCol="0" anchor="b"/>
-          <a:lstStyle>
-            <a:lvl1pPr algn="r">
-              <a:defRPr sz="1200"/>
-            </a:lvl1pPr>
-          </a:lstStyle>
-          <a:p>
-            <a:fld id="{CE5E9CC1-C706-0F49-92D6-E571CC5EEA8F}" type="slidenum">
-              <a:rPr lang="en-US"/>
-              <a:t>‹#›</a:t>
-            </a:fld>
-            <a:endParaRPr lang="en-US"/>
-          </a:p>
-        </p:txBody>
-      </p:sp>
     </p:spTree>
     <p:extLst>
       <p:ext uri="{BB962C8B-B14F-4D97-AF65-F5344CB8AC3E}">
-        <p14:creationId xmlns:p14="http://schemas.microsoft.com/office/powerpoint/2010/main" val="1024086991"/>
+        <p14:creationId xmlns:p14="http://schemas.microsoft.com/office/powerpoint/2010/main" val="1019887166"/>
       </p:ext>
     </p:extLst>
   </p:cSld>
   <p:clrMap bg1="lt1" tx1="dk1" bg2="lt2" tx2="dk2" accent1="accent1" accent2="accent2" accent3="accent3" accent4="accent4" accent5="accent5" accent6="accent6" hlink="hlink" folHlink="folHlink"/>
   <p:notesStyle>
     <a:lvl1pPr marL="0" algn="l" defTabSz="914400" rtl="0" eaLnBrk="1" latinLnBrk="0" hangingPunct="1">
-      <a:defRPr sz="1200" kern="1200">
+      <a:defRPr kumimoji="1" sz="1200" kern="1200">
         <a:solidFill>
           <a:schemeClr val="tx1"/>
         </a:solidFill>
@@ -896,7 +591,7 @@
       </a:defRPr>
     </a:lvl1pPr>
     <a:lvl2pPr marL="457200" algn="l" defTabSz="914400" rtl="0" eaLnBrk="1" latinLnBrk="0" hangingPunct="1">
-      <a:defRPr sz="1200" kern="1200">
+      <a:defRPr kumimoji="1" sz="1200" kern="1200">
         <a:solidFill>
           <a:schemeClr val="tx1"/>
         </a:solidFill>
@@ -906,7 +601,7 @@
       </a:defRPr>
     </a:lvl2pPr>
     <a:lvl3pPr marL="914400" algn="l" defTabSz="914400" rtl="0" eaLnBrk="1" latinLnBrk="0" hangingPunct="1">
-      <a:defRPr sz="1200" kern="1200">
+      <a:defRPr kumimoji="1" sz="1200" kern="1200">
         <a:solidFill>
           <a:schemeClr val="tx1"/>
         </a:solidFill>
@@ -916,7 +611,7 @@
       </a:defRPr>
     </a:lvl3pPr>
     <a:lvl4pPr marL="1371600" algn="l" defTabSz="914400" rtl="0" eaLnBrk="1" latinLnBrk="0" hangingPunct="1">
-      <a:defRPr sz="1200" kern="1200">
+      <a:defRPr kumimoji="1" sz="1200" kern="1200">
         <a:solidFill>
           <a:schemeClr val="tx1"/>
         </a:solidFill>
@@ -926,7 +621,7 @@
       </a:defRPr>
     </a:lvl4pPr>
     <a:lvl5pPr marL="1828800" algn="l" defTabSz="914400" rtl="0" eaLnBrk="1" latinLnBrk="0" hangingPunct="1">
-      <a:defRPr sz="1200" kern="1200">
+      <a:defRPr kumimoji="1" sz="1200" kern="1200">
         <a:solidFill>
           <a:schemeClr val="tx1"/>
         </a:solidFill>
@@ -936,7 +631,7 @@
       </a:defRPr>
     </a:lvl5pPr>
     <a:lvl6pPr marL="2286000" algn="l" defTabSz="914400" rtl="0" eaLnBrk="1" latinLnBrk="0" hangingPunct="1">
-      <a:defRPr sz="1200" kern="1200">
+      <a:defRPr kumimoji="1" sz="1200" kern="1200">
         <a:solidFill>
           <a:schemeClr val="tx1"/>
         </a:solidFill>
@@ -946,7 +641,7 @@
       </a:defRPr>
     </a:lvl6pPr>
     <a:lvl7pPr marL="2743200" algn="l" defTabSz="914400" rtl="0" eaLnBrk="1" latinLnBrk="0" hangingPunct="1">
-      <a:defRPr sz="1200" kern="1200">
+      <a:defRPr kumimoji="1" sz="1200" kern="1200">
         <a:solidFill>
           <a:schemeClr val="tx1"/>
         </a:solidFill>
@@ -956,7 +651,7 @@
       </a:defRPr>
     </a:lvl7pPr>
     <a:lvl8pPr marL="3200400" algn="l" defTabSz="914400" rtl="0" eaLnBrk="1" latinLnBrk="0" hangingPunct="1">
-      <a:defRPr sz="1200" kern="1200">
+      <a:defRPr kumimoji="1" sz="1200" kern="1200">
         <a:solidFill>
           <a:schemeClr val="tx1"/>
         </a:solidFill>
@@ -966,7 +661,7 @@
       </a:defRPr>
     </a:lvl8pPr>
     <a:lvl9pPr marL="3657600" algn="l" defTabSz="914400" rtl="0" eaLnBrk="1" latinLnBrk="0" hangingPunct="1">
-      <a:defRPr sz="1200" kern="1200">
+      <a:defRPr kumimoji="1" sz="1200" kern="1200">
         <a:solidFill>
           <a:schemeClr val="tx1"/>
         </a:solidFill>
@@ -1027,7 +722,6 @@
               <a:rPr lang="en-US" dirty="0"/>
               <a:t>M&amp;A担当がいない会社に、AIと49戦の経験で『社内M&amp;A部門』を月額で提供する事業です。</a:t>
             </a:r>
-            <a:endParaRPr lang="en-US" dirty="0"/>
           </a:p>
         </p:txBody>
       </p:sp>
@@ -1115,7 +809,6 @@
               <a:rPr lang="en-US" dirty="0"/>
               <a:t>成約データは持てないが、IMなら集められる。関東の生産・卸・飲食・不動産に絞って相場をつくり、適正価格をアドバイスする。支援が始まったら、受け取ったIMをすべて取り込み、お客様のBS/PLと強みに掛け合わせて分析する。分析したIMは匿名化してデータベースに戻すので、使うほど精度が上がる。</a:t>
             </a:r>
-            <a:endParaRPr lang="en-US" dirty="0"/>
           </a:p>
         </p:txBody>
       </p:sp>
@@ -1203,7 +896,6 @@
               <a:rPr lang="en-US" dirty="0"/>
               <a:t>左のマップで立ち位置、右の表で違い。費用は仲介の1/10以下で、買った後と人材育成まで入っている。</a:t>
             </a:r>
-            <a:endParaRPr lang="en-US" dirty="0"/>
           </a:p>
         </p:txBody>
       </p:sp>
@@ -1291,7 +983,6 @@
               <a:rPr lang="en-US" dirty="0"/>
               <a:t>一番のお客様は、M&amp;Aで成長したいのに担当者がいない会社。</a:t>
             </a:r>
-            <a:endParaRPr lang="en-US" dirty="0"/>
           </a:p>
         </p:txBody>
       </p:sp>
@@ -1379,7 +1070,6 @@
               <a:rPr lang="en-US" dirty="0"/>
               <a:t>成果は成約だけではない。12ヶ月後に担当者が自分で回せるようになることを約束する。</a:t>
             </a:r>
-            <a:endParaRPr lang="en-US" dirty="0"/>
           </a:p>
         </p:txBody>
       </p:sp>
@@ -1467,7 +1157,6 @@
               <a:rPr lang="en-US" dirty="0"/>
               <a:t>入口はツールの月10万円。有望案件が見えたら担当を派遣するスタンダードへ。プレミアムの価値は中野本人との壁打ちで、枠数を絞る。</a:t>
             </a:r>
-            <a:endParaRPr lang="en-US" dirty="0"/>
           </a:p>
         </p:txBody>
       </p:sp>
@@ -1555,7 +1244,6 @@
               <a:rPr lang="en-US" dirty="0"/>
               <a:t>最初は人とノウハウで勝つ。続けるほどデータが溜まり、後から来た競合が追いつけなくなる。</a:t>
             </a:r>
-            <a:endParaRPr lang="en-US" dirty="0"/>
           </a:p>
         </p:txBody>
       </p:sp>
@@ -1643,7 +1331,6 @@
               <a:rPr lang="en-US" dirty="0"/>
               <a:t>数字は仮説。ツール月10万円、派遣は1人10社で月50〜80万円、年3件成約が前提。ツールの社数には派遣先は含めていない。</a:t>
             </a:r>
-            <a:endParaRPr lang="en-US" dirty="0"/>
           </a:p>
         </p:txBody>
       </p:sp>
@@ -1731,7 +1418,6 @@
               <a:rPr lang="en-US" dirty="0"/>
               <a:t>最初の半年は、中野と2名で10社。ここで継続意向が取れたら拡大する。</a:t>
             </a:r>
-            <a:endParaRPr lang="en-US" dirty="0"/>
           </a:p>
         </p:txBody>
       </p:sp>
@@ -1819,7 +1505,6 @@
               <a:rPr lang="en-US" dirty="0"/>
               <a:t>講演の締めと同じメッセージで終える。手順は再現できる、だから教えられる。</a:t>
             </a:r>
-            <a:endParaRPr lang="en-US" dirty="0"/>
           </a:p>
         </p:txBody>
       </p:sp>
@@ -1907,7 +1592,6 @@
               <a:rPr lang="en-US" dirty="0"/>
               <a:t>誰に・何を・なぜ勝てるか。この3つだけ覚えて帰ってもらうページです。</a:t>
             </a:r>
-            <a:endParaRPr lang="en-US" dirty="0"/>
           </a:p>
         </p:txBody>
       </p:sp>
@@ -1995,7 +1679,6 @@
               <a:rPr lang="en-US" dirty="0"/>
               <a:t>市場はある。でも買い手側には、判断できる人も、味方も、買った後の支援もない。</a:t>
             </a:r>
-            <a:endParaRPr lang="en-US" dirty="0"/>
           </a:p>
         </p:txBody>
       </p:sp>
@@ -2083,7 +1766,6 @@
               <a:rPr lang="en-US" dirty="0"/>
               <a:t>ここが一番伝えたいところ。自分も負けた。だから、同じ負け方をする人を減らしたい。</a:t>
             </a:r>
-            <a:endParaRPr lang="en-US" dirty="0"/>
           </a:p>
         </p:txBody>
       </p:sp>
@@ -2171,7 +1853,6 @@
               <a:rPr lang="en-US" dirty="0"/>
               <a:t>見るのは2つ。買った値段に対して資産がいくら残ったか、営業利益がいくらに育ったか。第1期は資産では0.7倍、ただ保有中に7.6億の営業利益を出した。第2期は純資産より安く買っているので、資産は買値の1.3倍。そのうえ単年度で2.4億の営業利益に育っている。飲食A社は8.2億で買って純資産13億、今期の営業利益1.3億。飲食B事業は1,400万で買って純資産7,000万、今期8,000万。</a:t>
             </a:r>
-            <a:endParaRPr lang="en-US" dirty="0"/>
           </a:p>
         </p:txBody>
       </p:sp>
@@ -2259,7 +1940,6 @@
               <a:rPr lang="en-US" dirty="0"/>
               <a:t>原則の左側は私の実例、右側はそれをサービスでどう再現するか。案件名は伏せています。</a:t>
             </a:r>
-            <a:endParaRPr lang="en-US" dirty="0"/>
           </a:p>
         </p:txBody>
       </p:sp>
@@ -2347,7 +2027,6 @@
               <a:rPr lang="en-US" dirty="0"/>
               <a:t>人だけ出せばSES、情報を集めるだけならMANDAと同じ。ツールで入って、そのうえに人を乗せる二段構え。担当が抜けてもツールとデータが残るので、解約されにくい。</a:t>
             </a:r>
-            <a:endParaRPr lang="en-US" dirty="0"/>
           </a:p>
         </p:txBody>
       </p:sp>
@@ -2435,7 +2114,6 @@
               <a:rPr lang="en-US" dirty="0"/>
               <a:t>M&amp;A版のREINS。オープンになっている案件は全部ここに集まる状態をつくる。MANDAと違うのは、集めた先にAIと人がいること。</a:t>
             </a:r>
-            <a:endParaRPr lang="en-US" dirty="0"/>
           </a:p>
         </p:txBody>
       </p:sp>
@@ -2523,7 +2201,6 @@
               <a:rPr lang="en-US" dirty="0"/>
               <a:t>AIは道具。差は、49戦のルールでAIの出した答えを判定するところにある。</a:t>
             </a:r>
-            <a:endParaRPr lang="en-US" dirty="0"/>
           </a:p>
         </p:txBody>
       </p:sp>
@@ -2601,6 +2278,7 @@
         <a:solidFill>
           <a:schemeClr val="tx1"/>
         </a:solidFill>
+        <a:effectLst/>
       </p:bgPr>
     </p:bg>
     <p:spTree>
@@ -2620,9 +2298,11 @@
       <p:sp>
         <p:nvSpPr>
           <p:cNvPr id="2" name="Text 0"/>
-          <p:cNvSpPr/>
+          <p:cNvSpPr>
+            <a:spLocks noGrp="1"/>
+          </p:cNvSpPr>
           <p:nvPr>
-            <p:ph idx="100" type="body" hasCustomPrompt="1"/>
+            <p:ph type="body" idx="100" hasCustomPrompt="1"/>
           </p:nvPr>
         </p:nvSpPr>
         <p:spPr>
@@ -2639,9 +2319,9 @@
         <p:txBody>
           <a:bodyPr wrap="square" rtlCol="0"/>
           <a:lstStyle>
-            <a:lvl1pPr indent="0" marL="0">
-              <a:buNone/>
-              <a:defRPr lang="en-US" sz="1200" b="1" spc="100" kern="0" dirty="0">
+            <a:lvl1pPr marL="0" indent="0">
+              <a:buNone/>
+              <a:defRPr lang="en-US" sz="1200" b="1" kern="0" spc="100" dirty="0">
                 <a:solidFill>
                   <a:schemeClr val="accent4"/>
                 </a:solidFill>
@@ -2649,7 +2329,7 @@
             </a:lvl1pPr>
           </a:lstStyle>
           <a:p>
-            <a:pPr indent="0" marL="0">
+            <a:pPr marL="0" indent="0">
               <a:buNone/>
             </a:pPr>
             <a:endParaRPr lang="en-US" sz="1200" dirty="0"/>
@@ -2659,9 +2339,11 @@
       <p:sp>
         <p:nvSpPr>
           <p:cNvPr id="3" name="Text 0"/>
-          <p:cNvSpPr/>
+          <p:cNvSpPr>
+            <a:spLocks noGrp="1"/>
+          </p:cNvSpPr>
           <p:nvPr>
-            <p:ph idx="101" type="title" hasCustomPrompt="1"/>
+            <p:ph type="title" idx="101" hasCustomPrompt="1"/>
           </p:nvPr>
         </p:nvSpPr>
         <p:spPr>
@@ -2678,7 +2360,7 @@
         <p:txBody>
           <a:bodyPr wrap="square" rtlCol="0"/>
           <a:lstStyle>
-            <a:lvl1pPr algn="l" indent="0" marL="0">
+            <a:lvl1pPr marL="0" indent="0" algn="l">
               <a:buNone/>
               <a:defRPr lang="en-US" sz="4000" b="1" dirty="0">
                 <a:solidFill>
@@ -2688,7 +2370,7 @@
             </a:lvl1pPr>
           </a:lstStyle>
           <a:p>
-            <a:pPr algn="l" indent="0" marL="0">
+            <a:pPr marL="0" indent="0" algn="l">
               <a:buNone/>
             </a:pPr>
             <a:endParaRPr lang="en-US" sz="4000" dirty="0"/>
@@ -2698,9 +2380,11 @@
       <p:sp>
         <p:nvSpPr>
           <p:cNvPr id="4" name="Text 0"/>
-          <p:cNvSpPr/>
+          <p:cNvSpPr>
+            <a:spLocks noGrp="1"/>
+          </p:cNvSpPr>
           <p:nvPr>
-            <p:ph idx="102" type="body" hasCustomPrompt="1"/>
+            <p:ph type="body" idx="102" hasCustomPrompt="1"/>
           </p:nvPr>
         </p:nvSpPr>
         <p:spPr>
@@ -2717,7 +2401,7 @@
         <p:txBody>
           <a:bodyPr wrap="square" rtlCol="0"/>
           <a:lstStyle>
-            <a:lvl1pPr indent="0" marL="0">
+            <a:lvl1pPr marL="0" indent="0">
               <a:buNone/>
               <a:defRPr lang="en-US" sz="1500" dirty="0">
                 <a:solidFill>
@@ -2727,7 +2411,7 @@
             </a:lvl1pPr>
           </a:lstStyle>
           <a:p>
-            <a:pPr indent="0" marL="0">
+            <a:pPr marL="0" indent="0">
               <a:buNone/>
             </a:pPr>
             <a:endParaRPr lang="en-US" sz="1500" dirty="0"/>
@@ -2762,9 +2446,11 @@
       <p:sp>
         <p:nvSpPr>
           <p:cNvPr id="6" name="Text 1"/>
-          <p:cNvSpPr/>
+          <p:cNvSpPr>
+            <a:spLocks noGrp="1"/>
+          </p:cNvSpPr>
           <p:nvPr>
-            <p:ph idx="104" type="body" hasCustomPrompt="1"/>
+            <p:ph type="body" idx="104" hasCustomPrompt="1"/>
           </p:nvPr>
         </p:nvSpPr>
         <p:spPr>
@@ -2781,7 +2467,7 @@
         <p:txBody>
           <a:bodyPr wrap="square" rtlCol="0"/>
           <a:lstStyle>
-            <a:lvl1pPr indent="0" marL="0">
+            <a:lvl1pPr marL="0" indent="0">
               <a:buNone/>
               <a:defRPr lang="en-US" sz="1800" b="1" dirty="0">
                 <a:solidFill>
@@ -2791,7 +2477,7 @@
             </a:lvl1pPr>
           </a:lstStyle>
           <a:p>
-            <a:pPr indent="0" marL="0">
+            <a:pPr marL="0" indent="0">
               <a:buNone/>
             </a:pPr>
             <a:endParaRPr lang="en-US" sz="1800" dirty="0"/>
@@ -2801,9 +2487,11 @@
       <p:sp>
         <p:nvSpPr>
           <p:cNvPr id="7" name="Text 1"/>
-          <p:cNvSpPr/>
+          <p:cNvSpPr>
+            <a:spLocks noGrp="1"/>
+          </p:cNvSpPr>
           <p:nvPr>
-            <p:ph idx="105" type="body" hasCustomPrompt="1"/>
+            <p:ph type="body" idx="105" hasCustomPrompt="1"/>
           </p:nvPr>
         </p:nvSpPr>
         <p:spPr>
@@ -2820,7 +2508,7 @@
         <p:txBody>
           <a:bodyPr wrap="square" rtlCol="0"/>
           <a:lstStyle>
-            <a:lvl1pPr indent="0" marL="0">
+            <a:lvl1pPr marL="0" indent="0">
               <a:buNone/>
               <a:defRPr lang="en-US" sz="1100" dirty="0">
                 <a:solidFill>
@@ -2830,7 +2518,7 @@
             </a:lvl1pPr>
           </a:lstStyle>
           <a:p>
-            <a:pPr indent="0" marL="0">
+            <a:pPr marL="0" indent="0">
               <a:buNone/>
             </a:pPr>
             <a:endParaRPr lang="en-US" sz="1100" dirty="0"/>
@@ -2853,6 +2541,7 @@
         <a:solidFill>
           <a:schemeClr val="bg1"/>
         </a:solidFill>
+        <a:effectLst/>
       </p:bgPr>
     </p:bg>
     <p:spTree>
@@ -2872,9 +2561,11 @@
       <p:sp>
         <p:nvSpPr>
           <p:cNvPr id="2" name="Text 0"/>
-          <p:cNvSpPr/>
+          <p:cNvSpPr>
+            <a:spLocks noGrp="1"/>
+          </p:cNvSpPr>
           <p:nvPr>
-            <p:ph idx="100" type="body" hasCustomPrompt="1"/>
+            <p:ph type="body" idx="100" hasCustomPrompt="1"/>
           </p:nvPr>
         </p:nvSpPr>
         <p:spPr>
@@ -2891,9 +2582,9 @@
         <p:txBody>
           <a:bodyPr wrap="square" rtlCol="0"/>
           <a:lstStyle>
-            <a:lvl1pPr indent="0" marL="0">
-              <a:buNone/>
-              <a:defRPr lang="en-US" sz="1200" b="1" spc="240" kern="0" dirty="0">
+            <a:lvl1pPr marL="0" indent="0">
+              <a:buNone/>
+              <a:defRPr lang="en-US" sz="1200" b="1" kern="0" spc="240" dirty="0">
                 <a:solidFill>
                   <a:schemeClr val="accent1"/>
                 </a:solidFill>
@@ -2901,7 +2592,7 @@
             </a:lvl1pPr>
           </a:lstStyle>
           <a:p>
-            <a:pPr indent="0" marL="0">
+            <a:pPr marL="0" indent="0">
               <a:buNone/>
             </a:pPr>
             <a:endParaRPr lang="en-US" sz="1200" dirty="0"/>
@@ -2911,9 +2602,11 @@
       <p:sp>
         <p:nvSpPr>
           <p:cNvPr id="3" name="Text 0"/>
-          <p:cNvSpPr/>
+          <p:cNvSpPr>
+            <a:spLocks noGrp="1"/>
+          </p:cNvSpPr>
           <p:nvPr>
-            <p:ph idx="101" type="title" hasCustomPrompt="1"/>
+            <p:ph type="title" idx="101" hasCustomPrompt="1"/>
           </p:nvPr>
         </p:nvSpPr>
         <p:spPr>
@@ -2930,7 +2623,7 @@
         <p:txBody>
           <a:bodyPr wrap="square" rtlCol="0"/>
           <a:lstStyle>
-            <a:lvl1pPr algn="l" indent="0" marL="0">
+            <a:lvl1pPr marL="0" indent="0" algn="l">
               <a:buNone/>
               <a:defRPr lang="en-US" sz="3000" b="1" dirty="0">
                 <a:solidFill>
@@ -2940,7 +2633,7 @@
             </a:lvl1pPr>
           </a:lstStyle>
           <a:p>
-            <a:pPr algn="l" indent="0" marL="0">
+            <a:pPr marL="0" indent="0" algn="l">
               <a:buNone/>
             </a:pPr>
             <a:endParaRPr lang="en-US" sz="3000" dirty="0"/>
@@ -2950,9 +2643,11 @@
       <p:sp>
         <p:nvSpPr>
           <p:cNvPr id="4" name="Text 0"/>
-          <p:cNvSpPr/>
+          <p:cNvSpPr>
+            <a:spLocks noGrp="1"/>
+          </p:cNvSpPr>
           <p:nvPr>
-            <p:ph idx="102" type="body" hasCustomPrompt="1"/>
+            <p:ph type="body" idx="102" hasCustomPrompt="1"/>
           </p:nvPr>
         </p:nvSpPr>
         <p:spPr>
@@ -2969,7 +2664,7 @@
         <p:txBody>
           <a:bodyPr wrap="square" rtlCol="0"/>
           <a:lstStyle>
-            <a:lvl1pPr indent="0" marL="0">
+            <a:lvl1pPr marL="0" indent="0">
               <a:buNone/>
               <a:defRPr lang="en-US" sz="1350" dirty="0">
                 <a:solidFill>
@@ -2979,7 +2674,7 @@
             </a:lvl1pPr>
           </a:lstStyle>
           <a:p>
-            <a:pPr indent="0" marL="0">
+            <a:pPr marL="0" indent="0">
               <a:buNone/>
             </a:pPr>
             <a:endParaRPr lang="en-US" sz="1350" dirty="0"/>
@@ -3007,7 +2702,7 @@
           <a:bodyPr wrap="square" lIns="0" tIns="0" rIns="0" bIns="0" rtlCol="0" anchor="ctr"/>
           <a:lstStyle/>
           <a:p>
-            <a:pPr indent="0" marL="0">
+            <a:pPr marL="0" indent="0">
               <a:buNone/>
             </a:pPr>
             <a:r>
@@ -3042,7 +2737,7 @@
           </a:prstGeom>
           <a:extLst>
             <a:ext uri="{C572A759-6A51-4108-AA02-DFA0A04FC94B}">
-              <ma14:wrappingTextBoxFlag xmlns:ma14="http://schemas.microsoft.com/office/mac/drawingml/2011/main" val="0"/>
+              <ma14:wrappingTextBoxFlag xmlns:ma14="http://schemas.microsoft.com/office/mac/drawingml/2011/main" xmlns="" val="0"/>
             </a:ext>
           </a:extLst>
         </p:spPr>
@@ -3060,8 +2755,8 @@
           <a:p>
             <a:pPr algn="r"/>
             <a:fld id="{F7021451-1387-4CA6-816F-3879F97B5CBC}" type="slidenum">
-              <a:rPr b="0" lang="en-US"/>
-              <a:t>1003</a:t>
+              <a:rPr lang="en-US" b="0"/>
+              <a:t>‹#›</a:t>
             </a:fld>
             <a:endParaRPr lang="en-US"/>
           </a:p>
@@ -3083,6 +2778,7 @@
         <a:solidFill>
           <a:schemeClr val="tx1"/>
         </a:solidFill>
+        <a:effectLst/>
       </p:bgPr>
     </p:bg>
     <p:spTree>
@@ -3102,9 +2798,11 @@
       <p:sp>
         <p:nvSpPr>
           <p:cNvPr id="2" name="Text 0"/>
-          <p:cNvSpPr/>
+          <p:cNvSpPr>
+            <a:spLocks noGrp="1"/>
+          </p:cNvSpPr>
           <p:nvPr>
-            <p:ph idx="100" type="body" hasCustomPrompt="1"/>
+            <p:ph type="body" idx="100" hasCustomPrompt="1"/>
           </p:nvPr>
         </p:nvSpPr>
         <p:spPr>
@@ -3121,9 +2819,9 @@
         <p:txBody>
           <a:bodyPr wrap="square" rtlCol="0"/>
           <a:lstStyle>
-            <a:lvl1pPr indent="0" marL="0">
-              <a:buNone/>
-              <a:defRPr lang="en-US" sz="1200" b="1" spc="400" kern="0" dirty="0">
+            <a:lvl1pPr marL="0" indent="0">
+              <a:buNone/>
+              <a:defRPr lang="en-US" sz="1200" b="1" kern="0" spc="400" dirty="0">
                 <a:solidFill>
                   <a:schemeClr val="accent4"/>
                 </a:solidFill>
@@ -3131,7 +2829,7 @@
             </a:lvl1pPr>
           </a:lstStyle>
           <a:p>
-            <a:pPr indent="0" marL="0">
+            <a:pPr marL="0" indent="0">
               <a:buNone/>
             </a:pPr>
             <a:endParaRPr lang="en-US" sz="1200" dirty="0"/>
@@ -3141,9 +2839,11 @@
       <p:sp>
         <p:nvSpPr>
           <p:cNvPr id="3" name="Text 0"/>
-          <p:cNvSpPr/>
+          <p:cNvSpPr>
+            <a:spLocks noGrp="1"/>
+          </p:cNvSpPr>
           <p:nvPr>
-            <p:ph idx="101" type="title" hasCustomPrompt="1"/>
+            <p:ph type="title" idx="101" hasCustomPrompt="1"/>
           </p:nvPr>
         </p:nvSpPr>
         <p:spPr>
@@ -3160,7 +2860,7 @@
         <p:txBody>
           <a:bodyPr wrap="square" rtlCol="0"/>
           <a:lstStyle>
-            <a:lvl1pPr algn="l" indent="0" marL="0">
+            <a:lvl1pPr marL="0" indent="0" algn="l">
               <a:buNone/>
               <a:defRPr lang="en-US" sz="3600" b="1" dirty="0">
                 <a:solidFill>
@@ -3170,7 +2870,7 @@
             </a:lvl1pPr>
           </a:lstStyle>
           <a:p>
-            <a:pPr algn="l" indent="0" marL="0">
+            <a:pPr marL="0" indent="0" algn="l">
               <a:buNone/>
             </a:pPr>
             <a:endParaRPr lang="en-US" sz="3600" dirty="0"/>
@@ -3205,9 +2905,11 @@
       <p:sp>
         <p:nvSpPr>
           <p:cNvPr id="5" name="Text 1"/>
-          <p:cNvSpPr/>
+          <p:cNvSpPr>
+            <a:spLocks noGrp="1"/>
+          </p:cNvSpPr>
           <p:nvPr>
-            <p:ph idx="103" type="body" hasCustomPrompt="1"/>
+            <p:ph type="body" idx="103" hasCustomPrompt="1"/>
           </p:nvPr>
         </p:nvSpPr>
         <p:spPr>
@@ -3224,7 +2926,7 @@
         <p:txBody>
           <a:bodyPr wrap="square" rtlCol="0"/>
           <a:lstStyle>
-            <a:lvl1pPr indent="0" marL="0">
+            <a:lvl1pPr marL="0" indent="0">
               <a:buNone/>
               <a:defRPr lang="en-US" sz="1500" dirty="0">
                 <a:solidFill>
@@ -3234,7 +2936,7 @@
             </a:lvl1pPr>
           </a:lstStyle>
           <a:p>
-            <a:pPr indent="0" marL="0">
+            <a:pPr marL="0" indent="0">
               <a:buNone/>
             </a:pPr>
             <a:endParaRPr lang="en-US" sz="1500" dirty="0"/>
@@ -3244,9 +2946,11 @@
       <p:sp>
         <p:nvSpPr>
           <p:cNvPr id="6" name="Text 1"/>
-          <p:cNvSpPr/>
+          <p:cNvSpPr>
+            <a:spLocks noGrp="1"/>
+          </p:cNvSpPr>
           <p:nvPr>
-            <p:ph idx="104" type="body" hasCustomPrompt="1"/>
+            <p:ph type="body" idx="104" hasCustomPrompt="1"/>
           </p:nvPr>
         </p:nvSpPr>
         <p:spPr>
@@ -3263,7 +2967,7 @@
         <p:txBody>
           <a:bodyPr wrap="square" rtlCol="0"/>
           <a:lstStyle>
-            <a:lvl1pPr indent="0" marL="0">
+            <a:lvl1pPr marL="0" indent="0">
               <a:buNone/>
               <a:defRPr lang="en-US" sz="1300" b="1" dirty="0">
                 <a:solidFill>
@@ -3273,7 +2977,7 @@
             </a:lvl1pPr>
           </a:lstStyle>
           <a:p>
-            <a:pPr indent="0" marL="0">
+            <a:pPr marL="0" indent="0">
               <a:buNone/>
             </a:pPr>
             <a:endParaRPr lang="en-US" sz="1300" dirty="0"/>
@@ -3291,6 +2995,11 @@
 <file path=ppt/slideMasters/slideMaster1.xml><?xml version="1.0" encoding="utf-8"?>
 <p:sldMaster xmlns:a="http://schemas.openxmlformats.org/drawingml/2006/main" xmlns:r="http://schemas.openxmlformats.org/officeDocument/2006/relationships" xmlns:p="http://schemas.openxmlformats.org/presentationml/2006/main">
   <p:cSld>
+    <p:bg>
+      <p:bgRef idx="1001">
+        <a:schemeClr val="bg1"/>
+      </p:bgRef>
+    </p:bg>
     <p:spTree>
       <p:nvGrpSpPr>
         <p:cNvPr id="1" name=""/>
@@ -3325,7 +3034,7 @@
           </a:prstGeom>
           <a:extLst>
             <a:ext uri="{C572A759-6A51-4108-AA02-DFA0A04FC94B}">
-              <ma14:wrappingTextBoxFlag xmlns:ma14="http://schemas.microsoft.com/office/mac/drawingml/2011/main" val="0"/>
+              <ma14:wrappingTextBoxFlag xmlns:ma14="http://schemas.microsoft.com/office/mac/drawingml/2011/main" xmlns="" val="0"/>
             </a:ext>
           </a:extLst>
         </p:spPr>
@@ -3343,8 +3052,8 @@
           <a:p>
             <a:pPr algn="r"/>
             <a:fld id="{F7021451-1387-4CA6-816F-3879F97B5CBC}" type="slidenum">
-              <a:rPr b="0" lang="en-US"/>
-              <a:t>null</a:t>
+              <a:rPr lang="en-US" b="0"/>
+              <a:t>‹#›</a:t>
             </a:fld>
             <a:endParaRPr lang="en-US"/>
           </a:p>
@@ -3683,9 +3392,11 @@
       <p:sp>
         <p:nvSpPr>
           <p:cNvPr id="4" name="Text 0"/>
-          <p:cNvSpPr/>
+          <p:cNvSpPr>
+            <a:spLocks noGrp="1"/>
+          </p:cNvSpPr>
           <p:nvPr>
-            <p:ph idx="100" type="body" hasCustomPrompt="1"/>
+            <p:ph type="body" idx="100" hasCustomPrompt="1"/>
           </p:nvPr>
         </p:nvSpPr>
         <p:spPr>
@@ -3703,11 +3414,11 @@
           <a:bodyPr wrap="square" lIns="0" tIns="0" rIns="0" bIns="0" rtlCol="0"/>
           <a:lstStyle/>
           <a:p>
-            <a:pPr indent="0" marL="0">
-              <a:buNone/>
-            </a:pPr>
-            <a:r>
-              <a:rPr lang="en-US" sz="1200" b="1" spc="100" kern="0" dirty="0">
+            <a:pPr marL="0" indent="0">
+              <a:buNone/>
+            </a:pPr>
+            <a:r>
+              <a:rPr lang="en-US" sz="1200" b="1" kern="0" spc="100" dirty="0">
                 <a:solidFill>
                   <a:schemeClr val="accent4"/>
                 </a:solidFill>
@@ -3721,9 +3432,11 @@
       <p:sp>
         <p:nvSpPr>
           <p:cNvPr id="5" name="Text 0"/>
-          <p:cNvSpPr/>
+          <p:cNvSpPr>
+            <a:spLocks noGrp="1"/>
+          </p:cNvSpPr>
           <p:nvPr>
-            <p:ph idx="101" type="title" hasCustomPrompt="1"/>
+            <p:ph type="title" idx="101" hasCustomPrompt="1"/>
           </p:nvPr>
         </p:nvSpPr>
         <p:spPr>
@@ -3741,7 +3454,7 @@
           <a:bodyPr wrap="square" lIns="0" tIns="0" rIns="0" bIns="0" rtlCol="0" anchor="t"/>
           <a:lstStyle/>
           <a:p>
-            <a:pPr algn="l" indent="0" marL="0">
+            <a:pPr marL="0" indent="0" algn="l">
               <a:buNone/>
             </a:pPr>
             <a:r>
@@ -3755,7 +3468,7 @@
             <a:endParaRPr lang="en-US" sz="4000" dirty="0"/>
           </a:p>
           <a:p>
-            <a:pPr algn="l" indent="0" marL="0">
+            <a:pPr marL="0" indent="0" algn="l">
               <a:buNone/>
             </a:pPr>
             <a:r>
@@ -3773,9 +3486,11 @@
       <p:sp>
         <p:nvSpPr>
           <p:cNvPr id="6" name="Text 0"/>
-          <p:cNvSpPr/>
+          <p:cNvSpPr>
+            <a:spLocks noGrp="1"/>
+          </p:cNvSpPr>
           <p:nvPr>
-            <p:ph idx="102" type="body" hasCustomPrompt="1"/>
+            <p:ph type="body" idx="102" hasCustomPrompt="1"/>
           </p:nvPr>
         </p:nvSpPr>
         <p:spPr>
@@ -3793,7 +3508,7 @@
           <a:bodyPr wrap="square" lIns="0" tIns="0" rIns="0" bIns="0" rtlCol="0"/>
           <a:lstStyle/>
           <a:p>
-            <a:pPr indent="0" marL="0">
+            <a:pPr marL="0" indent="0">
               <a:buNone/>
             </a:pPr>
             <a:r>
@@ -3811,9 +3526,11 @@
       <p:sp>
         <p:nvSpPr>
           <p:cNvPr id="7" name="Text 1"/>
-          <p:cNvSpPr/>
+          <p:cNvSpPr>
+            <a:spLocks noGrp="1"/>
+          </p:cNvSpPr>
           <p:nvPr>
-            <p:ph idx="104" type="body" hasCustomPrompt="1"/>
+            <p:ph type="body" idx="104" hasCustomPrompt="1"/>
           </p:nvPr>
         </p:nvSpPr>
         <p:spPr>
@@ -3831,7 +3548,7 @@
           <a:bodyPr wrap="square" lIns="0" tIns="0" rIns="0" bIns="0" rtlCol="0"/>
           <a:lstStyle/>
           <a:p>
-            <a:pPr indent="0" marL="0">
+            <a:pPr marL="0" indent="0">
               <a:buNone/>
             </a:pPr>
             <a:r>
@@ -3849,9 +3566,11 @@
       <p:sp>
         <p:nvSpPr>
           <p:cNvPr id="8" name="Text 1"/>
-          <p:cNvSpPr/>
+          <p:cNvSpPr>
+            <a:spLocks noGrp="1"/>
+          </p:cNvSpPr>
           <p:nvPr>
-            <p:ph idx="105" type="body" hasCustomPrompt="1"/>
+            <p:ph type="body" idx="105" hasCustomPrompt="1"/>
           </p:nvPr>
         </p:nvSpPr>
         <p:spPr>
@@ -3869,7 +3588,7 @@
           <a:bodyPr wrap="square" lIns="0" tIns="0" rIns="0" bIns="0" rtlCol="0"/>
           <a:lstStyle/>
           <a:p>
-            <a:pPr indent="0" marL="0">
+            <a:pPr marL="0" indent="0">
               <a:buNone/>
             </a:pPr>
             <a:r>
@@ -3937,9 +3656,11 @@
       <p:sp>
         <p:nvSpPr>
           <p:cNvPr id="3" name="Text 0"/>
-          <p:cNvSpPr/>
+          <p:cNvSpPr>
+            <a:spLocks noGrp="1"/>
+          </p:cNvSpPr>
           <p:nvPr>
-            <p:ph idx="100" type="body" hasCustomPrompt="1"/>
+            <p:ph type="body" idx="100" hasCustomPrompt="1"/>
           </p:nvPr>
         </p:nvSpPr>
         <p:spPr>
@@ -3957,11 +3678,11 @@
           <a:bodyPr wrap="square" lIns="0" tIns="0" rIns="0" bIns="0" rtlCol="0" anchor="ctr"/>
           <a:lstStyle/>
           <a:p>
-            <a:pPr indent="0" marL="0">
-              <a:buNone/>
-            </a:pPr>
-            <a:r>
-              <a:rPr lang="en-US" sz="1200" b="1" spc="240" kern="0" dirty="0">
+            <a:pPr marL="0" indent="0">
+              <a:buNone/>
+            </a:pPr>
+            <a:r>
+              <a:rPr lang="en-US" sz="1200" b="1" kern="0" spc="240" dirty="0">
                 <a:solidFill>
                   <a:schemeClr val="accent1"/>
                 </a:solidFill>
@@ -3975,9 +3696,11 @@
       <p:sp>
         <p:nvSpPr>
           <p:cNvPr id="4" name="Text 0"/>
-          <p:cNvSpPr/>
+          <p:cNvSpPr>
+            <a:spLocks noGrp="1"/>
+          </p:cNvSpPr>
           <p:nvPr>
-            <p:ph idx="101" type="title" hasCustomPrompt="1"/>
+            <p:ph type="title" idx="101" hasCustomPrompt="1"/>
           </p:nvPr>
         </p:nvSpPr>
         <p:spPr>
@@ -3995,7 +3718,7 @@
           <a:bodyPr wrap="square" lIns="0" tIns="0" rIns="0" bIns="0" rtlCol="0" anchor="ctr"/>
           <a:lstStyle/>
           <a:p>
-            <a:pPr algn="l" indent="0" marL="0">
+            <a:pPr marL="0" indent="0" algn="l">
               <a:buNone/>
             </a:pPr>
             <a:r>
@@ -4013,9 +3736,11 @@
       <p:sp>
         <p:nvSpPr>
           <p:cNvPr id="5" name="Text 0"/>
-          <p:cNvSpPr/>
+          <p:cNvSpPr>
+            <a:spLocks noGrp="1"/>
+          </p:cNvSpPr>
           <p:nvPr>
-            <p:ph idx="102" type="body" hasCustomPrompt="1"/>
+            <p:ph type="body" idx="102" hasCustomPrompt="1"/>
           </p:nvPr>
         </p:nvSpPr>
         <p:spPr>
@@ -4033,7 +3758,7 @@
           <a:bodyPr wrap="square" lIns="0" tIns="0" rIns="0" bIns="0" rtlCol="0" anchor="t"/>
           <a:lstStyle/>
           <a:p>
-            <a:pPr indent="0" marL="0">
+            <a:pPr marL="0" indent="0">
               <a:buNone/>
             </a:pPr>
             <a:r>
@@ -4096,7 +3821,7 @@
           <a:bodyPr wrap="square" lIns="0" tIns="0" rIns="0" bIns="0" rtlCol="0" anchor="ctr"/>
           <a:lstStyle/>
           <a:p>
-            <a:pPr algn="ctr" indent="0" marL="0">
+            <a:pPr marL="0" indent="0" algn="ctr">
               <a:buNone/>
             </a:pPr>
             <a:r>
@@ -4110,7 +3835,7 @@
             <a:endParaRPr lang="en-US" sz="1300" dirty="0"/>
           </a:p>
           <a:p>
-            <a:pPr algn="ctr" indent="0" marL="0">
+            <a:pPr marL="0" indent="0" algn="ctr">
               <a:buNone/>
             </a:pPr>
             <a:r>
@@ -4124,7 +3849,7 @@
             <a:endParaRPr lang="en-US" sz="1300" dirty="0"/>
           </a:p>
           <a:p>
-            <a:pPr algn="ctr" indent="0" marL="0">
+            <a:pPr marL="0" indent="0" algn="ctr">
               <a:buNone/>
             </a:pPr>
             <a:r>
@@ -4165,7 +3890,7 @@
             <a:prstDash val="solid"/>
           </a:ln>
           <a:effectLst>
-            <a:outerShdw sx="100000" sy="100000" kx="0" ky="0" algn="bl" rotWithShape="0" blurRad="76200" dist="25400" dir="5400000">
+            <a:outerShdw blurRad="76200" dist="25400" dir="5400000" algn="bl" rotWithShape="0">
               <a:srgbClr val="6F665F">
                 <a:alpha val="12000"/>
               </a:srgbClr>
@@ -4194,7 +3919,7 @@
           <a:bodyPr wrap="square" lIns="0" tIns="0" rIns="0" bIns="0" rtlCol="0" anchor="t"/>
           <a:lstStyle/>
           <a:p>
-            <a:pPr indent="0" marL="0">
+            <a:pPr marL="0" indent="0">
               <a:buNone/>
             </a:pPr>
             <a:r>
@@ -4230,7 +3955,7 @@
           <a:bodyPr wrap="square" lIns="0" tIns="0" rIns="0" bIns="0" rtlCol="0" anchor="t"/>
           <a:lstStyle/>
           <a:p>
-            <a:pPr indent="0" marL="0">
+            <a:pPr marL="0" indent="0">
               <a:buNone/>
             </a:pPr>
             <a:r>
@@ -4296,7 +4021,7 @@
             <a:prstDash val="solid"/>
           </a:ln>
           <a:effectLst>
-            <a:outerShdw sx="100000" sy="100000" kx="0" ky="0" algn="bl" rotWithShape="0" blurRad="76200" dist="25400" dir="5400000">
+            <a:outerShdw blurRad="76200" dist="25400" dir="5400000" algn="bl" rotWithShape="0">
               <a:srgbClr val="6F665F">
                 <a:alpha val="12000"/>
               </a:srgbClr>
@@ -4325,7 +4050,7 @@
           <a:bodyPr wrap="square" lIns="0" tIns="0" rIns="0" bIns="0" rtlCol="0" anchor="t"/>
           <a:lstStyle/>
           <a:p>
-            <a:pPr indent="0" marL="0">
+            <a:pPr marL="0" indent="0">
               <a:buNone/>
             </a:pPr>
             <a:r>
@@ -4361,7 +4086,7 @@
           <a:bodyPr wrap="square" lIns="0" tIns="0" rIns="0" bIns="0" rtlCol="0" anchor="t"/>
           <a:lstStyle/>
           <a:p>
-            <a:pPr indent="0" marL="0">
+            <a:pPr marL="0" indent="0">
               <a:buNone/>
             </a:pPr>
             <a:r>
@@ -4449,7 +4174,7 @@
           <a:bodyPr wrap="square" lIns="0" tIns="0" rIns="0" bIns="0" rtlCol="0" anchor="t"/>
           <a:lstStyle/>
           <a:p>
-            <a:pPr indent="0" marL="0">
+            <a:pPr marL="0" indent="0">
               <a:buNone/>
             </a:pPr>
             <a:r>
@@ -4485,7 +4210,7 @@
           <a:bodyPr wrap="square" lIns="0" tIns="0" rIns="0" bIns="0" rtlCol="0" anchor="t"/>
           <a:lstStyle/>
           <a:p>
-            <a:pPr indent="0" marL="0">
+            <a:pPr marL="0" indent="0">
               <a:buNone/>
             </a:pPr>
             <a:r>
@@ -4548,7 +4273,7 @@
           <a:bodyPr wrap="square" lIns="0" tIns="0" rIns="0" bIns="0" rtlCol="0" anchor="ctr"/>
           <a:lstStyle/>
           <a:p>
-            <a:pPr algn="ctr" indent="0" marL="0">
+            <a:pPr marL="0" indent="0" algn="ctr">
               <a:buNone/>
             </a:pPr>
             <a:r>
@@ -4611,7 +4336,7 @@
           <a:bodyPr wrap="square" lIns="0" tIns="0" rIns="0" bIns="0" rtlCol="0" anchor="ctr"/>
           <a:lstStyle/>
           <a:p>
-            <a:pPr algn="ctr" indent="0" marL="0">
+            <a:pPr marL="0" indent="0" algn="ctr">
               <a:buNone/>
             </a:pPr>
             <a:r>
@@ -4674,7 +4399,7 @@
           <a:bodyPr wrap="square" lIns="0" tIns="0" rIns="0" bIns="0" rtlCol="0" anchor="ctr"/>
           <a:lstStyle/>
           <a:p>
-            <a:pPr algn="ctr" indent="0" marL="0">
+            <a:pPr marL="0" indent="0" algn="ctr">
               <a:buNone/>
             </a:pPr>
             <a:r>
@@ -4737,7 +4462,7 @@
           <a:bodyPr wrap="square" lIns="0" tIns="0" rIns="0" bIns="0" rtlCol="0" anchor="ctr"/>
           <a:lstStyle/>
           <a:p>
-            <a:pPr algn="ctr" indent="0" marL="0">
+            <a:pPr marL="0" indent="0" algn="ctr">
               <a:buNone/>
             </a:pPr>
             <a:r>
@@ -4803,7 +4528,7 @@
             <a:prstDash val="solid"/>
           </a:ln>
           <a:effectLst>
-            <a:outerShdw sx="100000" sy="100000" kx="0" ky="0" algn="bl" rotWithShape="0" blurRad="76200" dist="25400" dir="5400000">
+            <a:outerShdw blurRad="76200" dist="25400" dir="5400000" algn="bl" rotWithShape="0">
               <a:srgbClr val="6F665F">
                 <a:alpha val="12000"/>
               </a:srgbClr>
@@ -4832,7 +4557,7 @@
           <a:bodyPr wrap="square" lIns="0" tIns="0" rIns="0" bIns="0" rtlCol="0" anchor="t"/>
           <a:lstStyle/>
           <a:p>
-            <a:pPr indent="0" marL="0">
+            <a:pPr marL="0" indent="0">
               <a:buNone/>
             </a:pPr>
             <a:r>
@@ -4868,7 +4593,7 @@
           <a:bodyPr wrap="square" lIns="0" tIns="0" rIns="0" bIns="0" rtlCol="0" anchor="t"/>
           <a:lstStyle/>
           <a:p>
-            <a:pPr indent="0" marL="0">
+            <a:pPr marL="0" indent="0">
               <a:buNone/>
             </a:pPr>
             <a:r>
@@ -4931,7 +4656,7 @@
           <a:bodyPr wrap="square" lIns="0" tIns="0" rIns="0" bIns="0" rtlCol="0" anchor="ctr"/>
           <a:lstStyle/>
           <a:p>
-            <a:pPr algn="ctr" indent="0" marL="0">
+            <a:pPr marL="0" indent="0" algn="ctr">
               <a:buNone/>
             </a:pPr>
             <a:r>
@@ -4945,7 +4670,7 @@
             <a:endParaRPr lang="en-US" sz="1300" dirty="0"/>
           </a:p>
           <a:p>
-            <a:pPr algn="ctr" indent="0" marL="0">
+            <a:pPr marL="0" indent="0" algn="ctr">
               <a:buNone/>
             </a:pPr>
             <a:r>
@@ -4959,7 +4684,7 @@
             <a:endParaRPr lang="en-US" sz="1300" dirty="0"/>
           </a:p>
           <a:p>
-            <a:pPr algn="ctr" indent="0" marL="0">
+            <a:pPr marL="0" indent="0" algn="ctr">
               <a:buNone/>
             </a:pPr>
             <a:r>
@@ -5000,7 +4725,7 @@
             <a:prstDash val="solid"/>
           </a:ln>
           <a:effectLst>
-            <a:outerShdw sx="100000" sy="100000" kx="0" ky="0" algn="bl" rotWithShape="0" blurRad="76200" dist="25400" dir="5400000">
+            <a:outerShdw blurRad="76200" dist="25400" dir="5400000" algn="bl" rotWithShape="0">
               <a:srgbClr val="6F665F">
                 <a:alpha val="12000"/>
               </a:srgbClr>
@@ -5029,7 +4754,7 @@
           <a:bodyPr wrap="square" lIns="0" tIns="0" rIns="0" bIns="0" rtlCol="0" anchor="ctr"/>
           <a:lstStyle/>
           <a:p>
-            <a:pPr indent="0" marL="0">
+            <a:pPr marL="0" indent="0">
               <a:buNone/>
             </a:pPr>
             <a:r>
@@ -5043,7 +4768,7 @@
             <a:endParaRPr lang="en-US" sz="1250" dirty="0"/>
           </a:p>
           <a:p>
-            <a:pPr indent="0" marL="0">
+            <a:pPr marL="0" indent="0">
               <a:buNone/>
             </a:pPr>
             <a:r>
@@ -5084,7 +4809,7 @@
             <a:prstDash val="solid"/>
           </a:ln>
           <a:effectLst>
-            <a:outerShdw sx="100000" sy="100000" kx="0" ky="0" algn="bl" rotWithShape="0" blurRad="76200" dist="25400" dir="5400000">
+            <a:outerShdw blurRad="76200" dist="25400" dir="5400000" algn="bl" rotWithShape="0">
               <a:srgbClr val="6F665F">
                 <a:alpha val="12000"/>
               </a:srgbClr>
@@ -5113,7 +4838,7 @@
           <a:bodyPr wrap="square" lIns="0" tIns="0" rIns="0" bIns="0" rtlCol="0" anchor="ctr"/>
           <a:lstStyle/>
           <a:p>
-            <a:pPr indent="0" marL="0">
+            <a:pPr marL="0" indent="0">
               <a:buNone/>
             </a:pPr>
             <a:r>
@@ -5127,7 +4852,7 @@
             <a:endParaRPr lang="en-US" sz="1250" dirty="0"/>
           </a:p>
           <a:p>
-            <a:pPr indent="0" marL="0">
+            <a:pPr marL="0" indent="0">
               <a:buNone/>
             </a:pPr>
             <a:r>
@@ -5215,7 +4940,7 @@
           <a:bodyPr wrap="square" lIns="0" tIns="0" rIns="0" bIns="0" rtlCol="0" anchor="ctr"/>
           <a:lstStyle/>
           <a:p>
-            <a:pPr indent="0" marL="0">
+            <a:pPr marL="0" indent="0">
               <a:buNone/>
             </a:pPr>
             <a:r>
@@ -5229,7 +4954,7 @@
             <a:endParaRPr lang="en-US" sz="1300" dirty="0"/>
           </a:p>
           <a:p>
-            <a:pPr indent="0" marL="0">
+            <a:pPr marL="0" indent="0">
               <a:buNone/>
             </a:pPr>
             <a:r>
@@ -5243,7 +4968,7 @@
             <a:endParaRPr lang="en-US" sz="1300" dirty="0"/>
           </a:p>
           <a:p>
-            <a:pPr indent="0" marL="0">
+            <a:pPr marL="0" indent="0">
               <a:buNone/>
             </a:pPr>
             <a:r>
@@ -5309,7 +5034,7 @@
             <a:prstDash val="solid"/>
           </a:ln>
           <a:effectLst>
-            <a:outerShdw sx="100000" sy="100000" kx="0" ky="0" algn="bl" rotWithShape="0" blurRad="76200" dist="25400" dir="5400000">
+            <a:outerShdw blurRad="76200" dist="25400" dir="5400000" algn="bl" rotWithShape="0">
               <a:srgbClr val="6F665F">
                 <a:alpha val="12000"/>
               </a:srgbClr>
@@ -5338,7 +5063,7 @@
           <a:bodyPr wrap="square" lIns="0" tIns="0" rIns="0" bIns="0" rtlCol="0" anchor="t"/>
           <a:lstStyle/>
           <a:p>
-            <a:pPr indent="0" marL="0">
+            <a:pPr marL="0" indent="0">
               <a:buNone/>
             </a:pPr>
             <a:r>
@@ -5401,7 +5126,7 @@
           <a:bodyPr wrap="square" lIns="0" tIns="0" rIns="0" bIns="0" rtlCol="0" anchor="ctr"/>
           <a:lstStyle/>
           <a:p>
-            <a:pPr algn="ctr" indent="0" marL="0">
+            <a:pPr marL="0" indent="0" algn="ctr">
               <a:buNone/>
             </a:pPr>
             <a:r>
@@ -5464,7 +5189,7 @@
           <a:bodyPr wrap="square" lIns="0" tIns="0" rIns="0" bIns="0" rtlCol="0" anchor="ctr"/>
           <a:lstStyle/>
           <a:p>
-            <a:pPr algn="ctr" indent="0" marL="0">
+            <a:pPr marL="0" indent="0" algn="ctr">
               <a:buNone/>
             </a:pPr>
             <a:r>
@@ -5527,7 +5252,7 @@
           <a:bodyPr wrap="square" lIns="0" tIns="0" rIns="0" bIns="0" rtlCol="0" anchor="ctr"/>
           <a:lstStyle/>
           <a:p>
-            <a:pPr algn="ctr" indent="0" marL="0">
+            <a:pPr marL="0" indent="0" algn="ctr">
               <a:buNone/>
             </a:pPr>
             <a:r>
@@ -5590,7 +5315,7 @@
           <a:bodyPr wrap="square" lIns="0" tIns="0" rIns="0" bIns="0" rtlCol="0" anchor="ctr"/>
           <a:lstStyle/>
           <a:p>
-            <a:pPr algn="ctr" indent="0" marL="0">
+            <a:pPr marL="0" indent="0" algn="ctr">
               <a:buNone/>
             </a:pPr>
             <a:r>
@@ -5653,7 +5378,7 @@
           <a:bodyPr wrap="square" lIns="0" tIns="0" rIns="0" bIns="0" rtlCol="0" anchor="ctr"/>
           <a:lstStyle/>
           <a:p>
-            <a:pPr algn="ctr" indent="0" marL="0">
+            <a:pPr marL="0" indent="0" algn="ctr">
               <a:buNone/>
             </a:pPr>
             <a:r>
@@ -5689,7 +5414,7 @@
           <a:bodyPr wrap="square" lIns="0" tIns="0" rIns="0" bIns="0" rtlCol="0" anchor="t"/>
           <a:lstStyle/>
           <a:p>
-            <a:pPr indent="0" marL="0">
+            <a:pPr marL="0" indent="0">
               <a:buNone/>
             </a:pPr>
             <a:r>
@@ -5706,7 +5431,7 @@
       </p:sp>
       <p:sp>
         <p:nvSpPr>
-          <p:cNvPr id="25" name="Slide Number Placeholder 0"/>
+          <p:cNvPr id="54" name="Slide Number Placeholder 0"/>
           <p:cNvSpPr>
             <a:spLocks noGrp="1"/>
           </p:cNvSpPr>
@@ -5724,7 +5449,7 @@
           </a:prstGeom>
           <a:extLst>
             <a:ext uri="{C572A759-6A51-4108-AA02-DFA0A04FC94B}">
-              <ma14:wrappingTextBoxFlag xmlns:ma14="http://schemas.microsoft.com/office/mac/drawingml/2011/main" val="0"/>
+              <ma14:wrappingTextBoxFlag xmlns:ma14="http://schemas.microsoft.com/office/mac/drawingml/2011/main" xmlns="" val="0"/>
             </a:ext>
           </a:extLst>
         </p:spPr>
@@ -5742,7 +5467,7 @@
           <a:p>
             <a:pPr algn="r"/>
             <a:fld id="{F7021451-1387-4CA6-816F-3879F97B5CBC}" type="slidenum">
-              <a:rPr b="0" lang="en-US"/>
+              <a:rPr lang="en-US" b="0"/>
               <a:t>10</a:t>
             </a:fld>
             <a:endParaRPr lang="en-US"/>
@@ -5802,9 +5527,11 @@
       <p:sp>
         <p:nvSpPr>
           <p:cNvPr id="3" name="Text 0"/>
-          <p:cNvSpPr/>
+          <p:cNvSpPr>
+            <a:spLocks noGrp="1"/>
+          </p:cNvSpPr>
           <p:nvPr>
-            <p:ph idx="100" type="body" hasCustomPrompt="1"/>
+            <p:ph type="body" idx="100" hasCustomPrompt="1"/>
           </p:nvPr>
         </p:nvSpPr>
         <p:spPr>
@@ -5822,11 +5549,11 @@
           <a:bodyPr wrap="square" lIns="0" tIns="0" rIns="0" bIns="0" rtlCol="0" anchor="ctr"/>
           <a:lstStyle/>
           <a:p>
-            <a:pPr indent="0" marL="0">
-              <a:buNone/>
-            </a:pPr>
-            <a:r>
-              <a:rPr lang="en-US" sz="1200" b="1" spc="240" kern="0" dirty="0">
+            <a:pPr marL="0" indent="0">
+              <a:buNone/>
+            </a:pPr>
+            <a:r>
+              <a:rPr lang="en-US" sz="1200" b="1" kern="0" spc="240" dirty="0">
                 <a:solidFill>
                   <a:schemeClr val="accent1"/>
                 </a:solidFill>
@@ -5840,9 +5567,11 @@
       <p:sp>
         <p:nvSpPr>
           <p:cNvPr id="4" name="Text 0"/>
-          <p:cNvSpPr/>
+          <p:cNvSpPr>
+            <a:spLocks noGrp="1"/>
+          </p:cNvSpPr>
           <p:nvPr>
-            <p:ph idx="101" type="title" hasCustomPrompt="1"/>
+            <p:ph type="title" idx="101" hasCustomPrompt="1"/>
           </p:nvPr>
         </p:nvSpPr>
         <p:spPr>
@@ -5860,7 +5589,7 @@
           <a:bodyPr wrap="square" lIns="0" tIns="0" rIns="0" bIns="0" rtlCol="0" anchor="ctr"/>
           <a:lstStyle/>
           <a:p>
-            <a:pPr algn="l" indent="0" marL="0">
+            <a:pPr marL="0" indent="0" algn="l">
               <a:buNone/>
             </a:pPr>
             <a:r>
@@ -5878,9 +5607,11 @@
       <p:sp>
         <p:nvSpPr>
           <p:cNvPr id="5" name="Text 0"/>
-          <p:cNvSpPr/>
+          <p:cNvSpPr>
+            <a:spLocks noGrp="1"/>
+          </p:cNvSpPr>
           <p:nvPr>
-            <p:ph idx="102" type="body" hasCustomPrompt="1"/>
+            <p:ph type="body" idx="102" hasCustomPrompt="1"/>
           </p:nvPr>
         </p:nvSpPr>
         <p:spPr>
@@ -5898,7 +5629,7 @@
           <a:bodyPr wrap="square" lIns="0" tIns="0" rIns="0" bIns="0" rtlCol="0" anchor="t"/>
           <a:lstStyle/>
           <a:p>
-            <a:pPr indent="0" marL="0">
+            <a:pPr marL="0" indent="0">
               <a:buNone/>
             </a:pPr>
             <a:r>
@@ -6005,7 +5736,7 @@
           <a:bodyPr wrap="square" lIns="0" tIns="0" rIns="0" bIns="0" rtlCol="0" anchor="t"/>
           <a:lstStyle/>
           <a:p>
-            <a:pPr indent="0" marL="0">
+            <a:pPr marL="0" indent="0">
               <a:buNone/>
             </a:pPr>
             <a:r>
@@ -6041,7 +5772,7 @@
           <a:bodyPr wrap="square" lIns="0" tIns="0" rIns="0" bIns="0" rtlCol="0" anchor="t"/>
           <a:lstStyle/>
           <a:p>
-            <a:pPr indent="0" marL="0">
+            <a:pPr marL="0" indent="0">
               <a:buNone/>
             </a:pPr>
             <a:r>
@@ -6077,7 +5808,7 @@
           <a:bodyPr wrap="square" lIns="0" tIns="0" rIns="0" bIns="0" rtlCol="0" anchor="t"/>
           <a:lstStyle/>
           <a:p>
-            <a:pPr indent="0" marL="0">
+            <a:pPr marL="0" indent="0">
               <a:buNone/>
             </a:pPr>
             <a:r>
@@ -6113,7 +5844,7 @@
           <a:bodyPr wrap="square" lIns="0" tIns="0" rIns="0" bIns="0" rtlCol="0" anchor="t"/>
           <a:lstStyle/>
           <a:p>
-            <a:pPr algn="r" indent="0" marL="0">
+            <a:pPr marL="0" indent="0" algn="r">
               <a:buNone/>
             </a:pPr>
             <a:r>
@@ -6174,7 +5905,7 @@
           <a:bodyPr wrap="square" lIns="0" tIns="0" rIns="0" bIns="0" rtlCol="0" anchor="ctr"/>
           <a:lstStyle/>
           <a:p>
-            <a:pPr algn="ctr" indent="0" marL="0">
+            <a:pPr marL="0" indent="0" algn="ctr">
               <a:buNone/>
             </a:pPr>
             <a:r>
@@ -6188,7 +5919,7 @@
             <a:endParaRPr lang="en-US" sz="1050" dirty="0"/>
           </a:p>
           <a:p>
-            <a:pPr algn="ctr" indent="0" marL="0">
+            <a:pPr marL="0" indent="0" algn="ctr">
               <a:buNone/>
             </a:pPr>
             <a:r>
@@ -6249,7 +5980,7 @@
           <a:bodyPr wrap="square" lIns="0" tIns="0" rIns="0" bIns="0" rtlCol="0" anchor="ctr"/>
           <a:lstStyle/>
           <a:p>
-            <a:pPr algn="ctr" indent="0" marL="0">
+            <a:pPr marL="0" indent="0" algn="ctr">
               <a:buNone/>
             </a:pPr>
             <a:r>
@@ -6310,7 +6041,7 @@
           <a:bodyPr wrap="square" lIns="0" tIns="0" rIns="0" bIns="0" rtlCol="0" anchor="ctr"/>
           <a:lstStyle/>
           <a:p>
-            <a:pPr algn="ctr" indent="0" marL="0">
+            <a:pPr marL="0" indent="0" algn="ctr">
               <a:buNone/>
             </a:pPr>
             <a:r>
@@ -6324,7 +6055,7 @@
             <a:endParaRPr lang="en-US" sz="1050" dirty="0"/>
           </a:p>
           <a:p>
-            <a:pPr algn="ctr" indent="0" marL="0">
+            <a:pPr marL="0" indent="0" algn="ctr">
               <a:buNone/>
             </a:pPr>
             <a:r>
@@ -6385,7 +6116,7 @@
           <a:bodyPr wrap="square" lIns="0" tIns="0" rIns="0" bIns="0" rtlCol="0" anchor="ctr"/>
           <a:lstStyle/>
           <a:p>
-            <a:pPr algn="ctr" indent="0" marL="0">
+            <a:pPr marL="0" indent="0" algn="ctr">
               <a:buNone/>
             </a:pPr>
             <a:r>
@@ -6402,7 +6133,7 @@
       </p:sp>
       <p:graphicFrame>
         <p:nvGraphicFramePr>
-          <p:cNvPr id="12" name="comparison"/>
+          <p:cNvPr id="21" name="comparison"/>
           <p:cNvGraphicFramePr>
             <a:graphicFrameLocks noGrp="1"/>
           </p:cNvGraphicFramePr>
@@ -6416,17 +6147,41 @@
         </p:nvGraphicFramePr>
         <p:xfrm>
           <a:off x="6355080" y="2103120"/>
-          <a:ext cx="5148072" cy="914400"/>
+          <a:ext cx="5148072" cy="3401568"/>
         </p:xfrm>
         <a:graphic>
           <a:graphicData uri="http://schemas.openxmlformats.org/drawingml/2006/table">
             <a:tbl>
               <a:tblPr/>
               <a:tblGrid>
-                <a:gridCol w="1234440"/>
-                <a:gridCol w="1234440"/>
-                <a:gridCol w="1234440"/>
-                <a:gridCol w="1444752"/>
+                <a:gridCol w="1234440">
+                  <a:extLst>
+                    <a:ext uri="{9D8B030D-6E8A-4147-A177-3AD203B41FA5}">
+                      <a16:colId xmlns:a16="http://schemas.microsoft.com/office/drawing/2014/main" val="20000"/>
+                    </a:ext>
+                  </a:extLst>
+                </a:gridCol>
+                <a:gridCol w="1234440">
+                  <a:extLst>
+                    <a:ext uri="{9D8B030D-6E8A-4147-A177-3AD203B41FA5}">
+                      <a16:colId xmlns:a16="http://schemas.microsoft.com/office/drawing/2014/main" val="20001"/>
+                    </a:ext>
+                  </a:extLst>
+                </a:gridCol>
+                <a:gridCol w="1234440">
+                  <a:extLst>
+                    <a:ext uri="{9D8B030D-6E8A-4147-A177-3AD203B41FA5}">
+                      <a16:colId xmlns:a16="http://schemas.microsoft.com/office/drawing/2014/main" val="20002"/>
+                    </a:ext>
+                  </a:extLst>
+                </a:gridCol>
+                <a:gridCol w="1444752">
+                  <a:extLst>
+                    <a:ext uri="{9D8B030D-6E8A-4147-A177-3AD203B41FA5}">
+                      <a16:colId xmlns:a16="http://schemas.microsoft.com/office/drawing/2014/main" val="20003"/>
+                    </a:ext>
+                  </a:extLst>
+                </a:gridCol>
               </a:tblGrid>
               <a:tr h="566928">
                 <a:tc>
@@ -6434,7 +6189,7 @@
                     <a:bodyPr/>
                     <a:lstStyle/>
                     <a:p>
-                      <a:pPr algn="ctr" indent="0" marL="0">
+                      <a:pPr marL="0" indent="0" algn="ctr">
                         <a:buNone/>
                       </a:pPr>
                       <a:endParaRPr lang="en-US" sz="1100" dirty="0"/>
@@ -6487,7 +6242,7 @@
                     <a:bodyPr/>
                     <a:lstStyle/>
                     <a:p>
-                      <a:pPr algn="ctr" indent="0" marL="0">
+                      <a:pPr marL="0" indent="0" algn="ctr">
                         <a:buNone/>
                       </a:pPr>
                       <a:r>
@@ -6548,7 +6303,7 @@
                     <a:bodyPr/>
                     <a:lstStyle/>
                     <a:p>
-                      <a:pPr algn="ctr" indent="0" marL="0">
+                      <a:pPr marL="0" indent="0" algn="ctr">
                         <a:buNone/>
                       </a:pPr>
                       <a:r>
@@ -6609,7 +6364,7 @@
                     <a:bodyPr/>
                     <a:lstStyle/>
                     <a:p>
-                      <a:pPr algn="ctr" indent="0" marL="0">
+                      <a:pPr marL="0" indent="0" algn="ctr">
                         <a:buNone/>
                       </a:pPr>
                       <a:r>
@@ -6665,6 +6420,11 @@
                     </a:solidFill>
                   </a:tcPr>
                 </a:tc>
+                <a:extLst>
+                  <a:ext uri="{0D108BD9-81ED-4DB2-BD59-A6C34878D82A}">
+                    <a16:rowId xmlns:a16="http://schemas.microsoft.com/office/drawing/2014/main" val="10000"/>
+                  </a:ext>
+                </a:extLst>
               </a:tr>
               <a:tr h="566928">
                 <a:tc>
@@ -6672,7 +6432,7 @@
                     <a:bodyPr/>
                     <a:lstStyle/>
                     <a:p>
-                      <a:pPr indent="0" marL="0">
+                      <a:pPr marL="0" indent="0">
                         <a:buNone/>
                       </a:pPr>
                       <a:r>
@@ -6733,7 +6493,7 @@
                     <a:bodyPr/>
                     <a:lstStyle/>
                     <a:p>
-                      <a:pPr algn="ctr" indent="0" marL="0">
+                      <a:pPr marL="0" indent="0" algn="ctr">
                         <a:buNone/>
                       </a:pPr>
                       <a:r>
@@ -6794,7 +6554,7 @@
                     <a:bodyPr/>
                     <a:lstStyle/>
                     <a:p>
-                      <a:pPr algn="ctr" indent="0" marL="0">
+                      <a:pPr marL="0" indent="0" algn="ctr">
                         <a:buNone/>
                       </a:pPr>
                       <a:r>
@@ -6855,7 +6615,7 @@
                     <a:bodyPr/>
                     <a:lstStyle/>
                     <a:p>
-                      <a:pPr algn="ctr" indent="0" marL="0">
+                      <a:pPr marL="0" indent="0" algn="ctr">
                         <a:buNone/>
                       </a:pPr>
                       <a:r>
@@ -6911,6 +6671,11 @@
                     </a:solidFill>
                   </a:tcPr>
                 </a:tc>
+                <a:extLst>
+                  <a:ext uri="{0D108BD9-81ED-4DB2-BD59-A6C34878D82A}">
+                    <a16:rowId xmlns:a16="http://schemas.microsoft.com/office/drawing/2014/main" val="10001"/>
+                  </a:ext>
+                </a:extLst>
               </a:tr>
               <a:tr h="566928">
                 <a:tc>
@@ -6918,7 +6683,7 @@
                     <a:bodyPr/>
                     <a:lstStyle/>
                     <a:p>
-                      <a:pPr indent="0" marL="0">
+                      <a:pPr marL="0" indent="0">
                         <a:buNone/>
                       </a:pPr>
                       <a:r>
@@ -6979,7 +6744,7 @@
                     <a:bodyPr/>
                     <a:lstStyle/>
                     <a:p>
-                      <a:pPr algn="ctr" indent="0" marL="0">
+                      <a:pPr marL="0" indent="0" algn="ctr">
                         <a:buNone/>
                       </a:pPr>
                       <a:r>
@@ -7040,7 +6805,7 @@
                     <a:bodyPr/>
                     <a:lstStyle/>
                     <a:p>
-                      <a:pPr algn="ctr" indent="0" marL="0">
+                      <a:pPr marL="0" indent="0" algn="ctr">
                         <a:buNone/>
                       </a:pPr>
                       <a:r>
@@ -7101,7 +6866,7 @@
                     <a:bodyPr/>
                     <a:lstStyle/>
                     <a:p>
-                      <a:pPr algn="ctr" indent="0" marL="0">
+                      <a:pPr marL="0" indent="0" algn="ctr">
                         <a:buNone/>
                       </a:pPr>
                       <a:r>
@@ -7157,6 +6922,11 @@
                     </a:solidFill>
                   </a:tcPr>
                 </a:tc>
+                <a:extLst>
+                  <a:ext uri="{0D108BD9-81ED-4DB2-BD59-A6C34878D82A}">
+                    <a16:rowId xmlns:a16="http://schemas.microsoft.com/office/drawing/2014/main" val="10002"/>
+                  </a:ext>
+                </a:extLst>
               </a:tr>
               <a:tr h="566928">
                 <a:tc>
@@ -7164,7 +6934,7 @@
                     <a:bodyPr/>
                     <a:lstStyle/>
                     <a:p>
-                      <a:pPr indent="0" marL="0">
+                      <a:pPr marL="0" indent="0">
                         <a:buNone/>
                       </a:pPr>
                       <a:r>
@@ -7225,7 +6995,7 @@
                     <a:bodyPr/>
                     <a:lstStyle/>
                     <a:p>
-                      <a:pPr algn="ctr" indent="0" marL="0">
+                      <a:pPr marL="0" indent="0" algn="ctr">
                         <a:buNone/>
                       </a:pPr>
                       <a:r>
@@ -7286,7 +7056,7 @@
                     <a:bodyPr/>
                     <a:lstStyle/>
                     <a:p>
-                      <a:pPr algn="ctr" indent="0" marL="0">
+                      <a:pPr marL="0" indent="0" algn="ctr">
                         <a:buNone/>
                       </a:pPr>
                       <a:r>
@@ -7347,7 +7117,7 @@
                     <a:bodyPr/>
                     <a:lstStyle/>
                     <a:p>
-                      <a:pPr algn="ctr" indent="0" marL="0">
+                      <a:pPr marL="0" indent="0" algn="ctr">
                         <a:buNone/>
                       </a:pPr>
                       <a:r>
@@ -7403,6 +7173,11 @@
                     </a:solidFill>
                   </a:tcPr>
                 </a:tc>
+                <a:extLst>
+                  <a:ext uri="{0D108BD9-81ED-4DB2-BD59-A6C34878D82A}">
+                    <a16:rowId xmlns:a16="http://schemas.microsoft.com/office/drawing/2014/main" val="10003"/>
+                  </a:ext>
+                </a:extLst>
               </a:tr>
               <a:tr h="566928">
                 <a:tc>
@@ -7410,7 +7185,7 @@
                     <a:bodyPr/>
                     <a:lstStyle/>
                     <a:p>
-                      <a:pPr indent="0" marL="0">
+                      <a:pPr marL="0" indent="0">
                         <a:buNone/>
                       </a:pPr>
                       <a:r>
@@ -7471,7 +7246,7 @@
                     <a:bodyPr/>
                     <a:lstStyle/>
                     <a:p>
-                      <a:pPr algn="ctr" indent="0" marL="0">
+                      <a:pPr marL="0" indent="0" algn="ctr">
                         <a:buNone/>
                       </a:pPr>
                       <a:r>
@@ -7532,7 +7307,7 @@
                     <a:bodyPr/>
                     <a:lstStyle/>
                     <a:p>
-                      <a:pPr algn="ctr" indent="0" marL="0">
+                      <a:pPr marL="0" indent="0" algn="ctr">
                         <a:buNone/>
                       </a:pPr>
                       <a:r>
@@ -7593,7 +7368,7 @@
                     <a:bodyPr/>
                     <a:lstStyle/>
                     <a:p>
-                      <a:pPr algn="ctr" indent="0" marL="0">
+                      <a:pPr marL="0" indent="0" algn="ctr">
                         <a:buNone/>
                       </a:pPr>
                       <a:r>
@@ -7649,6 +7424,11 @@
                     </a:solidFill>
                   </a:tcPr>
                 </a:tc>
+                <a:extLst>
+                  <a:ext uri="{0D108BD9-81ED-4DB2-BD59-A6C34878D82A}">
+                    <a16:rowId xmlns:a16="http://schemas.microsoft.com/office/drawing/2014/main" val="10004"/>
+                  </a:ext>
+                </a:extLst>
               </a:tr>
               <a:tr h="566928">
                 <a:tc>
@@ -7656,7 +7436,7 @@
                     <a:bodyPr/>
                     <a:lstStyle/>
                     <a:p>
-                      <a:pPr indent="0" marL="0">
+                      <a:pPr marL="0" indent="0">
                         <a:buNone/>
                       </a:pPr>
                       <a:r>
@@ -7717,7 +7497,7 @@
                     <a:bodyPr/>
                     <a:lstStyle/>
                     <a:p>
-                      <a:pPr algn="ctr" indent="0" marL="0">
+                      <a:pPr marL="0" indent="0" algn="ctr">
                         <a:buNone/>
                       </a:pPr>
                       <a:r>
@@ -7778,7 +7558,7 @@
                     <a:bodyPr/>
                     <a:lstStyle/>
                     <a:p>
-                      <a:pPr algn="ctr" indent="0" marL="0">
+                      <a:pPr marL="0" indent="0" algn="ctr">
                         <a:buNone/>
                       </a:pPr>
                       <a:r>
@@ -7839,7 +7619,7 @@
                     <a:bodyPr/>
                     <a:lstStyle/>
                     <a:p>
-                      <a:pPr algn="ctr" indent="0" marL="0">
+                      <a:pPr marL="0" indent="0" algn="ctr">
                         <a:buNone/>
                       </a:pPr>
                       <a:r>
@@ -7895,6 +7675,11 @@
                     </a:solidFill>
                   </a:tcPr>
                 </a:tc>
+                <a:extLst>
+                  <a:ext uri="{0D108BD9-81ED-4DB2-BD59-A6C34878D82A}">
+                    <a16:rowId xmlns:a16="http://schemas.microsoft.com/office/drawing/2014/main" val="10005"/>
+                  </a:ext>
+                </a:extLst>
               </a:tr>
             </a:tbl>
           </a:graphicData>
@@ -7921,7 +7706,7 @@
           <a:bodyPr wrap="square" lIns="0" tIns="0" rIns="0" bIns="0" rtlCol="0" anchor="t"/>
           <a:lstStyle/>
           <a:p>
-            <a:pPr indent="0" marL="0">
+            <a:pPr marL="0" indent="0">
               <a:buNone/>
             </a:pPr>
             <a:r>
@@ -7956,7 +7741,7 @@
           </a:prstGeom>
           <a:extLst>
             <a:ext uri="{C572A759-6A51-4108-AA02-DFA0A04FC94B}">
-              <ma14:wrappingTextBoxFlag xmlns:ma14="http://schemas.microsoft.com/office/mac/drawingml/2011/main" val="0"/>
+              <ma14:wrappingTextBoxFlag xmlns:ma14="http://schemas.microsoft.com/office/mac/drawingml/2011/main" xmlns="" val="0"/>
             </a:ext>
           </a:extLst>
         </p:spPr>
@@ -7974,7 +7759,7 @@
           <a:p>
             <a:pPr algn="r"/>
             <a:fld id="{F7021451-1387-4CA6-816F-3879F97B5CBC}" type="slidenum">
-              <a:rPr b="0" lang="en-US"/>
+              <a:rPr lang="en-US" b="0"/>
               <a:t>11</a:t>
             </a:fld>
             <a:endParaRPr lang="en-US"/>
@@ -8034,9 +7819,11 @@
       <p:sp>
         <p:nvSpPr>
           <p:cNvPr id="3" name="Text 0"/>
-          <p:cNvSpPr/>
+          <p:cNvSpPr>
+            <a:spLocks noGrp="1"/>
+          </p:cNvSpPr>
           <p:nvPr>
-            <p:ph idx="100" type="body" hasCustomPrompt="1"/>
+            <p:ph type="body" idx="100" hasCustomPrompt="1"/>
           </p:nvPr>
         </p:nvSpPr>
         <p:spPr>
@@ -8054,11 +7841,11 @@
           <a:bodyPr wrap="square" lIns="0" tIns="0" rIns="0" bIns="0" rtlCol="0" anchor="ctr"/>
           <a:lstStyle/>
           <a:p>
-            <a:pPr indent="0" marL="0">
-              <a:buNone/>
-            </a:pPr>
-            <a:r>
-              <a:rPr lang="en-US" sz="1200" b="1" spc="240" kern="0" dirty="0">
+            <a:pPr marL="0" indent="0">
+              <a:buNone/>
+            </a:pPr>
+            <a:r>
+              <a:rPr lang="en-US" sz="1200" b="1" kern="0" spc="240" dirty="0">
                 <a:solidFill>
                   <a:schemeClr val="accent1"/>
                 </a:solidFill>
@@ -8072,9 +7859,11 @@
       <p:sp>
         <p:nvSpPr>
           <p:cNvPr id="4" name="Text 0"/>
-          <p:cNvSpPr/>
+          <p:cNvSpPr>
+            <a:spLocks noGrp="1"/>
+          </p:cNvSpPr>
           <p:nvPr>
-            <p:ph idx="101" type="title" hasCustomPrompt="1"/>
+            <p:ph type="title" idx="101" hasCustomPrompt="1"/>
           </p:nvPr>
         </p:nvSpPr>
         <p:spPr>
@@ -8092,7 +7881,7 @@
           <a:bodyPr wrap="square" lIns="0" tIns="0" rIns="0" bIns="0" rtlCol="0" anchor="ctr"/>
           <a:lstStyle/>
           <a:p>
-            <a:pPr algn="l" indent="0" marL="0">
+            <a:pPr marL="0" indent="0" algn="l">
               <a:buNone/>
             </a:pPr>
             <a:r>
@@ -8110,9 +7899,11 @@
       <p:sp>
         <p:nvSpPr>
           <p:cNvPr id="5" name="Text 0"/>
-          <p:cNvSpPr/>
+          <p:cNvSpPr>
+            <a:spLocks noGrp="1"/>
+          </p:cNvSpPr>
           <p:nvPr>
-            <p:ph idx="102" type="body" hasCustomPrompt="1"/>
+            <p:ph type="body" idx="102" hasCustomPrompt="1"/>
           </p:nvPr>
         </p:nvSpPr>
         <p:spPr>
@@ -8130,7 +7921,7 @@
           <a:bodyPr wrap="square" lIns="0" tIns="0" rIns="0" bIns="0" rtlCol="0" anchor="t"/>
           <a:lstStyle/>
           <a:p>
-            <a:pPr indent="0" marL="0">
+            <a:pPr marL="0" indent="0">
               <a:buNone/>
             </a:pPr>
             <a:r>
@@ -8171,7 +7962,7 @@
             <a:prstDash val="solid"/>
           </a:ln>
           <a:effectLst>
-            <a:outerShdw sx="100000" sy="100000" kx="0" ky="0" algn="bl" rotWithShape="0" blurRad="76200" dist="25400" dir="5400000">
+            <a:outerShdw blurRad="76200" dist="25400" dir="5400000" algn="bl" rotWithShape="0">
               <a:srgbClr val="6F665F">
                 <a:alpha val="12000"/>
               </a:srgbClr>
@@ -8225,7 +8016,7 @@
           <a:bodyPr wrap="square" lIns="0" tIns="0" rIns="0" bIns="0" rtlCol="0" anchor="ctr"/>
           <a:lstStyle/>
           <a:p>
-            <a:pPr algn="ctr" indent="0" marL="0">
+            <a:pPr marL="0" indent="0" algn="ctr">
               <a:buNone/>
             </a:pPr>
             <a:endParaRPr lang="en-US" sz="1300" dirty="0"/>
@@ -8234,14 +8025,14 @@
       </p:sp>
       <p:pic>
         <p:nvPicPr>
-          <p:cNvPr id="9" name="Image 0" descr="preencoded.png">    </p:cNvPr>
+          <p:cNvPr id="9" name="Image 0" descr="preencoded.png"/>
           <p:cNvPicPr>
             <a:picLocks noChangeAspect="1"/>
           </p:cNvPicPr>
           <p:nvPr/>
         </p:nvPicPr>
         <p:blipFill>
-          <a:blip r:embed="rId1"/>
+          <a:blip r:embed="rId3"/>
           <a:stretch>
             <a:fillRect/>
           </a:stretch>
@@ -8304,7 +8095,7 @@
           <a:bodyPr wrap="square" lIns="0" tIns="0" rIns="0" bIns="0" rtlCol="0" anchor="ctr"/>
           <a:lstStyle/>
           <a:p>
-            <a:pPr algn="ctr" indent="0" marL="0">
+            <a:pPr marL="0" indent="0" algn="ctr">
               <a:buNone/>
             </a:pPr>
             <a:r>
@@ -8340,7 +8131,7 @@
           <a:bodyPr wrap="square" lIns="0" tIns="0" rIns="0" bIns="0" rtlCol="0" anchor="t"/>
           <a:lstStyle/>
           <a:p>
-            <a:pPr indent="0" marL="0">
+            <a:pPr marL="0" indent="0">
               <a:buNone/>
             </a:pPr>
             <a:r>
@@ -8376,7 +8167,7 @@
           <a:bodyPr wrap="square" lIns="0" tIns="0" rIns="0" bIns="0" rtlCol="0" anchor="t"/>
           <a:lstStyle/>
           <a:p>
-            <a:pPr indent="0" marL="0">
+            <a:pPr marL="0" indent="0">
               <a:buNone/>
             </a:pPr>
             <a:r>
@@ -8385,7 +8176,7 @@
                   <a:schemeClr val="accent2"/>
                 </a:solidFill>
               </a:rPr>
-              <a:t>年商10〜100億円／M&amp;Aで成長したい</a:t>
+              <a:t>年商3〜100億円／M&amp;Aで成長したい</a:t>
             </a:r>
             <a:endParaRPr lang="en-US" sz="1050" dirty="0"/>
           </a:p>
@@ -8412,7 +8203,7 @@
           <a:bodyPr wrap="square" lIns="0" tIns="0" rIns="0" bIns="0" rtlCol="0" anchor="t"/>
           <a:lstStyle/>
           <a:p>
-            <a:pPr indent="0" marL="0">
+            <a:pPr marL="0" indent="0">
               <a:buNone/>
             </a:pPr>
             <a:r>
@@ -8426,7 +8217,7 @@
             <a:endParaRPr lang="en-US" sz="1200" dirty="0"/>
           </a:p>
           <a:p>
-            <a:pPr indent="0" marL="0">
+            <a:pPr marL="0" indent="0">
               <a:buNone/>
             </a:pPr>
             <a:r>
@@ -8440,7 +8231,7 @@
             <a:endParaRPr lang="en-US" sz="1200" dirty="0"/>
           </a:p>
           <a:p>
-            <a:pPr indent="0" marL="0">
+            <a:pPr marL="0" indent="0">
               <a:buNone/>
             </a:pPr>
             <a:r>
@@ -8454,7 +8245,7 @@
             <a:endParaRPr lang="en-US" sz="1200" dirty="0"/>
           </a:p>
           <a:p>
-            <a:pPr indent="0" marL="0">
+            <a:pPr marL="0" indent="0">
               <a:buNone/>
             </a:pPr>
             <a:r>
@@ -8468,7 +8259,7 @@
             <a:endParaRPr lang="en-US" sz="1200" dirty="0"/>
           </a:p>
           <a:p>
-            <a:pPr indent="0" marL="0">
+            <a:pPr marL="0" indent="0">
               <a:buNone/>
             </a:pPr>
             <a:r>
@@ -8509,7 +8300,7 @@
             <a:prstDash val="solid"/>
           </a:ln>
           <a:effectLst>
-            <a:outerShdw sx="100000" sy="100000" kx="0" ky="0" algn="bl" rotWithShape="0" blurRad="76200" dist="25400" dir="5400000">
+            <a:outerShdw blurRad="76200" dist="25400" dir="5400000" algn="bl" rotWithShape="0">
               <a:srgbClr val="6F665F">
                 <a:alpha val="12000"/>
               </a:srgbClr>
@@ -8563,7 +8354,7 @@
           <a:bodyPr wrap="square" lIns="0" tIns="0" rIns="0" bIns="0" rtlCol="0" anchor="ctr"/>
           <a:lstStyle/>
           <a:p>
-            <a:pPr algn="ctr" indent="0" marL="0">
+            <a:pPr marL="0" indent="0" algn="ctr">
               <a:buNone/>
             </a:pPr>
             <a:endParaRPr lang="en-US" sz="1300" dirty="0"/>
@@ -8572,14 +8363,14 @@
       </p:sp>
       <p:pic>
         <p:nvPicPr>
-          <p:cNvPr id="18" name="Image 1" descr="preencoded.png">    </p:cNvPr>
+          <p:cNvPr id="18" name="Image 1" descr="preencoded.png"/>
           <p:cNvPicPr>
             <a:picLocks noChangeAspect="1"/>
           </p:cNvPicPr>
           <p:nvPr/>
         </p:nvPicPr>
         <p:blipFill>
-          <a:blip r:embed="rId2"/>
+          <a:blip r:embed="rId4"/>
           <a:stretch>
             <a:fillRect/>
           </a:stretch>
@@ -8642,7 +8433,7 @@
           <a:bodyPr wrap="square" lIns="0" tIns="0" rIns="0" bIns="0" rtlCol="0" anchor="ctr"/>
           <a:lstStyle/>
           <a:p>
-            <a:pPr algn="ctr" indent="0" marL="0">
+            <a:pPr marL="0" indent="0" algn="ctr">
               <a:buNone/>
             </a:pPr>
             <a:r>
@@ -8678,7 +8469,7 @@
           <a:bodyPr wrap="square" lIns="0" tIns="0" rIns="0" bIns="0" rtlCol="0" anchor="t"/>
           <a:lstStyle/>
           <a:p>
-            <a:pPr indent="0" marL="0">
+            <a:pPr marL="0" indent="0">
               <a:buNone/>
             </a:pPr>
             <a:r>
@@ -8714,7 +8505,7 @@
           <a:bodyPr wrap="square" lIns="0" tIns="0" rIns="0" bIns="0" rtlCol="0" anchor="t"/>
           <a:lstStyle/>
           <a:p>
-            <a:pPr indent="0" marL="0">
+            <a:pPr marL="0" indent="0">
               <a:buNone/>
             </a:pPr>
             <a:r>
@@ -8750,7 +8541,7 @@
           <a:bodyPr wrap="square" lIns="0" tIns="0" rIns="0" bIns="0" rtlCol="0" anchor="t"/>
           <a:lstStyle/>
           <a:p>
-            <a:pPr indent="0" marL="0">
+            <a:pPr marL="0" indent="0">
               <a:buNone/>
             </a:pPr>
             <a:r>
@@ -8764,7 +8555,7 @@
             <a:endParaRPr lang="en-US" sz="1200" dirty="0"/>
           </a:p>
           <a:p>
-            <a:pPr indent="0" marL="0">
+            <a:pPr marL="0" indent="0">
               <a:buNone/>
             </a:pPr>
             <a:r>
@@ -8778,7 +8569,7 @@
             <a:endParaRPr lang="en-US" sz="1200" dirty="0"/>
           </a:p>
           <a:p>
-            <a:pPr indent="0" marL="0">
+            <a:pPr marL="0" indent="0">
               <a:buNone/>
             </a:pPr>
             <a:r>
@@ -8792,7 +8583,7 @@
             <a:endParaRPr lang="en-US" sz="1200" dirty="0"/>
           </a:p>
           <a:p>
-            <a:pPr indent="0" marL="0">
+            <a:pPr marL="0" indent="0">
               <a:buNone/>
             </a:pPr>
             <a:r>
@@ -8806,7 +8597,7 @@
             <a:endParaRPr lang="en-US" sz="1200" dirty="0"/>
           </a:p>
           <a:p>
-            <a:pPr indent="0" marL="0">
+            <a:pPr marL="0" indent="0">
               <a:buNone/>
             </a:pPr>
             <a:r>
@@ -8847,7 +8638,7 @@
             <a:prstDash val="solid"/>
           </a:ln>
           <a:effectLst>
-            <a:outerShdw sx="100000" sy="100000" kx="0" ky="0" algn="bl" rotWithShape="0" blurRad="76200" dist="25400" dir="5400000">
+            <a:outerShdw blurRad="76200" dist="25400" dir="5400000" algn="bl" rotWithShape="0">
               <a:srgbClr val="6F665F">
                 <a:alpha val="12000"/>
               </a:srgbClr>
@@ -8901,7 +8692,7 @@
           <a:bodyPr wrap="square" lIns="0" tIns="0" rIns="0" bIns="0" rtlCol="0" anchor="ctr"/>
           <a:lstStyle/>
           <a:p>
-            <a:pPr algn="ctr" indent="0" marL="0">
+            <a:pPr marL="0" indent="0" algn="ctr">
               <a:buNone/>
             </a:pPr>
             <a:endParaRPr lang="en-US" sz="1300" dirty="0"/>
@@ -8910,14 +8701,14 @@
       </p:sp>
       <p:pic>
         <p:nvPicPr>
-          <p:cNvPr id="27" name="Image 2" descr="preencoded.png">    </p:cNvPr>
+          <p:cNvPr id="27" name="Image 2" descr="preencoded.png"/>
           <p:cNvPicPr>
             <a:picLocks noChangeAspect="1"/>
           </p:cNvPicPr>
           <p:nvPr/>
         </p:nvPicPr>
         <p:blipFill>
-          <a:blip r:embed="rId3"/>
+          <a:blip r:embed="rId5"/>
           <a:stretch>
             <a:fillRect/>
           </a:stretch>
@@ -8980,7 +8771,7 @@
           <a:bodyPr wrap="square" lIns="0" tIns="0" rIns="0" bIns="0" rtlCol="0" anchor="ctr"/>
           <a:lstStyle/>
           <a:p>
-            <a:pPr algn="ctr" indent="0" marL="0">
+            <a:pPr marL="0" indent="0" algn="ctr">
               <a:buNone/>
             </a:pPr>
             <a:r>
@@ -9016,7 +8807,7 @@
           <a:bodyPr wrap="square" lIns="0" tIns="0" rIns="0" bIns="0" rtlCol="0" anchor="t"/>
           <a:lstStyle/>
           <a:p>
-            <a:pPr indent="0" marL="0">
+            <a:pPr marL="0" indent="0">
               <a:buNone/>
             </a:pPr>
             <a:r>
@@ -9052,7 +8843,7 @@
           <a:bodyPr wrap="square" lIns="0" tIns="0" rIns="0" bIns="0" rtlCol="0" anchor="t"/>
           <a:lstStyle/>
           <a:p>
-            <a:pPr indent="0" marL="0">
+            <a:pPr marL="0" indent="0">
               <a:buNone/>
             </a:pPr>
             <a:r>
@@ -9088,7 +8879,7 @@
           <a:bodyPr wrap="square" lIns="0" tIns="0" rIns="0" bIns="0" rtlCol="0" anchor="t"/>
           <a:lstStyle/>
           <a:p>
-            <a:pPr indent="0" marL="0">
+            <a:pPr marL="0" indent="0">
               <a:buNone/>
             </a:pPr>
             <a:r>
@@ -9102,7 +8893,7 @@
             <a:endParaRPr lang="en-US" sz="1200" dirty="0"/>
           </a:p>
           <a:p>
-            <a:pPr indent="0" marL="0">
+            <a:pPr marL="0" indent="0">
               <a:buNone/>
             </a:pPr>
             <a:r>
@@ -9116,7 +8907,7 @@
             <a:endParaRPr lang="en-US" sz="1200" dirty="0"/>
           </a:p>
           <a:p>
-            <a:pPr indent="0" marL="0">
+            <a:pPr marL="0" indent="0">
               <a:buNone/>
             </a:pPr>
             <a:r>
@@ -9130,7 +8921,7 @@
             <a:endParaRPr lang="en-US" sz="1200" dirty="0"/>
           </a:p>
           <a:p>
-            <a:pPr indent="0" marL="0">
+            <a:pPr marL="0" indent="0">
               <a:buNone/>
             </a:pPr>
             <a:r>
@@ -9144,7 +8935,7 @@
             <a:endParaRPr lang="en-US" sz="1200" dirty="0"/>
           </a:p>
           <a:p>
-            <a:pPr indent="0" marL="0">
+            <a:pPr marL="0" indent="0">
               <a:buNone/>
             </a:pPr>
             <a:r>
@@ -9161,7 +8952,7 @@
       </p:sp>
       <p:sp>
         <p:nvSpPr>
-          <p:cNvPr id="25" name="Slide Number Placeholder 0"/>
+          <p:cNvPr id="33" name="Slide Number Placeholder 0"/>
           <p:cNvSpPr>
             <a:spLocks noGrp="1"/>
           </p:cNvSpPr>
@@ -9179,7 +8970,7 @@
           </a:prstGeom>
           <a:extLst>
             <a:ext uri="{C572A759-6A51-4108-AA02-DFA0A04FC94B}">
-              <ma14:wrappingTextBoxFlag xmlns:ma14="http://schemas.microsoft.com/office/mac/drawingml/2011/main" val="0"/>
+              <ma14:wrappingTextBoxFlag xmlns:ma14="http://schemas.microsoft.com/office/mac/drawingml/2011/main" xmlns="" val="0"/>
             </a:ext>
           </a:extLst>
         </p:spPr>
@@ -9197,7 +8988,7 @@
           <a:p>
             <a:pPr algn="r"/>
             <a:fld id="{F7021451-1387-4CA6-816F-3879F97B5CBC}" type="slidenum">
-              <a:rPr b="0" lang="en-US"/>
+              <a:rPr lang="en-US" b="0"/>
               <a:t>12</a:t>
             </a:fld>
             <a:endParaRPr lang="en-US"/>
@@ -9257,9 +9048,11 @@
       <p:sp>
         <p:nvSpPr>
           <p:cNvPr id="3" name="Text 0"/>
-          <p:cNvSpPr/>
+          <p:cNvSpPr>
+            <a:spLocks noGrp="1"/>
+          </p:cNvSpPr>
           <p:nvPr>
-            <p:ph idx="100" type="body" hasCustomPrompt="1"/>
+            <p:ph type="body" idx="100" hasCustomPrompt="1"/>
           </p:nvPr>
         </p:nvSpPr>
         <p:spPr>
@@ -9277,11 +9070,11 @@
           <a:bodyPr wrap="square" lIns="0" tIns="0" rIns="0" bIns="0" rtlCol="0" anchor="ctr"/>
           <a:lstStyle/>
           <a:p>
-            <a:pPr indent="0" marL="0">
-              <a:buNone/>
-            </a:pPr>
-            <a:r>
-              <a:rPr lang="en-US" sz="1200" b="1" spc="240" kern="0" dirty="0">
+            <a:pPr marL="0" indent="0">
+              <a:buNone/>
+            </a:pPr>
+            <a:r>
+              <a:rPr lang="en-US" sz="1200" b="1" kern="0" spc="240" dirty="0">
                 <a:solidFill>
                   <a:schemeClr val="accent1"/>
                 </a:solidFill>
@@ -9295,9 +9088,11 @@
       <p:sp>
         <p:nvSpPr>
           <p:cNvPr id="4" name="Text 0"/>
-          <p:cNvSpPr/>
+          <p:cNvSpPr>
+            <a:spLocks noGrp="1"/>
+          </p:cNvSpPr>
           <p:nvPr>
-            <p:ph idx="101" type="title" hasCustomPrompt="1"/>
+            <p:ph type="title" idx="101" hasCustomPrompt="1"/>
           </p:nvPr>
         </p:nvSpPr>
         <p:spPr>
@@ -9315,7 +9110,7 @@
           <a:bodyPr wrap="square" lIns="0" tIns="0" rIns="0" bIns="0" rtlCol="0" anchor="ctr"/>
           <a:lstStyle/>
           <a:p>
-            <a:pPr algn="l" indent="0" marL="0">
+            <a:pPr marL="0" indent="0" algn="l">
               <a:buNone/>
             </a:pPr>
             <a:r>
@@ -9333,9 +9128,11 @@
       <p:sp>
         <p:nvSpPr>
           <p:cNvPr id="5" name="Text 0"/>
-          <p:cNvSpPr/>
+          <p:cNvSpPr>
+            <a:spLocks noGrp="1"/>
+          </p:cNvSpPr>
           <p:nvPr>
-            <p:ph idx="102" type="body" hasCustomPrompt="1"/>
+            <p:ph type="body" idx="102" hasCustomPrompt="1"/>
           </p:nvPr>
         </p:nvSpPr>
         <p:spPr>
@@ -9353,7 +9150,7 @@
           <a:bodyPr wrap="square" lIns="0" tIns="0" rIns="0" bIns="0" rtlCol="0" anchor="t"/>
           <a:lstStyle/>
           <a:p>
-            <a:pPr indent="0" marL="0">
+            <a:pPr marL="0" indent="0">
               <a:buNone/>
             </a:pPr>
             <a:r>
@@ -9437,7 +9234,7 @@
           <a:bodyPr wrap="square" lIns="0" tIns="0" rIns="0" bIns="0" rtlCol="0" anchor="ctr"/>
           <a:lstStyle/>
           <a:p>
-            <a:pPr algn="ctr" indent="0" marL="0">
+            <a:pPr marL="0" indent="0" algn="ctr">
               <a:buNone/>
             </a:pPr>
             <a:r>
@@ -9473,7 +9270,7 @@
           <a:bodyPr wrap="square" lIns="0" tIns="0" rIns="0" bIns="0" rtlCol="0" anchor="ctr"/>
           <a:lstStyle/>
           <a:p>
-            <a:pPr indent="0" marL="0">
+            <a:pPr marL="0" indent="0">
               <a:buNone/>
             </a:pPr>
             <a:r>
@@ -9514,7 +9311,7 @@
             <a:prstDash val="solid"/>
           </a:ln>
           <a:effectLst>
-            <a:outerShdw sx="100000" sy="100000" kx="0" ky="0" algn="bl" rotWithShape="0" blurRad="76200" dist="25400" dir="5400000">
+            <a:outerShdw blurRad="76200" dist="25400" dir="5400000" algn="bl" rotWithShape="0">
               <a:srgbClr val="6F665F">
                 <a:alpha val="12000"/>
               </a:srgbClr>
@@ -9543,7 +9340,7 @@
           <a:bodyPr wrap="square" lIns="0" tIns="0" rIns="0" bIns="0" rtlCol="0" anchor="t"/>
           <a:lstStyle/>
           <a:p>
-            <a:pPr indent="0" marL="0">
+            <a:pPr marL="0" indent="0">
               <a:buNone/>
             </a:pPr>
             <a:r>
@@ -9579,7 +9376,7 @@
           <a:bodyPr wrap="square" lIns="0" tIns="0" rIns="0" bIns="0" rtlCol="0" anchor="t"/>
           <a:lstStyle/>
           <a:p>
-            <a:pPr indent="0" marL="0">
+            <a:pPr marL="0" indent="0">
               <a:buNone/>
             </a:pPr>
             <a:r>
@@ -9642,7 +9439,7 @@
           <a:bodyPr wrap="square" lIns="0" tIns="0" rIns="0" bIns="0" rtlCol="0" anchor="ctr"/>
           <a:lstStyle/>
           <a:p>
-            <a:pPr indent="0" marL="0">
+            <a:pPr marL="0" indent="0">
               <a:buNone/>
             </a:pPr>
             <a:r>
@@ -9653,9 +9450,6 @@
               </a:rPr>
               <a:t>担当者が </a:t>
             </a:r>
-            <a:pPr indent="0" marL="0">
-              <a:buNone/>
-            </a:pPr>
             <a:r>
               <a:rPr lang="en-US" sz="1150" b="1" dirty="0">
                 <a:solidFill>
@@ -9714,7 +9508,7 @@
           <a:bodyPr wrap="square" lIns="0" tIns="0" rIns="0" bIns="0" rtlCol="0" anchor="ctr"/>
           <a:lstStyle/>
           <a:p>
-            <a:pPr algn="ctr" indent="0" marL="0">
+            <a:pPr marL="0" indent="0" algn="ctr">
               <a:buNone/>
             </a:pPr>
             <a:r>
@@ -9750,7 +9544,7 @@
           <a:bodyPr wrap="square" lIns="0" tIns="0" rIns="0" bIns="0" rtlCol="0" anchor="ctr"/>
           <a:lstStyle/>
           <a:p>
-            <a:pPr indent="0" marL="0">
+            <a:pPr marL="0" indent="0">
               <a:buNone/>
             </a:pPr>
             <a:r>
@@ -9791,7 +9585,7 @@
             <a:prstDash val="solid"/>
           </a:ln>
           <a:effectLst>
-            <a:outerShdw sx="100000" sy="100000" kx="0" ky="0" algn="bl" rotWithShape="0" blurRad="76200" dist="25400" dir="5400000">
+            <a:outerShdw blurRad="76200" dist="25400" dir="5400000" algn="bl" rotWithShape="0">
               <a:srgbClr val="6F665F">
                 <a:alpha val="12000"/>
               </a:srgbClr>
@@ -9820,7 +9614,7 @@
           <a:bodyPr wrap="square" lIns="0" tIns="0" rIns="0" bIns="0" rtlCol="0" anchor="t"/>
           <a:lstStyle/>
           <a:p>
-            <a:pPr indent="0" marL="0">
+            <a:pPr marL="0" indent="0">
               <a:buNone/>
             </a:pPr>
             <a:r>
@@ -9856,7 +9650,7 @@
           <a:bodyPr wrap="square" lIns="0" tIns="0" rIns="0" bIns="0" rtlCol="0" anchor="t"/>
           <a:lstStyle/>
           <a:p>
-            <a:pPr indent="0" marL="0">
+            <a:pPr marL="0" indent="0">
               <a:buNone/>
             </a:pPr>
             <a:r>
@@ -9919,7 +9713,7 @@
           <a:bodyPr wrap="square" lIns="0" tIns="0" rIns="0" bIns="0" rtlCol="0" anchor="ctr"/>
           <a:lstStyle/>
           <a:p>
-            <a:pPr indent="0" marL="0">
+            <a:pPr marL="0" indent="0">
               <a:buNone/>
             </a:pPr>
             <a:r>
@@ -9930,9 +9724,6 @@
               </a:rPr>
               <a:t>担当者が </a:t>
             </a:r>
-            <a:pPr indent="0" marL="0">
-              <a:buNone/>
-            </a:pPr>
             <a:r>
               <a:rPr lang="en-US" sz="1150" b="1" dirty="0">
                 <a:solidFill>
@@ -9991,7 +9782,7 @@
           <a:bodyPr wrap="square" lIns="0" tIns="0" rIns="0" bIns="0" rtlCol="0" anchor="ctr"/>
           <a:lstStyle/>
           <a:p>
-            <a:pPr algn="ctr" indent="0" marL="0">
+            <a:pPr marL="0" indent="0" algn="ctr">
               <a:buNone/>
             </a:pPr>
             <a:r>
@@ -10027,7 +9818,7 @@
           <a:bodyPr wrap="square" lIns="0" tIns="0" rIns="0" bIns="0" rtlCol="0" anchor="ctr"/>
           <a:lstStyle/>
           <a:p>
-            <a:pPr indent="0" marL="0">
+            <a:pPr marL="0" indent="0">
               <a:buNone/>
             </a:pPr>
             <a:r>
@@ -10068,7 +9859,7 @@
             <a:prstDash val="solid"/>
           </a:ln>
           <a:effectLst>
-            <a:outerShdw sx="100000" sy="100000" kx="0" ky="0" algn="bl" rotWithShape="0" blurRad="76200" dist="25400" dir="5400000">
+            <a:outerShdw blurRad="76200" dist="25400" dir="5400000" algn="bl" rotWithShape="0">
               <a:srgbClr val="6F665F">
                 <a:alpha val="12000"/>
               </a:srgbClr>
@@ -10097,7 +9888,7 @@
           <a:bodyPr wrap="square" lIns="0" tIns="0" rIns="0" bIns="0" rtlCol="0" anchor="t"/>
           <a:lstStyle/>
           <a:p>
-            <a:pPr indent="0" marL="0">
+            <a:pPr marL="0" indent="0">
               <a:buNone/>
             </a:pPr>
             <a:r>
@@ -10133,7 +9924,7 @@
           <a:bodyPr wrap="square" lIns="0" tIns="0" rIns="0" bIns="0" rtlCol="0" anchor="t"/>
           <a:lstStyle/>
           <a:p>
-            <a:pPr indent="0" marL="0">
+            <a:pPr marL="0" indent="0">
               <a:buNone/>
             </a:pPr>
             <a:r>
@@ -10196,7 +9987,7 @@
           <a:bodyPr wrap="square" lIns="0" tIns="0" rIns="0" bIns="0" rtlCol="0" anchor="ctr"/>
           <a:lstStyle/>
           <a:p>
-            <a:pPr indent="0" marL="0">
+            <a:pPr marL="0" indent="0">
               <a:buNone/>
             </a:pPr>
             <a:r>
@@ -10207,9 +9998,6 @@
               </a:rPr>
               <a:t>担当者が </a:t>
             </a:r>
-            <a:pPr indent="0" marL="0">
-              <a:buNone/>
-            </a:pPr>
             <a:r>
               <a:rPr lang="en-US" sz="1150" b="1" dirty="0">
                 <a:solidFill>
@@ -10268,7 +10056,7 @@
           <a:bodyPr wrap="square" lIns="0" tIns="0" rIns="0" bIns="0" rtlCol="0" anchor="ctr"/>
           <a:lstStyle/>
           <a:p>
-            <a:pPr algn="ctr" indent="0" marL="0">
+            <a:pPr marL="0" indent="0" algn="ctr">
               <a:buNone/>
             </a:pPr>
             <a:r>
@@ -10304,7 +10092,7 @@
           <a:bodyPr wrap="square" lIns="0" tIns="0" rIns="0" bIns="0" rtlCol="0" anchor="ctr"/>
           <a:lstStyle/>
           <a:p>
-            <a:pPr indent="0" marL="0">
+            <a:pPr marL="0" indent="0">
               <a:buNone/>
             </a:pPr>
             <a:r>
@@ -10345,7 +10133,7 @@
             <a:prstDash val="solid"/>
           </a:ln>
           <a:effectLst>
-            <a:outerShdw sx="100000" sy="100000" kx="0" ky="0" algn="bl" rotWithShape="0" blurRad="76200" dist="25400" dir="5400000">
+            <a:outerShdw blurRad="76200" dist="25400" dir="5400000" algn="bl" rotWithShape="0">
               <a:srgbClr val="6F665F">
                 <a:alpha val="12000"/>
               </a:srgbClr>
@@ -10374,7 +10162,7 @@
           <a:bodyPr wrap="square" lIns="0" tIns="0" rIns="0" bIns="0" rtlCol="0" anchor="t"/>
           <a:lstStyle/>
           <a:p>
-            <a:pPr indent="0" marL="0">
+            <a:pPr marL="0" indent="0">
               <a:buNone/>
             </a:pPr>
             <a:r>
@@ -10410,7 +10198,7 @@
           <a:bodyPr wrap="square" lIns="0" tIns="0" rIns="0" bIns="0" rtlCol="0" anchor="t"/>
           <a:lstStyle/>
           <a:p>
-            <a:pPr indent="0" marL="0">
+            <a:pPr marL="0" indent="0">
               <a:buNone/>
             </a:pPr>
             <a:r>
@@ -10473,7 +10261,7 @@
           <a:bodyPr wrap="square" lIns="0" tIns="0" rIns="0" bIns="0" rtlCol="0" anchor="ctr"/>
           <a:lstStyle/>
           <a:p>
-            <a:pPr indent="0" marL="0">
+            <a:pPr marL="0" indent="0">
               <a:buNone/>
             </a:pPr>
             <a:r>
@@ -10484,9 +10272,6 @@
               </a:rPr>
               <a:t>担当者が </a:t>
             </a:r>
-            <a:pPr indent="0" marL="0">
-              <a:buNone/>
-            </a:pPr>
             <a:r>
               <a:rPr lang="en-US" sz="1150" b="1" dirty="0">
                 <a:solidFill>
@@ -10520,7 +10305,7 @@
           <a:bodyPr wrap="square" lIns="0" tIns="0" rIns="0" bIns="0" rtlCol="0" anchor="t"/>
           <a:lstStyle/>
           <a:p>
-            <a:pPr indent="0" marL="0">
+            <a:pPr marL="0" indent="0">
               <a:buNone/>
             </a:pPr>
             <a:r>
@@ -10537,7 +10322,7 @@
       </p:sp>
       <p:sp>
         <p:nvSpPr>
-          <p:cNvPr id="25" name="Slide Number Placeholder 0"/>
+          <p:cNvPr id="40" name="Slide Number Placeholder 0"/>
           <p:cNvSpPr>
             <a:spLocks noGrp="1"/>
           </p:cNvSpPr>
@@ -10555,7 +10340,7 @@
           </a:prstGeom>
           <a:extLst>
             <a:ext uri="{C572A759-6A51-4108-AA02-DFA0A04FC94B}">
-              <ma14:wrappingTextBoxFlag xmlns:ma14="http://schemas.microsoft.com/office/mac/drawingml/2011/main" val="0"/>
+              <ma14:wrappingTextBoxFlag xmlns:ma14="http://schemas.microsoft.com/office/mac/drawingml/2011/main" xmlns="" val="0"/>
             </a:ext>
           </a:extLst>
         </p:spPr>
@@ -10573,7 +10358,7 @@
           <a:p>
             <a:pPr algn="r"/>
             <a:fld id="{F7021451-1387-4CA6-816F-3879F97B5CBC}" type="slidenum">
-              <a:rPr b="0" lang="en-US"/>
+              <a:rPr lang="en-US" b="0"/>
               <a:t>13</a:t>
             </a:fld>
             <a:endParaRPr lang="en-US"/>
@@ -10633,9 +10418,11 @@
       <p:sp>
         <p:nvSpPr>
           <p:cNvPr id="3" name="Text 0"/>
-          <p:cNvSpPr/>
+          <p:cNvSpPr>
+            <a:spLocks noGrp="1"/>
+          </p:cNvSpPr>
           <p:nvPr>
-            <p:ph idx="100" type="body" hasCustomPrompt="1"/>
+            <p:ph type="body" idx="100" hasCustomPrompt="1"/>
           </p:nvPr>
         </p:nvSpPr>
         <p:spPr>
@@ -10653,11 +10440,11 @@
           <a:bodyPr wrap="square" lIns="0" tIns="0" rIns="0" bIns="0" rtlCol="0" anchor="ctr"/>
           <a:lstStyle/>
           <a:p>
-            <a:pPr indent="0" marL="0">
-              <a:buNone/>
-            </a:pPr>
-            <a:r>
-              <a:rPr lang="en-US" sz="1200" b="1" spc="240" kern="0" dirty="0">
+            <a:pPr marL="0" indent="0">
+              <a:buNone/>
+            </a:pPr>
+            <a:r>
+              <a:rPr lang="en-US" sz="1200" b="1" kern="0" spc="240" dirty="0">
                 <a:solidFill>
                   <a:schemeClr val="accent1"/>
                 </a:solidFill>
@@ -10671,9 +10458,11 @@
       <p:sp>
         <p:nvSpPr>
           <p:cNvPr id="4" name="Text 0"/>
-          <p:cNvSpPr/>
+          <p:cNvSpPr>
+            <a:spLocks noGrp="1"/>
+          </p:cNvSpPr>
           <p:nvPr>
-            <p:ph idx="101" type="title" hasCustomPrompt="1"/>
+            <p:ph type="title" idx="101" hasCustomPrompt="1"/>
           </p:nvPr>
         </p:nvSpPr>
         <p:spPr>
@@ -10691,7 +10480,7 @@
           <a:bodyPr wrap="square" lIns="0" tIns="0" rIns="0" bIns="0" rtlCol="0" anchor="ctr"/>
           <a:lstStyle/>
           <a:p>
-            <a:pPr algn="l" indent="0" marL="0">
+            <a:pPr marL="0" indent="0" algn="l">
               <a:buNone/>
             </a:pPr>
             <a:r>
@@ -10709,9 +10498,11 @@
       <p:sp>
         <p:nvSpPr>
           <p:cNvPr id="5" name="Text 0"/>
-          <p:cNvSpPr/>
+          <p:cNvSpPr>
+            <a:spLocks noGrp="1"/>
+          </p:cNvSpPr>
           <p:nvPr>
-            <p:ph idx="102" type="body" hasCustomPrompt="1"/>
+            <p:ph type="body" idx="102" hasCustomPrompt="1"/>
           </p:nvPr>
         </p:nvSpPr>
         <p:spPr>
@@ -10729,7 +10520,7 @@
           <a:bodyPr wrap="square" lIns="0" tIns="0" rIns="0" bIns="0" rtlCol="0" anchor="t"/>
           <a:lstStyle/>
           <a:p>
-            <a:pPr indent="0" marL="0">
+            <a:pPr marL="0" indent="0">
               <a:buNone/>
             </a:pPr>
             <a:r>
@@ -10770,7 +10561,7 @@
             <a:prstDash val="solid"/>
           </a:ln>
           <a:effectLst>
-            <a:outerShdw sx="100000" sy="100000" kx="0" ky="0" algn="bl" rotWithShape="0" blurRad="76200" dist="25400" dir="5400000">
+            <a:outerShdw blurRad="76200" dist="25400" dir="5400000" algn="bl" rotWithShape="0">
               <a:srgbClr val="6F665F">
                 <a:alpha val="12000"/>
               </a:srgbClr>
@@ -10799,7 +10590,7 @@
           <a:bodyPr wrap="square" lIns="0" tIns="0" rIns="0" bIns="0" rtlCol="0" anchor="t"/>
           <a:lstStyle/>
           <a:p>
-            <a:pPr indent="0" marL="0">
+            <a:pPr marL="0" indent="0">
               <a:buNone/>
             </a:pPr>
             <a:r>
@@ -10835,7 +10626,7 @@
           <a:bodyPr wrap="square" lIns="0" tIns="0" rIns="0" bIns="0" rtlCol="0" anchor="ctr"/>
           <a:lstStyle/>
           <a:p>
-            <a:pPr indent="0" marL="0">
+            <a:pPr marL="0" indent="0">
               <a:buNone/>
             </a:pPr>
             <a:r>
@@ -10846,9 +10637,6 @@
               </a:rPr>
               <a:t>10</a:t>
             </a:r>
-            <a:pPr indent="0" marL="0">
-              <a:buNone/>
-            </a:pPr>
             <a:r>
               <a:rPr lang="en-US" sz="1100" b="1" dirty="0">
                 <a:solidFill>
@@ -10882,7 +10670,7 @@
           <a:bodyPr wrap="square" lIns="0" tIns="0" rIns="0" bIns="0" rtlCol="0" anchor="t"/>
           <a:lstStyle/>
           <a:p>
-            <a:pPr indent="0" marL="0">
+            <a:pPr marL="0" indent="0">
               <a:buNone/>
             </a:pPr>
             <a:r>
@@ -11040,7 +10828,7 @@
             <a:prstDash val="solid"/>
           </a:ln>
           <a:effectLst>
-            <a:outerShdw sx="100000" sy="100000" kx="0" ky="0" algn="bl" rotWithShape="0" blurRad="76200" dist="25400" dir="5400000">
+            <a:outerShdw blurRad="76200" dist="25400" dir="5400000" algn="bl" rotWithShape="0">
               <a:srgbClr val="6F665F">
                 <a:alpha val="12000"/>
               </a:srgbClr>
@@ -11069,7 +10857,7 @@
           <a:bodyPr wrap="square" lIns="0" tIns="0" rIns="0" bIns="0" rtlCol="0" anchor="t"/>
           <a:lstStyle/>
           <a:p>
-            <a:pPr indent="0" marL="0">
+            <a:pPr marL="0" indent="0">
               <a:buNone/>
             </a:pPr>
             <a:r>
@@ -11105,7 +10893,7 @@
           <a:bodyPr wrap="square" lIns="0" tIns="0" rIns="0" bIns="0" rtlCol="0" anchor="ctr"/>
           <a:lstStyle/>
           <a:p>
-            <a:pPr indent="0" marL="0">
+            <a:pPr marL="0" indent="0">
               <a:buNone/>
             </a:pPr>
             <a:r>
@@ -11116,9 +10904,6 @@
               </a:rPr>
               <a:t>50</a:t>
             </a:r>
-            <a:pPr indent="0" marL="0">
-              <a:buNone/>
-            </a:pPr>
             <a:r>
               <a:rPr lang="en-US" sz="1100" b="1" dirty="0">
                 <a:solidFill>
@@ -11152,7 +10937,7 @@
           <a:bodyPr wrap="square" lIns="0" tIns="0" rIns="0" bIns="0" rtlCol="0" anchor="t"/>
           <a:lstStyle/>
           <a:p>
-            <a:pPr indent="0" marL="0">
+            <a:pPr marL="0" indent="0">
               <a:buNone/>
             </a:pPr>
             <a:r>
@@ -11377,7 +11162,7 @@
           <a:bodyPr wrap="square" lIns="0" tIns="0" rIns="0" bIns="0" rtlCol="0" anchor="ctr"/>
           <a:lstStyle/>
           <a:p>
-            <a:pPr algn="ctr" indent="0" marL="0">
+            <a:pPr marL="0" indent="0" algn="ctr">
               <a:buNone/>
             </a:pPr>
             <a:r>
@@ -11413,7 +11198,7 @@
           <a:bodyPr wrap="square" lIns="0" tIns="0" rIns="0" bIns="0" rtlCol="0" anchor="t"/>
           <a:lstStyle/>
           <a:p>
-            <a:pPr indent="0" marL="0">
+            <a:pPr marL="0" indent="0">
               <a:buNone/>
             </a:pPr>
             <a:r>
@@ -11449,7 +11234,7 @@
           <a:bodyPr wrap="square" lIns="0" tIns="0" rIns="0" bIns="0" rtlCol="0" anchor="ctr"/>
           <a:lstStyle/>
           <a:p>
-            <a:pPr indent="0" marL="0">
+            <a:pPr marL="0" indent="0">
               <a:buNone/>
             </a:pPr>
             <a:r>
@@ -11460,9 +11245,6 @@
               </a:rPr>
               <a:t>80</a:t>
             </a:r>
-            <a:pPr indent="0" marL="0">
-              <a:buNone/>
-            </a:pPr>
             <a:r>
               <a:rPr lang="en-US" sz="1100" b="1" dirty="0">
                 <a:solidFill>
@@ -11496,7 +11278,7 @@
           <a:bodyPr wrap="square" lIns="0" tIns="0" rIns="0" bIns="0" rtlCol="0" anchor="t"/>
           <a:lstStyle/>
           <a:p>
-            <a:pPr indent="0" marL="0">
+            <a:pPr marL="0" indent="0">
               <a:buNone/>
             </a:pPr>
             <a:r>
@@ -11654,7 +11436,7 @@
             <a:prstDash val="solid"/>
           </a:ln>
           <a:effectLst>
-            <a:outerShdw sx="100000" sy="100000" kx="0" ky="0" algn="bl" rotWithShape="0" blurRad="76200" dist="25400" dir="5400000">
+            <a:outerShdw blurRad="76200" dist="25400" dir="5400000" algn="bl" rotWithShape="0">
               <a:srgbClr val="6F665F">
                 <a:alpha val="12000"/>
               </a:srgbClr>
@@ -11683,7 +11465,7 @@
           <a:bodyPr wrap="square" lIns="0" tIns="0" rIns="0" bIns="0" rtlCol="0" anchor="t"/>
           <a:lstStyle/>
           <a:p>
-            <a:pPr indent="0" marL="0">
+            <a:pPr marL="0" indent="0">
               <a:buNone/>
             </a:pPr>
             <a:r>
@@ -11719,7 +11501,7 @@
           <a:bodyPr wrap="square" lIns="0" tIns="0" rIns="0" bIns="0" rtlCol="0" anchor="ctr"/>
           <a:lstStyle/>
           <a:p>
-            <a:pPr indent="0" marL="0">
+            <a:pPr marL="0" indent="0">
               <a:buNone/>
             </a:pPr>
             <a:r>
@@ -11728,11 +11510,8 @@
                   <a:schemeClr val="tx1"/>
                 </a:solidFill>
               </a:rPr>
-              <a:t>2〜3</a:t>
-            </a:r>
-            <a:pPr indent="0" marL="0">
-              <a:buNone/>
-            </a:pPr>
+              <a:t>3</a:t>
+            </a:r>
             <a:r>
               <a:rPr lang="en-US" sz="1100" b="1" dirty="0">
                 <a:solidFill>
@@ -11766,7 +11545,7 @@
           <a:bodyPr wrap="square" lIns="0" tIns="0" rIns="0" bIns="0" rtlCol="0" anchor="t"/>
           <a:lstStyle/>
           <a:p>
-            <a:pPr indent="0" marL="0">
+            <a:pPr marL="0" indent="0">
               <a:buNone/>
             </a:pPr>
             <a:r>
@@ -11901,7 +11680,7 @@
           <a:bodyPr wrap="square" lIns="0" tIns="0" rIns="0" bIns="0" rtlCol="0" anchor="t"/>
           <a:lstStyle/>
           <a:p>
-            <a:pPr indent="0" marL="0">
+            <a:pPr marL="0" indent="0">
               <a:buNone/>
             </a:pPr>
             <a:r>
@@ -11918,7 +11697,7 @@
       </p:sp>
       <p:sp>
         <p:nvSpPr>
-          <p:cNvPr id="25" name="Slide Number Placeholder 0"/>
+          <p:cNvPr id="33" name="Slide Number Placeholder 0"/>
           <p:cNvSpPr>
             <a:spLocks noGrp="1"/>
           </p:cNvSpPr>
@@ -11936,7 +11715,7 @@
           </a:prstGeom>
           <a:extLst>
             <a:ext uri="{C572A759-6A51-4108-AA02-DFA0A04FC94B}">
-              <ma14:wrappingTextBoxFlag xmlns:ma14="http://schemas.microsoft.com/office/mac/drawingml/2011/main" val="0"/>
+              <ma14:wrappingTextBoxFlag xmlns:ma14="http://schemas.microsoft.com/office/mac/drawingml/2011/main" xmlns="" val="0"/>
             </a:ext>
           </a:extLst>
         </p:spPr>
@@ -11954,7 +11733,7 @@
           <a:p>
             <a:pPr algn="r"/>
             <a:fld id="{F7021451-1387-4CA6-816F-3879F97B5CBC}" type="slidenum">
-              <a:rPr b="0" lang="en-US"/>
+              <a:rPr lang="en-US" b="0"/>
               <a:t>14</a:t>
             </a:fld>
             <a:endParaRPr lang="en-US"/>
@@ -12014,9 +11793,11 @@
       <p:sp>
         <p:nvSpPr>
           <p:cNvPr id="3" name="Text 0"/>
-          <p:cNvSpPr/>
+          <p:cNvSpPr>
+            <a:spLocks noGrp="1"/>
+          </p:cNvSpPr>
           <p:nvPr>
-            <p:ph idx="100" type="body" hasCustomPrompt="1"/>
+            <p:ph type="body" idx="100" hasCustomPrompt="1"/>
           </p:nvPr>
         </p:nvSpPr>
         <p:spPr>
@@ -12034,11 +11815,11 @@
           <a:bodyPr wrap="square" lIns="0" tIns="0" rIns="0" bIns="0" rtlCol="0" anchor="ctr"/>
           <a:lstStyle/>
           <a:p>
-            <a:pPr indent="0" marL="0">
-              <a:buNone/>
-            </a:pPr>
-            <a:r>
-              <a:rPr lang="en-US" sz="1200" b="1" spc="240" kern="0" dirty="0">
+            <a:pPr marL="0" indent="0">
+              <a:buNone/>
+            </a:pPr>
+            <a:r>
+              <a:rPr lang="en-US" sz="1200" b="1" kern="0" spc="240" dirty="0">
                 <a:solidFill>
                   <a:schemeClr val="accent1"/>
                 </a:solidFill>
@@ -12052,9 +11833,11 @@
       <p:sp>
         <p:nvSpPr>
           <p:cNvPr id="4" name="Text 0"/>
-          <p:cNvSpPr/>
+          <p:cNvSpPr>
+            <a:spLocks noGrp="1"/>
+          </p:cNvSpPr>
           <p:nvPr>
-            <p:ph idx="101" type="title" hasCustomPrompt="1"/>
+            <p:ph type="title" idx="101" hasCustomPrompt="1"/>
           </p:nvPr>
         </p:nvSpPr>
         <p:spPr>
@@ -12072,7 +11855,7 @@
           <a:bodyPr wrap="square" lIns="0" tIns="0" rIns="0" bIns="0" rtlCol="0" anchor="ctr"/>
           <a:lstStyle/>
           <a:p>
-            <a:pPr algn="l" indent="0" marL="0">
+            <a:pPr marL="0" indent="0" algn="l">
               <a:buNone/>
             </a:pPr>
             <a:r>
@@ -12090,9 +11873,11 @@
       <p:sp>
         <p:nvSpPr>
           <p:cNvPr id="5" name="Text 0"/>
-          <p:cNvSpPr/>
+          <p:cNvSpPr>
+            <a:spLocks noGrp="1"/>
+          </p:cNvSpPr>
           <p:nvPr>
-            <p:ph idx="102" type="body" hasCustomPrompt="1"/>
+            <p:ph type="body" idx="102" hasCustomPrompt="1"/>
           </p:nvPr>
         </p:nvSpPr>
         <p:spPr>
@@ -12110,7 +11895,7 @@
           <a:bodyPr wrap="square" lIns="0" tIns="0" rIns="0" bIns="0" rtlCol="0" anchor="t"/>
           <a:lstStyle/>
           <a:p>
-            <a:pPr indent="0" marL="0">
+            <a:pPr marL="0" indent="0">
               <a:buNone/>
             </a:pPr>
             <a:r>
@@ -12171,7 +11956,7 @@
           <a:bodyPr wrap="square" lIns="0" tIns="0" rIns="0" bIns="0" rtlCol="0" anchor="ctr"/>
           <a:lstStyle/>
           <a:p>
-            <a:pPr algn="ctr" indent="0" marL="0">
+            <a:pPr marL="0" indent="0" algn="ctr">
               <a:buNone/>
             </a:pPr>
             <a:r>
@@ -12185,7 +11970,7 @@
             <a:endParaRPr lang="en-US" sz="1300" dirty="0"/>
           </a:p>
           <a:p>
-            <a:pPr algn="ctr" indent="0" marL="0">
+            <a:pPr marL="0" indent="0" algn="ctr">
               <a:buNone/>
             </a:pPr>
             <a:r>
@@ -12226,7 +12011,7 @@
             <a:prstDash val="solid"/>
           </a:ln>
           <a:effectLst>
-            <a:outerShdw sx="100000" sy="100000" kx="0" ky="0" algn="bl" rotWithShape="0" blurRad="76200" dist="25400" dir="5400000">
+            <a:outerShdw blurRad="76200" dist="25400" dir="5400000" algn="bl" rotWithShape="0">
               <a:srgbClr val="6F665F">
                 <a:alpha val="12000"/>
               </a:srgbClr>
@@ -12255,7 +12040,7 @@
           <a:bodyPr wrap="square" lIns="0" tIns="0" rIns="0" bIns="0" rtlCol="0" anchor="ctr"/>
           <a:lstStyle/>
           <a:p>
-            <a:pPr algn="ctr" indent="0" marL="0">
+            <a:pPr marL="0" indent="0" algn="ctr">
               <a:buNone/>
             </a:pPr>
             <a:r>
@@ -12269,7 +12054,7 @@
             <a:endParaRPr lang="en-US" sz="1150" dirty="0"/>
           </a:p>
           <a:p>
-            <a:pPr algn="ctr" indent="0" marL="0">
+            <a:pPr marL="0" indent="0" algn="ctr">
               <a:buNone/>
             </a:pPr>
             <a:r>
@@ -12310,7 +12095,7 @@
             <a:prstDash val="solid"/>
           </a:ln>
           <a:effectLst>
-            <a:outerShdw sx="100000" sy="100000" kx="0" ky="0" algn="bl" rotWithShape="0" blurRad="76200" dist="25400" dir="5400000">
+            <a:outerShdw blurRad="76200" dist="25400" dir="5400000" algn="bl" rotWithShape="0">
               <a:srgbClr val="6F665F">
                 <a:alpha val="12000"/>
               </a:srgbClr>
@@ -12339,7 +12124,7 @@
           <a:bodyPr wrap="square" lIns="0" tIns="0" rIns="0" bIns="0" rtlCol="0" anchor="ctr"/>
           <a:lstStyle/>
           <a:p>
-            <a:pPr algn="ctr" indent="0" marL="0">
+            <a:pPr marL="0" indent="0" algn="ctr">
               <a:buNone/>
             </a:pPr>
             <a:r>
@@ -12353,7 +12138,7 @@
             <a:endParaRPr lang="en-US" sz="1150" dirty="0"/>
           </a:p>
           <a:p>
-            <a:pPr algn="ctr" indent="0" marL="0">
+            <a:pPr marL="0" indent="0" algn="ctr">
               <a:buNone/>
             </a:pPr>
             <a:r>
@@ -12394,7 +12179,7 @@
             <a:prstDash val="solid"/>
           </a:ln>
           <a:effectLst>
-            <a:outerShdw sx="100000" sy="100000" kx="0" ky="0" algn="bl" rotWithShape="0" blurRad="76200" dist="25400" dir="5400000">
+            <a:outerShdw blurRad="76200" dist="25400" dir="5400000" algn="bl" rotWithShape="0">
               <a:srgbClr val="6F665F">
                 <a:alpha val="12000"/>
               </a:srgbClr>
@@ -12423,7 +12208,7 @@
           <a:bodyPr wrap="square" lIns="0" tIns="0" rIns="0" bIns="0" rtlCol="0" anchor="ctr"/>
           <a:lstStyle/>
           <a:p>
-            <a:pPr algn="ctr" indent="0" marL="0">
+            <a:pPr marL="0" indent="0" algn="ctr">
               <a:buNone/>
             </a:pPr>
             <a:r>
@@ -12437,7 +12222,7 @@
             <a:endParaRPr lang="en-US" sz="1150" dirty="0"/>
           </a:p>
           <a:p>
-            <a:pPr algn="ctr" indent="0" marL="0">
+            <a:pPr marL="0" indent="0" algn="ctr">
               <a:buNone/>
             </a:pPr>
             <a:r>
@@ -12478,7 +12263,7 @@
             <a:prstDash val="solid"/>
           </a:ln>
           <a:effectLst>
-            <a:outerShdw sx="100000" sy="100000" kx="0" ky="0" algn="bl" rotWithShape="0" blurRad="76200" dist="25400" dir="5400000">
+            <a:outerShdw blurRad="76200" dist="25400" dir="5400000" algn="bl" rotWithShape="0">
               <a:srgbClr val="6F665F">
                 <a:alpha val="12000"/>
               </a:srgbClr>
@@ -12507,7 +12292,7 @@
           <a:bodyPr wrap="square" lIns="0" tIns="0" rIns="0" bIns="0" rtlCol="0" anchor="ctr"/>
           <a:lstStyle/>
           <a:p>
-            <a:pPr algn="ctr" indent="0" marL="0">
+            <a:pPr marL="0" indent="0" algn="ctr">
               <a:buNone/>
             </a:pPr>
             <a:r>
@@ -12521,7 +12306,7 @@
             <a:endParaRPr lang="en-US" sz="1150" dirty="0"/>
           </a:p>
           <a:p>
-            <a:pPr algn="ctr" indent="0" marL="0">
+            <a:pPr marL="0" indent="0" algn="ctr">
               <a:buNone/>
             </a:pPr>
             <a:r>
@@ -12658,7 +12443,7 @@
             <a:prstDash val="solid"/>
           </a:ln>
           <a:effectLst>
-            <a:outerShdw sx="100000" sy="100000" kx="0" ky="0" algn="bl" rotWithShape="0" blurRad="76200" dist="25400" dir="5400000">
+            <a:outerShdw blurRad="76200" dist="25400" dir="5400000" algn="bl" rotWithShape="0">
               <a:srgbClr val="6F665F">
                 <a:alpha val="12000"/>
               </a:srgbClr>
@@ -12712,7 +12497,7 @@
           <a:bodyPr wrap="square" lIns="0" tIns="0" rIns="0" bIns="0" rtlCol="0" anchor="ctr"/>
           <a:lstStyle/>
           <a:p>
-            <a:pPr algn="ctr" indent="0" marL="0">
+            <a:pPr marL="0" indent="0" algn="ctr">
               <a:buNone/>
             </a:pPr>
             <a:endParaRPr lang="en-US" sz="1300" dirty="0"/>
@@ -12721,14 +12506,14 @@
       </p:sp>
       <p:pic>
         <p:nvPicPr>
-          <p:cNvPr id="23" name="Image 0" descr="preencoded.png">    </p:cNvPr>
+          <p:cNvPr id="23" name="Image 0" descr="preencoded.png"/>
           <p:cNvPicPr>
             <a:picLocks noChangeAspect="1"/>
           </p:cNvPicPr>
           <p:nvPr/>
         </p:nvPicPr>
         <p:blipFill>
-          <a:blip r:embed="rId1"/>
+          <a:blip r:embed="rId3"/>
           <a:stretch>
             <a:fillRect/>
           </a:stretch>
@@ -12764,7 +12549,7 @@
           <a:bodyPr wrap="square" lIns="0" tIns="0" rIns="0" bIns="0" rtlCol="0" anchor="t"/>
           <a:lstStyle/>
           <a:p>
-            <a:pPr indent="0" marL="0">
+            <a:pPr marL="0" indent="0">
               <a:buNone/>
             </a:pPr>
             <a:r>
@@ -12800,7 +12585,7 @@
           <a:bodyPr wrap="square" lIns="0" tIns="0" rIns="0" bIns="0" rtlCol="0" anchor="t"/>
           <a:lstStyle/>
           <a:p>
-            <a:pPr indent="0" marL="0">
+            <a:pPr marL="0" indent="0">
               <a:buNone/>
             </a:pPr>
             <a:r>
@@ -12841,7 +12626,7 @@
             <a:prstDash val="solid"/>
           </a:ln>
           <a:effectLst>
-            <a:outerShdw sx="100000" sy="100000" kx="0" ky="0" algn="bl" rotWithShape="0" blurRad="76200" dist="25400" dir="5400000">
+            <a:outerShdw blurRad="76200" dist="25400" dir="5400000" algn="bl" rotWithShape="0">
               <a:srgbClr val="6F665F">
                 <a:alpha val="12000"/>
               </a:srgbClr>
@@ -12895,7 +12680,7 @@
           <a:bodyPr wrap="square" lIns="0" tIns="0" rIns="0" bIns="0" rtlCol="0" anchor="ctr"/>
           <a:lstStyle/>
           <a:p>
-            <a:pPr algn="ctr" indent="0" marL="0">
+            <a:pPr marL="0" indent="0" algn="ctr">
               <a:buNone/>
             </a:pPr>
             <a:endParaRPr lang="en-US" sz="1300" dirty="0"/>
@@ -12904,14 +12689,14 @@
       </p:sp>
       <p:pic>
         <p:nvPicPr>
-          <p:cNvPr id="29" name="Image 1" descr="preencoded.png">    </p:cNvPr>
+          <p:cNvPr id="29" name="Image 1" descr="preencoded.png"/>
           <p:cNvPicPr>
             <a:picLocks noChangeAspect="1"/>
           </p:cNvPicPr>
           <p:nvPr/>
         </p:nvPicPr>
         <p:blipFill>
-          <a:blip r:embed="rId2"/>
+          <a:blip r:embed="rId4"/>
           <a:stretch>
             <a:fillRect/>
           </a:stretch>
@@ -12947,7 +12732,7 @@
           <a:bodyPr wrap="square" lIns="0" tIns="0" rIns="0" bIns="0" rtlCol="0" anchor="t"/>
           <a:lstStyle/>
           <a:p>
-            <a:pPr indent="0" marL="0">
+            <a:pPr marL="0" indent="0">
               <a:buNone/>
             </a:pPr>
             <a:r>
@@ -12983,7 +12768,7 @@
           <a:bodyPr wrap="square" lIns="0" tIns="0" rIns="0" bIns="0" rtlCol="0" anchor="t"/>
           <a:lstStyle/>
           <a:p>
-            <a:pPr indent="0" marL="0">
+            <a:pPr marL="0" indent="0">
               <a:buNone/>
             </a:pPr>
             <a:r>
@@ -13024,7 +12809,7 @@
             <a:prstDash val="solid"/>
           </a:ln>
           <a:effectLst>
-            <a:outerShdw sx="100000" sy="100000" kx="0" ky="0" algn="bl" rotWithShape="0" blurRad="76200" dist="25400" dir="5400000">
+            <a:outerShdw blurRad="76200" dist="25400" dir="5400000" algn="bl" rotWithShape="0">
               <a:srgbClr val="6F665F">
                 <a:alpha val="12000"/>
               </a:srgbClr>
@@ -13078,7 +12863,7 @@
           <a:bodyPr wrap="square" lIns="0" tIns="0" rIns="0" bIns="0" rtlCol="0" anchor="ctr"/>
           <a:lstStyle/>
           <a:p>
-            <a:pPr algn="ctr" indent="0" marL="0">
+            <a:pPr marL="0" indent="0" algn="ctr">
               <a:buNone/>
             </a:pPr>
             <a:endParaRPr lang="en-US" sz="1300" dirty="0"/>
@@ -13087,14 +12872,14 @@
       </p:sp>
       <p:pic>
         <p:nvPicPr>
-          <p:cNvPr id="35" name="Image 2" descr="preencoded.png">    </p:cNvPr>
+          <p:cNvPr id="35" name="Image 2" descr="preencoded.png"/>
           <p:cNvPicPr>
             <a:picLocks noChangeAspect="1"/>
           </p:cNvPicPr>
           <p:nvPr/>
         </p:nvPicPr>
         <p:blipFill>
-          <a:blip r:embed="rId3"/>
+          <a:blip r:embed="rId5"/>
           <a:stretch>
             <a:fillRect/>
           </a:stretch>
@@ -13130,7 +12915,7 @@
           <a:bodyPr wrap="square" lIns="0" tIns="0" rIns="0" bIns="0" rtlCol="0" anchor="t"/>
           <a:lstStyle/>
           <a:p>
-            <a:pPr indent="0" marL="0">
+            <a:pPr marL="0" indent="0">
               <a:buNone/>
             </a:pPr>
             <a:r>
@@ -13166,7 +12951,7 @@
           <a:bodyPr wrap="square" lIns="0" tIns="0" rIns="0" bIns="0" rtlCol="0" anchor="t"/>
           <a:lstStyle/>
           <a:p>
-            <a:pPr indent="0" marL="0">
+            <a:pPr marL="0" indent="0">
               <a:buNone/>
             </a:pPr>
             <a:r>
@@ -13183,7 +12968,7 @@
       </p:sp>
       <p:sp>
         <p:nvSpPr>
-          <p:cNvPr id="25" name="Slide Number Placeholder 0"/>
+          <p:cNvPr id="38" name="Slide Number Placeholder 0"/>
           <p:cNvSpPr>
             <a:spLocks noGrp="1"/>
           </p:cNvSpPr>
@@ -13201,7 +12986,7 @@
           </a:prstGeom>
           <a:extLst>
             <a:ext uri="{C572A759-6A51-4108-AA02-DFA0A04FC94B}">
-              <ma14:wrappingTextBoxFlag xmlns:ma14="http://schemas.microsoft.com/office/mac/drawingml/2011/main" val="0"/>
+              <ma14:wrappingTextBoxFlag xmlns:ma14="http://schemas.microsoft.com/office/mac/drawingml/2011/main" xmlns="" val="0"/>
             </a:ext>
           </a:extLst>
         </p:spPr>
@@ -13219,7 +13004,7 @@
           <a:p>
             <a:pPr algn="r"/>
             <a:fld id="{F7021451-1387-4CA6-816F-3879F97B5CBC}" type="slidenum">
-              <a:rPr b="0" lang="en-US"/>
+              <a:rPr lang="en-US" b="0"/>
               <a:t>15</a:t>
             </a:fld>
             <a:endParaRPr lang="en-US"/>
@@ -13279,9 +13064,11 @@
       <p:sp>
         <p:nvSpPr>
           <p:cNvPr id="3" name="Text 0"/>
-          <p:cNvSpPr/>
+          <p:cNvSpPr>
+            <a:spLocks noGrp="1"/>
+          </p:cNvSpPr>
           <p:nvPr>
-            <p:ph idx="100" type="body" hasCustomPrompt="1"/>
+            <p:ph type="body" idx="100" hasCustomPrompt="1"/>
           </p:nvPr>
         </p:nvSpPr>
         <p:spPr>
@@ -13299,11 +13086,11 @@
           <a:bodyPr wrap="square" lIns="0" tIns="0" rIns="0" bIns="0" rtlCol="0" anchor="ctr"/>
           <a:lstStyle/>
           <a:p>
-            <a:pPr indent="0" marL="0">
-              <a:buNone/>
-            </a:pPr>
-            <a:r>
-              <a:rPr lang="en-US" sz="1200" b="1" spc="240" kern="0" dirty="0">
+            <a:pPr marL="0" indent="0">
+              <a:buNone/>
+            </a:pPr>
+            <a:r>
+              <a:rPr lang="en-US" sz="1200" b="1" kern="0" spc="240" dirty="0">
                 <a:solidFill>
                   <a:schemeClr val="accent1"/>
                 </a:solidFill>
@@ -13317,9 +13104,11 @@
       <p:sp>
         <p:nvSpPr>
           <p:cNvPr id="4" name="Text 0"/>
-          <p:cNvSpPr/>
+          <p:cNvSpPr>
+            <a:spLocks noGrp="1"/>
+          </p:cNvSpPr>
           <p:nvPr>
-            <p:ph idx="101" type="title" hasCustomPrompt="1"/>
+            <p:ph type="title" idx="101" hasCustomPrompt="1"/>
           </p:nvPr>
         </p:nvSpPr>
         <p:spPr>
@@ -13337,7 +13126,7 @@
           <a:bodyPr wrap="square" lIns="0" tIns="0" rIns="0" bIns="0" rtlCol="0" anchor="ctr"/>
           <a:lstStyle/>
           <a:p>
-            <a:pPr algn="l" indent="0" marL="0">
+            <a:pPr marL="0" indent="0" algn="l">
               <a:buNone/>
             </a:pPr>
             <a:r>
@@ -13355,9 +13144,11 @@
       <p:sp>
         <p:nvSpPr>
           <p:cNvPr id="5" name="Text 0"/>
-          <p:cNvSpPr/>
+          <p:cNvSpPr>
+            <a:spLocks noGrp="1"/>
+          </p:cNvSpPr>
           <p:nvPr>
-            <p:ph idx="102" type="body" hasCustomPrompt="1"/>
+            <p:ph type="body" idx="102" hasCustomPrompt="1"/>
           </p:nvPr>
         </p:nvSpPr>
         <p:spPr>
@@ -13375,7 +13166,7 @@
           <a:bodyPr wrap="square" lIns="0" tIns="0" rIns="0" bIns="0" rtlCol="0" anchor="t"/>
           <a:lstStyle/>
           <a:p>
-            <a:pPr indent="0" marL="0">
+            <a:pPr marL="0" indent="0">
               <a:buNone/>
             </a:pPr>
             <a:r>
@@ -13392,7 +13183,7 @@
       </p:sp>
       <p:graphicFrame>
         <p:nvGraphicFramePr>
-          <p:cNvPr id="6" name="plan chart" descr=""/>
+          <p:cNvPr id="6" name="plan chart"/>
           <p:cNvGraphicFramePr/>
           <p:nvPr/>
         </p:nvGraphicFramePr>
@@ -13400,9 +13191,9 @@
           <a:off x="685800" y="2011680"/>
           <a:ext cx="6035040" cy="4069080"/>
         </p:xfrm>
-        <a:graphic xmlns:a="http://schemas.openxmlformats.org/drawingml/2006/main">
+        <a:graphic>
           <a:graphicData uri="http://schemas.openxmlformats.org/drawingml/2006/chart">
-            <c:chart xmlns:c="http://schemas.openxmlformats.org/drawingml/2006/chart" r:id="rId1"/>
+            <c:chart xmlns:c="http://schemas.openxmlformats.org/drawingml/2006/chart" xmlns:r="http://schemas.openxmlformats.org/officeDocument/2006/relationships" r:id="rId3"/>
           </a:graphicData>
         </a:graphic>
       </p:graphicFrame>
@@ -13432,7 +13223,7 @@
             <a:prstDash val="solid"/>
           </a:ln>
           <a:effectLst>
-            <a:outerShdw sx="100000" sy="100000" kx="0" ky="0" algn="bl" rotWithShape="0" blurRad="76200" dist="25400" dir="5400000">
+            <a:outerShdw blurRad="76200" dist="25400" dir="5400000" algn="bl" rotWithShape="0">
               <a:srgbClr val="6F665F">
                 <a:alpha val="12000"/>
               </a:srgbClr>
@@ -13461,7 +13252,7 @@
           <a:bodyPr wrap="square" lIns="0" tIns="0" rIns="0" bIns="0" rtlCol="0" anchor="ctr"/>
           <a:lstStyle/>
           <a:p>
-            <a:pPr indent="0" marL="0">
+            <a:pPr marL="0" indent="0">
               <a:buNone/>
             </a:pPr>
             <a:r>
@@ -13497,7 +13288,7 @@
           <a:bodyPr wrap="square" lIns="0" tIns="0" rIns="0" bIns="0" rtlCol="0" anchor="ctr"/>
           <a:lstStyle/>
           <a:p>
-            <a:pPr indent="0" marL="0">
+            <a:pPr marL="0" indent="0">
               <a:buNone/>
             </a:pPr>
             <a:r>
@@ -13511,7 +13302,7 @@
             <a:endParaRPr lang="en-US" sz="1250" dirty="0"/>
           </a:p>
           <a:p>
-            <a:pPr indent="0" marL="0">
+            <a:pPr marL="0" indent="0">
               <a:buNone/>
             </a:pPr>
             <a:r>
@@ -13552,7 +13343,7 @@
             <a:prstDash val="solid"/>
           </a:ln>
           <a:effectLst>
-            <a:outerShdw sx="100000" sy="100000" kx="0" ky="0" algn="bl" rotWithShape="0" blurRad="76200" dist="25400" dir="5400000">
+            <a:outerShdw blurRad="76200" dist="25400" dir="5400000" algn="bl" rotWithShape="0">
               <a:srgbClr val="6F665F">
                 <a:alpha val="12000"/>
               </a:srgbClr>
@@ -13581,7 +13372,7 @@
           <a:bodyPr wrap="square" lIns="0" tIns="0" rIns="0" bIns="0" rtlCol="0" anchor="ctr"/>
           <a:lstStyle/>
           <a:p>
-            <a:pPr indent="0" marL="0">
+            <a:pPr marL="0" indent="0">
               <a:buNone/>
             </a:pPr>
             <a:r>
@@ -13617,7 +13408,7 @@
           <a:bodyPr wrap="square" lIns="0" tIns="0" rIns="0" bIns="0" rtlCol="0" anchor="ctr"/>
           <a:lstStyle/>
           <a:p>
-            <a:pPr indent="0" marL="0">
+            <a:pPr marL="0" indent="0">
               <a:buNone/>
             </a:pPr>
             <a:r>
@@ -13631,7 +13422,7 @@
             <a:endParaRPr lang="en-US" sz="1250" dirty="0"/>
           </a:p>
           <a:p>
-            <a:pPr indent="0" marL="0">
+            <a:pPr marL="0" indent="0">
               <a:buNone/>
             </a:pPr>
             <a:r>
@@ -13672,7 +13463,7 @@
             <a:prstDash val="solid"/>
           </a:ln>
           <a:effectLst>
-            <a:outerShdw sx="100000" sy="100000" kx="0" ky="0" algn="bl" rotWithShape="0" blurRad="76200" dist="25400" dir="5400000">
+            <a:outerShdw blurRad="76200" dist="25400" dir="5400000" algn="bl" rotWithShape="0">
               <a:srgbClr val="6F665F">
                 <a:alpha val="12000"/>
               </a:srgbClr>
@@ -13701,7 +13492,7 @@
           <a:bodyPr wrap="square" lIns="0" tIns="0" rIns="0" bIns="0" rtlCol="0" anchor="ctr"/>
           <a:lstStyle/>
           <a:p>
-            <a:pPr indent="0" marL="0">
+            <a:pPr marL="0" indent="0">
               <a:buNone/>
             </a:pPr>
             <a:r>
@@ -13737,7 +13528,7 @@
           <a:bodyPr wrap="square" lIns="0" tIns="0" rIns="0" bIns="0" rtlCol="0" anchor="ctr"/>
           <a:lstStyle/>
           <a:p>
-            <a:pPr indent="0" marL="0">
+            <a:pPr marL="0" indent="0">
               <a:buNone/>
             </a:pPr>
             <a:r>
@@ -13751,7 +13542,7 @@
             <a:endParaRPr lang="en-US" sz="1250" dirty="0"/>
           </a:p>
           <a:p>
-            <a:pPr indent="0" marL="0">
+            <a:pPr marL="0" indent="0">
               <a:buNone/>
             </a:pPr>
             <a:r>
@@ -13814,7 +13605,7 @@
           <a:bodyPr wrap="square" lIns="0" tIns="0" rIns="0" bIns="0" rtlCol="0" anchor="ctr"/>
           <a:lstStyle/>
           <a:p>
-            <a:pPr indent="0" marL="0">
+            <a:pPr marL="0" indent="0">
               <a:buNone/>
             </a:pPr>
             <a:r>
@@ -13828,7 +13619,7 @@
             <a:endParaRPr lang="en-US" sz="1300" dirty="0"/>
           </a:p>
           <a:p>
-            <a:pPr indent="0" marL="0">
+            <a:pPr marL="0" indent="0">
               <a:buNone/>
             </a:pPr>
             <a:r>
@@ -13863,7 +13654,7 @@
           </a:prstGeom>
           <a:extLst>
             <a:ext uri="{C572A759-6A51-4108-AA02-DFA0A04FC94B}">
-              <ma14:wrappingTextBoxFlag xmlns:ma14="http://schemas.microsoft.com/office/mac/drawingml/2011/main" val="0"/>
+              <ma14:wrappingTextBoxFlag xmlns:ma14="http://schemas.microsoft.com/office/mac/drawingml/2011/main" xmlns="" val="0"/>
             </a:ext>
           </a:extLst>
         </p:spPr>
@@ -13881,7 +13672,7 @@
           <a:p>
             <a:pPr algn="r"/>
             <a:fld id="{F7021451-1387-4CA6-816F-3879F97B5CBC}" type="slidenum">
-              <a:rPr b="0" lang="en-US"/>
+              <a:rPr lang="en-US" b="0"/>
               <a:t>16</a:t>
             </a:fld>
             <a:endParaRPr lang="en-US"/>
@@ -13941,9 +13732,11 @@
       <p:sp>
         <p:nvSpPr>
           <p:cNvPr id="3" name="Text 0"/>
-          <p:cNvSpPr/>
+          <p:cNvSpPr>
+            <a:spLocks noGrp="1"/>
+          </p:cNvSpPr>
           <p:nvPr>
-            <p:ph idx="100" type="body" hasCustomPrompt="1"/>
+            <p:ph type="body" idx="100" hasCustomPrompt="1"/>
           </p:nvPr>
         </p:nvSpPr>
         <p:spPr>
@@ -13961,11 +13754,11 @@
           <a:bodyPr wrap="square" lIns="0" tIns="0" rIns="0" bIns="0" rtlCol="0" anchor="ctr"/>
           <a:lstStyle/>
           <a:p>
-            <a:pPr indent="0" marL="0">
-              <a:buNone/>
-            </a:pPr>
-            <a:r>
-              <a:rPr lang="en-US" sz="1200" b="1" spc="240" kern="0" dirty="0">
+            <a:pPr marL="0" indent="0">
+              <a:buNone/>
+            </a:pPr>
+            <a:r>
+              <a:rPr lang="en-US" sz="1200" b="1" kern="0" spc="240" dirty="0">
                 <a:solidFill>
                   <a:schemeClr val="accent1"/>
                 </a:solidFill>
@@ -13979,9 +13772,11 @@
       <p:sp>
         <p:nvSpPr>
           <p:cNvPr id="4" name="Text 0"/>
-          <p:cNvSpPr/>
+          <p:cNvSpPr>
+            <a:spLocks noGrp="1"/>
+          </p:cNvSpPr>
           <p:nvPr>
-            <p:ph idx="101" type="title" hasCustomPrompt="1"/>
+            <p:ph type="title" idx="101" hasCustomPrompt="1"/>
           </p:nvPr>
         </p:nvSpPr>
         <p:spPr>
@@ -13999,7 +13794,7 @@
           <a:bodyPr wrap="square" lIns="0" tIns="0" rIns="0" bIns="0" rtlCol="0" anchor="ctr"/>
           <a:lstStyle/>
           <a:p>
-            <a:pPr algn="l" indent="0" marL="0">
+            <a:pPr marL="0" indent="0" algn="l">
               <a:buNone/>
             </a:pPr>
             <a:r>
@@ -14017,9 +13812,11 @@
       <p:sp>
         <p:nvSpPr>
           <p:cNvPr id="5" name="Text 0"/>
-          <p:cNvSpPr/>
+          <p:cNvSpPr>
+            <a:spLocks noGrp="1"/>
+          </p:cNvSpPr>
           <p:nvPr>
-            <p:ph idx="102" type="body" hasCustomPrompt="1"/>
+            <p:ph type="body" idx="102" hasCustomPrompt="1"/>
           </p:nvPr>
         </p:nvSpPr>
         <p:spPr>
@@ -14037,7 +13834,7 @@
           <a:bodyPr wrap="square" lIns="0" tIns="0" rIns="0" bIns="0" rtlCol="0" anchor="t"/>
           <a:lstStyle/>
           <a:p>
-            <a:pPr indent="0" marL="0">
+            <a:pPr marL="0" indent="0">
               <a:buNone/>
             </a:pPr>
             <a:r>
@@ -14078,7 +13875,7 @@
             <a:prstDash val="solid"/>
           </a:ln>
           <a:effectLst>
-            <a:outerShdw sx="100000" sy="100000" kx="0" ky="0" algn="bl" rotWithShape="0" blurRad="76200" dist="25400" dir="5400000">
+            <a:outerShdw blurRad="76200" dist="25400" dir="5400000" algn="bl" rotWithShape="0">
               <a:srgbClr val="6F665F">
                 <a:alpha val="12000"/>
               </a:srgbClr>
@@ -14134,7 +13931,7 @@
           <a:bodyPr wrap="square" lIns="0" tIns="0" rIns="0" bIns="0" rtlCol="0" anchor="ctr"/>
           <a:lstStyle/>
           <a:p>
-            <a:pPr algn="ctr" indent="0" marL="0">
+            <a:pPr marL="0" indent="0" algn="ctr">
               <a:buNone/>
             </a:pPr>
             <a:r>
@@ -14170,7 +13967,7 @@
           <a:bodyPr wrap="square" lIns="0" tIns="0" rIns="0" bIns="0" rtlCol="0" anchor="ctr"/>
           <a:lstStyle/>
           <a:p>
-            <a:pPr indent="0" marL="0">
+            <a:pPr marL="0" indent="0">
               <a:buNone/>
             </a:pPr>
             <a:r>
@@ -14206,7 +14003,7 @@
           <a:bodyPr wrap="square" lIns="0" tIns="0" rIns="0" bIns="0" rtlCol="0" anchor="t"/>
           <a:lstStyle/>
           <a:p>
-            <a:pPr indent="0" marL="0">
+            <a:pPr marL="0" indent="0">
               <a:buNone/>
             </a:pPr>
             <a:r>
@@ -14359,7 +14156,7 @@
           <a:bodyPr wrap="square" lIns="0" tIns="0" rIns="0" bIns="0" rtlCol="0" anchor="ctr"/>
           <a:lstStyle/>
           <a:p>
-            <a:pPr indent="0" marL="0">
+            <a:pPr marL="0" indent="0">
               <a:buNone/>
             </a:pPr>
             <a:r>
@@ -14370,9 +14167,6 @@
               </a:rPr>
               <a:t>次へ進む条件　</a:t>
             </a:r>
-            <a:pPr indent="0" marL="0">
-              <a:buNone/>
-            </a:pPr>
             <a:r>
               <a:rPr lang="en-US" sz="1150" b="1" dirty="0">
                 <a:solidFill>
@@ -14411,7 +14205,7 @@
             <a:prstDash val="solid"/>
           </a:ln>
           <a:effectLst>
-            <a:outerShdw sx="100000" sy="100000" kx="0" ky="0" algn="bl" rotWithShape="0" blurRad="76200" dist="25400" dir="5400000">
+            <a:outerShdw blurRad="76200" dist="25400" dir="5400000" algn="bl" rotWithShape="0">
               <a:srgbClr val="6F665F">
                 <a:alpha val="12000"/>
               </a:srgbClr>
@@ -14467,7 +14261,7 @@
           <a:bodyPr wrap="square" lIns="0" tIns="0" rIns="0" bIns="0" rtlCol="0" anchor="ctr"/>
           <a:lstStyle/>
           <a:p>
-            <a:pPr algn="ctr" indent="0" marL="0">
+            <a:pPr marL="0" indent="0" algn="ctr">
               <a:buNone/>
             </a:pPr>
             <a:r>
@@ -14503,7 +14297,7 @@
           <a:bodyPr wrap="square" lIns="0" tIns="0" rIns="0" bIns="0" rtlCol="0" anchor="ctr"/>
           <a:lstStyle/>
           <a:p>
-            <a:pPr indent="0" marL="0">
+            <a:pPr marL="0" indent="0">
               <a:buNone/>
             </a:pPr>
             <a:r>
@@ -14539,7 +14333,7 @@
           <a:bodyPr wrap="square" lIns="0" tIns="0" rIns="0" bIns="0" rtlCol="0" anchor="t"/>
           <a:lstStyle/>
           <a:p>
-            <a:pPr indent="0" marL="0">
+            <a:pPr marL="0" indent="0">
               <a:buNone/>
             </a:pPr>
             <a:r>
@@ -14692,7 +14486,7 @@
           <a:bodyPr wrap="square" lIns="0" tIns="0" rIns="0" bIns="0" rtlCol="0" anchor="ctr"/>
           <a:lstStyle/>
           <a:p>
-            <a:pPr indent="0" marL="0">
+            <a:pPr marL="0" indent="0">
               <a:buNone/>
             </a:pPr>
             <a:r>
@@ -14703,9 +14497,6 @@
               </a:rPr>
               <a:t>次へ進む条件　</a:t>
             </a:r>
-            <a:pPr indent="0" marL="0">
-              <a:buNone/>
-            </a:pPr>
             <a:r>
               <a:rPr lang="en-US" sz="1150" b="1" dirty="0">
                 <a:solidFill>
@@ -14793,7 +14584,7 @@
           <a:bodyPr wrap="square" lIns="0" tIns="0" rIns="0" bIns="0" rtlCol="0" anchor="ctr"/>
           <a:lstStyle/>
           <a:p>
-            <a:pPr algn="ctr" indent="0" marL="0">
+            <a:pPr marL="0" indent="0" algn="ctr">
               <a:buNone/>
             </a:pPr>
             <a:r>
@@ -14829,7 +14620,7 @@
           <a:bodyPr wrap="square" lIns="0" tIns="0" rIns="0" bIns="0" rtlCol="0" anchor="ctr"/>
           <a:lstStyle/>
           <a:p>
-            <a:pPr indent="0" marL="0">
+            <a:pPr marL="0" indent="0">
               <a:buNone/>
             </a:pPr>
             <a:r>
@@ -14865,7 +14656,7 @@
           <a:bodyPr wrap="square" lIns="0" tIns="0" rIns="0" bIns="0" rtlCol="0" anchor="t"/>
           <a:lstStyle/>
           <a:p>
-            <a:pPr indent="0" marL="0">
+            <a:pPr marL="0" indent="0">
               <a:buNone/>
             </a:pPr>
             <a:r>
@@ -15018,7 +14809,7 @@
           <a:bodyPr wrap="square" lIns="0" tIns="0" rIns="0" bIns="0" rtlCol="0" anchor="ctr"/>
           <a:lstStyle/>
           <a:p>
-            <a:pPr indent="0" marL="0">
+            <a:pPr marL="0" indent="0">
               <a:buNone/>
             </a:pPr>
             <a:r>
@@ -15029,9 +14820,6 @@
               </a:rPr>
               <a:t>次へ進む条件　</a:t>
             </a:r>
-            <a:pPr indent="0" marL="0">
-              <a:buNone/>
-            </a:pPr>
             <a:r>
               <a:rPr lang="en-US" sz="1150" b="1" dirty="0">
                 <a:solidFill>
@@ -15046,7 +14834,7 @@
       </p:sp>
       <p:sp>
         <p:nvSpPr>
-          <p:cNvPr id="25" name="Slide Number Placeholder 0"/>
+          <p:cNvPr id="30" name="Slide Number Placeholder 0"/>
           <p:cNvSpPr>
             <a:spLocks noGrp="1"/>
           </p:cNvSpPr>
@@ -15064,7 +14852,7 @@
           </a:prstGeom>
           <a:extLst>
             <a:ext uri="{C572A759-6A51-4108-AA02-DFA0A04FC94B}">
-              <ma14:wrappingTextBoxFlag xmlns:ma14="http://schemas.microsoft.com/office/mac/drawingml/2011/main" val="0"/>
+              <ma14:wrappingTextBoxFlag xmlns:ma14="http://schemas.microsoft.com/office/mac/drawingml/2011/main" xmlns="" val="0"/>
             </a:ext>
           </a:extLst>
         </p:spPr>
@@ -15082,7 +14870,7 @@
           <a:p>
             <a:pPr algn="r"/>
             <a:fld id="{F7021451-1387-4CA6-816F-3879F97B5CBC}" type="slidenum">
-              <a:rPr b="0" lang="en-US"/>
+              <a:rPr lang="en-US" b="0"/>
               <a:t>17</a:t>
             </a:fld>
             <a:endParaRPr lang="en-US"/>
@@ -15167,9 +14955,11 @@
       <p:sp>
         <p:nvSpPr>
           <p:cNvPr id="4" name="Text 0"/>
-          <p:cNvSpPr/>
+          <p:cNvSpPr>
+            <a:spLocks noGrp="1"/>
+          </p:cNvSpPr>
           <p:nvPr>
-            <p:ph idx="100" type="body" hasCustomPrompt="1"/>
+            <p:ph type="body" idx="100" hasCustomPrompt="1"/>
           </p:nvPr>
         </p:nvSpPr>
         <p:spPr>
@@ -15187,11 +14977,11 @@
           <a:bodyPr wrap="square" lIns="0" tIns="0" rIns="0" bIns="0" rtlCol="0"/>
           <a:lstStyle/>
           <a:p>
-            <a:pPr indent="0" marL="0">
-              <a:buNone/>
-            </a:pPr>
-            <a:r>
-              <a:rPr lang="en-US" sz="1200" b="1" spc="400" kern="0" dirty="0">
+            <a:pPr marL="0" indent="0">
+              <a:buNone/>
+            </a:pPr>
+            <a:r>
+              <a:rPr lang="en-US" sz="1200" b="1" kern="0" spc="400" dirty="0">
                 <a:solidFill>
                   <a:schemeClr val="accent4"/>
                 </a:solidFill>
@@ -15205,9 +14995,11 @@
       <p:sp>
         <p:nvSpPr>
           <p:cNvPr id="5" name="Text 0"/>
-          <p:cNvSpPr/>
+          <p:cNvSpPr>
+            <a:spLocks noGrp="1"/>
+          </p:cNvSpPr>
           <p:nvPr>
-            <p:ph idx="101" type="title" hasCustomPrompt="1"/>
+            <p:ph type="title" idx="101" hasCustomPrompt="1"/>
           </p:nvPr>
         </p:nvSpPr>
         <p:spPr>
@@ -15225,7 +15017,7 @@
           <a:bodyPr wrap="square" lIns="0" tIns="0" rIns="0" bIns="0" rtlCol="0" anchor="t"/>
           <a:lstStyle/>
           <a:p>
-            <a:pPr algn="l" indent="0" marL="0">
+            <a:pPr marL="0" indent="0" algn="l">
               <a:buNone/>
             </a:pPr>
             <a:r>
@@ -15239,7 +15031,7 @@
             <a:endParaRPr lang="en-US" sz="3600" dirty="0"/>
           </a:p>
           <a:p>
-            <a:pPr algn="l" indent="0" marL="0">
+            <a:pPr marL="0" indent="0" algn="l">
               <a:buNone/>
             </a:pPr>
             <a:r>
@@ -15257,9 +15049,11 @@
       <p:sp>
         <p:nvSpPr>
           <p:cNvPr id="6" name="Text 1"/>
-          <p:cNvSpPr/>
+          <p:cNvSpPr>
+            <a:spLocks noGrp="1"/>
+          </p:cNvSpPr>
           <p:nvPr>
-            <p:ph idx="103" type="body" hasCustomPrompt="1"/>
+            <p:ph type="body" idx="103" hasCustomPrompt="1"/>
           </p:nvPr>
         </p:nvSpPr>
         <p:spPr>
@@ -15277,7 +15071,7 @@
           <a:bodyPr wrap="square" lIns="0" tIns="0" rIns="0" bIns="0" rtlCol="0" anchor="t"/>
           <a:lstStyle/>
           <a:p>
-            <a:pPr indent="0" marL="0">
+            <a:pPr marL="0" indent="0">
               <a:buNone/>
             </a:pPr>
             <a:r>
@@ -15291,7 +15085,7 @@
             <a:endParaRPr lang="en-US" sz="1500" dirty="0"/>
           </a:p>
           <a:p>
-            <a:pPr indent="0" marL="0">
+            <a:pPr marL="0" indent="0">
               <a:buNone/>
             </a:pPr>
             <a:r>
@@ -15305,7 +15099,7 @@
             <a:endParaRPr lang="en-US" sz="1500" dirty="0"/>
           </a:p>
           <a:p>
-            <a:pPr indent="0" marL="0">
+            <a:pPr marL="0" indent="0">
               <a:buNone/>
             </a:pPr>
             <a:r>
@@ -15319,7 +15113,7 @@
             <a:endParaRPr lang="en-US" sz="1500" dirty="0"/>
           </a:p>
           <a:p>
-            <a:pPr indent="0" marL="0">
+            <a:pPr marL="0" indent="0">
               <a:buNone/>
             </a:pPr>
             <a:r>
@@ -15333,7 +15127,7 @@
             <a:endParaRPr lang="en-US" sz="1500" dirty="0"/>
           </a:p>
           <a:p>
-            <a:pPr indent="0" marL="0">
+            <a:pPr marL="0" indent="0">
               <a:buNone/>
             </a:pPr>
             <a:r>
@@ -15351,9 +15145,11 @@
       <p:sp>
         <p:nvSpPr>
           <p:cNvPr id="7" name="Text 1"/>
-          <p:cNvSpPr/>
+          <p:cNvSpPr>
+            <a:spLocks noGrp="1"/>
+          </p:cNvSpPr>
           <p:nvPr>
-            <p:ph idx="104" type="body" hasCustomPrompt="1"/>
+            <p:ph type="body" idx="104" hasCustomPrompt="1"/>
           </p:nvPr>
         </p:nvSpPr>
         <p:spPr>
@@ -15371,7 +15167,7 @@
           <a:bodyPr wrap="square" lIns="0" tIns="0" rIns="0" bIns="0" rtlCol="0"/>
           <a:lstStyle/>
           <a:p>
-            <a:pPr indent="0" marL="0">
+            <a:pPr marL="0" indent="0">
               <a:buNone/>
             </a:pPr>
             <a:r>
@@ -15439,9 +15235,11 @@
       <p:sp>
         <p:nvSpPr>
           <p:cNvPr id="3" name="Text 0"/>
-          <p:cNvSpPr/>
+          <p:cNvSpPr>
+            <a:spLocks noGrp="1"/>
+          </p:cNvSpPr>
           <p:nvPr>
-            <p:ph idx="100" type="body" hasCustomPrompt="1"/>
+            <p:ph type="body" idx="100" hasCustomPrompt="1"/>
           </p:nvPr>
         </p:nvSpPr>
         <p:spPr>
@@ -15459,11 +15257,11 @@
           <a:bodyPr wrap="square" lIns="0" tIns="0" rIns="0" bIns="0" rtlCol="0" anchor="ctr"/>
           <a:lstStyle/>
           <a:p>
-            <a:pPr indent="0" marL="0">
-              <a:buNone/>
-            </a:pPr>
-            <a:r>
-              <a:rPr lang="en-US" sz="1200" b="1" spc="240" kern="0" dirty="0">
+            <a:pPr marL="0" indent="0">
+              <a:buNone/>
+            </a:pPr>
+            <a:r>
+              <a:rPr lang="en-US" sz="1200" b="1" kern="0" spc="240" dirty="0">
                 <a:solidFill>
                   <a:schemeClr val="accent1"/>
                 </a:solidFill>
@@ -15477,9 +15275,11 @@
       <p:sp>
         <p:nvSpPr>
           <p:cNvPr id="4" name="Text 0"/>
-          <p:cNvSpPr/>
+          <p:cNvSpPr>
+            <a:spLocks noGrp="1"/>
+          </p:cNvSpPr>
           <p:nvPr>
-            <p:ph idx="101" type="title" hasCustomPrompt="1"/>
+            <p:ph type="title" idx="101" hasCustomPrompt="1"/>
           </p:nvPr>
         </p:nvSpPr>
         <p:spPr>
@@ -15497,7 +15297,7 @@
           <a:bodyPr wrap="square" lIns="0" tIns="0" rIns="0" bIns="0" rtlCol="0" anchor="ctr"/>
           <a:lstStyle/>
           <a:p>
-            <a:pPr algn="l" indent="0" marL="0">
+            <a:pPr marL="0" indent="0" algn="l">
               <a:buNone/>
             </a:pPr>
             <a:r>
@@ -15515,9 +15315,11 @@
       <p:sp>
         <p:nvSpPr>
           <p:cNvPr id="5" name="Text 0"/>
-          <p:cNvSpPr/>
+          <p:cNvSpPr>
+            <a:spLocks noGrp="1"/>
+          </p:cNvSpPr>
           <p:nvPr>
-            <p:ph idx="102" type="body" hasCustomPrompt="1"/>
+            <p:ph type="body" idx="102" hasCustomPrompt="1"/>
           </p:nvPr>
         </p:nvSpPr>
         <p:spPr>
@@ -15535,7 +15337,7 @@
           <a:bodyPr wrap="square" lIns="0" tIns="0" rIns="0" bIns="0" rtlCol="0" anchor="t"/>
           <a:lstStyle/>
           <a:p>
-            <a:pPr indent="0" marL="0">
+            <a:pPr marL="0" indent="0">
               <a:buNone/>
             </a:pPr>
             <a:r>
@@ -15576,7 +15378,7 @@
             <a:prstDash val="solid"/>
           </a:ln>
           <a:effectLst>
-            <a:outerShdw sx="100000" sy="100000" kx="0" ky="0" algn="bl" rotWithShape="0" blurRad="76200" dist="25400" dir="5400000">
+            <a:outerShdw blurRad="76200" dist="25400" dir="5400000" algn="bl" rotWithShape="0">
               <a:srgbClr val="6F665F">
                 <a:alpha val="12000"/>
               </a:srgbClr>
@@ -15605,7 +15407,7 @@
           <a:bodyPr wrap="square" lIns="0" tIns="0" rIns="0" bIns="0" rtlCol="0" anchor="t"/>
           <a:lstStyle/>
           <a:p>
-            <a:pPr algn="r" indent="0" marL="0">
+            <a:pPr marL="0" indent="0" algn="r">
               <a:buNone/>
             </a:pPr>
             <a:r>
@@ -15668,7 +15470,7 @@
           <a:bodyPr wrap="square" lIns="0" tIns="0" rIns="0" bIns="0" rtlCol="0" anchor="ctr"/>
           <a:lstStyle/>
           <a:p>
-            <a:pPr algn="ctr" indent="0" marL="0">
+            <a:pPr marL="0" indent="0" algn="ctr">
               <a:buNone/>
             </a:pPr>
             <a:r>
@@ -15704,7 +15506,7 @@
           <a:bodyPr wrap="square" lIns="0" tIns="0" rIns="0" bIns="0" rtlCol="0" anchor="t"/>
           <a:lstStyle/>
           <a:p>
-            <a:pPr indent="0" marL="0">
+            <a:pPr marL="0" indent="0">
               <a:buNone/>
             </a:pPr>
             <a:r>
@@ -15713,7 +15515,19 @@
                   <a:schemeClr val="tx1"/>
                 </a:solidFill>
               </a:rPr>
-              <a:t>M&amp;Aで成長したいが、社内にM&amp;A担当がいない・育てたい年商10〜100億円の企業</a:t>
+              <a:t>M&amp;Aで成長したいが、社内にM&amp;A担当がいない・育てたい年商</a:t>
+            </a:r>
+            <a:r>
+              <a:rPr lang="en-US" sz="1400" dirty="0"/>
+              <a:t>3</a:t>
+            </a:r>
+            <a:r>
+              <a:rPr lang="en-US" sz="1400" dirty="0">
+                <a:solidFill>
+                  <a:schemeClr val="tx1"/>
+                </a:solidFill>
+              </a:rPr>
+              <a:t>〜100億円の企業</a:t>
             </a:r>
             <a:endParaRPr lang="en-US" sz="1400" dirty="0"/>
           </a:p>
@@ -15745,7 +15559,7 @@
             <a:prstDash val="solid"/>
           </a:ln>
           <a:effectLst>
-            <a:outerShdw sx="100000" sy="100000" kx="0" ky="0" algn="bl" rotWithShape="0" blurRad="76200" dist="25400" dir="5400000">
+            <a:outerShdw blurRad="76200" dist="25400" dir="5400000" algn="bl" rotWithShape="0">
               <a:srgbClr val="6F665F">
                 <a:alpha val="12000"/>
               </a:srgbClr>
@@ -15774,7 +15588,7 @@
           <a:bodyPr wrap="square" lIns="0" tIns="0" rIns="0" bIns="0" rtlCol="0" anchor="t"/>
           <a:lstStyle/>
           <a:p>
-            <a:pPr algn="r" indent="0" marL="0">
+            <a:pPr marL="0" indent="0" algn="r">
               <a:buNone/>
             </a:pPr>
             <a:r>
@@ -15837,7 +15651,7 @@
           <a:bodyPr wrap="square" lIns="0" tIns="0" rIns="0" bIns="0" rtlCol="0" anchor="ctr"/>
           <a:lstStyle/>
           <a:p>
-            <a:pPr algn="ctr" indent="0" marL="0">
+            <a:pPr marL="0" indent="0" algn="ctr">
               <a:buNone/>
             </a:pPr>
             <a:r>
@@ -15873,7 +15687,7 @@
           <a:bodyPr wrap="square" lIns="0" tIns="0" rIns="0" bIns="0" rtlCol="0" anchor="t"/>
           <a:lstStyle/>
           <a:p>
-            <a:pPr indent="0" marL="0">
+            <a:pPr marL="0" indent="0">
               <a:buNone/>
             </a:pPr>
             <a:r>
@@ -15914,7 +15728,7 @@
             <a:prstDash val="solid"/>
           </a:ln>
           <a:effectLst>
-            <a:outerShdw sx="100000" sy="100000" kx="0" ky="0" algn="bl" rotWithShape="0" blurRad="76200" dist="25400" dir="5400000">
+            <a:outerShdw blurRad="76200" dist="25400" dir="5400000" algn="bl" rotWithShape="0">
               <a:srgbClr val="6F665F">
                 <a:alpha val="12000"/>
               </a:srgbClr>
@@ -15943,7 +15757,7 @@
           <a:bodyPr wrap="square" lIns="0" tIns="0" rIns="0" bIns="0" rtlCol="0" anchor="t"/>
           <a:lstStyle/>
           <a:p>
-            <a:pPr algn="r" indent="0" marL="0">
+            <a:pPr marL="0" indent="0" algn="r">
               <a:buNone/>
             </a:pPr>
             <a:r>
@@ -16006,7 +15820,7 @@
           <a:bodyPr wrap="square" lIns="0" tIns="0" rIns="0" bIns="0" rtlCol="0" anchor="ctr"/>
           <a:lstStyle/>
           <a:p>
-            <a:pPr algn="ctr" indent="0" marL="0">
+            <a:pPr marL="0" indent="0" algn="ctr">
               <a:buNone/>
             </a:pPr>
             <a:r>
@@ -16042,7 +15856,7 @@
           <a:bodyPr wrap="square" lIns="0" tIns="0" rIns="0" bIns="0" rtlCol="0" anchor="t"/>
           <a:lstStyle/>
           <a:p>
-            <a:pPr indent="0" marL="0">
+            <a:pPr marL="0" indent="0">
               <a:buNone/>
             </a:pPr>
             <a:r>
@@ -16105,7 +15919,7 @@
           <a:bodyPr wrap="square" lIns="0" tIns="0" rIns="0" bIns="0" rtlCol="0" anchor="ctr"/>
           <a:lstStyle/>
           <a:p>
-            <a:pPr indent="0" marL="0">
+            <a:pPr marL="0" indent="0">
               <a:buNone/>
             </a:pPr>
             <a:r>
@@ -16119,7 +15933,7 @@
             <a:endParaRPr lang="en-US" sz="1300" dirty="0"/>
           </a:p>
           <a:p>
-            <a:pPr indent="0" marL="0">
+            <a:pPr marL="0" indent="0">
               <a:buNone/>
             </a:pPr>
             <a:r>
@@ -16154,7 +15968,7 @@
           </a:prstGeom>
           <a:extLst>
             <a:ext uri="{C572A759-6A51-4108-AA02-DFA0A04FC94B}">
-              <ma14:wrappingTextBoxFlag xmlns:ma14="http://schemas.microsoft.com/office/mac/drawingml/2011/main" val="0"/>
+              <ma14:wrappingTextBoxFlag xmlns:ma14="http://schemas.microsoft.com/office/mac/drawingml/2011/main" xmlns="" val="0"/>
             </a:ext>
           </a:extLst>
         </p:spPr>
@@ -16172,7 +15986,7 @@
           <a:p>
             <a:pPr algn="r"/>
             <a:fld id="{F7021451-1387-4CA6-816F-3879F97B5CBC}" type="slidenum">
-              <a:rPr b="0" lang="en-US"/>
+              <a:rPr lang="en-US" b="0"/>
               <a:t>2</a:t>
             </a:fld>
             <a:endParaRPr lang="en-US"/>
@@ -16232,9 +16046,11 @@
       <p:sp>
         <p:nvSpPr>
           <p:cNvPr id="3" name="Text 0"/>
-          <p:cNvSpPr/>
+          <p:cNvSpPr>
+            <a:spLocks noGrp="1"/>
+          </p:cNvSpPr>
           <p:nvPr>
-            <p:ph idx="100" type="body" hasCustomPrompt="1"/>
+            <p:ph type="body" idx="100" hasCustomPrompt="1"/>
           </p:nvPr>
         </p:nvSpPr>
         <p:spPr>
@@ -16252,11 +16068,11 @@
           <a:bodyPr wrap="square" lIns="0" tIns="0" rIns="0" bIns="0" rtlCol="0" anchor="ctr"/>
           <a:lstStyle/>
           <a:p>
-            <a:pPr indent="0" marL="0">
-              <a:buNone/>
-            </a:pPr>
-            <a:r>
-              <a:rPr lang="en-US" sz="1200" b="1" spc="240" kern="0" dirty="0">
+            <a:pPr marL="0" indent="0">
+              <a:buNone/>
+            </a:pPr>
+            <a:r>
+              <a:rPr lang="en-US" sz="1200" b="1" kern="0" spc="240" dirty="0">
                 <a:solidFill>
                   <a:schemeClr val="accent1"/>
                 </a:solidFill>
@@ -16270,9 +16086,11 @@
       <p:sp>
         <p:nvSpPr>
           <p:cNvPr id="4" name="Text 0"/>
-          <p:cNvSpPr/>
+          <p:cNvSpPr>
+            <a:spLocks noGrp="1"/>
+          </p:cNvSpPr>
           <p:nvPr>
-            <p:ph idx="101" type="title" hasCustomPrompt="1"/>
+            <p:ph type="title" idx="101" hasCustomPrompt="1"/>
           </p:nvPr>
         </p:nvSpPr>
         <p:spPr>
@@ -16290,7 +16108,7 @@
           <a:bodyPr wrap="square" lIns="0" tIns="0" rIns="0" bIns="0" rtlCol="0" anchor="ctr"/>
           <a:lstStyle/>
           <a:p>
-            <a:pPr algn="l" indent="0" marL="0">
+            <a:pPr marL="0" indent="0" algn="l">
               <a:buNone/>
             </a:pPr>
             <a:r>
@@ -16308,9 +16126,11 @@
       <p:sp>
         <p:nvSpPr>
           <p:cNvPr id="5" name="Text 0"/>
-          <p:cNvSpPr/>
+          <p:cNvSpPr>
+            <a:spLocks noGrp="1"/>
+          </p:cNvSpPr>
           <p:nvPr>
-            <p:ph idx="102" type="body" hasCustomPrompt="1"/>
+            <p:ph type="body" idx="102" hasCustomPrompt="1"/>
           </p:nvPr>
         </p:nvSpPr>
         <p:spPr>
@@ -16328,7 +16148,7 @@
           <a:bodyPr wrap="square" lIns="0" tIns="0" rIns="0" bIns="0" rtlCol="0" anchor="t"/>
           <a:lstStyle/>
           <a:p>
-            <a:pPr indent="0" marL="0">
+            <a:pPr marL="0" indent="0">
               <a:buNone/>
             </a:pPr>
             <a:r>
@@ -16369,7 +16189,7 @@
             <a:prstDash val="solid"/>
           </a:ln>
           <a:effectLst>
-            <a:outerShdw sx="100000" sy="100000" kx="0" ky="0" algn="bl" rotWithShape="0" blurRad="76200" dist="25400" dir="5400000">
+            <a:outerShdw blurRad="76200" dist="25400" dir="5400000" algn="bl" rotWithShape="0">
               <a:srgbClr val="6F665F">
                 <a:alpha val="12000"/>
               </a:srgbClr>
@@ -16379,31 +16199,6 @@
       </p:sp>
       <p:sp>
         <p:nvSpPr>
-          <p:cNvPr id="7" name="Shape 5"/>
-          <p:cNvSpPr/>
-          <p:nvPr/>
-        </p:nvSpPr>
-        <p:spPr>
-          <a:xfrm>
-            <a:off x="941832" y="2331720"/>
-            <a:ext cx="365760" cy="45720"/>
-          </a:xfrm>
-          <a:prstGeom prst="rect">
-            <a:avLst/>
-          </a:prstGeom>
-          <a:solidFill>
-            <a:schemeClr val="accent1"/>
-          </a:solidFill>
-          <a:ln w="12700">
-            <a:solidFill>
-              <a:schemeClr val="accent1"/>
-            </a:solidFill>
-            <a:prstDash val="solid"/>
-          </a:ln>
-        </p:spPr>
-      </p:sp>
-      <p:sp>
-        <p:nvSpPr>
           <p:cNvPr id="8" name="Text 6"/>
           <p:cNvSpPr txBox="1"/>
           <p:nvPr/>
@@ -16423,7 +16218,7 @@
           <a:bodyPr wrap="square" lIns="0" tIns="0" rIns="0" bIns="0" rtlCol="0" anchor="ctr"/>
           <a:lstStyle/>
           <a:p>
-            <a:pPr indent="0" marL="0">
+            <a:pPr marL="0" indent="0">
               <a:buNone/>
             </a:pPr>
             <a:r>
@@ -16459,7 +16254,7 @@
           <a:bodyPr wrap="square" lIns="0" tIns="0" rIns="0" bIns="0" rtlCol="0" anchor="t"/>
           <a:lstStyle/>
           <a:p>
-            <a:pPr indent="0" marL="0">
+            <a:pPr marL="0" indent="0">
               <a:buNone/>
             </a:pPr>
             <a:r>
@@ -16495,7 +16290,7 @@
           <a:bodyPr wrap="square" lIns="0" tIns="0" rIns="0" bIns="0" rtlCol="0" anchor="t"/>
           <a:lstStyle/>
           <a:p>
-            <a:pPr indent="0" marL="0">
+            <a:pPr marL="0" indent="0">
               <a:buNone/>
             </a:pPr>
             <a:r>
@@ -16536,7 +16331,7 @@
             <a:prstDash val="solid"/>
           </a:ln>
           <a:effectLst>
-            <a:outerShdw sx="100000" sy="100000" kx="0" ky="0" algn="bl" rotWithShape="0" blurRad="76200" dist="25400" dir="5400000">
+            <a:outerShdw blurRad="76200" dist="25400" dir="5400000" algn="bl" rotWithShape="0">
               <a:srgbClr val="6F665F">
                 <a:alpha val="12000"/>
               </a:srgbClr>
@@ -16546,31 +16341,6 @@
       </p:sp>
       <p:sp>
         <p:nvSpPr>
-          <p:cNvPr id="12" name="Shape 10"/>
-          <p:cNvSpPr/>
-          <p:nvPr/>
-        </p:nvSpPr>
-        <p:spPr>
-          <a:xfrm>
-            <a:off x="4626864" y="2331720"/>
-            <a:ext cx="365760" cy="45720"/>
-          </a:xfrm>
-          <a:prstGeom prst="rect">
-            <a:avLst/>
-          </a:prstGeom>
-          <a:solidFill>
-            <a:schemeClr val="accent1"/>
-          </a:solidFill>
-          <a:ln w="12700">
-            <a:solidFill>
-              <a:schemeClr val="accent1"/>
-            </a:solidFill>
-            <a:prstDash val="solid"/>
-          </a:ln>
-        </p:spPr>
-      </p:sp>
-      <p:sp>
-        <p:nvSpPr>
           <p:cNvPr id="13" name="Text 11"/>
           <p:cNvSpPr txBox="1"/>
           <p:nvPr/>
@@ -16590,7 +16360,7 @@
           <a:bodyPr wrap="square" lIns="0" tIns="0" rIns="0" bIns="0" rtlCol="0" anchor="ctr"/>
           <a:lstStyle/>
           <a:p>
-            <a:pPr indent="0" marL="0">
+            <a:pPr marL="0" indent="0">
               <a:buNone/>
             </a:pPr>
             <a:r>
@@ -16626,7 +16396,7 @@
           <a:bodyPr wrap="square" lIns="0" tIns="0" rIns="0" bIns="0" rtlCol="0" anchor="t"/>
           <a:lstStyle/>
           <a:p>
-            <a:pPr indent="0" marL="0">
+            <a:pPr marL="0" indent="0">
               <a:buNone/>
             </a:pPr>
             <a:r>
@@ -16662,7 +16432,7 @@
           <a:bodyPr wrap="square" lIns="0" tIns="0" rIns="0" bIns="0" rtlCol="0" anchor="t"/>
           <a:lstStyle/>
           <a:p>
-            <a:pPr indent="0" marL="0">
+            <a:pPr marL="0" indent="0">
               <a:buNone/>
             </a:pPr>
             <a:r>
@@ -16703,7 +16473,7 @@
             <a:prstDash val="solid"/>
           </a:ln>
           <a:effectLst>
-            <a:outerShdw sx="100000" sy="100000" kx="0" ky="0" algn="bl" rotWithShape="0" blurRad="76200" dist="25400" dir="5400000">
+            <a:outerShdw blurRad="76200" dist="25400" dir="5400000" algn="bl" rotWithShape="0">
               <a:srgbClr val="6F665F">
                 <a:alpha val="12000"/>
               </a:srgbClr>
@@ -16713,31 +16483,6 @@
       </p:sp>
       <p:sp>
         <p:nvSpPr>
-          <p:cNvPr id="17" name="Shape 15"/>
-          <p:cNvSpPr/>
-          <p:nvPr/>
-        </p:nvSpPr>
-        <p:spPr>
-          <a:xfrm>
-            <a:off x="8311896" y="2331720"/>
-            <a:ext cx="365760" cy="45720"/>
-          </a:xfrm>
-          <a:prstGeom prst="rect">
-            <a:avLst/>
-          </a:prstGeom>
-          <a:solidFill>
-            <a:schemeClr val="accent1"/>
-          </a:solidFill>
-          <a:ln w="12700">
-            <a:solidFill>
-              <a:schemeClr val="accent1"/>
-            </a:solidFill>
-            <a:prstDash val="solid"/>
-          </a:ln>
-        </p:spPr>
-      </p:sp>
-      <p:sp>
-        <p:nvSpPr>
           <p:cNvPr id="18" name="Text 16"/>
           <p:cNvSpPr txBox="1"/>
           <p:nvPr/>
@@ -16757,7 +16502,7 @@
           <a:bodyPr wrap="square" lIns="0" tIns="0" rIns="0" bIns="0" rtlCol="0" anchor="ctr"/>
           <a:lstStyle/>
           <a:p>
-            <a:pPr indent="0" marL="0">
+            <a:pPr marL="0" indent="0">
               <a:buNone/>
             </a:pPr>
             <a:r>
@@ -16793,7 +16538,7 @@
           <a:bodyPr wrap="square" lIns="0" tIns="0" rIns="0" bIns="0" rtlCol="0" anchor="t"/>
           <a:lstStyle/>
           <a:p>
-            <a:pPr indent="0" marL="0">
+            <a:pPr marL="0" indent="0">
               <a:buNone/>
             </a:pPr>
             <a:r>
@@ -16829,7 +16574,7 @@
           <a:bodyPr wrap="square" lIns="0" tIns="0" rIns="0" bIns="0" rtlCol="0" anchor="t"/>
           <a:lstStyle/>
           <a:p>
-            <a:pPr indent="0" marL="0">
+            <a:pPr marL="0" indent="0">
               <a:buNone/>
             </a:pPr>
             <a:r>
@@ -16870,7 +16615,7 @@
             <a:prstDash val="solid"/>
           </a:ln>
           <a:effectLst>
-            <a:outerShdw sx="100000" sy="100000" kx="0" ky="0" algn="bl" rotWithShape="0" blurRad="76200" dist="25400" dir="5400000">
+            <a:outerShdw blurRad="76200" dist="25400" dir="5400000" algn="bl" rotWithShape="0">
               <a:srgbClr val="6F665F">
                 <a:alpha val="12000"/>
               </a:srgbClr>
@@ -16924,7 +16669,7 @@
           <a:bodyPr wrap="square" lIns="0" tIns="0" rIns="0" bIns="0" rtlCol="0" anchor="ctr"/>
           <a:lstStyle/>
           <a:p>
-            <a:pPr algn="ctr" indent="0" marL="0">
+            <a:pPr marL="0" indent="0" algn="ctr">
               <a:buNone/>
             </a:pPr>
             <a:r>
@@ -16960,7 +16705,7 @@
           <a:bodyPr wrap="square" lIns="0" tIns="0" rIns="0" bIns="0" rtlCol="0" anchor="ctr"/>
           <a:lstStyle/>
           <a:p>
-            <a:pPr indent="0" marL="0">
+            <a:pPr marL="0" indent="0">
               <a:buNone/>
             </a:pPr>
             <a:r>
@@ -16996,7 +16741,7 @@
           <a:bodyPr wrap="square" lIns="0" tIns="0" rIns="0" bIns="0" rtlCol="0" anchor="t"/>
           <a:lstStyle/>
           <a:p>
-            <a:pPr indent="0" marL="0">
+            <a:pPr marL="0" indent="0">
               <a:buNone/>
             </a:pPr>
             <a:r>
@@ -17037,7 +16782,7 @@
             <a:prstDash val="solid"/>
           </a:ln>
           <a:effectLst>
-            <a:outerShdw sx="100000" sy="100000" kx="0" ky="0" algn="bl" rotWithShape="0" blurRad="76200" dist="25400" dir="5400000">
+            <a:outerShdw blurRad="76200" dist="25400" dir="5400000" algn="bl" rotWithShape="0">
               <a:srgbClr val="6F665F">
                 <a:alpha val="12000"/>
               </a:srgbClr>
@@ -17091,7 +16836,7 @@
           <a:bodyPr wrap="square" lIns="0" tIns="0" rIns="0" bIns="0" rtlCol="0" anchor="ctr"/>
           <a:lstStyle/>
           <a:p>
-            <a:pPr algn="ctr" indent="0" marL="0">
+            <a:pPr marL="0" indent="0" algn="ctr">
               <a:buNone/>
             </a:pPr>
             <a:r>
@@ -17127,7 +16872,7 @@
           <a:bodyPr wrap="square" lIns="0" tIns="0" rIns="0" bIns="0" rtlCol="0" anchor="ctr"/>
           <a:lstStyle/>
           <a:p>
-            <a:pPr indent="0" marL="0">
+            <a:pPr marL="0" indent="0">
               <a:buNone/>
             </a:pPr>
             <a:r>
@@ -17163,7 +16908,7 @@
           <a:bodyPr wrap="square" lIns="0" tIns="0" rIns="0" bIns="0" rtlCol="0" anchor="t"/>
           <a:lstStyle/>
           <a:p>
-            <a:pPr indent="0" marL="0">
+            <a:pPr marL="0" indent="0">
               <a:buNone/>
             </a:pPr>
             <a:r>
@@ -17204,7 +16949,7 @@
             <a:prstDash val="solid"/>
           </a:ln>
           <a:effectLst>
-            <a:outerShdw sx="100000" sy="100000" kx="0" ky="0" algn="bl" rotWithShape="0" blurRad="76200" dist="25400" dir="5400000">
+            <a:outerShdw blurRad="76200" dist="25400" dir="5400000" algn="bl" rotWithShape="0">
               <a:srgbClr val="6F665F">
                 <a:alpha val="12000"/>
               </a:srgbClr>
@@ -17258,7 +17003,7 @@
           <a:bodyPr wrap="square" lIns="0" tIns="0" rIns="0" bIns="0" rtlCol="0" anchor="ctr"/>
           <a:lstStyle/>
           <a:p>
-            <a:pPr algn="ctr" indent="0" marL="0">
+            <a:pPr marL="0" indent="0" algn="ctr">
               <a:buNone/>
             </a:pPr>
             <a:r>
@@ -17294,7 +17039,7 @@
           <a:bodyPr wrap="square" lIns="0" tIns="0" rIns="0" bIns="0" rtlCol="0" anchor="ctr"/>
           <a:lstStyle/>
           <a:p>
-            <a:pPr indent="0" marL="0">
+            <a:pPr marL="0" indent="0">
               <a:buNone/>
             </a:pPr>
             <a:r>
@@ -17330,7 +17075,7 @@
           <a:bodyPr wrap="square" lIns="0" tIns="0" rIns="0" bIns="0" rtlCol="0" anchor="t"/>
           <a:lstStyle/>
           <a:p>
-            <a:pPr indent="0" marL="0">
+            <a:pPr marL="0" indent="0">
               <a:buNone/>
             </a:pPr>
             <a:r>
@@ -17366,7 +17111,7 @@
           <a:bodyPr wrap="square" lIns="0" tIns="0" rIns="0" bIns="0" rtlCol="0" anchor="t"/>
           <a:lstStyle/>
           <a:p>
-            <a:pPr indent="0" marL="0">
+            <a:pPr marL="0" indent="0">
               <a:buNone/>
             </a:pPr>
             <a:r>
@@ -17383,7 +17128,7 @@
       </p:sp>
       <p:sp>
         <p:nvSpPr>
-          <p:cNvPr id="25" name="Slide Number Placeholder 0"/>
+          <p:cNvPr id="37" name="Slide Number Placeholder 0"/>
           <p:cNvSpPr>
             <a:spLocks noGrp="1"/>
           </p:cNvSpPr>
@@ -17401,7 +17146,7 @@
           </a:prstGeom>
           <a:extLst>
             <a:ext uri="{C572A759-6A51-4108-AA02-DFA0A04FC94B}">
-              <ma14:wrappingTextBoxFlag xmlns:ma14="http://schemas.microsoft.com/office/mac/drawingml/2011/main" val="0"/>
+              <ma14:wrappingTextBoxFlag xmlns:ma14="http://schemas.microsoft.com/office/mac/drawingml/2011/main" xmlns="" val="0"/>
             </a:ext>
           </a:extLst>
         </p:spPr>
@@ -17419,7 +17164,7 @@
           <a:p>
             <a:pPr algn="r"/>
             <a:fld id="{F7021451-1387-4CA6-816F-3879F97B5CBC}" type="slidenum">
-              <a:rPr b="0" lang="en-US"/>
+              <a:rPr lang="en-US" b="0"/>
               <a:t>3</a:t>
             </a:fld>
             <a:endParaRPr lang="en-US"/>
@@ -17479,9 +17224,11 @@
       <p:sp>
         <p:nvSpPr>
           <p:cNvPr id="3" name="Text 0"/>
-          <p:cNvSpPr/>
+          <p:cNvSpPr>
+            <a:spLocks noGrp="1"/>
+          </p:cNvSpPr>
           <p:nvPr>
-            <p:ph idx="100" type="body" hasCustomPrompt="1"/>
+            <p:ph type="body" idx="100" hasCustomPrompt="1"/>
           </p:nvPr>
         </p:nvSpPr>
         <p:spPr>
@@ -17499,11 +17246,11 @@
           <a:bodyPr wrap="square" lIns="0" tIns="0" rIns="0" bIns="0" rtlCol="0" anchor="ctr"/>
           <a:lstStyle/>
           <a:p>
-            <a:pPr indent="0" marL="0">
-              <a:buNone/>
-            </a:pPr>
-            <a:r>
-              <a:rPr lang="en-US" sz="1200" b="1" spc="240" kern="0" dirty="0">
+            <a:pPr marL="0" indent="0">
+              <a:buNone/>
+            </a:pPr>
+            <a:r>
+              <a:rPr lang="en-US" sz="1200" b="1" kern="0" spc="240" dirty="0">
                 <a:solidFill>
                   <a:schemeClr val="accent1"/>
                 </a:solidFill>
@@ -17517,9 +17264,11 @@
       <p:sp>
         <p:nvSpPr>
           <p:cNvPr id="4" name="Text 0"/>
-          <p:cNvSpPr/>
+          <p:cNvSpPr>
+            <a:spLocks noGrp="1"/>
+          </p:cNvSpPr>
           <p:nvPr>
-            <p:ph idx="101" type="title" hasCustomPrompt="1"/>
+            <p:ph type="title" idx="101" hasCustomPrompt="1"/>
           </p:nvPr>
         </p:nvSpPr>
         <p:spPr>
@@ -17537,7 +17286,7 @@
           <a:bodyPr wrap="square" lIns="0" tIns="0" rIns="0" bIns="0" rtlCol="0" anchor="ctr"/>
           <a:lstStyle/>
           <a:p>
-            <a:pPr algn="l" indent="0" marL="0">
+            <a:pPr marL="0" indent="0" algn="l">
               <a:buNone/>
             </a:pPr>
             <a:r>
@@ -17555,9 +17304,11 @@
       <p:sp>
         <p:nvSpPr>
           <p:cNvPr id="5" name="Text 0"/>
-          <p:cNvSpPr/>
+          <p:cNvSpPr>
+            <a:spLocks noGrp="1"/>
+          </p:cNvSpPr>
           <p:nvPr>
-            <p:ph idx="102" type="body" hasCustomPrompt="1"/>
+            <p:ph type="body" idx="102" hasCustomPrompt="1"/>
           </p:nvPr>
         </p:nvSpPr>
         <p:spPr>
@@ -17575,7 +17326,7 @@
           <a:bodyPr wrap="square" lIns="0" tIns="0" rIns="0" bIns="0" rtlCol="0" anchor="t"/>
           <a:lstStyle/>
           <a:p>
-            <a:pPr indent="0" marL="0">
+            <a:pPr marL="0" indent="0">
               <a:buNone/>
             </a:pPr>
             <a:r>
@@ -17636,7 +17387,7 @@
           <a:bodyPr wrap="square" lIns="0" tIns="0" rIns="0" bIns="0" rtlCol="0" anchor="ctr"/>
           <a:lstStyle/>
           <a:p>
-            <a:pPr algn="ctr" indent="0" marL="0">
+            <a:pPr marL="0" indent="0" algn="ctr">
               <a:buNone/>
             </a:pPr>
             <a:r>
@@ -17677,7 +17428,7 @@
             <a:prstDash val="solid"/>
           </a:ln>
           <a:effectLst>
-            <a:outerShdw sx="100000" sy="100000" kx="0" ky="0" algn="bl" rotWithShape="0" blurRad="76200" dist="25400" dir="5400000">
+            <a:outerShdw blurRad="76200" dist="25400" dir="5400000" algn="bl" rotWithShape="0">
               <a:srgbClr val="6F665F">
                 <a:alpha val="12000"/>
               </a:srgbClr>
@@ -17706,7 +17457,7 @@
           <a:bodyPr wrap="square" lIns="0" tIns="0" rIns="0" bIns="0" rtlCol="0" anchor="t"/>
           <a:lstStyle/>
           <a:p>
-            <a:pPr indent="0" marL="0">
+            <a:pPr marL="0" indent="0">
               <a:buNone/>
             </a:pPr>
             <a:r>
@@ -17742,7 +17493,7 @@
           <a:bodyPr wrap="square" lIns="0" tIns="0" rIns="0" bIns="0" rtlCol="0" anchor="t"/>
           <a:lstStyle/>
           <a:p>
-            <a:pPr indent="0" marL="0">
+            <a:pPr marL="0" indent="0">
               <a:buNone/>
             </a:pPr>
             <a:r>
@@ -17803,7 +17554,7 @@
           <a:bodyPr wrap="square" lIns="0" tIns="0" rIns="0" bIns="0" rtlCol="0" anchor="ctr"/>
           <a:lstStyle/>
           <a:p>
-            <a:pPr algn="ctr" indent="0" marL="0">
+            <a:pPr marL="0" indent="0" algn="ctr">
               <a:buNone/>
             </a:pPr>
             <a:r>
@@ -17844,7 +17595,7 @@
             <a:prstDash val="solid"/>
           </a:ln>
           <a:effectLst>
-            <a:outerShdw sx="100000" sy="100000" kx="0" ky="0" algn="bl" rotWithShape="0" blurRad="76200" dist="25400" dir="5400000">
+            <a:outerShdw blurRad="76200" dist="25400" dir="5400000" algn="bl" rotWithShape="0">
               <a:srgbClr val="6F665F">
                 <a:alpha val="12000"/>
               </a:srgbClr>
@@ -17873,7 +17624,7 @@
           <a:bodyPr wrap="square" lIns="0" tIns="0" rIns="0" bIns="0" rtlCol="0" anchor="t"/>
           <a:lstStyle/>
           <a:p>
-            <a:pPr indent="0" marL="0">
+            <a:pPr marL="0" indent="0">
               <a:buNone/>
             </a:pPr>
             <a:r>
@@ -17909,7 +17660,7 @@
           <a:bodyPr wrap="square" lIns="0" tIns="0" rIns="0" bIns="0" rtlCol="0" anchor="t"/>
           <a:lstStyle/>
           <a:p>
-            <a:pPr indent="0" marL="0">
+            <a:pPr marL="0" indent="0">
               <a:buNone/>
             </a:pPr>
             <a:r>
@@ -17970,7 +17721,7 @@
           <a:bodyPr wrap="square" lIns="0" tIns="0" rIns="0" bIns="0" rtlCol="0" anchor="ctr"/>
           <a:lstStyle/>
           <a:p>
-            <a:pPr algn="ctr" indent="0" marL="0">
+            <a:pPr marL="0" indent="0" algn="ctr">
               <a:buNone/>
             </a:pPr>
             <a:r>
@@ -18011,7 +17762,7 @@
             <a:prstDash val="solid"/>
           </a:ln>
           <a:effectLst>
-            <a:outerShdw sx="100000" sy="100000" kx="0" ky="0" algn="bl" rotWithShape="0" blurRad="76200" dist="25400" dir="5400000">
+            <a:outerShdw blurRad="76200" dist="25400" dir="5400000" algn="bl" rotWithShape="0">
               <a:srgbClr val="6F665F">
                 <a:alpha val="12000"/>
               </a:srgbClr>
@@ -18040,7 +17791,7 @@
           <a:bodyPr wrap="square" lIns="0" tIns="0" rIns="0" bIns="0" rtlCol="0" anchor="t"/>
           <a:lstStyle/>
           <a:p>
-            <a:pPr indent="0" marL="0">
+            <a:pPr marL="0" indent="0">
               <a:buNone/>
             </a:pPr>
             <a:r>
@@ -18076,7 +17827,7 @@
           <a:bodyPr wrap="square" lIns="0" tIns="0" rIns="0" bIns="0" rtlCol="0" anchor="t"/>
           <a:lstStyle/>
           <a:p>
-            <a:pPr indent="0" marL="0">
+            <a:pPr marL="0" indent="0">
               <a:buNone/>
             </a:pPr>
             <a:r>
@@ -18139,7 +17890,7 @@
           <a:bodyPr wrap="square" lIns="0" tIns="0" rIns="0" bIns="0" rtlCol="0" anchor="t"/>
           <a:lstStyle/>
           <a:p>
-            <a:pPr indent="0" marL="0">
+            <a:pPr marL="0" indent="0">
               <a:buNone/>
             </a:pPr>
             <a:r>
@@ -18153,7 +17904,7 @@
             <a:endParaRPr lang="en-US" sz="1300" dirty="0"/>
           </a:p>
           <a:p>
-            <a:pPr indent="0" marL="0">
+            <a:pPr marL="0" indent="0">
               <a:buNone/>
             </a:pPr>
             <a:r>
@@ -18167,7 +17918,7 @@
             <a:endParaRPr lang="en-US" sz="1300" dirty="0"/>
           </a:p>
           <a:p>
-            <a:pPr indent="0" marL="0">
+            <a:pPr marL="0" indent="0">
               <a:buNone/>
             </a:pPr>
             <a:r>
@@ -18181,7 +17932,7 @@
             <a:endParaRPr lang="en-US" sz="1300" dirty="0"/>
           </a:p>
           <a:p>
-            <a:pPr indent="0" marL="0">
+            <a:pPr marL="0" indent="0">
               <a:buNone/>
             </a:pPr>
             <a:r>
@@ -18195,7 +17946,7 @@
             <a:endParaRPr lang="en-US" sz="1300" dirty="0"/>
           </a:p>
           <a:p>
-            <a:pPr indent="0" marL="0">
+            <a:pPr marL="0" indent="0">
               <a:buNone/>
             </a:pPr>
             <a:r>
@@ -18209,7 +17960,7 @@
             <a:endParaRPr lang="en-US" sz="1300" dirty="0"/>
           </a:p>
           <a:p>
-            <a:pPr indent="0" marL="0">
+            <a:pPr marL="0" indent="0">
               <a:buNone/>
             </a:pPr>
             <a:r>
@@ -18244,7 +17995,7 @@
           </a:prstGeom>
           <a:extLst>
             <a:ext uri="{C572A759-6A51-4108-AA02-DFA0A04FC94B}">
-              <ma14:wrappingTextBoxFlag xmlns:ma14="http://schemas.microsoft.com/office/mac/drawingml/2011/main" val="0"/>
+              <ma14:wrappingTextBoxFlag xmlns:ma14="http://schemas.microsoft.com/office/mac/drawingml/2011/main" xmlns="" val="0"/>
             </a:ext>
           </a:extLst>
         </p:spPr>
@@ -18262,7 +18013,7 @@
           <a:p>
             <a:pPr algn="r"/>
             <a:fld id="{F7021451-1387-4CA6-816F-3879F97B5CBC}" type="slidenum">
-              <a:rPr b="0" lang="en-US"/>
+              <a:rPr lang="en-US" b="0"/>
               <a:t>4</a:t>
             </a:fld>
             <a:endParaRPr lang="en-US"/>
@@ -18322,9 +18073,11 @@
       <p:sp>
         <p:nvSpPr>
           <p:cNvPr id="3" name="Text 0"/>
-          <p:cNvSpPr/>
+          <p:cNvSpPr>
+            <a:spLocks noGrp="1"/>
+          </p:cNvSpPr>
           <p:nvPr>
-            <p:ph idx="100" type="body" hasCustomPrompt="1"/>
+            <p:ph type="body" idx="100" hasCustomPrompt="1"/>
           </p:nvPr>
         </p:nvSpPr>
         <p:spPr>
@@ -18342,11 +18095,11 @@
           <a:bodyPr wrap="square" lIns="0" tIns="0" rIns="0" bIns="0" rtlCol="0" anchor="ctr"/>
           <a:lstStyle/>
           <a:p>
-            <a:pPr indent="0" marL="0">
-              <a:buNone/>
-            </a:pPr>
-            <a:r>
-              <a:rPr lang="en-US" sz="1200" b="1" spc="240" kern="0" dirty="0">
+            <a:pPr marL="0" indent="0">
+              <a:buNone/>
+            </a:pPr>
+            <a:r>
+              <a:rPr lang="en-US" sz="1200" b="1" kern="0" spc="240" dirty="0">
                 <a:solidFill>
                   <a:schemeClr val="accent1"/>
                 </a:solidFill>
@@ -18360,9 +18113,11 @@
       <p:sp>
         <p:nvSpPr>
           <p:cNvPr id="4" name="Text 0"/>
-          <p:cNvSpPr/>
+          <p:cNvSpPr>
+            <a:spLocks noGrp="1"/>
+          </p:cNvSpPr>
           <p:nvPr>
-            <p:ph idx="101" type="title" hasCustomPrompt="1"/>
+            <p:ph type="title" idx="101" hasCustomPrompt="1"/>
           </p:nvPr>
         </p:nvSpPr>
         <p:spPr>
@@ -18380,7 +18135,7 @@
           <a:bodyPr wrap="square" lIns="0" tIns="0" rIns="0" bIns="0" rtlCol="0" anchor="ctr"/>
           <a:lstStyle/>
           <a:p>
-            <a:pPr algn="l" indent="0" marL="0">
+            <a:pPr marL="0" indent="0" algn="l">
               <a:buNone/>
             </a:pPr>
             <a:r>
@@ -18398,9 +18153,11 @@
       <p:sp>
         <p:nvSpPr>
           <p:cNvPr id="5" name="Text 0"/>
-          <p:cNvSpPr/>
+          <p:cNvSpPr>
+            <a:spLocks noGrp="1"/>
+          </p:cNvSpPr>
           <p:nvPr>
-            <p:ph idx="102" type="body" hasCustomPrompt="1"/>
+            <p:ph type="body" idx="102" hasCustomPrompt="1"/>
           </p:nvPr>
         </p:nvSpPr>
         <p:spPr>
@@ -18418,7 +18175,7 @@
           <a:bodyPr wrap="square" lIns="0" tIns="0" rIns="0" bIns="0" rtlCol="0" anchor="t"/>
           <a:lstStyle/>
           <a:p>
-            <a:pPr indent="0" marL="0">
+            <a:pPr marL="0" indent="0">
               <a:buNone/>
             </a:pPr>
             <a:r>
@@ -18459,7 +18216,7 @@
             <a:prstDash val="solid"/>
           </a:ln>
           <a:effectLst>
-            <a:outerShdw sx="100000" sy="100000" kx="0" ky="0" algn="bl" rotWithShape="0" blurRad="76200" dist="25400" dir="5400000">
+            <a:outerShdw blurRad="76200" dist="25400" dir="5400000" algn="bl" rotWithShape="0">
               <a:srgbClr val="6F665F">
                 <a:alpha val="12000"/>
               </a:srgbClr>
@@ -18515,7 +18272,7 @@
           <a:bodyPr wrap="square" lIns="0" tIns="0" rIns="0" bIns="0" rtlCol="0" anchor="ctr"/>
           <a:lstStyle/>
           <a:p>
-            <a:pPr algn="ctr" indent="0" marL="0">
+            <a:pPr marL="0" indent="0" algn="ctr">
               <a:buNone/>
             </a:pPr>
             <a:r>
@@ -18551,7 +18308,7 @@
           <a:bodyPr wrap="square" lIns="0" tIns="0" rIns="0" bIns="0" rtlCol="0" anchor="ctr"/>
           <a:lstStyle/>
           <a:p>
-            <a:pPr indent="0" marL="0">
+            <a:pPr marL="0" indent="0">
               <a:buNone/>
             </a:pPr>
             <a:r>
@@ -18587,7 +18344,7 @@
           <a:bodyPr wrap="square" lIns="0" tIns="0" rIns="0" bIns="0" rtlCol="0" anchor="ctr"/>
           <a:lstStyle/>
           <a:p>
-            <a:pPr indent="0" marL="0">
+            <a:pPr marL="0" indent="0">
               <a:buNone/>
             </a:pPr>
             <a:r>
@@ -18648,7 +18405,7 @@
           <a:bodyPr wrap="square" lIns="0" tIns="0" rIns="0" bIns="0" rtlCol="0" anchor="ctr"/>
           <a:lstStyle/>
           <a:p>
-            <a:pPr indent="0" marL="0">
+            <a:pPr marL="0" indent="0">
               <a:buNone/>
             </a:pPr>
             <a:r>
@@ -18684,7 +18441,7 @@
           <a:bodyPr wrap="square" lIns="0" tIns="0" rIns="0" bIns="0" rtlCol="0" anchor="ctr"/>
           <a:lstStyle/>
           <a:p>
-            <a:pPr indent="0" marL="0">
+            <a:pPr marL="0" indent="0">
               <a:buNone/>
             </a:pPr>
             <a:r>
@@ -18745,7 +18502,7 @@
           <a:bodyPr wrap="square" lIns="0" tIns="0" rIns="0" bIns="0" rtlCol="0" anchor="ctr"/>
           <a:lstStyle/>
           <a:p>
-            <a:pPr indent="0" marL="0">
+            <a:pPr marL="0" indent="0">
               <a:buNone/>
             </a:pPr>
             <a:r>
@@ -18781,7 +18538,7 @@
           <a:bodyPr wrap="square" lIns="0" tIns="0" rIns="0" bIns="0" rtlCol="0" anchor="ctr"/>
           <a:lstStyle/>
           <a:p>
-            <a:pPr algn="r" indent="0" marL="0">
+            <a:pPr marL="0" indent="0" algn="r">
               <a:buNone/>
             </a:pPr>
             <a:r>
@@ -18795,7 +18552,7 @@
             <a:endParaRPr lang="en-US" sz="1300" dirty="0"/>
           </a:p>
           <a:p>
-            <a:pPr algn="r" indent="0" marL="0">
+            <a:pPr marL="0" indent="0" algn="r">
               <a:buNone/>
             </a:pPr>
             <a:r>
@@ -18854,7 +18611,7 @@
           <a:bodyPr wrap="square" lIns="0" tIns="0" rIns="0" bIns="0" rtlCol="0" anchor="t"/>
           <a:lstStyle/>
           <a:p>
-            <a:pPr indent="0" marL="0">
+            <a:pPr marL="0" indent="0">
               <a:buNone/>
             </a:pPr>
             <a:r>
@@ -18890,7 +18647,7 @@
           <a:bodyPr wrap="square" lIns="0" tIns="0" rIns="0" bIns="0" rtlCol="0" anchor="ctr"/>
           <a:lstStyle/>
           <a:p>
-            <a:pPr indent="0" marL="0">
+            <a:pPr marL="0" indent="0">
               <a:buNone/>
             </a:pPr>
             <a:r>
@@ -18901,9 +18658,6 @@
               </a:rPr>
               <a:t>累計7.6</a:t>
             </a:r>
-            <a:pPr indent="0" marL="0">
-              <a:buNone/>
-            </a:pPr>
             <a:r>
               <a:rPr lang="en-US" sz="1200" b="1" dirty="0">
                 <a:solidFill>
@@ -18937,7 +18691,7 @@
           <a:bodyPr wrap="square" lIns="0" tIns="0" rIns="0" bIns="0" rtlCol="0" anchor="t"/>
           <a:lstStyle/>
           <a:p>
-            <a:pPr indent="0" marL="0">
+            <a:pPr marL="0" indent="0">
               <a:buNone/>
             </a:pPr>
             <a:r>
@@ -18946,7 +18700,23 @@
                   <a:schemeClr val="accent2"/>
                 </a:solidFill>
               </a:rPr>
-              <a:t>資産と合わせると14.9億円が戻った</a:t>
+              <a:t>資産と合わせると</a:t>
+            </a:r>
+            <a:r>
+              <a:rPr lang="en-US" sz="950" b="1" dirty="0">
+                <a:solidFill>
+                  <a:srgbClr val="0070C0"/>
+                </a:solidFill>
+              </a:rPr>
+              <a:t>14.9億円</a:t>
+            </a:r>
+            <a:r>
+              <a:rPr lang="en-US" sz="950" dirty="0">
+                <a:solidFill>
+                  <a:schemeClr val="accent2"/>
+                </a:solidFill>
+              </a:rPr>
+              <a:t>が戻った</a:t>
             </a:r>
             <a:endParaRPr lang="en-US" sz="950" dirty="0"/>
           </a:p>
@@ -19000,7 +18770,7 @@
           <a:bodyPr wrap="square" lIns="0" tIns="0" rIns="0" bIns="0" rtlCol="0" anchor="ctr"/>
           <a:lstStyle/>
           <a:p>
-            <a:pPr indent="0" marL="0">
+            <a:pPr marL="0" indent="0">
               <a:buNone/>
             </a:pPr>
             <a:r>
@@ -19014,7 +18784,7 @@
             <a:endParaRPr lang="en-US" sz="1300" dirty="0"/>
           </a:p>
           <a:p>
-            <a:pPr indent="0" marL="0">
+            <a:pPr marL="0" indent="0">
               <a:buNone/>
             </a:pPr>
             <a:r>
@@ -19077,7 +18847,7 @@
           <a:bodyPr wrap="square" lIns="0" tIns="0" rIns="0" bIns="0" rtlCol="0" anchor="ctr"/>
           <a:lstStyle/>
           <a:p>
-            <a:pPr indent="0" marL="0">
+            <a:pPr marL="0" indent="0">
               <a:buNone/>
             </a:pPr>
             <a:r>
@@ -19091,7 +18861,7 @@
             <a:endParaRPr lang="en-US" sz="1300" dirty="0"/>
           </a:p>
           <a:p>
-            <a:pPr indent="0" marL="0">
+            <a:pPr marL="0" indent="0">
               <a:buNone/>
             </a:pPr>
             <a:r>
@@ -19127,7 +18897,7 @@
           <a:bodyPr wrap="square" lIns="0" tIns="0" rIns="0" bIns="0" rtlCol="0" anchor="ctr"/>
           <a:lstStyle/>
           <a:p>
-            <a:pPr indent="0" marL="0">
+            <a:pPr marL="0" indent="0">
               <a:buNone/>
             </a:pPr>
             <a:r>
@@ -19217,7 +18987,7 @@
           <a:bodyPr wrap="square" lIns="0" tIns="0" rIns="0" bIns="0" rtlCol="0" anchor="ctr"/>
           <a:lstStyle/>
           <a:p>
-            <a:pPr algn="ctr" indent="0" marL="0">
+            <a:pPr marL="0" indent="0" algn="ctr">
               <a:buNone/>
             </a:pPr>
             <a:r>
@@ -19253,7 +19023,7 @@
           <a:bodyPr wrap="square" lIns="0" tIns="0" rIns="0" bIns="0" rtlCol="0" anchor="ctr"/>
           <a:lstStyle/>
           <a:p>
-            <a:pPr indent="0" marL="0">
+            <a:pPr marL="0" indent="0">
               <a:buNone/>
             </a:pPr>
             <a:r>
@@ -19289,7 +19059,7 @@
           <a:bodyPr wrap="square" lIns="0" tIns="0" rIns="0" bIns="0" rtlCol="0" anchor="ctr"/>
           <a:lstStyle/>
           <a:p>
-            <a:pPr indent="0" marL="0">
+            <a:pPr marL="0" indent="0">
               <a:buNone/>
             </a:pPr>
             <a:r>
@@ -19350,7 +19120,7 @@
           <a:bodyPr wrap="square" lIns="0" tIns="0" rIns="0" bIns="0" rtlCol="0" anchor="ctr"/>
           <a:lstStyle/>
           <a:p>
-            <a:pPr indent="0" marL="0">
+            <a:pPr marL="0" indent="0">
               <a:buNone/>
             </a:pPr>
             <a:r>
@@ -19386,7 +19156,7 @@
           <a:bodyPr wrap="square" lIns="0" tIns="0" rIns="0" bIns="0" rtlCol="0" anchor="ctr"/>
           <a:lstStyle/>
           <a:p>
-            <a:pPr indent="0" marL="0">
+            <a:pPr marL="0" indent="0">
               <a:buNone/>
             </a:pPr>
             <a:r>
@@ -19447,7 +19217,7 @@
           <a:bodyPr wrap="square" lIns="0" tIns="0" rIns="0" bIns="0" rtlCol="0" anchor="ctr"/>
           <a:lstStyle/>
           <a:p>
-            <a:pPr indent="0" marL="0">
+            <a:pPr marL="0" indent="0">
               <a:buNone/>
             </a:pPr>
             <a:r>
@@ -19483,7 +19253,7 @@
           <a:bodyPr wrap="square" lIns="0" tIns="0" rIns="0" bIns="0" rtlCol="0" anchor="ctr"/>
           <a:lstStyle/>
           <a:p>
-            <a:pPr algn="r" indent="0" marL="0">
+            <a:pPr marL="0" indent="0" algn="r">
               <a:buNone/>
             </a:pPr>
             <a:r>
@@ -19497,7 +19267,7 @@
             <a:endParaRPr lang="en-US" sz="1300" dirty="0"/>
           </a:p>
           <a:p>
-            <a:pPr algn="r" indent="0" marL="0">
+            <a:pPr marL="0" indent="0" algn="r">
               <a:buNone/>
             </a:pPr>
             <a:r>
@@ -19556,7 +19326,7 @@
           <a:bodyPr wrap="square" lIns="0" tIns="0" rIns="0" bIns="0" rtlCol="0" anchor="t"/>
           <a:lstStyle/>
           <a:p>
-            <a:pPr indent="0" marL="0">
+            <a:pPr marL="0" indent="0">
               <a:buNone/>
             </a:pPr>
             <a:r>
@@ -19592,7 +19362,7 @@
           <a:bodyPr wrap="square" lIns="0" tIns="0" rIns="0" bIns="0" rtlCol="0" anchor="ctr"/>
           <a:lstStyle/>
           <a:p>
-            <a:pPr indent="0" marL="0">
+            <a:pPr marL="0" indent="0">
               <a:buNone/>
             </a:pPr>
             <a:r>
@@ -19603,9 +19373,6 @@
               </a:rPr>
               <a:t>2.4</a:t>
             </a:r>
-            <a:pPr indent="0" marL="0">
-              <a:buNone/>
-            </a:pPr>
             <a:r>
               <a:rPr lang="en-US" sz="1200" b="1" dirty="0">
                 <a:solidFill>
@@ -19639,7 +19406,7 @@
           <a:bodyPr wrap="square" lIns="0" tIns="0" rIns="0" bIns="0" rtlCol="0" anchor="t"/>
           <a:lstStyle/>
           <a:p>
-            <a:pPr indent="0" marL="0">
+            <a:pPr marL="0" indent="0">
               <a:buNone/>
             </a:pPr>
             <a:r>
@@ -19702,7 +19469,7 @@
           <a:bodyPr wrap="square" lIns="0" tIns="0" rIns="0" bIns="0" rtlCol="0" anchor="ctr"/>
           <a:lstStyle/>
           <a:p>
-            <a:pPr indent="0" marL="0">
+            <a:pPr marL="0" indent="0">
               <a:buNone/>
             </a:pPr>
             <a:r>
@@ -19716,7 +19483,7 @@
             <a:endParaRPr lang="en-US" sz="1300" dirty="0"/>
           </a:p>
           <a:p>
-            <a:pPr indent="0" marL="0">
+            <a:pPr marL="0" indent="0">
               <a:buNone/>
             </a:pPr>
             <a:r>
@@ -19779,7 +19546,7 @@
           <a:bodyPr wrap="square" lIns="0" tIns="0" rIns="0" bIns="0" rtlCol="0" anchor="ctr"/>
           <a:lstStyle/>
           <a:p>
-            <a:pPr indent="0" marL="0">
+            <a:pPr marL="0" indent="0">
               <a:buNone/>
             </a:pPr>
             <a:r>
@@ -19793,7 +19560,7 @@
             <a:endParaRPr lang="en-US" sz="1300" dirty="0"/>
           </a:p>
           <a:p>
-            <a:pPr indent="0" marL="0">
+            <a:pPr marL="0" indent="0">
               <a:buNone/>
             </a:pPr>
             <a:r>
@@ -19829,7 +19596,7 @@
           <a:bodyPr wrap="square" lIns="0" tIns="0" rIns="0" bIns="0" rtlCol="0" anchor="ctr"/>
           <a:lstStyle/>
           <a:p>
-            <a:pPr indent="0" marL="0">
+            <a:pPr marL="0" indent="0">
               <a:buNone/>
             </a:pPr>
             <a:r>
@@ -19865,7 +19632,7 @@
           <a:bodyPr wrap="square" lIns="0" tIns="0" rIns="0" bIns="0" rtlCol="0" anchor="t"/>
           <a:lstStyle/>
           <a:p>
-            <a:pPr indent="0" marL="0">
+            <a:pPr marL="0" indent="0">
               <a:buNone/>
             </a:pPr>
             <a:r>
@@ -19882,7 +19649,7 @@
       </p:sp>
       <p:sp>
         <p:nvSpPr>
-          <p:cNvPr id="25" name="Slide Number Placeholder 0"/>
+          <p:cNvPr id="47" name="Slide Number Placeholder 0"/>
           <p:cNvSpPr>
             <a:spLocks noGrp="1"/>
           </p:cNvSpPr>
@@ -19900,7 +19667,7 @@
           </a:prstGeom>
           <a:extLst>
             <a:ext uri="{C572A759-6A51-4108-AA02-DFA0A04FC94B}">
-              <ma14:wrappingTextBoxFlag xmlns:ma14="http://schemas.microsoft.com/office/mac/drawingml/2011/main" val="0"/>
+              <ma14:wrappingTextBoxFlag xmlns:ma14="http://schemas.microsoft.com/office/mac/drawingml/2011/main" xmlns="" val="0"/>
             </a:ext>
           </a:extLst>
         </p:spPr>
@@ -19918,7 +19685,7 @@
           <a:p>
             <a:pPr algn="r"/>
             <a:fld id="{F7021451-1387-4CA6-816F-3879F97B5CBC}" type="slidenum">
-              <a:rPr b="0" lang="en-US"/>
+              <a:rPr lang="en-US" b="0"/>
               <a:t>5</a:t>
             </a:fld>
             <a:endParaRPr lang="en-US"/>
@@ -19978,9 +19745,11 @@
       <p:sp>
         <p:nvSpPr>
           <p:cNvPr id="3" name="Text 0"/>
-          <p:cNvSpPr/>
+          <p:cNvSpPr>
+            <a:spLocks noGrp="1"/>
+          </p:cNvSpPr>
           <p:nvPr>
-            <p:ph idx="100" type="body" hasCustomPrompt="1"/>
+            <p:ph type="body" idx="100" hasCustomPrompt="1"/>
           </p:nvPr>
         </p:nvSpPr>
         <p:spPr>
@@ -19998,11 +19767,11 @@
           <a:bodyPr wrap="square" lIns="0" tIns="0" rIns="0" bIns="0" rtlCol="0" anchor="ctr"/>
           <a:lstStyle/>
           <a:p>
-            <a:pPr indent="0" marL="0">
-              <a:buNone/>
-            </a:pPr>
-            <a:r>
-              <a:rPr lang="en-US" sz="1200" b="1" spc="240" kern="0" dirty="0">
+            <a:pPr marL="0" indent="0">
+              <a:buNone/>
+            </a:pPr>
+            <a:r>
+              <a:rPr lang="en-US" sz="1200" b="1" kern="0" spc="240" dirty="0">
                 <a:solidFill>
                   <a:schemeClr val="accent1"/>
                 </a:solidFill>
@@ -20016,9 +19785,11 @@
       <p:sp>
         <p:nvSpPr>
           <p:cNvPr id="4" name="Text 0"/>
-          <p:cNvSpPr/>
+          <p:cNvSpPr>
+            <a:spLocks noGrp="1"/>
+          </p:cNvSpPr>
           <p:nvPr>
-            <p:ph idx="101" type="title" hasCustomPrompt="1"/>
+            <p:ph type="title" idx="101" hasCustomPrompt="1"/>
           </p:nvPr>
         </p:nvSpPr>
         <p:spPr>
@@ -20036,7 +19807,7 @@
           <a:bodyPr wrap="square" lIns="0" tIns="0" rIns="0" bIns="0" rtlCol="0" anchor="ctr"/>
           <a:lstStyle/>
           <a:p>
-            <a:pPr algn="l" indent="0" marL="0">
+            <a:pPr marL="0" indent="0" algn="l">
               <a:buNone/>
             </a:pPr>
             <a:r>
@@ -20054,9 +19825,11 @@
       <p:sp>
         <p:nvSpPr>
           <p:cNvPr id="5" name="Text 0"/>
-          <p:cNvSpPr/>
+          <p:cNvSpPr>
+            <a:spLocks noGrp="1"/>
+          </p:cNvSpPr>
           <p:nvPr>
-            <p:ph idx="102" type="body" hasCustomPrompt="1"/>
+            <p:ph type="body" idx="102" hasCustomPrompt="1"/>
           </p:nvPr>
         </p:nvSpPr>
         <p:spPr>
@@ -20074,7 +19847,7 @@
           <a:bodyPr wrap="square" lIns="0" tIns="0" rIns="0" bIns="0" rtlCol="0" anchor="t"/>
           <a:lstStyle/>
           <a:p>
-            <a:pPr indent="0" marL="0">
+            <a:pPr marL="0" indent="0">
               <a:buNone/>
             </a:pPr>
             <a:r>
@@ -20110,7 +19883,7 @@
           <a:bodyPr wrap="square" lIns="0" tIns="0" rIns="0" bIns="0" rtlCol="0" anchor="t"/>
           <a:lstStyle/>
           <a:p>
-            <a:pPr indent="0" marL="0">
+            <a:pPr marL="0" indent="0">
               <a:buNone/>
             </a:pPr>
             <a:r>
@@ -20146,7 +19919,7 @@
           <a:bodyPr wrap="square" lIns="0" tIns="0" rIns="0" bIns="0" rtlCol="0" anchor="t"/>
           <a:lstStyle/>
           <a:p>
-            <a:pPr indent="0" marL="0">
+            <a:pPr marL="0" indent="0">
               <a:buNone/>
             </a:pPr>
             <a:r>
@@ -20207,7 +19980,7 @@
           <a:bodyPr wrap="square" lIns="0" tIns="0" rIns="0" bIns="0" rtlCol="0" anchor="ctr"/>
           <a:lstStyle/>
           <a:p>
-            <a:pPr algn="ctr" indent="0" marL="0">
+            <a:pPr marL="0" indent="0" algn="ctr">
               <a:buNone/>
             </a:pPr>
             <a:r>
@@ -20270,7 +20043,7 @@
           <a:bodyPr wrap="square" lIns="0" tIns="0" rIns="0" bIns="0" rtlCol="0" anchor="ctr"/>
           <a:lstStyle/>
           <a:p>
-            <a:pPr indent="0" marL="0">
+            <a:pPr marL="0" indent="0">
               <a:buNone/>
             </a:pPr>
             <a:r>
@@ -20284,7 +20057,7 @@
             <a:endParaRPr lang="en-US" sz="1300" dirty="0"/>
           </a:p>
           <a:p>
-            <a:pPr indent="0" marL="0">
+            <a:pPr marL="0" indent="0">
               <a:buNone/>
             </a:pPr>
             <a:r>
@@ -20350,7 +20123,7 @@
             <a:prstDash val="solid"/>
           </a:ln>
           <a:effectLst>
-            <a:outerShdw sx="100000" sy="100000" kx="0" ky="0" algn="bl" rotWithShape="0" blurRad="76200" dist="25400" dir="5400000">
+            <a:outerShdw blurRad="76200" dist="25400" dir="5400000" algn="bl" rotWithShape="0">
               <a:srgbClr val="6F665F">
                 <a:alpha val="12000"/>
               </a:srgbClr>
@@ -20379,7 +20152,7 @@
           <a:bodyPr wrap="square" lIns="0" tIns="0" rIns="0" bIns="0" rtlCol="0" anchor="ctr"/>
           <a:lstStyle/>
           <a:p>
-            <a:pPr indent="0" marL="0">
+            <a:pPr marL="0" indent="0">
               <a:buNone/>
             </a:pPr>
             <a:r>
@@ -20440,7 +20213,7 @@
           <a:bodyPr wrap="square" lIns="0" tIns="0" rIns="0" bIns="0" rtlCol="0" anchor="ctr"/>
           <a:lstStyle/>
           <a:p>
-            <a:pPr algn="ctr" indent="0" marL="0">
+            <a:pPr marL="0" indent="0" algn="ctr">
               <a:buNone/>
             </a:pPr>
             <a:r>
@@ -20503,11 +20276,11 @@
           <a:bodyPr wrap="square" lIns="0" tIns="0" rIns="0" bIns="0" rtlCol="0" anchor="ctr"/>
           <a:lstStyle/>
           <a:p>
-            <a:pPr indent="0" marL="0">
-              <a:buNone/>
-            </a:pPr>
-            <a:r>
-              <a:rPr lang="en-US" sz="1250" b="1" dirty="0">
+            <a:pPr marL="0" indent="0">
+              <a:buNone/>
+            </a:pPr>
+            <a:r>
+              <a:rPr lang="en-US" sz="1250" dirty="0">
                 <a:solidFill>
                   <a:schemeClr val="tx1"/>
                 </a:solidFill>
@@ -20517,7 +20290,7 @@
             <a:endParaRPr lang="en-US" sz="1300" dirty="0"/>
           </a:p>
           <a:p>
-            <a:pPr indent="0" marL="0">
+            <a:pPr marL="0" indent="0">
               <a:buNone/>
             </a:pPr>
             <a:r>
@@ -20583,7 +20356,7 @@
             <a:prstDash val="solid"/>
           </a:ln>
           <a:effectLst>
-            <a:outerShdw sx="100000" sy="100000" kx="0" ky="0" algn="bl" rotWithShape="0" blurRad="76200" dist="25400" dir="5400000">
+            <a:outerShdw blurRad="76200" dist="25400" dir="5400000" algn="bl" rotWithShape="0">
               <a:srgbClr val="6F665F">
                 <a:alpha val="12000"/>
               </a:srgbClr>
@@ -20612,7 +20385,7 @@
           <a:bodyPr wrap="square" lIns="0" tIns="0" rIns="0" bIns="0" rtlCol="0" anchor="ctr"/>
           <a:lstStyle/>
           <a:p>
-            <a:pPr indent="0" marL="0">
+            <a:pPr marL="0" indent="0">
               <a:buNone/>
             </a:pPr>
             <a:r>
@@ -20673,7 +20446,7 @@
           <a:bodyPr wrap="square" lIns="0" tIns="0" rIns="0" bIns="0" rtlCol="0" anchor="ctr"/>
           <a:lstStyle/>
           <a:p>
-            <a:pPr algn="ctr" indent="0" marL="0">
+            <a:pPr marL="0" indent="0" algn="ctr">
               <a:buNone/>
             </a:pPr>
             <a:r>
@@ -20736,7 +20509,7 @@
           <a:bodyPr wrap="square" lIns="0" tIns="0" rIns="0" bIns="0" rtlCol="0" anchor="ctr"/>
           <a:lstStyle/>
           <a:p>
-            <a:pPr indent="0" marL="0">
+            <a:pPr marL="0" indent="0">
               <a:buNone/>
             </a:pPr>
             <a:r>
@@ -20750,7 +20523,7 @@
             <a:endParaRPr lang="en-US" sz="1300" dirty="0"/>
           </a:p>
           <a:p>
-            <a:pPr indent="0" marL="0">
+            <a:pPr marL="0" indent="0">
               <a:buNone/>
             </a:pPr>
             <a:r>
@@ -20816,7 +20589,7 @@
             <a:prstDash val="solid"/>
           </a:ln>
           <a:effectLst>
-            <a:outerShdw sx="100000" sy="100000" kx="0" ky="0" algn="bl" rotWithShape="0" blurRad="76200" dist="25400" dir="5400000">
+            <a:outerShdw blurRad="76200" dist="25400" dir="5400000" algn="bl" rotWithShape="0">
               <a:srgbClr val="6F665F">
                 <a:alpha val="12000"/>
               </a:srgbClr>
@@ -20845,7 +20618,7 @@
           <a:bodyPr wrap="square" lIns="0" tIns="0" rIns="0" bIns="0" rtlCol="0" anchor="ctr"/>
           <a:lstStyle/>
           <a:p>
-            <a:pPr indent="0" marL="0">
+            <a:pPr marL="0" indent="0">
               <a:buNone/>
             </a:pPr>
             <a:r>
@@ -20906,7 +20679,7 @@
           <a:bodyPr wrap="square" lIns="0" tIns="0" rIns="0" bIns="0" rtlCol="0" anchor="ctr"/>
           <a:lstStyle/>
           <a:p>
-            <a:pPr algn="ctr" indent="0" marL="0">
+            <a:pPr marL="0" indent="0" algn="ctr">
               <a:buNone/>
             </a:pPr>
             <a:r>
@@ -20969,7 +20742,7 @@
           <a:bodyPr wrap="square" lIns="0" tIns="0" rIns="0" bIns="0" rtlCol="0" anchor="ctr"/>
           <a:lstStyle/>
           <a:p>
-            <a:pPr indent="0" marL="0">
+            <a:pPr marL="0" indent="0">
               <a:buNone/>
             </a:pPr>
             <a:r>
@@ -20983,7 +20756,7 @@
             <a:endParaRPr lang="en-US" sz="1300" dirty="0"/>
           </a:p>
           <a:p>
-            <a:pPr indent="0" marL="0">
+            <a:pPr marL="0" indent="0">
               <a:buNone/>
             </a:pPr>
             <a:r>
@@ -21049,7 +20822,7 @@
             <a:prstDash val="solid"/>
           </a:ln>
           <a:effectLst>
-            <a:outerShdw sx="100000" sy="100000" kx="0" ky="0" algn="bl" rotWithShape="0" blurRad="76200" dist="25400" dir="5400000">
+            <a:outerShdw blurRad="76200" dist="25400" dir="5400000" algn="bl" rotWithShape="0">
               <a:srgbClr val="6F665F">
                 <a:alpha val="12000"/>
               </a:srgbClr>
@@ -21078,7 +20851,7 @@
           <a:bodyPr wrap="square" lIns="0" tIns="0" rIns="0" bIns="0" rtlCol="0" anchor="ctr"/>
           <a:lstStyle/>
           <a:p>
-            <a:pPr indent="0" marL="0">
+            <a:pPr marL="0" indent="0">
               <a:buNone/>
             </a:pPr>
             <a:r>
@@ -21139,7 +20912,7 @@
           <a:bodyPr wrap="square" lIns="0" tIns="0" rIns="0" bIns="0" rtlCol="0" anchor="ctr"/>
           <a:lstStyle/>
           <a:p>
-            <a:pPr algn="ctr" indent="0" marL="0">
+            <a:pPr marL="0" indent="0" algn="ctr">
               <a:buNone/>
             </a:pPr>
             <a:r>
@@ -21202,11 +20975,11 @@
           <a:bodyPr wrap="square" lIns="0" tIns="0" rIns="0" bIns="0" rtlCol="0" anchor="ctr"/>
           <a:lstStyle/>
           <a:p>
-            <a:pPr indent="0" marL="0">
-              <a:buNone/>
-            </a:pPr>
-            <a:r>
-              <a:rPr lang="en-US" sz="1250" b="1" dirty="0">
+            <a:pPr marL="0" indent="0">
+              <a:buNone/>
+            </a:pPr>
+            <a:r>
+              <a:rPr lang="en-US" sz="1250" dirty="0">
                 <a:solidFill>
                   <a:schemeClr val="tx1"/>
                 </a:solidFill>
@@ -21216,7 +20989,7 @@
             <a:endParaRPr lang="en-US" sz="1300" dirty="0"/>
           </a:p>
           <a:p>
-            <a:pPr indent="0" marL="0">
+            <a:pPr marL="0" indent="0">
               <a:buNone/>
             </a:pPr>
             <a:r>
@@ -21282,7 +21055,7 @@
             <a:prstDash val="solid"/>
           </a:ln>
           <a:effectLst>
-            <a:outerShdw sx="100000" sy="100000" kx="0" ky="0" algn="bl" rotWithShape="0" blurRad="76200" dist="25400" dir="5400000">
+            <a:outerShdw blurRad="76200" dist="25400" dir="5400000" algn="bl" rotWithShape="0">
               <a:srgbClr val="6F665F">
                 <a:alpha val="12000"/>
               </a:srgbClr>
@@ -21311,7 +21084,7 @@
           <a:bodyPr wrap="square" lIns="0" tIns="0" rIns="0" bIns="0" rtlCol="0" anchor="ctr"/>
           <a:lstStyle/>
           <a:p>
-            <a:pPr indent="0" marL="0">
+            <a:pPr marL="0" indent="0">
               <a:buNone/>
             </a:pPr>
             <a:r>
@@ -21347,7 +21120,7 @@
           <a:bodyPr wrap="square" lIns="0" tIns="0" rIns="0" bIns="0" rtlCol="0" anchor="t"/>
           <a:lstStyle/>
           <a:p>
-            <a:pPr indent="0" marL="0">
+            <a:pPr marL="0" indent="0">
               <a:buNone/>
             </a:pPr>
             <a:r>
@@ -21364,7 +21137,7 @@
       </p:sp>
       <p:sp>
         <p:nvSpPr>
-          <p:cNvPr id="25" name="Slide Number Placeholder 0"/>
+          <p:cNvPr id="44" name="Slide Number Placeholder 0"/>
           <p:cNvSpPr>
             <a:spLocks noGrp="1"/>
           </p:cNvSpPr>
@@ -21382,7 +21155,7 @@
           </a:prstGeom>
           <a:extLst>
             <a:ext uri="{C572A759-6A51-4108-AA02-DFA0A04FC94B}">
-              <ma14:wrappingTextBoxFlag xmlns:ma14="http://schemas.microsoft.com/office/mac/drawingml/2011/main" val="0"/>
+              <ma14:wrappingTextBoxFlag xmlns:ma14="http://schemas.microsoft.com/office/mac/drawingml/2011/main" xmlns="" val="0"/>
             </a:ext>
           </a:extLst>
         </p:spPr>
@@ -21400,7 +21173,7 @@
           <a:p>
             <a:pPr algn="r"/>
             <a:fld id="{F7021451-1387-4CA6-816F-3879F97B5CBC}" type="slidenum">
-              <a:rPr b="0" lang="en-US"/>
+              <a:rPr lang="en-US" b="0"/>
               <a:t>6</a:t>
             </a:fld>
             <a:endParaRPr lang="en-US"/>
@@ -21460,9 +21233,11 @@
       <p:sp>
         <p:nvSpPr>
           <p:cNvPr id="3" name="Text 0"/>
-          <p:cNvSpPr/>
+          <p:cNvSpPr>
+            <a:spLocks noGrp="1"/>
+          </p:cNvSpPr>
           <p:nvPr>
-            <p:ph idx="100" type="body" hasCustomPrompt="1"/>
+            <p:ph type="body" idx="100" hasCustomPrompt="1"/>
           </p:nvPr>
         </p:nvSpPr>
         <p:spPr>
@@ -21480,11 +21255,11 @@
           <a:bodyPr wrap="square" lIns="0" tIns="0" rIns="0" bIns="0" rtlCol="0" anchor="ctr"/>
           <a:lstStyle/>
           <a:p>
-            <a:pPr indent="0" marL="0">
-              <a:buNone/>
-            </a:pPr>
-            <a:r>
-              <a:rPr lang="en-US" sz="1200" b="1" spc="240" kern="0" dirty="0">
+            <a:pPr marL="0" indent="0">
+              <a:buNone/>
+            </a:pPr>
+            <a:r>
+              <a:rPr lang="en-US" sz="1200" b="1" kern="0" spc="240" dirty="0">
                 <a:solidFill>
                   <a:schemeClr val="accent1"/>
                 </a:solidFill>
@@ -21498,9 +21273,11 @@
       <p:sp>
         <p:nvSpPr>
           <p:cNvPr id="4" name="Text 0"/>
-          <p:cNvSpPr/>
+          <p:cNvSpPr>
+            <a:spLocks noGrp="1"/>
+          </p:cNvSpPr>
           <p:nvPr>
-            <p:ph idx="101" type="title" hasCustomPrompt="1"/>
+            <p:ph type="title" idx="101" hasCustomPrompt="1"/>
           </p:nvPr>
         </p:nvSpPr>
         <p:spPr>
@@ -21518,7 +21295,7 @@
           <a:bodyPr wrap="square" lIns="0" tIns="0" rIns="0" bIns="0" rtlCol="0" anchor="ctr"/>
           <a:lstStyle/>
           <a:p>
-            <a:pPr algn="l" indent="0" marL="0">
+            <a:pPr marL="0" indent="0" algn="l">
               <a:buNone/>
             </a:pPr>
             <a:r>
@@ -21536,9 +21313,11 @@
       <p:sp>
         <p:nvSpPr>
           <p:cNvPr id="5" name="Text 0"/>
-          <p:cNvSpPr/>
+          <p:cNvSpPr>
+            <a:spLocks noGrp="1"/>
+          </p:cNvSpPr>
           <p:nvPr>
-            <p:ph idx="102" type="body" hasCustomPrompt="1"/>
+            <p:ph type="body" idx="102" hasCustomPrompt="1"/>
           </p:nvPr>
         </p:nvSpPr>
         <p:spPr>
@@ -21556,7 +21335,7 @@
           <a:bodyPr wrap="square" lIns="0" tIns="0" rIns="0" bIns="0" rtlCol="0" anchor="t"/>
           <a:lstStyle/>
           <a:p>
-            <a:pPr indent="0" marL="0">
+            <a:pPr marL="0" indent="0">
               <a:buNone/>
             </a:pPr>
             <a:r>
@@ -21619,7 +21398,7 @@
           <a:bodyPr wrap="square" lIns="0" tIns="0" rIns="0" bIns="0" rtlCol="0" anchor="ctr"/>
           <a:lstStyle/>
           <a:p>
-            <a:pPr indent="0" marL="0">
+            <a:pPr marL="0" indent="0">
               <a:buNone/>
             </a:pPr>
             <a:r>
@@ -21655,7 +21434,7 @@
           <a:bodyPr wrap="square" lIns="0" tIns="0" rIns="0" bIns="0" rtlCol="0" anchor="ctr"/>
           <a:lstStyle/>
           <a:p>
-            <a:pPr indent="0" marL="0">
+            <a:pPr marL="0" indent="0">
               <a:buNone/>
             </a:pPr>
             <a:r>
@@ -21669,7 +21448,7 @@
             <a:endParaRPr lang="en-US" sz="1300" dirty="0"/>
           </a:p>
           <a:p>
-            <a:pPr indent="0" marL="0">
+            <a:pPr marL="0" indent="0">
               <a:buNone/>
             </a:pPr>
             <a:r>
@@ -21705,7 +21484,7 @@
           <a:bodyPr wrap="square" lIns="0" tIns="0" rIns="0" bIns="0" rtlCol="0" anchor="ctr"/>
           <a:lstStyle/>
           <a:p>
-            <a:pPr algn="r" indent="0" marL="0">
+            <a:pPr marL="0" indent="0" algn="r">
               <a:buNone/>
             </a:pPr>
             <a:r>
@@ -21768,7 +21547,7 @@
           <a:bodyPr wrap="square" lIns="0" tIns="0" rIns="0" bIns="0" rtlCol="0" anchor="ctr"/>
           <a:lstStyle/>
           <a:p>
-            <a:pPr indent="0" marL="0">
+            <a:pPr marL="0" indent="0">
               <a:buNone/>
             </a:pPr>
             <a:r>
@@ -21804,7 +21583,7 @@
           <a:bodyPr wrap="square" lIns="0" tIns="0" rIns="0" bIns="0" rtlCol="0" anchor="ctr"/>
           <a:lstStyle/>
           <a:p>
-            <a:pPr indent="0" marL="0">
+            <a:pPr marL="0" indent="0">
               <a:buNone/>
             </a:pPr>
             <a:r>
@@ -21818,7 +21597,7 @@
             <a:endParaRPr lang="en-US" sz="1300" dirty="0"/>
           </a:p>
           <a:p>
-            <a:pPr indent="0" marL="0">
+            <a:pPr marL="0" indent="0">
               <a:buNone/>
             </a:pPr>
             <a:r>
@@ -21854,7 +21633,7 @@
           <a:bodyPr wrap="square" lIns="0" tIns="0" rIns="0" bIns="0" rtlCol="0" anchor="ctr"/>
           <a:lstStyle/>
           <a:p>
-            <a:pPr algn="r" indent="0" marL="0">
+            <a:pPr marL="0" indent="0" algn="r">
               <a:buNone/>
             </a:pPr>
             <a:r>
@@ -21917,7 +21696,7 @@
           <a:bodyPr wrap="square" lIns="0" tIns="0" rIns="0" bIns="0" rtlCol="0" anchor="ctr"/>
           <a:lstStyle/>
           <a:p>
-            <a:pPr indent="0" marL="0">
+            <a:pPr marL="0" indent="0">
               <a:buNone/>
             </a:pPr>
             <a:r>
@@ -21953,7 +21732,7 @@
           <a:bodyPr wrap="square" lIns="0" tIns="0" rIns="0" bIns="0" rtlCol="0" anchor="ctr"/>
           <a:lstStyle/>
           <a:p>
-            <a:pPr indent="0" marL="0">
+            <a:pPr marL="0" indent="0">
               <a:buNone/>
             </a:pPr>
             <a:r>
@@ -21967,7 +21746,7 @@
             <a:endParaRPr lang="en-US" sz="1300" dirty="0"/>
           </a:p>
           <a:p>
-            <a:pPr indent="0" marL="0">
+            <a:pPr marL="0" indent="0">
               <a:buNone/>
             </a:pPr>
             <a:r>
@@ -22003,7 +21782,7 @@
           <a:bodyPr wrap="square" lIns="0" tIns="0" rIns="0" bIns="0" rtlCol="0" anchor="ctr"/>
           <a:lstStyle/>
           <a:p>
-            <a:pPr algn="r" indent="0" marL="0">
+            <a:pPr marL="0" indent="0" algn="r">
               <a:buNone/>
             </a:pPr>
             <a:r>
@@ -22044,7 +21823,7 @@
             <a:prstDash val="solid"/>
           </a:ln>
           <a:effectLst>
-            <a:outerShdw sx="100000" sy="100000" kx="0" ky="0" algn="bl" rotWithShape="0" blurRad="76200" dist="25400" dir="5400000">
+            <a:outerShdw blurRad="76200" dist="25400" dir="5400000" algn="bl" rotWithShape="0">
               <a:srgbClr val="6F665F">
                 <a:alpha val="12000"/>
               </a:srgbClr>
@@ -22100,7 +21879,7 @@
           <a:bodyPr wrap="square" lIns="0" tIns="0" rIns="0" bIns="0" rtlCol="0" anchor="ctr"/>
           <a:lstStyle/>
           <a:p>
-            <a:pPr algn="ctr" indent="0" marL="0">
+            <a:pPr marL="0" indent="0" algn="ctr">
               <a:buNone/>
             </a:pPr>
             <a:r>
@@ -22136,7 +21915,7 @@
           <a:bodyPr wrap="square" lIns="0" tIns="0" rIns="0" bIns="0" rtlCol="0" anchor="ctr"/>
           <a:lstStyle/>
           <a:p>
-            <a:pPr indent="0" marL="0">
+            <a:pPr marL="0" indent="0">
               <a:buNone/>
             </a:pPr>
             <a:r>
@@ -22172,7 +21951,7 @@
           <a:bodyPr wrap="square" lIns="0" tIns="0" rIns="0" bIns="0" rtlCol="0" anchor="t"/>
           <a:lstStyle/>
           <a:p>
-            <a:pPr indent="0" marL="0">
+            <a:pPr marL="0" indent="0">
               <a:buNone/>
             </a:pPr>
             <a:r>
@@ -22287,7 +22066,7 @@
           <a:bodyPr wrap="square" lIns="0" tIns="0" rIns="0" bIns="0" rtlCol="0" anchor="ctr"/>
           <a:lstStyle/>
           <a:p>
-            <a:pPr algn="ctr" indent="0" marL="0">
+            <a:pPr marL="0" indent="0" algn="ctr">
               <a:buNone/>
             </a:pPr>
             <a:r>
@@ -22323,7 +22102,7 @@
           <a:bodyPr wrap="square" lIns="0" tIns="0" rIns="0" bIns="0" rtlCol="0" anchor="ctr"/>
           <a:lstStyle/>
           <a:p>
-            <a:pPr indent="0" marL="0">
+            <a:pPr marL="0" indent="0">
               <a:buNone/>
             </a:pPr>
             <a:r>
@@ -22359,7 +22138,7 @@
           <a:bodyPr wrap="square" lIns="0" tIns="0" rIns="0" bIns="0" rtlCol="0" anchor="t"/>
           <a:lstStyle/>
           <a:p>
-            <a:pPr indent="0" marL="0">
+            <a:pPr marL="0" indent="0">
               <a:buNone/>
             </a:pPr>
             <a:r>
@@ -22395,7 +22174,7 @@
           <a:bodyPr wrap="square" lIns="0" tIns="0" rIns="0" bIns="0" rtlCol="0" anchor="t"/>
           <a:lstStyle/>
           <a:p>
-            <a:pPr indent="0" marL="0">
+            <a:pPr marL="0" indent="0">
               <a:buNone/>
             </a:pPr>
             <a:r>
@@ -22412,7 +22191,7 @@
       </p:sp>
       <p:sp>
         <p:nvSpPr>
-          <p:cNvPr id="25" name="Slide Number Placeholder 0"/>
+          <p:cNvPr id="30" name="Slide Number Placeholder 0"/>
           <p:cNvSpPr>
             <a:spLocks noGrp="1"/>
           </p:cNvSpPr>
@@ -22430,7 +22209,7 @@
           </a:prstGeom>
           <a:extLst>
             <a:ext uri="{C572A759-6A51-4108-AA02-DFA0A04FC94B}">
-              <ma14:wrappingTextBoxFlag xmlns:ma14="http://schemas.microsoft.com/office/mac/drawingml/2011/main" val="0"/>
+              <ma14:wrappingTextBoxFlag xmlns:ma14="http://schemas.microsoft.com/office/mac/drawingml/2011/main" xmlns="" val="0"/>
             </a:ext>
           </a:extLst>
         </p:spPr>
@@ -22448,7 +22227,7 @@
           <a:p>
             <a:pPr algn="r"/>
             <a:fld id="{F7021451-1387-4CA6-816F-3879F97B5CBC}" type="slidenum">
-              <a:rPr b="0" lang="en-US"/>
+              <a:rPr lang="en-US" b="0"/>
               <a:t>7</a:t>
             </a:fld>
             <a:endParaRPr lang="en-US"/>
@@ -22508,9 +22287,11 @@
       <p:sp>
         <p:nvSpPr>
           <p:cNvPr id="3" name="Text 0"/>
-          <p:cNvSpPr/>
+          <p:cNvSpPr>
+            <a:spLocks noGrp="1"/>
+          </p:cNvSpPr>
           <p:nvPr>
-            <p:ph idx="100" type="body" hasCustomPrompt="1"/>
+            <p:ph type="body" idx="100" hasCustomPrompt="1"/>
           </p:nvPr>
         </p:nvSpPr>
         <p:spPr>
@@ -22528,11 +22309,11 @@
           <a:bodyPr wrap="square" lIns="0" tIns="0" rIns="0" bIns="0" rtlCol="0" anchor="ctr"/>
           <a:lstStyle/>
           <a:p>
-            <a:pPr indent="0" marL="0">
-              <a:buNone/>
-            </a:pPr>
-            <a:r>
-              <a:rPr lang="en-US" sz="1200" b="1" spc="240" kern="0" dirty="0">
+            <a:pPr marL="0" indent="0">
+              <a:buNone/>
+            </a:pPr>
+            <a:r>
+              <a:rPr lang="en-US" sz="1200" b="1" kern="0" spc="240" dirty="0">
                 <a:solidFill>
                   <a:schemeClr val="accent1"/>
                 </a:solidFill>
@@ -22546,9 +22327,11 @@
       <p:sp>
         <p:nvSpPr>
           <p:cNvPr id="4" name="Text 0"/>
-          <p:cNvSpPr/>
+          <p:cNvSpPr>
+            <a:spLocks noGrp="1"/>
+          </p:cNvSpPr>
           <p:nvPr>
-            <p:ph idx="101" type="title" hasCustomPrompt="1"/>
+            <p:ph type="title" idx="101" hasCustomPrompt="1"/>
           </p:nvPr>
         </p:nvSpPr>
         <p:spPr>
@@ -22566,7 +22349,7 @@
           <a:bodyPr wrap="square" lIns="0" tIns="0" rIns="0" bIns="0" rtlCol="0" anchor="ctr"/>
           <a:lstStyle/>
           <a:p>
-            <a:pPr algn="l" indent="0" marL="0">
+            <a:pPr marL="0" indent="0" algn="l">
               <a:buNone/>
             </a:pPr>
             <a:r>
@@ -22584,9 +22367,11 @@
       <p:sp>
         <p:nvSpPr>
           <p:cNvPr id="5" name="Text 0"/>
-          <p:cNvSpPr/>
+          <p:cNvSpPr>
+            <a:spLocks noGrp="1"/>
+          </p:cNvSpPr>
           <p:nvPr>
-            <p:ph idx="102" type="body" hasCustomPrompt="1"/>
+            <p:ph type="body" idx="102" hasCustomPrompt="1"/>
           </p:nvPr>
         </p:nvSpPr>
         <p:spPr>
@@ -22604,7 +22389,7 @@
           <a:bodyPr wrap="square" lIns="0" tIns="0" rIns="0" bIns="0" rtlCol="0" anchor="t"/>
           <a:lstStyle/>
           <a:p>
-            <a:pPr indent="0" marL="0">
+            <a:pPr marL="0" indent="0">
               <a:buNone/>
             </a:pPr>
             <a:r>
@@ -22645,7 +22430,7 @@
             <a:prstDash val="solid"/>
           </a:ln>
           <a:effectLst>
-            <a:outerShdw sx="100000" sy="100000" kx="0" ky="0" algn="bl" rotWithShape="0" blurRad="76200" dist="25400" dir="5400000">
+            <a:outerShdw blurRad="76200" dist="25400" dir="5400000" algn="bl" rotWithShape="0">
               <a:srgbClr val="6F665F">
                 <a:alpha val="12000"/>
               </a:srgbClr>
@@ -22699,7 +22484,7 @@
           <a:bodyPr wrap="square" lIns="0" tIns="0" rIns="0" bIns="0" rtlCol="0" anchor="ctr"/>
           <a:lstStyle/>
           <a:p>
-            <a:pPr algn="ctr" indent="0" marL="0">
+            <a:pPr marL="0" indent="0" algn="ctr">
               <a:buNone/>
             </a:pPr>
             <a:endParaRPr lang="en-US" sz="1300" dirty="0"/>
@@ -22708,14 +22493,14 @@
       </p:sp>
       <p:pic>
         <p:nvPicPr>
-          <p:cNvPr id="9" name="Image 0" descr="preencoded.png">    </p:cNvPr>
+          <p:cNvPr id="9" name="Image 0" descr="preencoded.png"/>
           <p:cNvPicPr>
             <a:picLocks noChangeAspect="1"/>
           </p:cNvPicPr>
           <p:nvPr/>
         </p:nvPicPr>
         <p:blipFill>
-          <a:blip r:embed="rId1"/>
+          <a:blip r:embed="rId3"/>
           <a:stretch>
             <a:fillRect/>
           </a:stretch>
@@ -22751,7 +22536,7 @@
           <a:bodyPr wrap="square" lIns="0" tIns="0" rIns="0" bIns="0" rtlCol="0" anchor="ctr"/>
           <a:lstStyle/>
           <a:p>
-            <a:pPr indent="0" marL="0">
+            <a:pPr marL="0" indent="0">
               <a:buNone/>
             </a:pPr>
             <a:r>
@@ -22787,7 +22572,7 @@
           <a:bodyPr wrap="square" lIns="0" tIns="0" rIns="0" bIns="0" rtlCol="0" anchor="t"/>
           <a:lstStyle/>
           <a:p>
-            <a:pPr indent="0" marL="0">
+            <a:pPr marL="0" indent="0">
               <a:buNone/>
             </a:pPr>
             <a:r>
@@ -22853,7 +22638,7 @@
             <a:prstDash val="solid"/>
           </a:ln>
           <a:effectLst>
-            <a:outerShdw sx="100000" sy="100000" kx="0" ky="0" algn="bl" rotWithShape="0" blurRad="76200" dist="25400" dir="5400000">
+            <a:outerShdw blurRad="76200" dist="25400" dir="5400000" algn="bl" rotWithShape="0">
               <a:srgbClr val="6F665F">
                 <a:alpha val="12000"/>
               </a:srgbClr>
@@ -22907,7 +22692,7 @@
           <a:bodyPr wrap="square" lIns="0" tIns="0" rIns="0" bIns="0" rtlCol="0" anchor="ctr"/>
           <a:lstStyle/>
           <a:p>
-            <a:pPr algn="ctr" indent="0" marL="0">
+            <a:pPr marL="0" indent="0" algn="ctr">
               <a:buNone/>
             </a:pPr>
             <a:endParaRPr lang="en-US" sz="1300" dirty="0"/>
@@ -22916,14 +22701,14 @@
       </p:sp>
       <p:pic>
         <p:nvPicPr>
-          <p:cNvPr id="16" name="Image 1" descr="preencoded.png">    </p:cNvPr>
+          <p:cNvPr id="16" name="Image 1" descr="preencoded.png"/>
           <p:cNvPicPr>
             <a:picLocks noChangeAspect="1"/>
           </p:cNvPicPr>
           <p:nvPr/>
         </p:nvPicPr>
         <p:blipFill>
-          <a:blip r:embed="rId2"/>
+          <a:blip r:embed="rId4"/>
           <a:stretch>
             <a:fillRect/>
           </a:stretch>
@@ -22959,7 +22744,7 @@
           <a:bodyPr wrap="square" lIns="0" tIns="0" rIns="0" bIns="0" rtlCol="0" anchor="ctr"/>
           <a:lstStyle/>
           <a:p>
-            <a:pPr indent="0" marL="0">
+            <a:pPr marL="0" indent="0">
               <a:buNone/>
             </a:pPr>
             <a:r>
@@ -22995,7 +22780,7 @@
           <a:bodyPr wrap="square" lIns="0" tIns="0" rIns="0" bIns="0" rtlCol="0" anchor="t"/>
           <a:lstStyle/>
           <a:p>
-            <a:pPr indent="0" marL="0">
+            <a:pPr marL="0" indent="0">
               <a:buNone/>
             </a:pPr>
             <a:r>
@@ -23044,6 +22829,214 @@
         <p:spPr>
           <a:xfrm>
             <a:off x="6227064" y="2057400"/>
+            <a:ext cx="2560320" cy="2103120"/>
+          </a:xfrm>
+          <a:prstGeom prst="roundRect">
+            <a:avLst>
+              <a:gd name="adj" fmla="val 2609"/>
+            </a:avLst>
+          </a:prstGeom>
+          <a:solidFill>
+            <a:schemeClr val="bg2"/>
+          </a:solidFill>
+          <a:ln w="25400">
+            <a:solidFill>
+              <a:srgbClr val="FF0000"/>
+            </a:solidFill>
+            <a:prstDash val="solid"/>
+          </a:ln>
+          <a:effectLst>
+            <a:outerShdw blurRad="76200" dist="25400" dir="5400000" algn="bl" rotWithShape="0">
+              <a:srgbClr val="6F665F">
+                <a:alpha val="12000"/>
+              </a:srgbClr>
+            </a:outerShdw>
+          </a:effectLst>
+        </p:spPr>
+      </p:sp>
+      <p:sp>
+        <p:nvSpPr>
+          <p:cNvPr id="21" name="Shape 17"/>
+          <p:cNvSpPr/>
+          <p:nvPr/>
+        </p:nvSpPr>
+        <p:spPr>
+          <a:xfrm>
+            <a:off x="6455664" y="2240280"/>
+            <a:ext cx="566928" cy="566928"/>
+          </a:xfrm>
+          <a:prstGeom prst="ellipse">
+            <a:avLst/>
+          </a:prstGeom>
+          <a:solidFill>
+            <a:schemeClr val="tx1"/>
+          </a:solidFill>
+          <a:ln w="12700">
+            <a:solidFill>
+              <a:schemeClr val="tx1"/>
+            </a:solidFill>
+            <a:prstDash val="solid"/>
+          </a:ln>
+        </p:spPr>
+      </p:sp>
+      <p:sp>
+        <p:nvSpPr>
+          <p:cNvPr id="22" name="Text 18"/>
+          <p:cNvSpPr txBox="1"/>
+          <p:nvPr/>
+        </p:nvSpPr>
+        <p:spPr>
+          <a:xfrm>
+            <a:off x="6455664" y="2240280"/>
+            <a:ext cx="566928" cy="566928"/>
+          </a:xfrm>
+          <a:prstGeom prst="rect">
+            <a:avLst/>
+          </a:prstGeom>
+          <a:noFill/>
+          <a:ln/>
+        </p:spPr>
+        <p:txBody>
+          <a:bodyPr wrap="square" lIns="0" tIns="0" rIns="0" bIns="0" rtlCol="0" anchor="ctr"/>
+          <a:lstStyle/>
+          <a:p>
+            <a:pPr marL="0" indent="0" algn="ctr">
+              <a:buNone/>
+            </a:pPr>
+            <a:endParaRPr lang="en-US" sz="1300" dirty="0"/>
+          </a:p>
+        </p:txBody>
+      </p:sp>
+      <p:pic>
+        <p:nvPicPr>
+          <p:cNvPr id="23" name="Image 2" descr="preencoded.png"/>
+          <p:cNvPicPr>
+            <a:picLocks noChangeAspect="1"/>
+          </p:cNvPicPr>
+          <p:nvPr/>
+        </p:nvPicPr>
+        <p:blipFill>
+          <a:blip r:embed="rId5"/>
+          <a:stretch>
+            <a:fillRect/>
+          </a:stretch>
+        </p:blipFill>
+        <p:spPr>
+          <a:xfrm>
+            <a:off x="6592824" y="2377440"/>
+            <a:ext cx="292608" cy="292608"/>
+          </a:xfrm>
+          <a:prstGeom prst="rect">
+            <a:avLst/>
+          </a:prstGeom>
+        </p:spPr>
+      </p:pic>
+      <p:sp>
+        <p:nvSpPr>
+          <p:cNvPr id="24" name="Text 19"/>
+          <p:cNvSpPr txBox="1"/>
+          <p:nvPr/>
+        </p:nvSpPr>
+        <p:spPr>
+          <a:xfrm>
+            <a:off x="7141464" y="2240280"/>
+            <a:ext cx="1463040" cy="566928"/>
+          </a:xfrm>
+          <a:prstGeom prst="rect">
+            <a:avLst/>
+          </a:prstGeom>
+          <a:noFill/>
+          <a:ln/>
+        </p:spPr>
+        <p:txBody>
+          <a:bodyPr wrap="square" lIns="0" tIns="0" rIns="0" bIns="0" rtlCol="0" anchor="ctr"/>
+          <a:lstStyle/>
+          <a:p>
+            <a:pPr marL="0" indent="0">
+              <a:buNone/>
+            </a:pPr>
+            <a:r>
+              <a:rPr lang="en-US" sz="1700" b="1" dirty="0">
+                <a:solidFill>
+                  <a:schemeClr val="tx1"/>
+                </a:solidFill>
+              </a:rPr>
+              <a:t>選ぶ</a:t>
+            </a:r>
+            <a:endParaRPr lang="en-US" sz="1700" dirty="0"/>
+          </a:p>
+        </p:txBody>
+      </p:sp>
+      <p:sp>
+        <p:nvSpPr>
+          <p:cNvPr id="25" name="Text 20"/>
+          <p:cNvSpPr txBox="1"/>
+          <p:nvPr/>
+        </p:nvSpPr>
+        <p:spPr>
+          <a:xfrm>
+            <a:off x="6455664" y="2926080"/>
+            <a:ext cx="2148840" cy="1371600"/>
+          </a:xfrm>
+          <a:prstGeom prst="rect">
+            <a:avLst/>
+          </a:prstGeom>
+          <a:noFill/>
+          <a:ln/>
+        </p:spPr>
+        <p:txBody>
+          <a:bodyPr wrap="square" lIns="0" tIns="0" rIns="0" bIns="0" rtlCol="0" anchor="t"/>
+          <a:lstStyle/>
+          <a:p>
+            <a:pPr marL="0" indent="0">
+              <a:buNone/>
+            </a:pPr>
+            <a:r>
+              <a:rPr lang="en-US" sz="1100" dirty="0">
+                <a:solidFill>
+                  <a:schemeClr val="accent2"/>
+                </a:solidFill>
+              </a:rPr>
+              <a:t>買い手の買収方針と自社データで、合う案件だけをAIが点数づけ</a:t>
+            </a:r>
+            <a:endParaRPr lang="en-US" sz="1100" dirty="0"/>
+          </a:p>
+        </p:txBody>
+      </p:sp>
+      <p:sp>
+        <p:nvSpPr>
+          <p:cNvPr id="26" name="reins arrow"/>
+          <p:cNvSpPr/>
+          <p:nvPr/>
+        </p:nvSpPr>
+        <p:spPr>
+          <a:xfrm>
+            <a:off x="8823960" y="3090672"/>
+            <a:ext cx="146304" cy="256032"/>
+          </a:xfrm>
+          <a:prstGeom prst="chevron">
+            <a:avLst/>
+          </a:prstGeom>
+          <a:solidFill>
+            <a:schemeClr val="accent1"/>
+          </a:solidFill>
+          <a:ln w="12700">
+            <a:solidFill>
+              <a:schemeClr val="accent1"/>
+            </a:solidFill>
+            <a:prstDash val="solid"/>
+          </a:ln>
+        </p:spPr>
+      </p:sp>
+      <p:sp>
+        <p:nvSpPr>
+          <p:cNvPr id="27" name="reins 届ける"/>
+          <p:cNvSpPr/>
+          <p:nvPr/>
+        </p:nvSpPr>
+        <p:spPr>
+          <a:xfrm>
+            <a:off x="8997696" y="2057400"/>
             <a:ext cx="2560320" cy="2103120"/>
           </a:xfrm>
           <a:prstGeom prst="roundRect">
@@ -23061,7 +23054,7 @@
             <a:prstDash val="solid"/>
           </a:ln>
           <a:effectLst>
-            <a:outerShdw sx="100000" sy="100000" kx="0" ky="0" algn="bl" rotWithShape="0" blurRad="76200" dist="25400" dir="5400000">
+            <a:outerShdw blurRad="76200" dist="25400" dir="5400000" algn="bl" rotWithShape="0">
               <a:srgbClr val="6F665F">
                 <a:alpha val="12000"/>
               </a:srgbClr>
@@ -23071,13 +23064,13 @@
       </p:sp>
       <p:sp>
         <p:nvSpPr>
-          <p:cNvPr id="21" name="Shape 17"/>
+          <p:cNvPr id="28" name="Shape 23"/>
           <p:cNvSpPr/>
           <p:nvPr/>
         </p:nvSpPr>
         <p:spPr>
           <a:xfrm>
-            <a:off x="6455664" y="2240280"/>
+            <a:off x="9226296" y="2240280"/>
             <a:ext cx="566928" cy="566928"/>
           </a:xfrm>
           <a:prstGeom prst="ellipse">
@@ -23096,13 +23089,13 @@
       </p:sp>
       <p:sp>
         <p:nvSpPr>
-          <p:cNvPr id="22" name="Text 18"/>
-          <p:cNvSpPr txBox="1"/>
-          <p:nvPr/>
-        </p:nvSpPr>
-        <p:spPr>
-          <a:xfrm>
-            <a:off x="6455664" y="2240280"/>
+          <p:cNvPr id="29" name="Text 24"/>
+          <p:cNvSpPr txBox="1"/>
+          <p:nvPr/>
+        </p:nvSpPr>
+        <p:spPr>
+          <a:xfrm>
+            <a:off x="9226296" y="2240280"/>
             <a:ext cx="566928" cy="566928"/>
           </a:xfrm>
           <a:prstGeom prst="rect">
@@ -23115,7 +23108,7 @@
           <a:bodyPr wrap="square" lIns="0" tIns="0" rIns="0" bIns="0" rtlCol="0" anchor="ctr"/>
           <a:lstStyle/>
           <a:p>
-            <a:pPr algn="ctr" indent="0" marL="0">
+            <a:pPr marL="0" indent="0" algn="ctr">
               <a:buNone/>
             </a:pPr>
             <a:endParaRPr lang="en-US" sz="1300" dirty="0"/>
@@ -23124,21 +23117,21 @@
       </p:sp>
       <p:pic>
         <p:nvPicPr>
-          <p:cNvPr id="23" name="Image 2" descr="preencoded.png">    </p:cNvPr>
+          <p:cNvPr id="30" name="Image 3" descr="preencoded.png"/>
           <p:cNvPicPr>
             <a:picLocks noChangeAspect="1"/>
           </p:cNvPicPr>
           <p:nvPr/>
         </p:nvPicPr>
         <p:blipFill>
-          <a:blip r:embed="rId3"/>
+          <a:blip r:embed="rId6"/>
           <a:stretch>
             <a:fillRect/>
           </a:stretch>
         </p:blipFill>
         <p:spPr>
           <a:xfrm>
-            <a:off x="6592824" y="2377440"/>
+            <a:off x="9363456" y="2377440"/>
             <a:ext cx="292608" cy="292608"/>
           </a:xfrm>
           <a:prstGeom prst="rect">
@@ -23148,13 +23141,13 @@
       </p:pic>
       <p:sp>
         <p:nvSpPr>
-          <p:cNvPr id="24" name="Text 19"/>
-          <p:cNvSpPr txBox="1"/>
-          <p:nvPr/>
-        </p:nvSpPr>
-        <p:spPr>
-          <a:xfrm>
-            <a:off x="7141464" y="2240280"/>
+          <p:cNvPr id="31" name="Text 25"/>
+          <p:cNvSpPr txBox="1"/>
+          <p:nvPr/>
+        </p:nvSpPr>
+        <p:spPr>
+          <a:xfrm>
+            <a:off x="9912096" y="2240280"/>
             <a:ext cx="1463040" cy="566928"/>
           </a:xfrm>
           <a:prstGeom prst="rect">
@@ -23167,7 +23160,7 @@
           <a:bodyPr wrap="square" lIns="0" tIns="0" rIns="0" bIns="0" rtlCol="0" anchor="ctr"/>
           <a:lstStyle/>
           <a:p>
-            <a:pPr indent="0" marL="0">
+            <a:pPr marL="0" indent="0">
               <a:buNone/>
             </a:pPr>
             <a:r>
@@ -23176,7 +23169,7 @@
                   <a:schemeClr val="tx1"/>
                 </a:solidFill>
               </a:rPr>
-              <a:t>選ぶ</a:t>
+              <a:t>届ける</a:t>
             </a:r>
             <a:endParaRPr lang="en-US" sz="1700" dirty="0"/>
           </a:p>
@@ -23184,13 +23177,13 @@
       </p:sp>
       <p:sp>
         <p:nvSpPr>
-          <p:cNvPr id="25" name="Text 20"/>
-          <p:cNvSpPr txBox="1"/>
-          <p:nvPr/>
-        </p:nvSpPr>
-        <p:spPr>
-          <a:xfrm>
-            <a:off x="6455664" y="2926080"/>
+          <p:cNvPr id="32" name="Text 26"/>
+          <p:cNvSpPr txBox="1"/>
+          <p:nvPr/>
+        </p:nvSpPr>
+        <p:spPr>
+          <a:xfrm>
+            <a:off x="9226296" y="2926080"/>
             <a:ext cx="2148840" cy="1371600"/>
           </a:xfrm>
           <a:prstGeom prst="rect">
@@ -23203,7 +23196,7 @@
           <a:bodyPr wrap="square" lIns="0" tIns="0" rIns="0" bIns="0" rtlCol="0" anchor="t"/>
           <a:lstStyle/>
           <a:p>
-            <a:pPr indent="0" marL="0">
+            <a:pPr marL="0" indent="0">
               <a:buNone/>
             </a:pPr>
             <a:r>
@@ -23212,7 +23205,7 @@
                   <a:schemeClr val="accent2"/>
                 </a:solidFill>
               </a:rPr>
-              <a:t>買い手の買収方針と自社データで、合う案件だけをAIが点数づけ</a:t>
+              <a:t>新着の有望案件を毎朝通知。気になる案件は担当がすぐ打診</a:t>
             </a:r>
             <a:endParaRPr lang="en-US" sz="1100" dirty="0"/>
           </a:p>
@@ -23220,43 +23213,18 @@
       </p:sp>
       <p:sp>
         <p:nvSpPr>
-          <p:cNvPr id="26" name="reins arrow"/>
+          <p:cNvPr id="33" name="reins scale"/>
           <p:cNvSpPr/>
           <p:nvPr/>
         </p:nvSpPr>
         <p:spPr>
           <a:xfrm>
-            <a:off x="8823960" y="3090672"/>
-            <a:ext cx="146304" cy="256032"/>
-          </a:xfrm>
-          <a:prstGeom prst="chevron">
-            <a:avLst/>
-          </a:prstGeom>
-          <a:solidFill>
-            <a:schemeClr val="accent1"/>
-          </a:solidFill>
-          <a:ln w="12700">
-            <a:solidFill>
-              <a:schemeClr val="accent1"/>
-            </a:solidFill>
-            <a:prstDash val="solid"/>
-          </a:ln>
-        </p:spPr>
-      </p:sp>
-      <p:sp>
-        <p:nvSpPr>
-          <p:cNvPr id="27" name="reins 届ける"/>
-          <p:cNvSpPr/>
-          <p:nvPr/>
-        </p:nvSpPr>
-        <p:spPr>
-          <a:xfrm>
-            <a:off x="8997696" y="2057400"/>
-            <a:ext cx="2560320" cy="2103120"/>
+            <a:off x="685800" y="4343400"/>
+            <a:ext cx="2560320" cy="1600200"/>
           </a:xfrm>
           <a:prstGeom prst="roundRect">
             <a:avLst>
-              <a:gd name="adj" fmla="val 2609"/>
+              <a:gd name="adj" fmla="val 3429"/>
             </a:avLst>
           </a:prstGeom>
           <a:solidFill>
@@ -23269,7 +23237,7 @@
             <a:prstDash val="solid"/>
           </a:ln>
           <a:effectLst>
-            <a:outerShdw sx="100000" sy="100000" kx="0" ky="0" algn="bl" rotWithShape="0" blurRad="76200" dist="25400" dir="5400000">
+            <a:outerShdw blurRad="76200" dist="25400" dir="5400000" algn="bl" rotWithShape="0">
               <a:srgbClr val="6F665F">
                 <a:alpha val="12000"/>
               </a:srgbClr>
@@ -23279,189 +23247,6 @@
       </p:sp>
       <p:sp>
         <p:nvSpPr>
-          <p:cNvPr id="28" name="Shape 23"/>
-          <p:cNvSpPr/>
-          <p:nvPr/>
-        </p:nvSpPr>
-        <p:spPr>
-          <a:xfrm>
-            <a:off x="9226296" y="2240280"/>
-            <a:ext cx="566928" cy="566928"/>
-          </a:xfrm>
-          <a:prstGeom prst="ellipse">
-            <a:avLst/>
-          </a:prstGeom>
-          <a:solidFill>
-            <a:schemeClr val="tx1"/>
-          </a:solidFill>
-          <a:ln w="12700">
-            <a:solidFill>
-              <a:schemeClr val="tx1"/>
-            </a:solidFill>
-            <a:prstDash val="solid"/>
-          </a:ln>
-        </p:spPr>
-      </p:sp>
-      <p:sp>
-        <p:nvSpPr>
-          <p:cNvPr id="29" name="Text 24"/>
-          <p:cNvSpPr txBox="1"/>
-          <p:nvPr/>
-        </p:nvSpPr>
-        <p:spPr>
-          <a:xfrm>
-            <a:off x="9226296" y="2240280"/>
-            <a:ext cx="566928" cy="566928"/>
-          </a:xfrm>
-          <a:prstGeom prst="rect">
-            <a:avLst/>
-          </a:prstGeom>
-          <a:noFill/>
-          <a:ln/>
-        </p:spPr>
-        <p:txBody>
-          <a:bodyPr wrap="square" lIns="0" tIns="0" rIns="0" bIns="0" rtlCol="0" anchor="ctr"/>
-          <a:lstStyle/>
-          <a:p>
-            <a:pPr algn="ctr" indent="0" marL="0">
-              <a:buNone/>
-            </a:pPr>
-            <a:endParaRPr lang="en-US" sz="1300" dirty="0"/>
-          </a:p>
-        </p:txBody>
-      </p:sp>
-      <p:pic>
-        <p:nvPicPr>
-          <p:cNvPr id="30" name="Image 3" descr="preencoded.png">    </p:cNvPr>
-          <p:cNvPicPr>
-            <a:picLocks noChangeAspect="1"/>
-          </p:cNvPicPr>
-          <p:nvPr/>
-        </p:nvPicPr>
-        <p:blipFill>
-          <a:blip r:embed="rId4"/>
-          <a:stretch>
-            <a:fillRect/>
-          </a:stretch>
-        </p:blipFill>
-        <p:spPr>
-          <a:xfrm>
-            <a:off x="9363456" y="2377440"/>
-            <a:ext cx="292608" cy="292608"/>
-          </a:xfrm>
-          <a:prstGeom prst="rect">
-            <a:avLst/>
-          </a:prstGeom>
-        </p:spPr>
-      </p:pic>
-      <p:sp>
-        <p:nvSpPr>
-          <p:cNvPr id="31" name="Text 25"/>
-          <p:cNvSpPr txBox="1"/>
-          <p:nvPr/>
-        </p:nvSpPr>
-        <p:spPr>
-          <a:xfrm>
-            <a:off x="9912096" y="2240280"/>
-            <a:ext cx="1463040" cy="566928"/>
-          </a:xfrm>
-          <a:prstGeom prst="rect">
-            <a:avLst/>
-          </a:prstGeom>
-          <a:noFill/>
-          <a:ln/>
-        </p:spPr>
-        <p:txBody>
-          <a:bodyPr wrap="square" lIns="0" tIns="0" rIns="0" bIns="0" rtlCol="0" anchor="ctr"/>
-          <a:lstStyle/>
-          <a:p>
-            <a:pPr indent="0" marL="0">
-              <a:buNone/>
-            </a:pPr>
-            <a:r>
-              <a:rPr lang="en-US" sz="1700" b="1" dirty="0">
-                <a:solidFill>
-                  <a:schemeClr val="tx1"/>
-                </a:solidFill>
-              </a:rPr>
-              <a:t>届ける</a:t>
-            </a:r>
-            <a:endParaRPr lang="en-US" sz="1700" dirty="0"/>
-          </a:p>
-        </p:txBody>
-      </p:sp>
-      <p:sp>
-        <p:nvSpPr>
-          <p:cNvPr id="32" name="Text 26"/>
-          <p:cNvSpPr txBox="1"/>
-          <p:nvPr/>
-        </p:nvSpPr>
-        <p:spPr>
-          <a:xfrm>
-            <a:off x="9226296" y="2926080"/>
-            <a:ext cx="2148840" cy="1371600"/>
-          </a:xfrm>
-          <a:prstGeom prst="rect">
-            <a:avLst/>
-          </a:prstGeom>
-          <a:noFill/>
-          <a:ln/>
-        </p:spPr>
-        <p:txBody>
-          <a:bodyPr wrap="square" lIns="0" tIns="0" rIns="0" bIns="0" rtlCol="0" anchor="t"/>
-          <a:lstStyle/>
-          <a:p>
-            <a:pPr indent="0" marL="0">
-              <a:buNone/>
-            </a:pPr>
-            <a:r>
-              <a:rPr lang="en-US" sz="1100" dirty="0">
-                <a:solidFill>
-                  <a:schemeClr val="accent2"/>
-                </a:solidFill>
-              </a:rPr>
-              <a:t>新着の有望案件を毎朝通知。気になる案件は担当がすぐ打診</a:t>
-            </a:r>
-            <a:endParaRPr lang="en-US" sz="1100" dirty="0"/>
-          </a:p>
-        </p:txBody>
-      </p:sp>
-      <p:sp>
-        <p:nvSpPr>
-          <p:cNvPr id="33" name="reins scale"/>
-          <p:cNvSpPr/>
-          <p:nvPr/>
-        </p:nvSpPr>
-        <p:spPr>
-          <a:xfrm>
-            <a:off x="685800" y="4343400"/>
-            <a:ext cx="2560320" cy="1600200"/>
-          </a:xfrm>
-          <a:prstGeom prst="roundRect">
-            <a:avLst>
-              <a:gd name="adj" fmla="val 3429"/>
-            </a:avLst>
-          </a:prstGeom>
-          <a:solidFill>
-            <a:schemeClr val="bg2"/>
-          </a:solidFill>
-          <a:ln w="9525">
-            <a:solidFill>
-              <a:schemeClr val="accent3"/>
-            </a:solidFill>
-            <a:prstDash val="solid"/>
-          </a:ln>
-          <a:effectLst>
-            <a:outerShdw sx="100000" sy="100000" kx="0" ky="0" algn="bl" rotWithShape="0" blurRad="76200" dist="25400" dir="5400000">
-              <a:srgbClr val="6F665F">
-                <a:alpha val="12000"/>
-              </a:srgbClr>
-            </a:outerShdw>
-          </a:effectLst>
-        </p:spPr>
-      </p:sp>
-      <p:sp>
-        <p:nvSpPr>
           <p:cNvPr id="34" name="Text 28"/>
           <p:cNvSpPr txBox="1"/>
           <p:nvPr/>
@@ -23481,7 +23266,7 @@
           <a:bodyPr wrap="square" lIns="0" tIns="0" rIns="0" bIns="0" rtlCol="0" anchor="ctr"/>
           <a:lstStyle/>
           <a:p>
-            <a:pPr indent="0" marL="0">
+            <a:pPr marL="0" indent="0">
               <a:buNone/>
             </a:pPr>
             <a:r>
@@ -23492,9 +23277,6 @@
               </a:rPr>
               <a:t>約2万</a:t>
             </a:r>
-            <a:pPr indent="0" marL="0">
-              <a:buNone/>
-            </a:pPr>
             <a:r>
               <a:rPr lang="en-US" sz="1300" b="1" dirty="0">
                 <a:solidFill>
@@ -23528,7 +23310,7 @@
           <a:bodyPr wrap="square" lIns="0" tIns="0" rIns="0" bIns="0" rtlCol="0" anchor="t"/>
           <a:lstStyle/>
           <a:p>
-            <a:pPr indent="0" marL="0">
+            <a:pPr marL="0" indent="0">
               <a:buNone/>
             </a:pPr>
             <a:r>
@@ -23569,7 +23351,7 @@
             <a:prstDash val="solid"/>
           </a:ln>
           <a:effectLst>
-            <a:outerShdw sx="100000" sy="100000" kx="0" ky="0" algn="bl" rotWithShape="0" blurRad="76200" dist="25400" dir="5400000">
+            <a:outerShdw blurRad="76200" dist="25400" dir="5400000" algn="bl" rotWithShape="0">
               <a:srgbClr val="6F665F">
                 <a:alpha val="12000"/>
               </a:srgbClr>
@@ -23598,7 +23380,7 @@
           <a:bodyPr wrap="square" lIns="0" tIns="0" rIns="0" bIns="0" rtlCol="0" anchor="ctr"/>
           <a:lstStyle/>
           <a:p>
-            <a:pPr indent="0" marL="0">
+            <a:pPr marL="0" indent="0">
               <a:buNone/>
             </a:pPr>
             <a:r>
@@ -23612,7 +23394,7 @@
             <a:endParaRPr lang="en-US" sz="1300" dirty="0"/>
           </a:p>
           <a:p>
-            <a:pPr indent="0" marL="0">
+            <a:pPr marL="0" indent="0">
               <a:buNone/>
             </a:pPr>
             <a:r>
@@ -23648,7 +23430,7 @@
           <a:bodyPr wrap="square" lIns="0" tIns="0" rIns="0" bIns="0" rtlCol="0" anchor="t"/>
           <a:lstStyle/>
           <a:p>
-            <a:pPr indent="0" marL="0">
+            <a:pPr marL="0" indent="0">
               <a:buNone/>
             </a:pPr>
             <a:r>
@@ -23665,7 +23447,7 @@
       </p:sp>
       <p:sp>
         <p:nvSpPr>
-          <p:cNvPr id="25" name="Slide Number Placeholder 0"/>
+          <p:cNvPr id="39" name="Slide Number Placeholder 0"/>
           <p:cNvSpPr>
             <a:spLocks noGrp="1"/>
           </p:cNvSpPr>
@@ -23683,7 +23465,7 @@
           </a:prstGeom>
           <a:extLst>
             <a:ext uri="{C572A759-6A51-4108-AA02-DFA0A04FC94B}">
-              <ma14:wrappingTextBoxFlag xmlns:ma14="http://schemas.microsoft.com/office/mac/drawingml/2011/main" val="0"/>
+              <ma14:wrappingTextBoxFlag xmlns:ma14="http://schemas.microsoft.com/office/mac/drawingml/2011/main" xmlns="" val="0"/>
             </a:ext>
           </a:extLst>
         </p:spPr>
@@ -23701,7 +23483,7 @@
           <a:p>
             <a:pPr algn="r"/>
             <a:fld id="{F7021451-1387-4CA6-816F-3879F97B5CBC}" type="slidenum">
-              <a:rPr b="0" lang="en-US"/>
+              <a:rPr lang="en-US" b="0"/>
               <a:t>8</a:t>
             </a:fld>
             <a:endParaRPr lang="en-US"/>
@@ -23761,9 +23543,11 @@
       <p:sp>
         <p:nvSpPr>
           <p:cNvPr id="3" name="Text 0"/>
-          <p:cNvSpPr/>
+          <p:cNvSpPr>
+            <a:spLocks noGrp="1"/>
+          </p:cNvSpPr>
           <p:nvPr>
-            <p:ph idx="100" type="body" hasCustomPrompt="1"/>
+            <p:ph type="body" idx="100" hasCustomPrompt="1"/>
           </p:nvPr>
         </p:nvSpPr>
         <p:spPr>
@@ -23781,11 +23565,11 @@
           <a:bodyPr wrap="square" lIns="0" tIns="0" rIns="0" bIns="0" rtlCol="0" anchor="ctr"/>
           <a:lstStyle/>
           <a:p>
-            <a:pPr indent="0" marL="0">
-              <a:buNone/>
-            </a:pPr>
-            <a:r>
-              <a:rPr lang="en-US" sz="1200" b="1" spc="240" kern="0" dirty="0">
+            <a:pPr marL="0" indent="0">
+              <a:buNone/>
+            </a:pPr>
+            <a:r>
+              <a:rPr lang="en-US" sz="1200" b="1" kern="0" spc="240" dirty="0">
                 <a:solidFill>
                   <a:schemeClr val="accent1"/>
                 </a:solidFill>
@@ -23799,9 +23583,11 @@
       <p:sp>
         <p:nvSpPr>
           <p:cNvPr id="4" name="Text 0"/>
-          <p:cNvSpPr/>
+          <p:cNvSpPr>
+            <a:spLocks noGrp="1"/>
+          </p:cNvSpPr>
           <p:nvPr>
-            <p:ph idx="101" type="title" hasCustomPrompt="1"/>
+            <p:ph type="title" idx="101" hasCustomPrompt="1"/>
           </p:nvPr>
         </p:nvSpPr>
         <p:spPr>
@@ -23819,7 +23605,7 @@
           <a:bodyPr wrap="square" lIns="0" tIns="0" rIns="0" bIns="0" rtlCol="0" anchor="ctr"/>
           <a:lstStyle/>
           <a:p>
-            <a:pPr algn="l" indent="0" marL="0">
+            <a:pPr marL="0" indent="0" algn="l">
               <a:buNone/>
             </a:pPr>
             <a:r>
@@ -23837,9 +23623,11 @@
       <p:sp>
         <p:nvSpPr>
           <p:cNvPr id="5" name="Text 0"/>
-          <p:cNvSpPr/>
+          <p:cNvSpPr>
+            <a:spLocks noGrp="1"/>
+          </p:cNvSpPr>
           <p:nvPr>
-            <p:ph idx="102" type="body" hasCustomPrompt="1"/>
+            <p:ph type="body" idx="102" hasCustomPrompt="1"/>
           </p:nvPr>
         </p:nvSpPr>
         <p:spPr>
@@ -23857,7 +23645,7 @@
           <a:bodyPr wrap="square" lIns="0" tIns="0" rIns="0" bIns="0" rtlCol="0" anchor="t"/>
           <a:lstStyle/>
           <a:p>
-            <a:pPr indent="0" marL="0">
+            <a:pPr marL="0" indent="0">
               <a:buNone/>
             </a:pPr>
             <a:r>
@@ -23898,7 +23686,7 @@
             <a:prstDash val="solid"/>
           </a:ln>
           <a:effectLst>
-            <a:outerShdw sx="100000" sy="100000" kx="0" ky="0" algn="bl" rotWithShape="0" blurRad="76200" dist="25400" dir="5400000">
+            <a:outerShdw blurRad="76200" dist="25400" dir="5400000" algn="bl" rotWithShape="0">
               <a:srgbClr val="6F665F">
                 <a:alpha val="12000"/>
               </a:srgbClr>
@@ -23927,7 +23715,7 @@
           <a:bodyPr wrap="square" lIns="0" tIns="0" rIns="0" bIns="0" rtlCol="0" anchor="t"/>
           <a:lstStyle/>
           <a:p>
-            <a:pPr indent="0" marL="0">
+            <a:pPr marL="0" indent="0">
               <a:buNone/>
             </a:pPr>
             <a:r>
@@ -24084,7 +23872,7 @@
           <a:bodyPr wrap="square" lIns="0" tIns="0" rIns="0" bIns="0" rtlCol="0" anchor="t"/>
           <a:lstStyle/>
           <a:p>
-            <a:pPr indent="0" marL="0">
+            <a:pPr marL="0" indent="0">
               <a:buNone/>
             </a:pPr>
             <a:r>
@@ -24128,14 +23916,14 @@
       </p:sp>
       <p:pic>
         <p:nvPicPr>
-          <p:cNvPr id="12" name="Image 0" descr="preencoded.png">    </p:cNvPr>
+          <p:cNvPr id="12" name="Image 0" descr="preencoded.png"/>
           <p:cNvPicPr>
             <a:picLocks noChangeAspect="1"/>
           </p:cNvPicPr>
           <p:nvPr/>
         </p:nvPicPr>
         <p:blipFill>
-          <a:blip r:embed="rId1"/>
+          <a:blip r:embed="rId3"/>
           <a:stretch>
             <a:fillRect/>
           </a:stretch>
@@ -24171,7 +23959,7 @@
           <a:bodyPr wrap="square" lIns="0" tIns="0" rIns="0" bIns="0" rtlCol="0" anchor="t"/>
           <a:lstStyle/>
           <a:p>
-            <a:pPr algn="ctr" indent="0" marL="0">
+            <a:pPr marL="0" indent="0" algn="ctr">
               <a:buNone/>
             </a:pPr>
             <a:r>
@@ -24207,7 +23995,7 @@
           <a:bodyPr wrap="square" lIns="0" tIns="0" rIns="0" bIns="0" rtlCol="0" anchor="t"/>
           <a:lstStyle/>
           <a:p>
-            <a:pPr algn="ctr" indent="0" marL="0">
+            <a:pPr marL="0" indent="0" algn="ctr">
               <a:buNone/>
             </a:pPr>
             <a:r>
@@ -24251,14 +24039,14 @@
       </p:sp>
       <p:pic>
         <p:nvPicPr>
-          <p:cNvPr id="16" name="Image 1" descr="preencoded.png">    </p:cNvPr>
+          <p:cNvPr id="16" name="Image 1" descr="preencoded.png"/>
           <p:cNvPicPr>
             <a:picLocks noChangeAspect="1"/>
           </p:cNvPicPr>
           <p:nvPr/>
         </p:nvPicPr>
         <p:blipFill>
-          <a:blip r:embed="rId2"/>
+          <a:blip r:embed="rId4"/>
           <a:stretch>
             <a:fillRect/>
           </a:stretch>
@@ -24294,7 +24082,7 @@
           <a:bodyPr wrap="square" lIns="0" tIns="0" rIns="0" bIns="0" rtlCol="0" anchor="t"/>
           <a:lstStyle/>
           <a:p>
-            <a:pPr algn="ctr" indent="0" marL="0">
+            <a:pPr marL="0" indent="0" algn="ctr">
               <a:buNone/>
             </a:pPr>
             <a:r>
@@ -24330,7 +24118,7 @@
           <a:bodyPr wrap="square" lIns="0" tIns="0" rIns="0" bIns="0" rtlCol="0" anchor="t"/>
           <a:lstStyle/>
           <a:p>
-            <a:pPr algn="ctr" indent="0" marL="0">
+            <a:pPr marL="0" indent="0" algn="ctr">
               <a:buNone/>
             </a:pPr>
             <a:r>
@@ -24374,14 +24162,14 @@
       </p:sp>
       <p:pic>
         <p:nvPicPr>
-          <p:cNvPr id="20" name="Image 2" descr="preencoded.png">    </p:cNvPr>
+          <p:cNvPr id="20" name="Image 2" descr="preencoded.png"/>
           <p:cNvPicPr>
             <a:picLocks noChangeAspect="1"/>
           </p:cNvPicPr>
           <p:nvPr/>
         </p:nvPicPr>
         <p:blipFill>
-          <a:blip r:embed="rId3"/>
+          <a:blip r:embed="rId5"/>
           <a:stretch>
             <a:fillRect/>
           </a:stretch>
@@ -24417,7 +24205,7 @@
           <a:bodyPr wrap="square" lIns="0" tIns="0" rIns="0" bIns="0" rtlCol="0" anchor="t"/>
           <a:lstStyle/>
           <a:p>
-            <a:pPr algn="ctr" indent="0" marL="0">
+            <a:pPr marL="0" indent="0" algn="ctr">
               <a:buNone/>
             </a:pPr>
             <a:r>
@@ -24453,7 +24241,7 @@
           <a:bodyPr wrap="square" lIns="0" tIns="0" rIns="0" bIns="0" rtlCol="0" anchor="t"/>
           <a:lstStyle/>
           <a:p>
-            <a:pPr algn="ctr" indent="0" marL="0">
+            <a:pPr marL="0" indent="0" algn="ctr">
               <a:buNone/>
             </a:pPr>
             <a:r>
@@ -24497,14 +24285,14 @@
       </p:sp>
       <p:pic>
         <p:nvPicPr>
-          <p:cNvPr id="24" name="Image 3" descr="preencoded.png">    </p:cNvPr>
+          <p:cNvPr id="24" name="Image 3" descr="preencoded.png"/>
           <p:cNvPicPr>
             <a:picLocks noChangeAspect="1"/>
           </p:cNvPicPr>
           <p:nvPr/>
         </p:nvPicPr>
         <p:blipFill>
-          <a:blip r:embed="rId4"/>
+          <a:blip r:embed="rId6"/>
           <a:stretch>
             <a:fillRect/>
           </a:stretch>
@@ -24540,7 +24328,7 @@
           <a:bodyPr wrap="square" lIns="0" tIns="0" rIns="0" bIns="0" rtlCol="0" anchor="t"/>
           <a:lstStyle/>
           <a:p>
-            <a:pPr algn="ctr" indent="0" marL="0">
+            <a:pPr marL="0" indent="0" algn="ctr">
               <a:buNone/>
             </a:pPr>
             <a:r>
@@ -24576,7 +24364,7 @@
           <a:bodyPr wrap="square" lIns="0" tIns="0" rIns="0" bIns="0" rtlCol="0" anchor="t"/>
           <a:lstStyle/>
           <a:p>
-            <a:pPr algn="ctr" indent="0" marL="0">
+            <a:pPr marL="0" indent="0" algn="ctr">
               <a:buNone/>
             </a:pPr>
             <a:r>
@@ -24620,14 +24408,14 @@
       </p:sp>
       <p:pic>
         <p:nvPicPr>
-          <p:cNvPr id="28" name="Image 4" descr="preencoded.png">    </p:cNvPr>
+          <p:cNvPr id="28" name="Image 4" descr="preencoded.png"/>
           <p:cNvPicPr>
             <a:picLocks noChangeAspect="1"/>
           </p:cNvPicPr>
           <p:nvPr/>
         </p:nvPicPr>
         <p:blipFill>
-          <a:blip r:embed="rId5"/>
+          <a:blip r:embed="rId7"/>
           <a:stretch>
             <a:fillRect/>
           </a:stretch>
@@ -24663,7 +24451,7 @@
           <a:bodyPr wrap="square" lIns="0" tIns="0" rIns="0" bIns="0" rtlCol="0" anchor="t"/>
           <a:lstStyle/>
           <a:p>
-            <a:pPr algn="ctr" indent="0" marL="0">
+            <a:pPr marL="0" indent="0" algn="ctr">
               <a:buNone/>
             </a:pPr>
             <a:r>
@@ -24699,7 +24487,7 @@
           <a:bodyPr wrap="square" lIns="0" tIns="0" rIns="0" bIns="0" rtlCol="0" anchor="t"/>
           <a:lstStyle/>
           <a:p>
-            <a:pPr algn="ctr" indent="0" marL="0">
+            <a:pPr marL="0" indent="0" algn="ctr">
               <a:buNone/>
             </a:pPr>
             <a:r>
@@ -24743,14 +24531,14 @@
       </p:sp>
       <p:pic>
         <p:nvPicPr>
-          <p:cNvPr id="32" name="Image 5" descr="preencoded.png">    </p:cNvPr>
+          <p:cNvPr id="32" name="Image 5" descr="preencoded.png"/>
           <p:cNvPicPr>
             <a:picLocks noChangeAspect="1"/>
           </p:cNvPicPr>
           <p:nvPr/>
         </p:nvPicPr>
         <p:blipFill>
-          <a:blip r:embed="rId6"/>
+          <a:blip r:embed="rId8"/>
           <a:stretch>
             <a:fillRect/>
           </a:stretch>
@@ -24786,7 +24574,7 @@
           <a:bodyPr wrap="square" lIns="0" tIns="0" rIns="0" bIns="0" rtlCol="0" anchor="t"/>
           <a:lstStyle/>
           <a:p>
-            <a:pPr algn="ctr" indent="0" marL="0">
+            <a:pPr marL="0" indent="0" algn="ctr">
               <a:buNone/>
             </a:pPr>
             <a:r>
@@ -24822,7 +24610,7 @@
           <a:bodyPr wrap="square" lIns="0" tIns="0" rIns="0" bIns="0" rtlCol="0" anchor="t"/>
           <a:lstStyle/>
           <a:p>
-            <a:pPr algn="ctr" indent="0" marL="0">
+            <a:pPr marL="0" indent="0" algn="ctr">
               <a:buNone/>
             </a:pPr>
             <a:r>
@@ -24885,7 +24673,7 @@
           <a:bodyPr wrap="square" lIns="0" tIns="0" rIns="0" bIns="0" rtlCol="0" anchor="ctr"/>
           <a:lstStyle/>
           <a:p>
-            <a:pPr algn="ctr" indent="0" marL="0">
+            <a:pPr marL="0" indent="0" algn="ctr">
               <a:buNone/>
             </a:pPr>
             <a:r>
@@ -24899,7 +24687,7 @@
             <a:endParaRPr lang="en-US" sz="1300" dirty="0"/>
           </a:p>
           <a:p>
-            <a:pPr algn="ctr" indent="0" marL="0">
+            <a:pPr marL="0" indent="0" algn="ctr">
               <a:buNone/>
             </a:pPr>
             <a:r>
@@ -24913,7 +24701,7 @@
             <a:endParaRPr lang="en-US" sz="1300" dirty="0"/>
           </a:p>
           <a:p>
-            <a:pPr algn="ctr" indent="0" marL="0">
+            <a:pPr marL="0" indent="0" algn="ctr">
               <a:buNone/>
             </a:pPr>
             <a:r>
@@ -24954,7 +24742,7 @@
             <a:prstDash val="solid"/>
           </a:ln>
           <a:effectLst>
-            <a:outerShdw sx="100000" sy="100000" kx="0" ky="0" algn="bl" rotWithShape="0" blurRad="76200" dist="25400" dir="5400000">
+            <a:outerShdw blurRad="76200" dist="25400" dir="5400000" algn="bl" rotWithShape="0">
               <a:srgbClr val="6F665F">
                 <a:alpha val="12000"/>
               </a:srgbClr>
@@ -24983,7 +24771,7 @@
           <a:bodyPr wrap="square" lIns="0" tIns="0" rIns="0" bIns="0" rtlCol="0" anchor="t"/>
           <a:lstStyle/>
           <a:p>
-            <a:pPr indent="0" marL="0">
+            <a:pPr marL="0" indent="0">
               <a:buNone/>
             </a:pPr>
             <a:r>
@@ -25140,7 +24928,7 @@
           <a:bodyPr wrap="square" lIns="0" tIns="0" rIns="0" bIns="0" rtlCol="0" anchor="ctr"/>
           <a:lstStyle/>
           <a:p>
-            <a:pPr indent="0" marL="0">
+            <a:pPr marL="0" indent="0">
               <a:buNone/>
             </a:pPr>
             <a:r>
@@ -25154,7 +24942,7 @@
             <a:endParaRPr lang="en-US" sz="1300" dirty="0"/>
           </a:p>
           <a:p>
-            <a:pPr indent="0" marL="0">
+            <a:pPr marL="0" indent="0">
               <a:buNone/>
             </a:pPr>
             <a:r>
@@ -25171,7 +24959,7 @@
       </p:sp>
       <p:sp>
         <p:nvSpPr>
-          <p:cNvPr id="25" name="Slide Number Placeholder 0"/>
+          <p:cNvPr id="42" name="Slide Number Placeholder 0"/>
           <p:cNvSpPr>
             <a:spLocks noGrp="1"/>
           </p:cNvSpPr>
@@ -25189,7 +24977,7 @@
           </a:prstGeom>
           <a:extLst>
             <a:ext uri="{C572A759-6A51-4108-AA02-DFA0A04FC94B}">
-              <ma14:wrappingTextBoxFlag xmlns:ma14="http://schemas.microsoft.com/office/mac/drawingml/2011/main" val="0"/>
+              <ma14:wrappingTextBoxFlag xmlns:ma14="http://schemas.microsoft.com/office/mac/drawingml/2011/main" xmlns="" val="0"/>
             </a:ext>
           </a:extLst>
         </p:spPr>
@@ -25207,7 +24995,7 @@
           <a:p>
             <a:pPr algn="r"/>
             <a:fld id="{F7021451-1387-4CA6-816F-3879F97B5CBC}" type="slidenum">
-              <a:rPr b="0" lang="en-US"/>
+              <a:rPr lang="en-US" b="0"/>
               <a:t>9</a:t>
             </a:fld>
             <a:endParaRPr lang="en-US"/>
@@ -25515,4 +25303,299 @@
     </a:ext>
   </a:extLst>
 </a:theme>
+</file>
+
+<file path=ppt/theme/theme2.xml><?xml version="1.0" encoding="utf-8"?>
+<a:theme xmlns:a="http://schemas.openxmlformats.org/drawingml/2006/main" name="Office テーマ">
+  <a:themeElements>
+    <a:clrScheme name="Office">
+      <a:dk1>
+        <a:sysClr val="windowText" lastClr="000000"/>
+      </a:dk1>
+      <a:lt1>
+        <a:sysClr val="window" lastClr="FFFFFF"/>
+      </a:lt1>
+      <a:dk2>
+        <a:srgbClr val="44546A"/>
+      </a:dk2>
+      <a:lt2>
+        <a:srgbClr val="E7E6E6"/>
+      </a:lt2>
+      <a:accent1>
+        <a:srgbClr val="4472C4"/>
+      </a:accent1>
+      <a:accent2>
+        <a:srgbClr val="ED7D31"/>
+      </a:accent2>
+      <a:accent3>
+        <a:srgbClr val="A5A5A5"/>
+      </a:accent3>
+      <a:accent4>
+        <a:srgbClr val="FFC000"/>
+      </a:accent4>
+      <a:accent5>
+        <a:srgbClr val="5B9BD5"/>
+      </a:accent5>
+      <a:accent6>
+        <a:srgbClr val="70AD47"/>
+      </a:accent6>
+      <a:hlink>
+        <a:srgbClr val="0563C1"/>
+      </a:hlink>
+      <a:folHlink>
+        <a:srgbClr val="954F72"/>
+      </a:folHlink>
+    </a:clrScheme>
+    <a:fontScheme name="Office">
+      <a:majorFont>
+        <a:latin typeface="游ゴシック Light" panose="020F0302020204030204"/>
+        <a:ea typeface=""/>
+        <a:cs typeface=""/>
+        <a:font script="Jpan" typeface="游ゴシック Light"/>
+        <a:font script="Hang" typeface="맑은 고딕"/>
+        <a:font script="Hans" typeface="等线 Light"/>
+        <a:font script="Hant" typeface="新細明體"/>
+        <a:font script="Arab" typeface="Times New Roman"/>
+        <a:font script="Hebr" typeface="Times New Roman"/>
+        <a:font script="Thai" typeface="Angsana New"/>
+        <a:font script="Ethi" typeface="Nyala"/>
+        <a:font script="Beng" typeface="Vrinda"/>
+        <a:font script="Gujr" typeface="Shruti"/>
+        <a:font script="Khmr" typeface="MoolBoran"/>
+        <a:font script="Knda" typeface="Tunga"/>
+        <a:font script="Guru" typeface="Raavi"/>
+        <a:font script="Cans" typeface="Euphemia"/>
+        <a:font script="Cher" typeface="Plantagenet Cherokee"/>
+        <a:font script="Yiii" typeface="Microsoft Yi Baiti"/>
+        <a:font script="Tibt" typeface="Microsoft Himalaya"/>
+        <a:font script="Thaa" typeface="MV Boli"/>
+        <a:font script="Deva" typeface="Mangal"/>
+        <a:font script="Telu" typeface="Gautami"/>
+        <a:font script="Taml" typeface="Latha"/>
+        <a:font script="Syrc" typeface="Estrangelo Edessa"/>
+        <a:font script="Orya" typeface="Kalinga"/>
+        <a:font script="Mlym" typeface="Kartika"/>
+        <a:font script="Laoo" typeface="DokChampa"/>
+        <a:font script="Sinh" typeface="Iskoola Pota"/>
+        <a:font script="Mong" typeface="Mongolian Baiti"/>
+        <a:font script="Viet" typeface="Times New Roman"/>
+        <a:font script="Uigh" typeface="Microsoft Uighur"/>
+        <a:font script="Geor" typeface="Sylfaen"/>
+        <a:font script="Armn" typeface="Arial"/>
+        <a:font script="Bugi" typeface="Leelawadee UI"/>
+        <a:font script="Bopo" typeface="Microsoft JhengHei"/>
+        <a:font script="Java" typeface="Javanese Text"/>
+        <a:font script="Lisu" typeface="Segoe UI"/>
+        <a:font script="Mymr" typeface="Myanmar Text"/>
+        <a:font script="Nkoo" typeface="Ebrima"/>
+        <a:font script="Olck" typeface="Nirmala UI"/>
+        <a:font script="Osma" typeface="Ebrima"/>
+        <a:font script="Phag" typeface="Phagspa"/>
+        <a:font script="Syrn" typeface="Estrangelo Edessa"/>
+        <a:font script="Syrj" typeface="Estrangelo Edessa"/>
+        <a:font script="Syre" typeface="Estrangelo Edessa"/>
+        <a:font script="Sora" typeface="Nirmala UI"/>
+        <a:font script="Tale" typeface="Microsoft Tai Le"/>
+        <a:font script="Talu" typeface="Microsoft New Tai Lue"/>
+        <a:font script="Tfng" typeface="Ebrima"/>
+      </a:majorFont>
+      <a:minorFont>
+        <a:latin typeface="游ゴシック" panose="020F0502020204030204"/>
+        <a:ea typeface=""/>
+        <a:cs typeface=""/>
+        <a:font script="Jpan" typeface="游ゴシック"/>
+        <a:font script="Hang" typeface="맑은 고딕"/>
+        <a:font script="Hans" typeface="等线"/>
+        <a:font script="Hant" typeface="新細明體"/>
+        <a:font script="Arab" typeface="Arial"/>
+        <a:font script="Hebr" typeface="Arial"/>
+        <a:font script="Thai" typeface="Cordia New"/>
+        <a:font script="Ethi" typeface="Nyala"/>
+        <a:font script="Beng" typeface="Vrinda"/>
+        <a:font script="Gujr" typeface="Shruti"/>
+        <a:font script="Khmr" typeface="DaunPenh"/>
+        <a:font script="Knda" typeface="Tunga"/>
+        <a:font script="Guru" typeface="Raavi"/>
+        <a:font script="Cans" typeface="Euphemia"/>
+        <a:font script="Cher" typeface="Plantagenet Cherokee"/>
+        <a:font script="Yiii" typeface="Microsoft Yi Baiti"/>
+        <a:font script="Tibt" typeface="Microsoft Himalaya"/>
+        <a:font script="Thaa" typeface="MV Boli"/>
+        <a:font script="Deva" typeface="Mangal"/>
+        <a:font script="Telu" typeface="Gautami"/>
+        <a:font script="Taml" typeface="Latha"/>
+        <a:font script="Syrc" typeface="Estrangelo Edessa"/>
+        <a:font script="Orya" typeface="Kalinga"/>
+        <a:font script="Mlym" typeface="Kartika"/>
+        <a:font script="Laoo" typeface="DokChampa"/>
+        <a:font script="Sinh" typeface="Iskoola Pota"/>
+        <a:font script="Mong" typeface="Mongolian Baiti"/>
+        <a:font script="Viet" typeface="Arial"/>
+        <a:font script="Uigh" typeface="Microsoft Uighur"/>
+        <a:font script="Geor" typeface="Sylfaen"/>
+        <a:font script="Armn" typeface="Arial"/>
+        <a:font script="Bugi" typeface="Leelawadee UI"/>
+        <a:font script="Bopo" typeface="Microsoft JhengHei"/>
+        <a:font script="Java" typeface="Javanese Text"/>
+        <a:font script="Lisu" typeface="Segoe UI"/>
+        <a:font script="Mymr" typeface="Myanmar Text"/>
+        <a:font script="Nkoo" typeface="Ebrima"/>
+        <a:font script="Olck" typeface="Nirmala UI"/>
+        <a:font script="Osma" typeface="Ebrima"/>
+        <a:font script="Phag" typeface="Phagspa"/>
+        <a:font script="Syrn" typeface="Estrangelo Edessa"/>
+        <a:font script="Syrj" typeface="Estrangelo Edessa"/>
+        <a:font script="Syre" typeface="Estrangelo Edessa"/>
+        <a:font script="Sora" typeface="Nirmala UI"/>
+        <a:font script="Tale" typeface="Microsoft Tai Le"/>
+        <a:font script="Talu" typeface="Microsoft New Tai Lue"/>
+        <a:font script="Tfng" typeface="Ebrima"/>
+      </a:minorFont>
+    </a:fontScheme>
+    <a:fmtScheme name="Office">
+      <a:fillStyleLst>
+        <a:solidFill>
+          <a:schemeClr val="phClr"/>
+        </a:solidFill>
+        <a:gradFill rotWithShape="1">
+          <a:gsLst>
+            <a:gs pos="0">
+              <a:schemeClr val="phClr">
+                <a:lumMod val="110000"/>
+                <a:satMod val="105000"/>
+                <a:tint val="67000"/>
+              </a:schemeClr>
+            </a:gs>
+            <a:gs pos="50000">
+              <a:schemeClr val="phClr">
+                <a:lumMod val="105000"/>
+                <a:satMod val="103000"/>
+                <a:tint val="73000"/>
+              </a:schemeClr>
+            </a:gs>
+            <a:gs pos="100000">
+              <a:schemeClr val="phClr">
+                <a:lumMod val="105000"/>
+                <a:satMod val="109000"/>
+                <a:tint val="81000"/>
+              </a:schemeClr>
+            </a:gs>
+          </a:gsLst>
+          <a:lin ang="5400000" scaled="0"/>
+        </a:gradFill>
+        <a:gradFill rotWithShape="1">
+          <a:gsLst>
+            <a:gs pos="0">
+              <a:schemeClr val="phClr">
+                <a:satMod val="103000"/>
+                <a:lumMod val="102000"/>
+                <a:tint val="94000"/>
+              </a:schemeClr>
+            </a:gs>
+            <a:gs pos="50000">
+              <a:schemeClr val="phClr">
+                <a:satMod val="110000"/>
+                <a:lumMod val="100000"/>
+                <a:shade val="100000"/>
+              </a:schemeClr>
+            </a:gs>
+            <a:gs pos="100000">
+              <a:schemeClr val="phClr">
+                <a:lumMod val="99000"/>
+                <a:satMod val="120000"/>
+                <a:shade val="78000"/>
+              </a:schemeClr>
+            </a:gs>
+          </a:gsLst>
+          <a:lin ang="5400000" scaled="0"/>
+        </a:gradFill>
+      </a:fillStyleLst>
+      <a:lnStyleLst>
+        <a:ln w="6350" cap="flat" cmpd="sng" algn="ctr">
+          <a:solidFill>
+            <a:schemeClr val="phClr"/>
+          </a:solidFill>
+          <a:prstDash val="solid"/>
+          <a:miter lim="800000"/>
+        </a:ln>
+        <a:ln w="12700" cap="flat" cmpd="sng" algn="ctr">
+          <a:solidFill>
+            <a:schemeClr val="phClr"/>
+          </a:solidFill>
+          <a:prstDash val="solid"/>
+          <a:miter lim="800000"/>
+        </a:ln>
+        <a:ln w="19050" cap="flat" cmpd="sng" algn="ctr">
+          <a:solidFill>
+            <a:schemeClr val="phClr"/>
+          </a:solidFill>
+          <a:prstDash val="solid"/>
+          <a:miter lim="800000"/>
+        </a:ln>
+      </a:lnStyleLst>
+      <a:effectStyleLst>
+        <a:effectStyle>
+          <a:effectLst/>
+        </a:effectStyle>
+        <a:effectStyle>
+          <a:effectLst/>
+        </a:effectStyle>
+        <a:effectStyle>
+          <a:effectLst>
+            <a:outerShdw blurRad="57150" dist="19050" dir="5400000" algn="ctr" rotWithShape="0">
+              <a:srgbClr val="000000">
+                <a:alpha val="63000"/>
+              </a:srgbClr>
+            </a:outerShdw>
+          </a:effectLst>
+        </a:effectStyle>
+      </a:effectStyleLst>
+      <a:bgFillStyleLst>
+        <a:solidFill>
+          <a:schemeClr val="phClr"/>
+        </a:solidFill>
+        <a:solidFill>
+          <a:schemeClr val="phClr">
+            <a:tint val="95000"/>
+            <a:satMod val="170000"/>
+          </a:schemeClr>
+        </a:solidFill>
+        <a:gradFill rotWithShape="1">
+          <a:gsLst>
+            <a:gs pos="0">
+              <a:schemeClr val="phClr">
+                <a:tint val="93000"/>
+                <a:satMod val="150000"/>
+                <a:shade val="98000"/>
+                <a:lumMod val="102000"/>
+              </a:schemeClr>
+            </a:gs>
+            <a:gs pos="50000">
+              <a:schemeClr val="phClr">
+                <a:tint val="98000"/>
+                <a:satMod val="130000"/>
+                <a:shade val="90000"/>
+                <a:lumMod val="103000"/>
+              </a:schemeClr>
+            </a:gs>
+            <a:gs pos="100000">
+              <a:schemeClr val="phClr">
+                <a:shade val="63000"/>
+                <a:satMod val="120000"/>
+              </a:schemeClr>
+            </a:gs>
+          </a:gsLst>
+          <a:lin ang="5400000" scaled="0"/>
+        </a:gradFill>
+      </a:bgFillStyleLst>
+    </a:fmtScheme>
+  </a:themeElements>
+  <a:objectDefaults/>
+  <a:extraClrSchemeLst/>
+  <a:extLst>
+    <a:ext uri="{05A4C25C-085E-4340-85A3-A5531E510DB2}">
+      <thm15:themeFamily xmlns:thm15="http://schemas.microsoft.com/office/thememl/2012/main" name="Office Theme" id="{62F939B6-93AF-4DB8-9C6B-D6C7DFDC589F}" vid="{4A3C46E8-61CC-4603-A589-7422A47A8E4A}"/>
+    </a:ext>
+  </a:extLst>
+</a:theme>
 </file>